--- a/proj_cm55/ui/design/ui_design_helper.pptx
+++ b/proj_cm55/ui/design/ui_design_helper.pptx
@@ -6,14 +6,15 @@
     <p:sldMasterId id="2147483661" r:id="rId5"/>
   </p:sldMasterIdLst>
   <p:notesMasterIdLst>
-    <p:notesMasterId r:id="rId11"/>
+    <p:notesMasterId r:id="rId12"/>
   </p:notesMasterIdLst>
   <p:sldIdLst>
     <p:sldId id="325" r:id="rId6"/>
     <p:sldId id="392" r:id="rId7"/>
-    <p:sldId id="389" r:id="rId8"/>
-    <p:sldId id="391" r:id="rId9"/>
-    <p:sldId id="350" r:id="rId10"/>
+    <p:sldId id="393" r:id="rId8"/>
+    <p:sldId id="389" r:id="rId9"/>
+    <p:sldId id="391" r:id="rId10"/>
+    <p:sldId id="350" r:id="rId11"/>
   </p:sldIdLst>
   <p:sldSz cx="9144000" cy="5143500" type="screen16x9"/>
   <p:notesSz cx="6858000" cy="9144000"/>
@@ -257,6 +258,7 @@
         <p14:section name="Thermostat mockups" id="{EDED3ED7-758D-4023-9EF3-1F9BEEFCB6FE}">
           <p14:sldIdLst>
             <p14:sldId id="392"/>
+            <p14:sldId id="393"/>
             <p14:sldId id="389"/>
             <p14:sldId id="391"/>
             <p14:sldId id="350"/>
@@ -1176,7 +1178,7 @@
                 <a:tabLst/>
                 <a:defRPr/>
               </a:pPr>
-              <a:t>3</a:t>
+              <a:t>4</a:t>
             </a:fld>
             <a:endParaRPr kumimoji="0" lang="en-US" sz="800" b="0" i="0" u="none" strike="noStrike" kern="1200" cap="none" spc="0" normalizeH="0" baseline="0" noProof="0" dirty="0">
               <a:ln>
@@ -1593,7 +1595,7 @@
                 <a:tabLst/>
                 <a:defRPr/>
               </a:pPr>
-              <a:t>5</a:t>
+              <a:t>6</a:t>
             </a:fld>
             <a:endParaRPr kumimoji="0" lang="en-US" sz="800" b="0" i="0" u="none" strike="noStrike" kern="1200" cap="none" spc="0" normalizeH="0" baseline="0" noProof="0" dirty="0">
               <a:ln>
@@ -29826,6 +29828,4392 @@
   <p:cSld>
     <p:spTree>
       <p:nvGrpSpPr>
+        <p:cNvPr id="1" name="">
+          <a:extLst>
+            <a:ext uri="{FF2B5EF4-FFF2-40B4-BE49-F238E27FC236}">
+              <a16:creationId xmlns:a16="http://schemas.microsoft.com/office/drawing/2014/main" id="{ECB09173-A665-BDF3-D460-9031573C5D8F}"/>
+            </a:ext>
+          </a:extLst>
+        </p:cNvPr>
+        <p:cNvGrpSpPr/>
+        <p:nvPr/>
+      </p:nvGrpSpPr>
+      <p:grpSpPr>
+        <a:xfrm>
+          <a:off x="0" y="0"/>
+          <a:ext cx="0" cy="0"/>
+          <a:chOff x="0" y="0"/>
+          <a:chExt cx="0" cy="0"/>
+        </a:xfrm>
+      </p:grpSpPr>
+      <p:pic>
+        <p:nvPicPr>
+          <p:cNvPr id="15" name="Picture 14">
+            <a:extLst>
+              <a:ext uri="{FF2B5EF4-FFF2-40B4-BE49-F238E27FC236}">
+                <a16:creationId xmlns:a16="http://schemas.microsoft.com/office/drawing/2014/main" id="{46D02BCC-2376-384F-F622-6FABEE904946}"/>
+              </a:ext>
+            </a:extLst>
+          </p:cNvPr>
+          <p:cNvPicPr>
+            <a:picLocks noChangeAspect="1"/>
+          </p:cNvPicPr>
+          <p:nvPr/>
+        </p:nvPicPr>
+        <p:blipFill>
+          <a:blip r:embed="rId2"/>
+          <a:stretch>
+            <a:fillRect/>
+          </a:stretch>
+        </p:blipFill>
+        <p:spPr>
+          <a:xfrm>
+            <a:off x="421772" y="902754"/>
+            <a:ext cx="2929469" cy="2929469"/>
+          </a:xfrm>
+          <a:prstGeom prst="rect">
+            <a:avLst/>
+          </a:prstGeom>
+          <a:ln>
+            <a:noFill/>
+          </a:ln>
+        </p:spPr>
+      </p:pic>
+      <p:pic>
+        <p:nvPicPr>
+          <p:cNvPr id="24" name="Picture 23">
+            <a:extLst>
+              <a:ext uri="{FF2B5EF4-FFF2-40B4-BE49-F238E27FC236}">
+                <a16:creationId xmlns:a16="http://schemas.microsoft.com/office/drawing/2014/main" id="{C5AA9B38-6B68-F802-535D-6C8BBE9ABC19}"/>
+              </a:ext>
+            </a:extLst>
+          </p:cNvPr>
+          <p:cNvPicPr>
+            <a:picLocks noChangeAspect="1"/>
+          </p:cNvPicPr>
+          <p:nvPr/>
+        </p:nvPicPr>
+        <p:blipFill>
+          <a:blip r:embed="rId3">
+            <a:extLst>
+              <a:ext uri="{BEBA8EAE-BF5A-486C-A8C5-ECC9F3942E4B}">
+                <a14:imgProps xmlns:a14="http://schemas.microsoft.com/office/drawing/2010/main">
+                  <a14:imgLayer r:embed="rId4">
+                    <a14:imgEffect>
+                      <a14:brightnessContrast bright="-20000" contrast="-20000"/>
+                    </a14:imgEffect>
+                  </a14:imgLayer>
+                </a14:imgProps>
+              </a:ext>
+            </a:extLst>
+          </a:blip>
+          <a:stretch>
+            <a:fillRect/>
+          </a:stretch>
+        </p:blipFill>
+        <p:spPr>
+          <a:xfrm>
+            <a:off x="421772" y="899015"/>
+            <a:ext cx="2929469" cy="2929469"/>
+          </a:xfrm>
+          <a:prstGeom prst="rect">
+            <a:avLst/>
+          </a:prstGeom>
+          <a:ln>
+            <a:noFill/>
+          </a:ln>
+        </p:spPr>
+      </p:pic>
+      <p:sp>
+        <p:nvSpPr>
+          <p:cNvPr id="3" name="Title 2">
+            <a:extLst>
+              <a:ext uri="{FF2B5EF4-FFF2-40B4-BE49-F238E27FC236}">
+                <a16:creationId xmlns:a16="http://schemas.microsoft.com/office/drawing/2014/main" id="{5B90D98B-05AB-6F24-FF83-B8B2C9354C4F}"/>
+              </a:ext>
+            </a:extLst>
+          </p:cNvPr>
+          <p:cNvSpPr>
+            <a:spLocks noGrp="1"/>
+          </p:cNvSpPr>
+          <p:nvPr>
+            <p:ph type="title"/>
+          </p:nvPr>
+        </p:nvSpPr>
+        <p:spPr/>
+        <p:txBody>
+          <a:bodyPr/>
+          <a:lstStyle/>
+          <a:p>
+            <a:r>
+              <a:rPr lang="en-US" dirty="0"/>
+              <a:t>Background image</a:t>
+            </a:r>
+            <a:br>
+              <a:rPr lang="en-US" dirty="0"/>
+            </a:br>
+            <a:endParaRPr lang="en-US" dirty="0"/>
+          </a:p>
+        </p:txBody>
+      </p:sp>
+      <p:sp>
+        <p:nvSpPr>
+          <p:cNvPr id="4" name="Date Placeholder 3">
+            <a:extLst>
+              <a:ext uri="{FF2B5EF4-FFF2-40B4-BE49-F238E27FC236}">
+                <a16:creationId xmlns:a16="http://schemas.microsoft.com/office/drawing/2014/main" id="{4EE2E091-C9B6-A9A3-B0C1-7FE54A811B58}"/>
+              </a:ext>
+            </a:extLst>
+          </p:cNvPr>
+          <p:cNvSpPr>
+            <a:spLocks noGrp="1"/>
+          </p:cNvSpPr>
+          <p:nvPr>
+            <p:ph type="dt" sz="half" idx="14"/>
+          </p:nvPr>
+        </p:nvSpPr>
+        <p:spPr/>
+        <p:txBody>
+          <a:bodyPr/>
+          <a:lstStyle/>
+          <a:p>
+            <a:r>
+              <a:rPr lang="en-US" b="1"/>
+              <a:t> </a:t>
+            </a:r>
+            <a:endParaRPr lang="en-US" b="1" dirty="0"/>
+          </a:p>
+        </p:txBody>
+      </p:sp>
+      <p:sp>
+        <p:nvSpPr>
+          <p:cNvPr id="5" name="Footer Placeholder 4">
+            <a:extLst>
+              <a:ext uri="{FF2B5EF4-FFF2-40B4-BE49-F238E27FC236}">
+                <a16:creationId xmlns:a16="http://schemas.microsoft.com/office/drawing/2014/main" id="{352CABCB-F43B-87F3-8AF1-26728BF57277}"/>
+              </a:ext>
+            </a:extLst>
+          </p:cNvPr>
+          <p:cNvSpPr>
+            <a:spLocks noGrp="1"/>
+          </p:cNvSpPr>
+          <p:nvPr>
+            <p:ph type="ftr" sz="quarter" idx="15"/>
+          </p:nvPr>
+        </p:nvSpPr>
+        <p:spPr/>
+        <p:txBody>
+          <a:bodyPr/>
+          <a:lstStyle/>
+          <a:p>
+            <a:endParaRPr lang="en-US" dirty="0"/>
+          </a:p>
+        </p:txBody>
+      </p:sp>
+      <p:pic>
+        <p:nvPicPr>
+          <p:cNvPr id="11" name="Picture 10">
+            <a:extLst>
+              <a:ext uri="{FF2B5EF4-FFF2-40B4-BE49-F238E27FC236}">
+                <a16:creationId xmlns:a16="http://schemas.microsoft.com/office/drawing/2014/main" id="{7BD31CB9-A70A-69F4-6EC4-CECBFD0469CA}"/>
+              </a:ext>
+            </a:extLst>
+          </p:cNvPr>
+          <p:cNvPicPr>
+            <a:picLocks noChangeAspect="1"/>
+          </p:cNvPicPr>
+          <p:nvPr/>
+        </p:nvPicPr>
+        <p:blipFill>
+          <a:blip r:embed="rId5"/>
+          <a:stretch>
+            <a:fillRect/>
+          </a:stretch>
+        </p:blipFill>
+        <p:spPr>
+          <a:xfrm>
+            <a:off x="5062648" y="1436155"/>
+            <a:ext cx="3112182" cy="2929469"/>
+          </a:xfrm>
+          <a:prstGeom prst="rect">
+            <a:avLst/>
+          </a:prstGeom>
+        </p:spPr>
+      </p:pic>
+      <p:sp>
+        <p:nvSpPr>
+          <p:cNvPr id="12" name="Rectangle: Top Corners Rounded 11">
+            <a:extLst>
+              <a:ext uri="{FF2B5EF4-FFF2-40B4-BE49-F238E27FC236}">
+                <a16:creationId xmlns:a16="http://schemas.microsoft.com/office/drawing/2014/main" id="{D1A19880-9901-8093-8FFA-F2AC7F3FC3D5}"/>
+              </a:ext>
+            </a:extLst>
+          </p:cNvPr>
+          <p:cNvSpPr/>
+          <p:nvPr/>
+        </p:nvSpPr>
+        <p:spPr bwMode="auto">
+          <a:xfrm rot="5400000">
+            <a:off x="4624746" y="2574458"/>
+            <a:ext cx="1375200" cy="658425"/>
+          </a:xfrm>
+          <a:prstGeom prst="round2SameRect">
+            <a:avLst>
+              <a:gd name="adj1" fmla="val 44038"/>
+              <a:gd name="adj2" fmla="val 0"/>
+            </a:avLst>
+          </a:prstGeom>
+          <a:solidFill>
+            <a:srgbClr val="086259">
+              <a:alpha val="34902"/>
+            </a:srgbClr>
+          </a:solidFill>
+          <a:ln w="12700">
+            <a:solidFill>
+              <a:srgbClr val="9BBA43"/>
+            </a:solidFill>
+            <a:miter lim="800000"/>
+            <a:headEnd/>
+            <a:tailEnd/>
+          </a:ln>
+          <a:effectLst>
+            <a:outerShdw blurRad="50800" dist="38100" algn="l" rotWithShape="0">
+              <a:prstClr val="black">
+                <a:alpha val="40000"/>
+              </a:prstClr>
+            </a:outerShdw>
+          </a:effectLst>
+        </p:spPr>
+        <p:txBody>
+          <a:bodyPr wrap="square" lIns="72000" tIns="72000" rIns="72000" bIns="72000" rtlCol="0" anchor="ctr"/>
+          <a:lstStyle/>
+          <a:p>
+            <a:pPr algn="ctr" defTabSz="576000" eaLnBrk="0" hangingPunct="0">
+              <a:lnSpc>
+                <a:spcPct val="120000"/>
+              </a:lnSpc>
+            </a:pPr>
+            <a:endParaRPr lang="en-US" sz="1600" baseline="0" dirty="0">
+              <a:solidFill>
+                <a:schemeClr val="bg1"/>
+              </a:solidFill>
+              <a:latin typeface="+mn-lt"/>
+              <a:ea typeface="+mn-ea"/>
+              <a:cs typeface="+mn-cs"/>
+            </a:endParaRPr>
+          </a:p>
+        </p:txBody>
+      </p:sp>
+      <p:sp>
+        <p:nvSpPr>
+          <p:cNvPr id="13" name="Rectangle 12">
+            <a:extLst>
+              <a:ext uri="{FF2B5EF4-FFF2-40B4-BE49-F238E27FC236}">
+                <a16:creationId xmlns:a16="http://schemas.microsoft.com/office/drawing/2014/main" id="{F27B25FE-E761-0823-67E6-AA14B3CAAA62}"/>
+              </a:ext>
+            </a:extLst>
+          </p:cNvPr>
+          <p:cNvSpPr/>
+          <p:nvPr/>
+        </p:nvSpPr>
+        <p:spPr bwMode="auto">
+          <a:xfrm>
+            <a:off x="4751254" y="1313917"/>
+            <a:ext cx="317971" cy="3213634"/>
+          </a:xfrm>
+          <a:prstGeom prst="rect">
+            <a:avLst/>
+          </a:prstGeom>
+          <a:solidFill>
+            <a:srgbClr val="BFBFBF"/>
+          </a:solidFill>
+          <a:ln w="9525">
+            <a:noFill/>
+            <a:miter lim="800000"/>
+            <a:headEnd/>
+            <a:tailEnd/>
+          </a:ln>
+        </p:spPr>
+        <p:txBody>
+          <a:bodyPr wrap="square" lIns="72000" tIns="72000" rIns="72000" bIns="72000" rtlCol="0" anchor="ctr"/>
+          <a:lstStyle/>
+          <a:p>
+            <a:pPr algn="ctr" defTabSz="576000" eaLnBrk="0" hangingPunct="0">
+              <a:lnSpc>
+                <a:spcPct val="120000"/>
+              </a:lnSpc>
+            </a:pPr>
+            <a:endParaRPr lang="en-US" sz="1600" baseline="0" dirty="0">
+              <a:solidFill>
+                <a:schemeClr val="bg1"/>
+              </a:solidFill>
+              <a:latin typeface="+mn-lt"/>
+              <a:ea typeface="+mn-ea"/>
+              <a:cs typeface="+mn-cs"/>
+            </a:endParaRPr>
+          </a:p>
+        </p:txBody>
+      </p:sp>
+      <p:sp>
+        <p:nvSpPr>
+          <p:cNvPr id="14" name="Rectangle 13">
+            <a:extLst>
+              <a:ext uri="{FF2B5EF4-FFF2-40B4-BE49-F238E27FC236}">
+                <a16:creationId xmlns:a16="http://schemas.microsoft.com/office/drawing/2014/main" id="{77A050AF-FBC2-BA79-54B2-A3EECA4DB4B3}"/>
+              </a:ext>
+            </a:extLst>
+          </p:cNvPr>
+          <p:cNvSpPr/>
+          <p:nvPr/>
+        </p:nvSpPr>
+        <p:spPr bwMode="auto">
+          <a:xfrm>
+            <a:off x="8057259" y="1313917"/>
+            <a:ext cx="317971" cy="3213634"/>
+          </a:xfrm>
+          <a:prstGeom prst="rect">
+            <a:avLst/>
+          </a:prstGeom>
+          <a:solidFill>
+            <a:srgbClr val="BFBFBF"/>
+          </a:solidFill>
+          <a:ln w="9525">
+            <a:noFill/>
+            <a:miter lim="800000"/>
+            <a:headEnd/>
+            <a:tailEnd/>
+          </a:ln>
+        </p:spPr>
+        <p:txBody>
+          <a:bodyPr wrap="square" lIns="72000" tIns="72000" rIns="72000" bIns="72000" rtlCol="0" anchor="ctr"/>
+          <a:lstStyle/>
+          <a:p>
+            <a:pPr algn="ctr" defTabSz="576000" eaLnBrk="0" hangingPunct="0">
+              <a:lnSpc>
+                <a:spcPct val="120000"/>
+              </a:lnSpc>
+            </a:pPr>
+            <a:endParaRPr lang="en-US" sz="1600" baseline="0" dirty="0">
+              <a:solidFill>
+                <a:schemeClr val="bg1"/>
+              </a:solidFill>
+              <a:latin typeface="+mn-lt"/>
+              <a:ea typeface="+mn-ea"/>
+              <a:cs typeface="+mn-cs"/>
+            </a:endParaRPr>
+          </a:p>
+        </p:txBody>
+      </p:sp>
+      <p:sp>
+        <p:nvSpPr>
+          <p:cNvPr id="7" name="Rectangle: Top Corners Rounded 6">
+            <a:extLst>
+              <a:ext uri="{FF2B5EF4-FFF2-40B4-BE49-F238E27FC236}">
+                <a16:creationId xmlns:a16="http://schemas.microsoft.com/office/drawing/2014/main" id="{2444B42D-B3E4-D255-0F16-AD9BDCB8A1FE}"/>
+              </a:ext>
+            </a:extLst>
+          </p:cNvPr>
+          <p:cNvSpPr/>
+          <p:nvPr/>
+        </p:nvSpPr>
+        <p:spPr bwMode="auto">
+          <a:xfrm rot="5400000">
+            <a:off x="66831" y="2041059"/>
+            <a:ext cx="1375200" cy="658425"/>
+          </a:xfrm>
+          <a:prstGeom prst="round2SameRect">
+            <a:avLst>
+              <a:gd name="adj1" fmla="val 44038"/>
+              <a:gd name="adj2" fmla="val 0"/>
+            </a:avLst>
+          </a:prstGeom>
+          <a:solidFill>
+            <a:srgbClr val="086259">
+              <a:alpha val="34902"/>
+            </a:srgbClr>
+          </a:solidFill>
+          <a:ln w="12700">
+            <a:solidFill>
+              <a:srgbClr val="9BBA43"/>
+            </a:solidFill>
+            <a:miter lim="800000"/>
+            <a:headEnd/>
+            <a:tailEnd/>
+          </a:ln>
+          <a:effectLst>
+            <a:outerShdw blurRad="50800" dist="38100" algn="l" rotWithShape="0">
+              <a:prstClr val="black">
+                <a:alpha val="40000"/>
+              </a:prstClr>
+            </a:outerShdw>
+          </a:effectLst>
+        </p:spPr>
+        <p:txBody>
+          <a:bodyPr wrap="square" lIns="72000" tIns="72000" rIns="72000" bIns="72000" rtlCol="0" anchor="ctr"/>
+          <a:lstStyle/>
+          <a:p>
+            <a:pPr algn="ctr" defTabSz="576000" eaLnBrk="0" hangingPunct="0">
+              <a:lnSpc>
+                <a:spcPct val="120000"/>
+              </a:lnSpc>
+            </a:pPr>
+            <a:endParaRPr lang="en-US" sz="1600" baseline="0" dirty="0">
+              <a:solidFill>
+                <a:schemeClr val="bg1"/>
+              </a:solidFill>
+              <a:latin typeface="+mn-lt"/>
+              <a:ea typeface="+mn-ea"/>
+              <a:cs typeface="+mn-cs"/>
+            </a:endParaRPr>
+          </a:p>
+        </p:txBody>
+      </p:sp>
+      <p:sp>
+        <p:nvSpPr>
+          <p:cNvPr id="16" name="Rectangle: Top Corners Rounded 15">
+            <a:extLst>
+              <a:ext uri="{FF2B5EF4-FFF2-40B4-BE49-F238E27FC236}">
+                <a16:creationId xmlns:a16="http://schemas.microsoft.com/office/drawing/2014/main" id="{D5959FBF-54AA-C9B8-92FB-B9B25C426EDA}"/>
+              </a:ext>
+            </a:extLst>
+          </p:cNvPr>
+          <p:cNvSpPr/>
+          <p:nvPr/>
+        </p:nvSpPr>
+        <p:spPr bwMode="auto">
+          <a:xfrm rot="16200000" flipH="1">
+            <a:off x="2326863" y="2041850"/>
+            <a:ext cx="1375200" cy="658425"/>
+          </a:xfrm>
+          <a:prstGeom prst="round2SameRect">
+            <a:avLst>
+              <a:gd name="adj1" fmla="val 44038"/>
+              <a:gd name="adj2" fmla="val 0"/>
+            </a:avLst>
+          </a:prstGeom>
+          <a:solidFill>
+            <a:srgbClr val="086259">
+              <a:alpha val="34902"/>
+            </a:srgbClr>
+          </a:solidFill>
+          <a:ln w="12700">
+            <a:solidFill>
+              <a:srgbClr val="9BBA43"/>
+            </a:solidFill>
+            <a:miter lim="800000"/>
+            <a:headEnd/>
+            <a:tailEnd/>
+          </a:ln>
+          <a:effectLst>
+            <a:outerShdw blurRad="50800" dist="38100" dir="10800000" algn="r" rotWithShape="0">
+              <a:prstClr val="black">
+                <a:alpha val="40000"/>
+              </a:prstClr>
+            </a:outerShdw>
+          </a:effectLst>
+        </p:spPr>
+        <p:txBody>
+          <a:bodyPr wrap="square" lIns="72000" tIns="72000" rIns="72000" bIns="72000" rtlCol="0" anchor="ctr"/>
+          <a:lstStyle/>
+          <a:p>
+            <a:pPr algn="ctr" defTabSz="576000" eaLnBrk="0" hangingPunct="0">
+              <a:lnSpc>
+                <a:spcPct val="120000"/>
+              </a:lnSpc>
+            </a:pPr>
+            <a:endParaRPr lang="en-US" sz="1600" baseline="0" dirty="0">
+              <a:solidFill>
+                <a:schemeClr val="bg1"/>
+              </a:solidFill>
+              <a:latin typeface="+mn-lt"/>
+              <a:ea typeface="+mn-ea"/>
+              <a:cs typeface="+mn-cs"/>
+            </a:endParaRPr>
+          </a:p>
+        </p:txBody>
+      </p:sp>
+      <p:sp>
+        <p:nvSpPr>
+          <p:cNvPr id="20" name="Block Arc 19">
+            <a:extLst>
+              <a:ext uri="{FF2B5EF4-FFF2-40B4-BE49-F238E27FC236}">
+                <a16:creationId xmlns:a16="http://schemas.microsoft.com/office/drawing/2014/main" id="{4B8E31D3-347B-5E1E-2B55-2547AAC0CA6A}"/>
+              </a:ext>
+            </a:extLst>
+          </p:cNvPr>
+          <p:cNvSpPr/>
+          <p:nvPr/>
+        </p:nvSpPr>
+        <p:spPr bwMode="auto">
+          <a:xfrm>
+            <a:off x="1222088" y="1700978"/>
+            <a:ext cx="1324717" cy="1324717"/>
+          </a:xfrm>
+          <a:prstGeom prst="blockArc">
+            <a:avLst>
+              <a:gd name="adj1" fmla="val 10800000"/>
+              <a:gd name="adj2" fmla="val 10799996"/>
+              <a:gd name="adj3" fmla="val 18018"/>
+            </a:avLst>
+          </a:prstGeom>
+          <a:gradFill>
+            <a:gsLst>
+              <a:gs pos="0">
+                <a:srgbClr val="656464"/>
+              </a:gs>
+              <a:gs pos="74000">
+                <a:srgbClr val="414852"/>
+              </a:gs>
+              <a:gs pos="100000">
+                <a:srgbClr val="39404A"/>
+              </a:gs>
+            </a:gsLst>
+            <a:lin ang="5400000" scaled="1"/>
+          </a:gradFill>
+          <a:ln w="9525">
+            <a:noFill/>
+            <a:miter lim="800000"/>
+            <a:headEnd/>
+            <a:tailEnd/>
+          </a:ln>
+          <a:effectLst>
+            <a:outerShdw blurRad="50800" dist="38100" dir="5400000" sx="101000" sy="101000" algn="t" rotWithShape="0">
+              <a:prstClr val="black">
+                <a:alpha val="40000"/>
+              </a:prstClr>
+            </a:outerShdw>
+          </a:effectLst>
+        </p:spPr>
+        <p:txBody>
+          <a:bodyPr wrap="square" lIns="72000" tIns="72000" rIns="72000" bIns="72000" rtlCol="0" anchor="ctr"/>
+          <a:lstStyle/>
+          <a:p>
+            <a:pPr algn="ctr" defTabSz="576000" eaLnBrk="0" hangingPunct="0">
+              <a:lnSpc>
+                <a:spcPct val="120000"/>
+              </a:lnSpc>
+            </a:pPr>
+            <a:endParaRPr lang="en-US" sz="1600" baseline="0" dirty="0">
+              <a:solidFill>
+                <a:schemeClr val="bg1"/>
+              </a:solidFill>
+              <a:latin typeface="+mn-lt"/>
+              <a:ea typeface="+mn-ea"/>
+              <a:cs typeface="+mn-cs"/>
+            </a:endParaRPr>
+          </a:p>
+        </p:txBody>
+      </p:sp>
+      <p:sp>
+        <p:nvSpPr>
+          <p:cNvPr id="2" name="Oval 1">
+            <a:extLst>
+              <a:ext uri="{FF2B5EF4-FFF2-40B4-BE49-F238E27FC236}">
+                <a16:creationId xmlns:a16="http://schemas.microsoft.com/office/drawing/2014/main" id="{F67FAB3A-80B1-CBB6-77A0-1028E4FC1785}"/>
+              </a:ext>
+            </a:extLst>
+          </p:cNvPr>
+          <p:cNvSpPr/>
+          <p:nvPr/>
+        </p:nvSpPr>
+        <p:spPr bwMode="auto">
+          <a:xfrm>
+            <a:off x="1460126" y="1940874"/>
+            <a:ext cx="844924" cy="844924"/>
+          </a:xfrm>
+          <a:prstGeom prst="ellipse">
+            <a:avLst/>
+          </a:prstGeom>
+          <a:gradFill>
+            <a:gsLst>
+              <a:gs pos="0">
+                <a:schemeClr val="tx1">
+                  <a:lumMod val="90000"/>
+                  <a:lumOff val="10000"/>
+                  <a:alpha val="80000"/>
+                </a:schemeClr>
+              </a:gs>
+              <a:gs pos="74000">
+                <a:srgbClr val="101820">
+                  <a:alpha val="80000"/>
+                </a:srgbClr>
+              </a:gs>
+              <a:gs pos="100000">
+                <a:srgbClr val="181820">
+                  <a:alpha val="80000"/>
+                </a:srgbClr>
+              </a:gs>
+            </a:gsLst>
+            <a:lin ang="5400000" scaled="1"/>
+          </a:gradFill>
+          <a:ln w="9525">
+            <a:solidFill>
+              <a:srgbClr val="5C676C"/>
+            </a:solidFill>
+            <a:miter lim="800000"/>
+            <a:headEnd/>
+            <a:tailEnd/>
+          </a:ln>
+        </p:spPr>
+        <p:txBody>
+          <a:bodyPr wrap="square" lIns="72000" tIns="72000" rIns="72000" bIns="72000" rtlCol="0" anchor="ctr"/>
+          <a:lstStyle/>
+          <a:p>
+            <a:pPr algn="ctr" defTabSz="576000" eaLnBrk="0" hangingPunct="0">
+              <a:lnSpc>
+                <a:spcPct val="120000"/>
+              </a:lnSpc>
+            </a:pPr>
+            <a:endParaRPr lang="en-US" sz="1600" baseline="0" dirty="0">
+              <a:solidFill>
+                <a:schemeClr val="bg1"/>
+              </a:solidFill>
+              <a:latin typeface="+mn-lt"/>
+              <a:ea typeface="+mn-ea"/>
+              <a:cs typeface="+mn-cs"/>
+            </a:endParaRPr>
+          </a:p>
+        </p:txBody>
+      </p:sp>
+      <p:grpSp>
+        <p:nvGrpSpPr>
+          <p:cNvPr id="28" name="Group 27">
+            <a:extLst>
+              <a:ext uri="{FF2B5EF4-FFF2-40B4-BE49-F238E27FC236}">
+                <a16:creationId xmlns:a16="http://schemas.microsoft.com/office/drawing/2014/main" id="{5345348D-57E7-CC0F-EC94-833B2979B8B2}"/>
+              </a:ext>
+            </a:extLst>
+          </p:cNvPr>
+          <p:cNvGrpSpPr/>
+          <p:nvPr/>
+        </p:nvGrpSpPr>
+        <p:grpSpPr>
+          <a:xfrm>
+            <a:off x="1506203" y="2055869"/>
+            <a:ext cx="833235" cy="648530"/>
+            <a:chOff x="1506203" y="2055869"/>
+            <a:chExt cx="833235" cy="648530"/>
+          </a:xfrm>
+        </p:grpSpPr>
+        <p:sp>
+          <p:nvSpPr>
+            <p:cNvPr id="9" name="Rectangle 8">
+              <a:extLst>
+                <a:ext uri="{FF2B5EF4-FFF2-40B4-BE49-F238E27FC236}">
+                  <a16:creationId xmlns:a16="http://schemas.microsoft.com/office/drawing/2014/main" id="{BA748786-CF78-DB2C-31B3-9C16688193EE}"/>
+                </a:ext>
+              </a:extLst>
+            </p:cNvPr>
+            <p:cNvSpPr/>
+            <p:nvPr/>
+          </p:nvSpPr>
+          <p:spPr>
+            <a:xfrm>
+              <a:off x="1506203" y="2058068"/>
+              <a:ext cx="704039" cy="646331"/>
+            </a:xfrm>
+            <a:prstGeom prst="rect">
+              <a:avLst/>
+            </a:prstGeom>
+          </p:spPr>
+          <p:txBody>
+            <a:bodyPr wrap="none">
+              <a:spAutoFit/>
+            </a:bodyPr>
+            <a:lstStyle/>
+            <a:p>
+              <a:pPr algn="ctr"/>
+              <a:r>
+                <a:rPr lang="en-US" sz="3600" dirty="0">
+                  <a:solidFill>
+                    <a:schemeClr val="bg1">
+                      <a:lumMod val="95000"/>
+                    </a:schemeClr>
+                  </a:solidFill>
+                  <a:latin typeface="Roboto" panose="02000000000000000000" pitchFamily="2" charset="0"/>
+                  <a:ea typeface="Roboto" panose="02000000000000000000" pitchFamily="2" charset="0"/>
+                </a:rPr>
+                <a:t>27</a:t>
+              </a:r>
+            </a:p>
+          </p:txBody>
+        </p:sp>
+        <p:sp>
+          <p:nvSpPr>
+            <p:cNvPr id="26" name="Rectangle 25">
+              <a:extLst>
+                <a:ext uri="{FF2B5EF4-FFF2-40B4-BE49-F238E27FC236}">
+                  <a16:creationId xmlns:a16="http://schemas.microsoft.com/office/drawing/2014/main" id="{461708DE-B36C-C5DB-1F0A-257F49503AC6}"/>
+                </a:ext>
+              </a:extLst>
+            </p:cNvPr>
+            <p:cNvSpPr/>
+            <p:nvPr/>
+          </p:nvSpPr>
+          <p:spPr>
+            <a:xfrm>
+              <a:off x="2010502" y="2055869"/>
+              <a:ext cx="328936" cy="523220"/>
+            </a:xfrm>
+            <a:prstGeom prst="rect">
+              <a:avLst/>
+            </a:prstGeom>
+          </p:spPr>
+          <p:txBody>
+            <a:bodyPr wrap="none">
+              <a:spAutoFit/>
+            </a:bodyPr>
+            <a:lstStyle/>
+            <a:p>
+              <a:pPr algn="ctr"/>
+              <a:r>
+                <a:rPr lang="en-US" altLang="en-US" sz="2800" dirty="0">
+                  <a:solidFill>
+                    <a:schemeClr val="bg1">
+                      <a:lumMod val="95000"/>
+                    </a:schemeClr>
+                  </a:solidFill>
+                  <a:latin typeface="Montserrat"/>
+                </a:rPr>
+                <a:t>°</a:t>
+              </a:r>
+              <a:endParaRPr lang="en-US" sz="2800" dirty="0">
+                <a:solidFill>
+                  <a:schemeClr val="bg1">
+                    <a:lumMod val="95000"/>
+                  </a:schemeClr>
+                </a:solidFill>
+                <a:latin typeface="Montserrat"/>
+                <a:ea typeface="Roboto" panose="02000000000000000000" pitchFamily="2" charset="0"/>
+              </a:endParaRPr>
+            </a:p>
+          </p:txBody>
+        </p:sp>
+      </p:grpSp>
+      <p:sp>
+        <p:nvSpPr>
+          <p:cNvPr id="43" name="Double Bracket 42">
+            <a:extLst>
+              <a:ext uri="{FF2B5EF4-FFF2-40B4-BE49-F238E27FC236}">
+                <a16:creationId xmlns:a16="http://schemas.microsoft.com/office/drawing/2014/main" id="{683EF5B0-C85B-EC5B-AEA0-21177705346F}"/>
+              </a:ext>
+            </a:extLst>
+          </p:cNvPr>
+          <p:cNvSpPr/>
+          <p:nvPr/>
+        </p:nvSpPr>
+        <p:spPr>
+          <a:xfrm>
+            <a:off x="5567070" y="3942005"/>
+            <a:ext cx="216496" cy="219755"/>
+          </a:xfrm>
+          <a:prstGeom prst="bracketPair">
+            <a:avLst/>
+          </a:prstGeom>
+          <a:ln w="9525">
+            <a:solidFill>
+              <a:schemeClr val="bg1"/>
+            </a:solidFill>
+            <a:tailEnd type="none"/>
+          </a:ln>
+        </p:spPr>
+        <p:style>
+          <a:lnRef idx="1">
+            <a:schemeClr val="accent1"/>
+          </a:lnRef>
+          <a:fillRef idx="0">
+            <a:schemeClr val="accent1"/>
+          </a:fillRef>
+          <a:effectRef idx="0">
+            <a:schemeClr val="accent1"/>
+          </a:effectRef>
+          <a:fontRef idx="minor">
+            <a:schemeClr val="tx1"/>
+          </a:fontRef>
+        </p:style>
+        <p:txBody>
+          <a:bodyPr rtlCol="0" anchor="ctr"/>
+          <a:lstStyle/>
+          <a:p>
+            <a:pPr marL="0" marR="0" lvl="0" indent="0" algn="ctr" defTabSz="914400" rtl="0" eaLnBrk="1" fontAlgn="auto" latinLnBrk="0" hangingPunct="1">
+              <a:lnSpc>
+                <a:spcPct val="100000"/>
+              </a:lnSpc>
+              <a:spcBef>
+                <a:spcPts val="0"/>
+              </a:spcBef>
+              <a:spcAft>
+                <a:spcPts val="0"/>
+              </a:spcAft>
+              <a:buClr>
+                <a:srgbClr val="000000"/>
+              </a:buClr>
+              <a:buSzTx/>
+              <a:buFont typeface="Arial"/>
+              <a:buNone/>
+              <a:tabLst/>
+              <a:defRPr/>
+            </a:pPr>
+            <a:endParaRPr kumimoji="0" lang="en-US" sz="1400" b="0" i="0" u="none" strike="noStrike" kern="0" cap="none" spc="0" normalizeH="0" baseline="0" noProof="0">
+              <a:ln>
+                <a:noFill/>
+              </a:ln>
+              <a:solidFill>
+                <a:srgbClr val="1D1D1D"/>
+              </a:solidFill>
+              <a:effectLst/>
+              <a:uLnTx/>
+              <a:uFillTx/>
+              <a:latin typeface="Arial"/>
+              <a:cs typeface="Arial"/>
+              <a:sym typeface="Arial"/>
+            </a:endParaRPr>
+          </a:p>
+        </p:txBody>
+      </p:sp>
+      <p:grpSp>
+        <p:nvGrpSpPr>
+          <p:cNvPr id="29" name="Group 28">
+            <a:extLst>
+              <a:ext uri="{FF2B5EF4-FFF2-40B4-BE49-F238E27FC236}">
+                <a16:creationId xmlns:a16="http://schemas.microsoft.com/office/drawing/2014/main" id="{E83CFD5E-94BD-24E5-6F92-5E3845D96B25}"/>
+              </a:ext>
+            </a:extLst>
+          </p:cNvPr>
+          <p:cNvGrpSpPr/>
+          <p:nvPr/>
+        </p:nvGrpSpPr>
+        <p:grpSpPr>
+          <a:xfrm>
+            <a:off x="4966189" y="2403842"/>
+            <a:ext cx="3060836" cy="1920612"/>
+            <a:chOff x="4966189" y="2403842"/>
+            <a:chExt cx="3060836" cy="1920612"/>
+          </a:xfrm>
+        </p:grpSpPr>
+        <p:pic>
+          <p:nvPicPr>
+            <p:cNvPr id="32" name="Picture 31" descr="A black background with a circular design&#10;&#10;Description automatically generated">
+              <a:extLst>
+                <a:ext uri="{FF2B5EF4-FFF2-40B4-BE49-F238E27FC236}">
+                  <a16:creationId xmlns:a16="http://schemas.microsoft.com/office/drawing/2014/main" id="{114BE58E-7E31-8BED-EBC6-D6CF0F8EC3D9}"/>
+                </a:ext>
+              </a:extLst>
+            </p:cNvPr>
+            <p:cNvPicPr>
+              <a:picLocks noChangeAspect="1"/>
+            </p:cNvPicPr>
+            <p:nvPr/>
+          </p:nvPicPr>
+          <p:blipFill>
+            <a:blip r:embed="rId6">
+              <a:lum bright="70000" contrast="-70000"/>
+              <a:extLst>
+                <a:ext uri="{28A0092B-C50C-407E-A947-70E740481C1C}">
+                  <a14:useLocalDpi xmlns:a14="http://schemas.microsoft.com/office/drawing/2010/main" val="0"/>
+                </a:ext>
+              </a:extLst>
+            </a:blip>
+            <a:stretch>
+              <a:fillRect/>
+            </a:stretch>
+          </p:blipFill>
+          <p:spPr>
+            <a:xfrm>
+              <a:off x="7500066" y="2953793"/>
+              <a:ext cx="386261" cy="386261"/>
+            </a:xfrm>
+            <a:prstGeom prst="rect">
+              <a:avLst/>
+            </a:prstGeom>
+          </p:spPr>
+        </p:pic>
+        <p:pic>
+          <p:nvPicPr>
+            <p:cNvPr id="33" name="Picture 32" descr="A white line drawing of a leaf&#10;&#10;Description automatically generated">
+              <a:extLst>
+                <a:ext uri="{FF2B5EF4-FFF2-40B4-BE49-F238E27FC236}">
+                  <a16:creationId xmlns:a16="http://schemas.microsoft.com/office/drawing/2014/main" id="{07BC21CB-D1D4-4BCE-6271-AE6812A83212}"/>
+                </a:ext>
+              </a:extLst>
+            </p:cNvPr>
+            <p:cNvPicPr>
+              <a:picLocks noChangeAspect="1"/>
+            </p:cNvPicPr>
+            <p:nvPr/>
+          </p:nvPicPr>
+          <p:blipFill>
+            <a:blip r:embed="rId7">
+              <a:extLst>
+                <a:ext uri="{28A0092B-C50C-407E-A947-70E740481C1C}">
+                  <a14:useLocalDpi xmlns:a14="http://schemas.microsoft.com/office/drawing/2010/main" val="0"/>
+                </a:ext>
+              </a:extLst>
+            </a:blip>
+            <a:stretch>
+              <a:fillRect/>
+            </a:stretch>
+          </p:blipFill>
+          <p:spPr>
+            <a:xfrm>
+              <a:off x="7535640" y="2421331"/>
+              <a:ext cx="310753" cy="310753"/>
+            </a:xfrm>
+            <a:prstGeom prst="rect">
+              <a:avLst/>
+            </a:prstGeom>
+          </p:spPr>
+        </p:pic>
+        <p:pic>
+          <p:nvPicPr>
+            <p:cNvPr id="34" name="Picture 33" descr="A wifi symbol on a black background&#10;&#10;Description automatically generated">
+              <a:extLst>
+                <a:ext uri="{FF2B5EF4-FFF2-40B4-BE49-F238E27FC236}">
+                  <a16:creationId xmlns:a16="http://schemas.microsoft.com/office/drawing/2014/main" id="{8DE16084-A8F0-B1D5-A361-6D562B123230}"/>
+                </a:ext>
+              </a:extLst>
+            </p:cNvPr>
+            <p:cNvPicPr>
+              <a:picLocks noChangeAspect="1"/>
+            </p:cNvPicPr>
+            <p:nvPr/>
+          </p:nvPicPr>
+          <p:blipFill>
+            <a:blip r:embed="rId8">
+              <a:extLst>
+                <a:ext uri="{28A0092B-C50C-407E-A947-70E740481C1C}">
+                  <a14:useLocalDpi xmlns:a14="http://schemas.microsoft.com/office/drawing/2010/main" val="0"/>
+                </a:ext>
+              </a:extLst>
+            </a:blip>
+            <a:stretch>
+              <a:fillRect/>
+            </a:stretch>
+          </p:blipFill>
+          <p:spPr>
+            <a:xfrm>
+              <a:off x="5148779" y="2976250"/>
+              <a:ext cx="361847" cy="361847"/>
+            </a:xfrm>
+            <a:prstGeom prst="rect">
+              <a:avLst/>
+            </a:prstGeom>
+          </p:spPr>
+        </p:pic>
+        <p:pic>
+          <p:nvPicPr>
+            <p:cNvPr id="35" name="Picture 34" descr="A white line drawing of gears&#10;&#10;Description automatically generated">
+              <a:extLst>
+                <a:ext uri="{FF2B5EF4-FFF2-40B4-BE49-F238E27FC236}">
+                  <a16:creationId xmlns:a16="http://schemas.microsoft.com/office/drawing/2014/main" id="{E341D023-B2DE-0D3B-6422-AC8080E26DD7}"/>
+                </a:ext>
+              </a:extLst>
+            </p:cNvPr>
+            <p:cNvPicPr>
+              <a:picLocks noChangeAspect="1"/>
+            </p:cNvPicPr>
+            <p:nvPr/>
+          </p:nvPicPr>
+          <p:blipFill>
+            <a:blip r:embed="rId9">
+              <a:extLst>
+                <a:ext uri="{28A0092B-C50C-407E-A947-70E740481C1C}">
+                  <a14:useLocalDpi xmlns:a14="http://schemas.microsoft.com/office/drawing/2010/main" val="0"/>
+                </a:ext>
+              </a:extLst>
+            </a:blip>
+            <a:stretch>
+              <a:fillRect/>
+            </a:stretch>
+          </p:blipFill>
+          <p:spPr>
+            <a:xfrm>
+              <a:off x="5161806" y="2403842"/>
+              <a:ext cx="348820" cy="348820"/>
+            </a:xfrm>
+            <a:prstGeom prst="rect">
+              <a:avLst/>
+            </a:prstGeom>
+          </p:spPr>
+        </p:pic>
+        <p:pic>
+          <p:nvPicPr>
+            <p:cNvPr id="36" name="Picture 33">
+              <a:extLst>
+                <a:ext uri="{FF2B5EF4-FFF2-40B4-BE49-F238E27FC236}">
+                  <a16:creationId xmlns:a16="http://schemas.microsoft.com/office/drawing/2014/main" id="{08DF1BDC-460A-B239-9525-EDBAC20224D6}"/>
+                </a:ext>
+              </a:extLst>
+            </p:cNvPr>
+            <p:cNvPicPr>
+              <a:picLocks noChangeAspect="1"/>
+            </p:cNvPicPr>
+            <p:nvPr/>
+          </p:nvPicPr>
+          <p:blipFill>
+            <a:blip r:embed="rId10">
+              <a:extLst>
+                <a:ext uri="{96DAC541-7B7A-43D3-8B79-37D633B846F1}">
+                  <asvg:svgBlip xmlns:asvg="http://schemas.microsoft.com/office/drawing/2016/SVG/main" r:embed="rId11"/>
+                </a:ext>
+              </a:extLst>
+            </a:blip>
+            <a:srcRect/>
+            <a:stretch/>
+          </p:blipFill>
+          <p:spPr>
+            <a:xfrm>
+              <a:off x="7333356" y="3910651"/>
+              <a:ext cx="255929" cy="255929"/>
+            </a:xfrm>
+            <a:prstGeom prst="rect">
+              <a:avLst/>
+            </a:prstGeom>
+          </p:spPr>
+        </p:pic>
+        <p:sp>
+          <p:nvSpPr>
+            <p:cNvPr id="37" name="TextBox 36">
+              <a:extLst>
+                <a:ext uri="{FF2B5EF4-FFF2-40B4-BE49-F238E27FC236}">
+                  <a16:creationId xmlns:a16="http://schemas.microsoft.com/office/drawing/2014/main" id="{976FA7AB-F633-4E39-6977-7D469BCBEDBD}"/>
+                </a:ext>
+              </a:extLst>
+            </p:cNvPr>
+            <p:cNvSpPr txBox="1"/>
+            <p:nvPr/>
+          </p:nvSpPr>
+          <p:spPr bwMode="auto">
+            <a:xfrm>
+              <a:off x="5010126" y="2726929"/>
+              <a:ext cx="656785" cy="136191"/>
+            </a:xfrm>
+            <a:prstGeom prst="rect">
+              <a:avLst/>
+            </a:prstGeom>
+            <a:noFill/>
+            <a:ln w="9525">
+              <a:noFill/>
+              <a:miter lim="800000"/>
+              <a:headEnd/>
+              <a:tailEnd/>
+            </a:ln>
+            <a:effectLst/>
+          </p:spPr>
+          <p:txBody>
+            <a:bodyPr wrap="square" lIns="0" tIns="0" rIns="0" bIns="0" rtlCol="0" anchor="t" anchorCtr="0">
+              <a:spAutoFit/>
+            </a:bodyPr>
+            <a:lstStyle/>
+            <a:p>
+              <a:pPr marL="0" marR="0" lvl="0" indent="0" algn="ctr" defTabSz="432000" rtl="0" eaLnBrk="0" fontAlgn="auto" latinLnBrk="0" hangingPunct="0">
+                <a:lnSpc>
+                  <a:spcPct val="120000"/>
+                </a:lnSpc>
+                <a:spcBef>
+                  <a:spcPts val="0"/>
+                </a:spcBef>
+                <a:spcAft>
+                  <a:spcPts val="0"/>
+                </a:spcAft>
+                <a:buClr>
+                  <a:srgbClr val="0A8276"/>
+                </a:buClr>
+                <a:buSzTx/>
+                <a:buFont typeface="Arial"/>
+                <a:buNone/>
+                <a:tabLst/>
+                <a:defRPr/>
+              </a:pPr>
+              <a:r>
+                <a:rPr kumimoji="0" lang="en-IN" sz="800" b="1" i="0" u="none" strike="noStrike" kern="0" cap="all" spc="0" normalizeH="0" baseline="0" noProof="0" dirty="0">
+                  <a:ln>
+                    <a:noFill/>
+                  </a:ln>
+                  <a:solidFill>
+                    <a:srgbClr val="FFFFFF"/>
+                  </a:solidFill>
+                  <a:effectLst/>
+                  <a:uLnTx/>
+                  <a:uFillTx/>
+                  <a:latin typeface="Montserrat" panose="00000500000000000000" pitchFamily="2" charset="0"/>
+                  <a:cs typeface="Arial"/>
+                  <a:sym typeface="Arial"/>
+                </a:rPr>
+                <a:t>SETTINGS</a:t>
+              </a:r>
+              <a:endParaRPr kumimoji="0" lang="en-US" sz="800" b="1" i="0" u="none" strike="noStrike" kern="0" cap="all" spc="0" normalizeH="0" baseline="0" noProof="0" dirty="0">
+                <a:ln>
+                  <a:noFill/>
+                </a:ln>
+                <a:solidFill>
+                  <a:srgbClr val="FFFFFF"/>
+                </a:solidFill>
+                <a:effectLst/>
+                <a:uLnTx/>
+                <a:uFillTx/>
+                <a:latin typeface="Montserrat" panose="00000500000000000000" pitchFamily="2" charset="0"/>
+                <a:cs typeface="Arial"/>
+                <a:sym typeface="Arial"/>
+              </a:endParaRPr>
+            </a:p>
+          </p:txBody>
+        </p:sp>
+        <p:sp>
+          <p:nvSpPr>
+            <p:cNvPr id="38" name="TextBox 37">
+              <a:extLst>
+                <a:ext uri="{FF2B5EF4-FFF2-40B4-BE49-F238E27FC236}">
+                  <a16:creationId xmlns:a16="http://schemas.microsoft.com/office/drawing/2014/main" id="{07CABD05-A4B9-8C75-81D4-F255E61776CD}"/>
+                </a:ext>
+              </a:extLst>
+            </p:cNvPr>
+            <p:cNvSpPr txBox="1"/>
+            <p:nvPr/>
+          </p:nvSpPr>
+          <p:spPr bwMode="auto">
+            <a:xfrm>
+              <a:off x="5336528" y="4188263"/>
+              <a:ext cx="656785" cy="136191"/>
+            </a:xfrm>
+            <a:prstGeom prst="rect">
+              <a:avLst/>
+            </a:prstGeom>
+            <a:noFill/>
+            <a:ln w="9525">
+              <a:noFill/>
+              <a:miter lim="800000"/>
+              <a:headEnd/>
+              <a:tailEnd/>
+            </a:ln>
+            <a:effectLst/>
+          </p:spPr>
+          <p:txBody>
+            <a:bodyPr wrap="square" lIns="0" tIns="0" rIns="0" bIns="0" rtlCol="0" anchor="t" anchorCtr="0">
+              <a:spAutoFit/>
+            </a:bodyPr>
+            <a:lstStyle/>
+            <a:p>
+              <a:pPr marL="0" marR="0" lvl="0" indent="0" algn="ctr" defTabSz="432000" rtl="0" eaLnBrk="0" fontAlgn="auto" latinLnBrk="0" hangingPunct="0">
+                <a:lnSpc>
+                  <a:spcPct val="120000"/>
+                </a:lnSpc>
+                <a:spcBef>
+                  <a:spcPts val="0"/>
+                </a:spcBef>
+                <a:spcAft>
+                  <a:spcPts val="0"/>
+                </a:spcAft>
+                <a:buClr>
+                  <a:srgbClr val="0A8276"/>
+                </a:buClr>
+                <a:buSzTx/>
+                <a:buFont typeface="Arial"/>
+                <a:buNone/>
+                <a:tabLst/>
+                <a:defRPr/>
+              </a:pPr>
+              <a:r>
+                <a:rPr kumimoji="0" lang="en-IN" sz="800" b="1" i="0" u="none" strike="noStrike" kern="0" cap="all" spc="0" normalizeH="0" baseline="0" noProof="0" dirty="0">
+                  <a:ln>
+                    <a:noFill/>
+                  </a:ln>
+                  <a:solidFill>
+                    <a:srgbClr val="FFFFFF"/>
+                  </a:solidFill>
+                  <a:effectLst/>
+                  <a:uLnTx/>
+                  <a:uFillTx/>
+                  <a:latin typeface="Montserrat" panose="00000500000000000000" pitchFamily="2" charset="0"/>
+                  <a:cs typeface="Arial"/>
+                  <a:sym typeface="Arial"/>
+                </a:rPr>
+                <a:t>PRESENCE</a:t>
+              </a:r>
+              <a:endParaRPr kumimoji="0" lang="en-US" sz="800" b="1" i="0" u="none" strike="noStrike" kern="0" cap="all" spc="0" normalizeH="0" baseline="0" noProof="0" dirty="0">
+                <a:ln>
+                  <a:noFill/>
+                </a:ln>
+                <a:solidFill>
+                  <a:srgbClr val="FFFFFF"/>
+                </a:solidFill>
+                <a:effectLst/>
+                <a:uLnTx/>
+                <a:uFillTx/>
+                <a:latin typeface="Montserrat" panose="00000500000000000000" pitchFamily="2" charset="0"/>
+                <a:cs typeface="Arial"/>
+                <a:sym typeface="Arial"/>
+              </a:endParaRPr>
+            </a:p>
+          </p:txBody>
+        </p:sp>
+        <p:sp>
+          <p:nvSpPr>
+            <p:cNvPr id="39" name="TextBox 38">
+              <a:extLst>
+                <a:ext uri="{FF2B5EF4-FFF2-40B4-BE49-F238E27FC236}">
+                  <a16:creationId xmlns:a16="http://schemas.microsoft.com/office/drawing/2014/main" id="{FF75D99D-A8D4-4695-7CAA-71C94EFD07F6}"/>
+                </a:ext>
+              </a:extLst>
+            </p:cNvPr>
+            <p:cNvSpPr txBox="1"/>
+            <p:nvPr/>
+          </p:nvSpPr>
+          <p:spPr bwMode="auto">
+            <a:xfrm>
+              <a:off x="7335543" y="2704326"/>
+              <a:ext cx="656785" cy="136191"/>
+            </a:xfrm>
+            <a:prstGeom prst="rect">
+              <a:avLst/>
+            </a:prstGeom>
+            <a:noFill/>
+            <a:ln w="9525">
+              <a:noFill/>
+              <a:miter lim="800000"/>
+              <a:headEnd/>
+              <a:tailEnd/>
+            </a:ln>
+            <a:effectLst/>
+          </p:spPr>
+          <p:txBody>
+            <a:bodyPr wrap="square" lIns="0" tIns="0" rIns="0" bIns="0" rtlCol="0" anchor="t" anchorCtr="0">
+              <a:spAutoFit/>
+            </a:bodyPr>
+            <a:lstStyle/>
+            <a:p>
+              <a:pPr marL="0" marR="0" lvl="0" indent="0" algn="ctr" defTabSz="432000" rtl="0" eaLnBrk="0" fontAlgn="auto" latinLnBrk="0" hangingPunct="0">
+                <a:lnSpc>
+                  <a:spcPct val="120000"/>
+                </a:lnSpc>
+                <a:spcBef>
+                  <a:spcPts val="0"/>
+                </a:spcBef>
+                <a:spcAft>
+                  <a:spcPts val="0"/>
+                </a:spcAft>
+                <a:buClr>
+                  <a:srgbClr val="0A8276"/>
+                </a:buClr>
+                <a:buSzTx/>
+                <a:buFont typeface="Arial"/>
+                <a:buNone/>
+                <a:tabLst/>
+                <a:defRPr/>
+              </a:pPr>
+              <a:r>
+                <a:rPr kumimoji="0" lang="en-IN" sz="800" b="1" i="0" u="none" strike="noStrike" kern="0" cap="all" spc="0" normalizeH="0" baseline="0" noProof="0" dirty="0">
+                  <a:ln>
+                    <a:noFill/>
+                  </a:ln>
+                  <a:solidFill>
+                    <a:srgbClr val="FFFFFF"/>
+                  </a:solidFill>
+                  <a:effectLst/>
+                  <a:uLnTx/>
+                  <a:uFillTx/>
+                  <a:latin typeface="Montserrat" panose="00000500000000000000" pitchFamily="2" charset="0"/>
+                  <a:cs typeface="Arial"/>
+                  <a:sym typeface="Arial"/>
+                </a:rPr>
+                <a:t>MODE</a:t>
+              </a:r>
+              <a:endParaRPr kumimoji="0" lang="en-US" sz="800" b="1" i="0" u="none" strike="noStrike" kern="0" cap="all" spc="0" normalizeH="0" baseline="0" noProof="0" dirty="0">
+                <a:ln>
+                  <a:noFill/>
+                </a:ln>
+                <a:solidFill>
+                  <a:srgbClr val="FFFFFF"/>
+                </a:solidFill>
+                <a:effectLst/>
+                <a:uLnTx/>
+                <a:uFillTx/>
+                <a:latin typeface="Montserrat" panose="00000500000000000000" pitchFamily="2" charset="0"/>
+                <a:cs typeface="Arial"/>
+                <a:sym typeface="Arial"/>
+              </a:endParaRPr>
+            </a:p>
+          </p:txBody>
+        </p:sp>
+        <p:sp>
+          <p:nvSpPr>
+            <p:cNvPr id="40" name="TextBox 39">
+              <a:extLst>
+                <a:ext uri="{FF2B5EF4-FFF2-40B4-BE49-F238E27FC236}">
+                  <a16:creationId xmlns:a16="http://schemas.microsoft.com/office/drawing/2014/main" id="{DE19353D-1B1B-0E4E-F888-AAAEABF24895}"/>
+                </a:ext>
+              </a:extLst>
+            </p:cNvPr>
+            <p:cNvSpPr txBox="1"/>
+            <p:nvPr/>
+          </p:nvSpPr>
+          <p:spPr bwMode="auto">
+            <a:xfrm>
+              <a:off x="7094229" y="4185986"/>
+              <a:ext cx="743757" cy="136191"/>
+            </a:xfrm>
+            <a:prstGeom prst="rect">
+              <a:avLst/>
+            </a:prstGeom>
+            <a:noFill/>
+            <a:ln w="9525">
+              <a:noFill/>
+              <a:miter lim="800000"/>
+              <a:headEnd/>
+              <a:tailEnd/>
+            </a:ln>
+            <a:effectLst/>
+          </p:spPr>
+          <p:txBody>
+            <a:bodyPr wrap="square" lIns="0" tIns="0" rIns="0" bIns="0" rtlCol="0" anchor="t" anchorCtr="0">
+              <a:spAutoFit/>
+            </a:bodyPr>
+            <a:lstStyle/>
+            <a:p>
+              <a:pPr marL="0" marR="0" lvl="0" indent="0" algn="ctr" defTabSz="432000" rtl="0" eaLnBrk="0" fontAlgn="auto" latinLnBrk="0" hangingPunct="0">
+                <a:lnSpc>
+                  <a:spcPct val="120000"/>
+                </a:lnSpc>
+                <a:spcBef>
+                  <a:spcPts val="0"/>
+                </a:spcBef>
+                <a:spcAft>
+                  <a:spcPts val="0"/>
+                </a:spcAft>
+                <a:buClr>
+                  <a:srgbClr val="0A8276"/>
+                </a:buClr>
+                <a:buSzTx/>
+                <a:buFont typeface="Arial"/>
+                <a:buNone/>
+                <a:tabLst/>
+                <a:defRPr/>
+              </a:pPr>
+              <a:r>
+                <a:rPr kumimoji="0" lang="en-IN" sz="800" b="1" i="0" u="none" strike="noStrike" kern="0" cap="all" spc="0" normalizeH="0" baseline="0" noProof="0" dirty="0">
+                  <a:ln>
+                    <a:noFill/>
+                  </a:ln>
+                  <a:solidFill>
+                    <a:srgbClr val="FFFFFF"/>
+                  </a:solidFill>
+                  <a:effectLst/>
+                  <a:uLnTx/>
+                  <a:uFillTx/>
+                  <a:latin typeface="Montserrat" panose="00000500000000000000" pitchFamily="2" charset="0"/>
+                  <a:cs typeface="Arial"/>
+                  <a:sym typeface="Arial"/>
+                </a:rPr>
+                <a:t>COMMAND</a:t>
+              </a:r>
+              <a:endParaRPr kumimoji="0" lang="en-US" sz="800" b="1" i="0" u="none" strike="noStrike" kern="0" cap="all" spc="0" normalizeH="0" baseline="0" noProof="0" dirty="0">
+                <a:ln>
+                  <a:noFill/>
+                </a:ln>
+                <a:solidFill>
+                  <a:srgbClr val="FFFFFF"/>
+                </a:solidFill>
+                <a:effectLst/>
+                <a:uLnTx/>
+                <a:uFillTx/>
+                <a:latin typeface="Montserrat" panose="00000500000000000000" pitchFamily="2" charset="0"/>
+                <a:cs typeface="Arial"/>
+                <a:sym typeface="Arial"/>
+              </a:endParaRPr>
+            </a:p>
+          </p:txBody>
+        </p:sp>
+        <p:sp>
+          <p:nvSpPr>
+            <p:cNvPr id="41" name="TextBox 40">
+              <a:extLst>
+                <a:ext uri="{FF2B5EF4-FFF2-40B4-BE49-F238E27FC236}">
+                  <a16:creationId xmlns:a16="http://schemas.microsoft.com/office/drawing/2014/main" id="{DB24DD64-30D8-381D-6ED6-D13E7B664267}"/>
+                </a:ext>
+              </a:extLst>
+            </p:cNvPr>
+            <p:cNvSpPr txBox="1"/>
+            <p:nvPr/>
+          </p:nvSpPr>
+          <p:spPr bwMode="auto">
+            <a:xfrm>
+              <a:off x="4966189" y="3302460"/>
+              <a:ext cx="743757" cy="136191"/>
+            </a:xfrm>
+            <a:prstGeom prst="rect">
+              <a:avLst/>
+            </a:prstGeom>
+            <a:noFill/>
+            <a:ln w="9525">
+              <a:noFill/>
+              <a:miter lim="800000"/>
+              <a:headEnd/>
+              <a:tailEnd/>
+            </a:ln>
+            <a:effectLst/>
+          </p:spPr>
+          <p:txBody>
+            <a:bodyPr wrap="square" lIns="0" tIns="0" rIns="0" bIns="0" rtlCol="0" anchor="t" anchorCtr="0">
+              <a:spAutoFit/>
+            </a:bodyPr>
+            <a:lstStyle/>
+            <a:p>
+              <a:pPr marL="0" marR="0" lvl="0" indent="0" algn="ctr" defTabSz="432000" rtl="0" eaLnBrk="0" fontAlgn="auto" latinLnBrk="0" hangingPunct="0">
+                <a:lnSpc>
+                  <a:spcPct val="120000"/>
+                </a:lnSpc>
+                <a:spcBef>
+                  <a:spcPts val="0"/>
+                </a:spcBef>
+                <a:spcAft>
+                  <a:spcPts val="0"/>
+                </a:spcAft>
+                <a:buClr>
+                  <a:srgbClr val="0A8276"/>
+                </a:buClr>
+                <a:buSzTx/>
+                <a:buFont typeface="Arial"/>
+                <a:buNone/>
+                <a:tabLst/>
+                <a:defRPr/>
+              </a:pPr>
+              <a:r>
+                <a:rPr kumimoji="0" lang="en-IN" sz="800" b="1" i="0" u="none" strike="noStrike" kern="0" cap="all" spc="0" normalizeH="0" baseline="0" noProof="0" dirty="0">
+                  <a:ln>
+                    <a:noFill/>
+                  </a:ln>
+                  <a:solidFill>
+                    <a:srgbClr val="FFFFFF"/>
+                  </a:solidFill>
+                  <a:effectLst/>
+                  <a:uLnTx/>
+                  <a:uFillTx/>
+                  <a:latin typeface="Montserrat" panose="00000500000000000000" pitchFamily="2" charset="0"/>
+                  <a:cs typeface="Arial"/>
+                  <a:sym typeface="Arial"/>
+                </a:rPr>
+                <a:t>CONNECT</a:t>
+              </a:r>
+              <a:endParaRPr kumimoji="0" lang="en-US" sz="800" b="1" i="0" u="none" strike="noStrike" kern="0" cap="all" spc="0" normalizeH="0" baseline="0" noProof="0" dirty="0">
+                <a:ln>
+                  <a:noFill/>
+                </a:ln>
+                <a:solidFill>
+                  <a:srgbClr val="FFFFFF"/>
+                </a:solidFill>
+                <a:effectLst/>
+                <a:uLnTx/>
+                <a:uFillTx/>
+                <a:latin typeface="Montserrat" panose="00000500000000000000" pitchFamily="2" charset="0"/>
+                <a:cs typeface="Arial"/>
+                <a:sym typeface="Arial"/>
+              </a:endParaRPr>
+            </a:p>
+          </p:txBody>
+        </p:sp>
+        <p:pic>
+          <p:nvPicPr>
+            <p:cNvPr id="42" name="Graphic 41" descr="Man outline">
+              <a:extLst>
+                <a:ext uri="{FF2B5EF4-FFF2-40B4-BE49-F238E27FC236}">
+                  <a16:creationId xmlns:a16="http://schemas.microsoft.com/office/drawing/2014/main" id="{7B727CE7-1925-3C34-1F02-A86807E9936F}"/>
+                </a:ext>
+              </a:extLst>
+            </p:cNvPr>
+            <p:cNvPicPr>
+              <a:picLocks noChangeAspect="1"/>
+            </p:cNvPicPr>
+            <p:nvPr/>
+          </p:nvPicPr>
+          <p:blipFill>
+            <a:blip r:embed="rId12">
+              <a:extLst>
+                <a:ext uri="{96DAC541-7B7A-43D3-8B79-37D633B846F1}">
+                  <asvg:svgBlip xmlns:asvg="http://schemas.microsoft.com/office/drawing/2016/SVG/main" r:embed="rId13"/>
+                </a:ext>
+              </a:extLst>
+            </a:blip>
+            <a:stretch>
+              <a:fillRect/>
+            </a:stretch>
+          </p:blipFill>
+          <p:spPr>
+            <a:xfrm>
+              <a:off x="5539626" y="3906559"/>
+              <a:ext cx="253373" cy="253373"/>
+            </a:xfrm>
+            <a:prstGeom prst="rect">
+              <a:avLst/>
+            </a:prstGeom>
+          </p:spPr>
+        </p:pic>
+        <p:sp>
+          <p:nvSpPr>
+            <p:cNvPr id="46" name="TextBox 45">
+              <a:extLst>
+                <a:ext uri="{FF2B5EF4-FFF2-40B4-BE49-F238E27FC236}">
+                  <a16:creationId xmlns:a16="http://schemas.microsoft.com/office/drawing/2014/main" id="{45D086A6-7137-A0D8-8CDE-45AD8AB39A37}"/>
+                </a:ext>
+              </a:extLst>
+            </p:cNvPr>
+            <p:cNvSpPr txBox="1"/>
+            <p:nvPr/>
+          </p:nvSpPr>
+          <p:spPr bwMode="auto">
+            <a:xfrm>
+              <a:off x="7370240" y="3295966"/>
+              <a:ext cx="656785" cy="137923"/>
+            </a:xfrm>
+            <a:prstGeom prst="rect">
+              <a:avLst/>
+            </a:prstGeom>
+            <a:noFill/>
+            <a:ln w="9525">
+              <a:noFill/>
+              <a:miter lim="800000"/>
+              <a:headEnd/>
+              <a:tailEnd/>
+            </a:ln>
+            <a:effectLst/>
+          </p:spPr>
+          <p:txBody>
+            <a:bodyPr wrap="square" lIns="0" tIns="0" rIns="0" bIns="0" rtlCol="0" anchor="t" anchorCtr="0">
+              <a:spAutoFit/>
+            </a:bodyPr>
+            <a:lstStyle/>
+            <a:p>
+              <a:pPr marL="0" marR="0" lvl="0" indent="0" algn="ctr" defTabSz="432000" rtl="0" eaLnBrk="0" fontAlgn="auto" latinLnBrk="0" hangingPunct="0">
+                <a:lnSpc>
+                  <a:spcPct val="120000"/>
+                </a:lnSpc>
+                <a:spcBef>
+                  <a:spcPts val="0"/>
+                </a:spcBef>
+                <a:spcAft>
+                  <a:spcPts val="0"/>
+                </a:spcAft>
+                <a:buClr>
+                  <a:srgbClr val="0A8276"/>
+                </a:buClr>
+                <a:buSzTx/>
+                <a:buFont typeface="Arial"/>
+                <a:buNone/>
+                <a:tabLst/>
+                <a:defRPr/>
+              </a:pPr>
+              <a:r>
+                <a:rPr kumimoji="0" lang="en-IN" sz="800" b="1" i="0" u="none" strike="noStrike" kern="0" cap="all" spc="0" normalizeH="0" baseline="0" noProof="0" dirty="0">
+                  <a:ln>
+                    <a:noFill/>
+                  </a:ln>
+                  <a:solidFill>
+                    <a:srgbClr val="FFFFFF"/>
+                  </a:solidFill>
+                  <a:effectLst/>
+                  <a:uLnTx/>
+                  <a:uFillTx/>
+                  <a:latin typeface="Montserrat" panose="00000500000000000000" pitchFamily="2" charset="0"/>
+                  <a:cs typeface="Arial"/>
+                  <a:sym typeface="Arial"/>
+                </a:rPr>
+                <a:t>LOW</a:t>
+              </a:r>
+              <a:endParaRPr kumimoji="0" lang="en-US" sz="800" b="1" i="0" u="none" strike="noStrike" kern="0" cap="all" spc="0" normalizeH="0" baseline="0" noProof="0" dirty="0">
+                <a:ln>
+                  <a:noFill/>
+                </a:ln>
+                <a:solidFill>
+                  <a:srgbClr val="FFFFFF"/>
+                </a:solidFill>
+                <a:effectLst/>
+                <a:uLnTx/>
+                <a:uFillTx/>
+                <a:latin typeface="Montserrat" panose="00000500000000000000" pitchFamily="2" charset="0"/>
+                <a:cs typeface="Arial"/>
+                <a:sym typeface="Arial"/>
+              </a:endParaRPr>
+            </a:p>
+          </p:txBody>
+        </p:sp>
+      </p:grpSp>
+      <p:grpSp>
+        <p:nvGrpSpPr>
+          <p:cNvPr id="48" name="Group 47">
+            <a:extLst>
+              <a:ext uri="{FF2B5EF4-FFF2-40B4-BE49-F238E27FC236}">
+                <a16:creationId xmlns:a16="http://schemas.microsoft.com/office/drawing/2014/main" id="{02C31CD5-7106-1E0E-4FDF-C46B7A25E6D4}"/>
+              </a:ext>
+            </a:extLst>
+          </p:cNvPr>
+          <p:cNvGrpSpPr/>
+          <p:nvPr/>
+        </p:nvGrpSpPr>
+        <p:grpSpPr>
+          <a:xfrm>
+            <a:off x="323538" y="1825492"/>
+            <a:ext cx="2997336" cy="1920612"/>
+            <a:chOff x="4966189" y="2403842"/>
+            <a:chExt cx="2997336" cy="1920612"/>
+          </a:xfrm>
+        </p:grpSpPr>
+        <p:pic>
+          <p:nvPicPr>
+            <p:cNvPr id="49" name="Picture 48" descr="A black background with a circular design&#10;&#10;Description automatically generated">
+              <a:extLst>
+                <a:ext uri="{FF2B5EF4-FFF2-40B4-BE49-F238E27FC236}">
+                  <a16:creationId xmlns:a16="http://schemas.microsoft.com/office/drawing/2014/main" id="{63214B3F-DF22-0FA3-BA6C-F8590C62ED6F}"/>
+                </a:ext>
+              </a:extLst>
+            </p:cNvPr>
+            <p:cNvPicPr>
+              <a:picLocks noChangeAspect="1"/>
+            </p:cNvPicPr>
+            <p:nvPr/>
+          </p:nvPicPr>
+          <p:blipFill>
+            <a:blip r:embed="rId6">
+              <a:lum bright="70000" contrast="-70000"/>
+              <a:extLst>
+                <a:ext uri="{28A0092B-C50C-407E-A947-70E740481C1C}">
+                  <a14:useLocalDpi xmlns:a14="http://schemas.microsoft.com/office/drawing/2010/main" val="0"/>
+                </a:ext>
+              </a:extLst>
+            </a:blip>
+            <a:stretch>
+              <a:fillRect/>
+            </a:stretch>
+          </p:blipFill>
+          <p:spPr>
+            <a:xfrm>
+              <a:off x="7436566" y="2953793"/>
+              <a:ext cx="386261" cy="386261"/>
+            </a:xfrm>
+            <a:prstGeom prst="rect">
+              <a:avLst/>
+            </a:prstGeom>
+          </p:spPr>
+        </p:pic>
+        <p:pic>
+          <p:nvPicPr>
+            <p:cNvPr id="50" name="Picture 49" descr="A white line drawing of a leaf&#10;&#10;Description automatically generated">
+              <a:extLst>
+                <a:ext uri="{FF2B5EF4-FFF2-40B4-BE49-F238E27FC236}">
+                  <a16:creationId xmlns:a16="http://schemas.microsoft.com/office/drawing/2014/main" id="{5695B650-3B6C-D13F-5D64-82A4301EAE2A}"/>
+                </a:ext>
+              </a:extLst>
+            </p:cNvPr>
+            <p:cNvPicPr>
+              <a:picLocks noChangeAspect="1"/>
+            </p:cNvPicPr>
+            <p:nvPr/>
+          </p:nvPicPr>
+          <p:blipFill>
+            <a:blip r:embed="rId7">
+              <a:extLst>
+                <a:ext uri="{28A0092B-C50C-407E-A947-70E740481C1C}">
+                  <a14:useLocalDpi xmlns:a14="http://schemas.microsoft.com/office/drawing/2010/main" val="0"/>
+                </a:ext>
+              </a:extLst>
+            </a:blip>
+            <a:stretch>
+              <a:fillRect/>
+            </a:stretch>
+          </p:blipFill>
+          <p:spPr>
+            <a:xfrm>
+              <a:off x="7472140" y="2421331"/>
+              <a:ext cx="310753" cy="310753"/>
+            </a:xfrm>
+            <a:prstGeom prst="rect">
+              <a:avLst/>
+            </a:prstGeom>
+          </p:spPr>
+        </p:pic>
+        <p:pic>
+          <p:nvPicPr>
+            <p:cNvPr id="51" name="Picture 50" descr="A wifi symbol on a black background&#10;&#10;Description automatically generated">
+              <a:extLst>
+                <a:ext uri="{FF2B5EF4-FFF2-40B4-BE49-F238E27FC236}">
+                  <a16:creationId xmlns:a16="http://schemas.microsoft.com/office/drawing/2014/main" id="{88E06A24-E74D-8F84-6EFA-F581C0B67749}"/>
+                </a:ext>
+              </a:extLst>
+            </p:cNvPr>
+            <p:cNvPicPr>
+              <a:picLocks noChangeAspect="1"/>
+            </p:cNvPicPr>
+            <p:nvPr/>
+          </p:nvPicPr>
+          <p:blipFill>
+            <a:blip r:embed="rId8">
+              <a:extLst>
+                <a:ext uri="{28A0092B-C50C-407E-A947-70E740481C1C}">
+                  <a14:useLocalDpi xmlns:a14="http://schemas.microsoft.com/office/drawing/2010/main" val="0"/>
+                </a:ext>
+              </a:extLst>
+            </a:blip>
+            <a:stretch>
+              <a:fillRect/>
+            </a:stretch>
+          </p:blipFill>
+          <p:spPr>
+            <a:xfrm>
+              <a:off x="5148779" y="2976250"/>
+              <a:ext cx="361847" cy="361847"/>
+            </a:xfrm>
+            <a:prstGeom prst="rect">
+              <a:avLst/>
+            </a:prstGeom>
+          </p:spPr>
+        </p:pic>
+        <p:pic>
+          <p:nvPicPr>
+            <p:cNvPr id="52" name="Picture 51" descr="A white line drawing of gears&#10;&#10;Description automatically generated">
+              <a:extLst>
+                <a:ext uri="{FF2B5EF4-FFF2-40B4-BE49-F238E27FC236}">
+                  <a16:creationId xmlns:a16="http://schemas.microsoft.com/office/drawing/2014/main" id="{F505A953-A8F9-CC16-DA6A-D8A1206B34F1}"/>
+                </a:ext>
+              </a:extLst>
+            </p:cNvPr>
+            <p:cNvPicPr>
+              <a:picLocks noChangeAspect="1"/>
+            </p:cNvPicPr>
+            <p:nvPr/>
+          </p:nvPicPr>
+          <p:blipFill>
+            <a:blip r:embed="rId9">
+              <a:extLst>
+                <a:ext uri="{28A0092B-C50C-407E-A947-70E740481C1C}">
+                  <a14:useLocalDpi xmlns:a14="http://schemas.microsoft.com/office/drawing/2010/main" val="0"/>
+                </a:ext>
+              </a:extLst>
+            </a:blip>
+            <a:stretch>
+              <a:fillRect/>
+            </a:stretch>
+          </p:blipFill>
+          <p:spPr>
+            <a:xfrm>
+              <a:off x="5161806" y="2403842"/>
+              <a:ext cx="348820" cy="348820"/>
+            </a:xfrm>
+            <a:prstGeom prst="rect">
+              <a:avLst/>
+            </a:prstGeom>
+          </p:spPr>
+        </p:pic>
+        <p:pic>
+          <p:nvPicPr>
+            <p:cNvPr id="53" name="Picture 33">
+              <a:extLst>
+                <a:ext uri="{FF2B5EF4-FFF2-40B4-BE49-F238E27FC236}">
+                  <a16:creationId xmlns:a16="http://schemas.microsoft.com/office/drawing/2014/main" id="{5C563DE6-43D0-443C-734F-BEADAFE4532F}"/>
+                </a:ext>
+              </a:extLst>
+            </p:cNvPr>
+            <p:cNvPicPr>
+              <a:picLocks noChangeAspect="1"/>
+            </p:cNvPicPr>
+            <p:nvPr/>
+          </p:nvPicPr>
+          <p:blipFill>
+            <a:blip r:embed="rId10">
+              <a:extLst>
+                <a:ext uri="{96DAC541-7B7A-43D3-8B79-37D633B846F1}">
+                  <asvg:svgBlip xmlns:asvg="http://schemas.microsoft.com/office/drawing/2016/SVG/main" r:embed="rId11"/>
+                </a:ext>
+              </a:extLst>
+            </a:blip>
+            <a:srcRect/>
+            <a:stretch/>
+          </p:blipFill>
+          <p:spPr>
+            <a:xfrm>
+              <a:off x="7333356" y="3910651"/>
+              <a:ext cx="255929" cy="255929"/>
+            </a:xfrm>
+            <a:prstGeom prst="rect">
+              <a:avLst/>
+            </a:prstGeom>
+          </p:spPr>
+        </p:pic>
+        <p:sp>
+          <p:nvSpPr>
+            <p:cNvPr id="54" name="TextBox 53">
+              <a:extLst>
+                <a:ext uri="{FF2B5EF4-FFF2-40B4-BE49-F238E27FC236}">
+                  <a16:creationId xmlns:a16="http://schemas.microsoft.com/office/drawing/2014/main" id="{0F4E4AF1-568F-25B6-6985-15B7721AB31F}"/>
+                </a:ext>
+              </a:extLst>
+            </p:cNvPr>
+            <p:cNvSpPr txBox="1"/>
+            <p:nvPr/>
+          </p:nvSpPr>
+          <p:spPr bwMode="auto">
+            <a:xfrm>
+              <a:off x="5010126" y="2726929"/>
+              <a:ext cx="656785" cy="136191"/>
+            </a:xfrm>
+            <a:prstGeom prst="rect">
+              <a:avLst/>
+            </a:prstGeom>
+            <a:noFill/>
+            <a:ln w="9525">
+              <a:noFill/>
+              <a:miter lim="800000"/>
+              <a:headEnd/>
+              <a:tailEnd/>
+            </a:ln>
+            <a:effectLst/>
+          </p:spPr>
+          <p:txBody>
+            <a:bodyPr wrap="square" lIns="0" tIns="0" rIns="0" bIns="0" rtlCol="0" anchor="t" anchorCtr="0">
+              <a:spAutoFit/>
+            </a:bodyPr>
+            <a:lstStyle/>
+            <a:p>
+              <a:pPr marL="0" marR="0" lvl="0" indent="0" algn="ctr" defTabSz="432000" rtl="0" eaLnBrk="0" fontAlgn="auto" latinLnBrk="0" hangingPunct="0">
+                <a:lnSpc>
+                  <a:spcPct val="120000"/>
+                </a:lnSpc>
+                <a:spcBef>
+                  <a:spcPts val="0"/>
+                </a:spcBef>
+                <a:spcAft>
+                  <a:spcPts val="0"/>
+                </a:spcAft>
+                <a:buClr>
+                  <a:srgbClr val="0A8276"/>
+                </a:buClr>
+                <a:buSzTx/>
+                <a:buFont typeface="Arial"/>
+                <a:buNone/>
+                <a:tabLst/>
+                <a:defRPr/>
+              </a:pPr>
+              <a:r>
+                <a:rPr kumimoji="0" lang="en-IN" sz="800" b="1" i="0" u="none" strike="noStrike" kern="0" cap="all" spc="0" normalizeH="0" baseline="0" noProof="0" dirty="0">
+                  <a:ln>
+                    <a:noFill/>
+                  </a:ln>
+                  <a:solidFill>
+                    <a:srgbClr val="FFFFFF"/>
+                  </a:solidFill>
+                  <a:effectLst/>
+                  <a:uLnTx/>
+                  <a:uFillTx/>
+                  <a:latin typeface="Montserrat" panose="00000500000000000000" pitchFamily="2" charset="0"/>
+                  <a:cs typeface="Arial"/>
+                  <a:sym typeface="Arial"/>
+                </a:rPr>
+                <a:t>SETTINGS</a:t>
+              </a:r>
+              <a:endParaRPr kumimoji="0" lang="en-US" sz="800" b="1" i="0" u="none" strike="noStrike" kern="0" cap="all" spc="0" normalizeH="0" baseline="0" noProof="0" dirty="0">
+                <a:ln>
+                  <a:noFill/>
+                </a:ln>
+                <a:solidFill>
+                  <a:srgbClr val="FFFFFF"/>
+                </a:solidFill>
+                <a:effectLst/>
+                <a:uLnTx/>
+                <a:uFillTx/>
+                <a:latin typeface="Montserrat" panose="00000500000000000000" pitchFamily="2" charset="0"/>
+                <a:cs typeface="Arial"/>
+                <a:sym typeface="Arial"/>
+              </a:endParaRPr>
+            </a:p>
+          </p:txBody>
+        </p:sp>
+        <p:sp>
+          <p:nvSpPr>
+            <p:cNvPr id="55" name="TextBox 54">
+              <a:extLst>
+                <a:ext uri="{FF2B5EF4-FFF2-40B4-BE49-F238E27FC236}">
+                  <a16:creationId xmlns:a16="http://schemas.microsoft.com/office/drawing/2014/main" id="{3426DA74-29F4-F3B0-E66B-DAF8BD6EA517}"/>
+                </a:ext>
+              </a:extLst>
+            </p:cNvPr>
+            <p:cNvSpPr txBox="1"/>
+            <p:nvPr/>
+          </p:nvSpPr>
+          <p:spPr bwMode="auto">
+            <a:xfrm>
+              <a:off x="5336528" y="4188263"/>
+              <a:ext cx="656785" cy="136191"/>
+            </a:xfrm>
+            <a:prstGeom prst="rect">
+              <a:avLst/>
+            </a:prstGeom>
+            <a:noFill/>
+            <a:ln w="9525">
+              <a:noFill/>
+              <a:miter lim="800000"/>
+              <a:headEnd/>
+              <a:tailEnd/>
+            </a:ln>
+            <a:effectLst/>
+          </p:spPr>
+          <p:txBody>
+            <a:bodyPr wrap="square" lIns="0" tIns="0" rIns="0" bIns="0" rtlCol="0" anchor="t" anchorCtr="0">
+              <a:spAutoFit/>
+            </a:bodyPr>
+            <a:lstStyle/>
+            <a:p>
+              <a:pPr marL="0" marR="0" lvl="0" indent="0" algn="ctr" defTabSz="432000" rtl="0" eaLnBrk="0" fontAlgn="auto" latinLnBrk="0" hangingPunct="0">
+                <a:lnSpc>
+                  <a:spcPct val="120000"/>
+                </a:lnSpc>
+                <a:spcBef>
+                  <a:spcPts val="0"/>
+                </a:spcBef>
+                <a:spcAft>
+                  <a:spcPts val="0"/>
+                </a:spcAft>
+                <a:buClr>
+                  <a:srgbClr val="0A8276"/>
+                </a:buClr>
+                <a:buSzTx/>
+                <a:buFont typeface="Arial"/>
+                <a:buNone/>
+                <a:tabLst/>
+                <a:defRPr/>
+              </a:pPr>
+              <a:r>
+                <a:rPr kumimoji="0" lang="en-IN" sz="800" b="1" i="0" u="none" strike="noStrike" kern="0" cap="all" spc="0" normalizeH="0" baseline="0" noProof="0" dirty="0">
+                  <a:ln>
+                    <a:noFill/>
+                  </a:ln>
+                  <a:solidFill>
+                    <a:srgbClr val="FFFFFF"/>
+                  </a:solidFill>
+                  <a:effectLst/>
+                  <a:uLnTx/>
+                  <a:uFillTx/>
+                  <a:latin typeface="Montserrat" panose="00000500000000000000" pitchFamily="2" charset="0"/>
+                  <a:cs typeface="Arial"/>
+                  <a:sym typeface="Arial"/>
+                </a:rPr>
+                <a:t>PRESENCE</a:t>
+              </a:r>
+              <a:endParaRPr kumimoji="0" lang="en-US" sz="800" b="1" i="0" u="none" strike="noStrike" kern="0" cap="all" spc="0" normalizeH="0" baseline="0" noProof="0" dirty="0">
+                <a:ln>
+                  <a:noFill/>
+                </a:ln>
+                <a:solidFill>
+                  <a:srgbClr val="FFFFFF"/>
+                </a:solidFill>
+                <a:effectLst/>
+                <a:uLnTx/>
+                <a:uFillTx/>
+                <a:latin typeface="Montserrat" panose="00000500000000000000" pitchFamily="2" charset="0"/>
+                <a:cs typeface="Arial"/>
+                <a:sym typeface="Arial"/>
+              </a:endParaRPr>
+            </a:p>
+          </p:txBody>
+        </p:sp>
+        <p:sp>
+          <p:nvSpPr>
+            <p:cNvPr id="56" name="TextBox 55">
+              <a:extLst>
+                <a:ext uri="{FF2B5EF4-FFF2-40B4-BE49-F238E27FC236}">
+                  <a16:creationId xmlns:a16="http://schemas.microsoft.com/office/drawing/2014/main" id="{70806EC7-8043-E8EF-5A02-4806289109A7}"/>
+                </a:ext>
+              </a:extLst>
+            </p:cNvPr>
+            <p:cNvSpPr txBox="1"/>
+            <p:nvPr/>
+          </p:nvSpPr>
+          <p:spPr bwMode="auto">
+            <a:xfrm>
+              <a:off x="7272043" y="2704326"/>
+              <a:ext cx="656785" cy="136191"/>
+            </a:xfrm>
+            <a:prstGeom prst="rect">
+              <a:avLst/>
+            </a:prstGeom>
+            <a:noFill/>
+            <a:ln w="9525">
+              <a:noFill/>
+              <a:miter lim="800000"/>
+              <a:headEnd/>
+              <a:tailEnd/>
+            </a:ln>
+            <a:effectLst/>
+          </p:spPr>
+          <p:txBody>
+            <a:bodyPr wrap="square" lIns="0" tIns="0" rIns="0" bIns="0" rtlCol="0" anchor="t" anchorCtr="0">
+              <a:spAutoFit/>
+            </a:bodyPr>
+            <a:lstStyle/>
+            <a:p>
+              <a:pPr marL="0" marR="0" lvl="0" indent="0" algn="ctr" defTabSz="432000" rtl="0" eaLnBrk="0" fontAlgn="auto" latinLnBrk="0" hangingPunct="0">
+                <a:lnSpc>
+                  <a:spcPct val="120000"/>
+                </a:lnSpc>
+                <a:spcBef>
+                  <a:spcPts val="0"/>
+                </a:spcBef>
+                <a:spcAft>
+                  <a:spcPts val="0"/>
+                </a:spcAft>
+                <a:buClr>
+                  <a:srgbClr val="0A8276"/>
+                </a:buClr>
+                <a:buSzTx/>
+                <a:buFont typeface="Arial"/>
+                <a:buNone/>
+                <a:tabLst/>
+                <a:defRPr/>
+              </a:pPr>
+              <a:r>
+                <a:rPr kumimoji="0" lang="en-IN" sz="800" b="1" i="0" u="none" strike="noStrike" kern="0" cap="all" spc="0" normalizeH="0" baseline="0" noProof="0" dirty="0">
+                  <a:ln>
+                    <a:noFill/>
+                  </a:ln>
+                  <a:solidFill>
+                    <a:srgbClr val="FFFFFF"/>
+                  </a:solidFill>
+                  <a:effectLst/>
+                  <a:uLnTx/>
+                  <a:uFillTx/>
+                  <a:latin typeface="Montserrat" panose="00000500000000000000" pitchFamily="2" charset="0"/>
+                  <a:cs typeface="Arial"/>
+                  <a:sym typeface="Arial"/>
+                </a:rPr>
+                <a:t>MODE</a:t>
+              </a:r>
+              <a:endParaRPr kumimoji="0" lang="en-US" sz="800" b="1" i="0" u="none" strike="noStrike" kern="0" cap="all" spc="0" normalizeH="0" baseline="0" noProof="0" dirty="0">
+                <a:ln>
+                  <a:noFill/>
+                </a:ln>
+                <a:solidFill>
+                  <a:srgbClr val="FFFFFF"/>
+                </a:solidFill>
+                <a:effectLst/>
+                <a:uLnTx/>
+                <a:uFillTx/>
+                <a:latin typeface="Montserrat" panose="00000500000000000000" pitchFamily="2" charset="0"/>
+                <a:cs typeface="Arial"/>
+                <a:sym typeface="Arial"/>
+              </a:endParaRPr>
+            </a:p>
+          </p:txBody>
+        </p:sp>
+        <p:sp>
+          <p:nvSpPr>
+            <p:cNvPr id="57" name="TextBox 56">
+              <a:extLst>
+                <a:ext uri="{FF2B5EF4-FFF2-40B4-BE49-F238E27FC236}">
+                  <a16:creationId xmlns:a16="http://schemas.microsoft.com/office/drawing/2014/main" id="{DA013A13-0D06-47CF-BAA7-CC8204DA928C}"/>
+                </a:ext>
+              </a:extLst>
+            </p:cNvPr>
+            <p:cNvSpPr txBox="1"/>
+            <p:nvPr/>
+          </p:nvSpPr>
+          <p:spPr bwMode="auto">
+            <a:xfrm>
+              <a:off x="7094229" y="4185986"/>
+              <a:ext cx="743757" cy="136191"/>
+            </a:xfrm>
+            <a:prstGeom prst="rect">
+              <a:avLst/>
+            </a:prstGeom>
+            <a:noFill/>
+            <a:ln w="9525">
+              <a:noFill/>
+              <a:miter lim="800000"/>
+              <a:headEnd/>
+              <a:tailEnd/>
+            </a:ln>
+            <a:effectLst/>
+          </p:spPr>
+          <p:txBody>
+            <a:bodyPr wrap="square" lIns="0" tIns="0" rIns="0" bIns="0" rtlCol="0" anchor="t" anchorCtr="0">
+              <a:spAutoFit/>
+            </a:bodyPr>
+            <a:lstStyle/>
+            <a:p>
+              <a:pPr marL="0" marR="0" lvl="0" indent="0" algn="ctr" defTabSz="432000" rtl="0" eaLnBrk="0" fontAlgn="auto" latinLnBrk="0" hangingPunct="0">
+                <a:lnSpc>
+                  <a:spcPct val="120000"/>
+                </a:lnSpc>
+                <a:spcBef>
+                  <a:spcPts val="0"/>
+                </a:spcBef>
+                <a:spcAft>
+                  <a:spcPts val="0"/>
+                </a:spcAft>
+                <a:buClr>
+                  <a:srgbClr val="0A8276"/>
+                </a:buClr>
+                <a:buSzTx/>
+                <a:buFont typeface="Arial"/>
+                <a:buNone/>
+                <a:tabLst/>
+                <a:defRPr/>
+              </a:pPr>
+              <a:r>
+                <a:rPr kumimoji="0" lang="en-IN" sz="800" b="1" i="0" u="none" strike="noStrike" kern="0" cap="all" spc="0" normalizeH="0" baseline="0" noProof="0" dirty="0">
+                  <a:ln>
+                    <a:noFill/>
+                  </a:ln>
+                  <a:solidFill>
+                    <a:srgbClr val="FFFFFF"/>
+                  </a:solidFill>
+                  <a:effectLst/>
+                  <a:uLnTx/>
+                  <a:uFillTx/>
+                  <a:latin typeface="Montserrat" panose="00000500000000000000" pitchFamily="2" charset="0"/>
+                  <a:cs typeface="Arial"/>
+                  <a:sym typeface="Arial"/>
+                </a:rPr>
+                <a:t>COMMAND</a:t>
+              </a:r>
+              <a:endParaRPr kumimoji="0" lang="en-US" sz="800" b="1" i="0" u="none" strike="noStrike" kern="0" cap="all" spc="0" normalizeH="0" baseline="0" noProof="0" dirty="0">
+                <a:ln>
+                  <a:noFill/>
+                </a:ln>
+                <a:solidFill>
+                  <a:srgbClr val="FFFFFF"/>
+                </a:solidFill>
+                <a:effectLst/>
+                <a:uLnTx/>
+                <a:uFillTx/>
+                <a:latin typeface="Montserrat" panose="00000500000000000000" pitchFamily="2" charset="0"/>
+                <a:cs typeface="Arial"/>
+                <a:sym typeface="Arial"/>
+              </a:endParaRPr>
+            </a:p>
+          </p:txBody>
+        </p:sp>
+        <p:sp>
+          <p:nvSpPr>
+            <p:cNvPr id="58" name="TextBox 57">
+              <a:extLst>
+                <a:ext uri="{FF2B5EF4-FFF2-40B4-BE49-F238E27FC236}">
+                  <a16:creationId xmlns:a16="http://schemas.microsoft.com/office/drawing/2014/main" id="{1C5FF157-6D09-6B97-44DB-02269F2ABC2D}"/>
+                </a:ext>
+              </a:extLst>
+            </p:cNvPr>
+            <p:cNvSpPr txBox="1"/>
+            <p:nvPr/>
+          </p:nvSpPr>
+          <p:spPr bwMode="auto">
+            <a:xfrm>
+              <a:off x="4966189" y="3302460"/>
+              <a:ext cx="743757" cy="136191"/>
+            </a:xfrm>
+            <a:prstGeom prst="rect">
+              <a:avLst/>
+            </a:prstGeom>
+            <a:noFill/>
+            <a:ln w="9525">
+              <a:noFill/>
+              <a:miter lim="800000"/>
+              <a:headEnd/>
+              <a:tailEnd/>
+            </a:ln>
+            <a:effectLst/>
+          </p:spPr>
+          <p:txBody>
+            <a:bodyPr wrap="square" lIns="0" tIns="0" rIns="0" bIns="0" rtlCol="0" anchor="t" anchorCtr="0">
+              <a:spAutoFit/>
+            </a:bodyPr>
+            <a:lstStyle/>
+            <a:p>
+              <a:pPr marL="0" marR="0" lvl="0" indent="0" algn="ctr" defTabSz="432000" rtl="0" eaLnBrk="0" fontAlgn="auto" latinLnBrk="0" hangingPunct="0">
+                <a:lnSpc>
+                  <a:spcPct val="120000"/>
+                </a:lnSpc>
+                <a:spcBef>
+                  <a:spcPts val="0"/>
+                </a:spcBef>
+                <a:spcAft>
+                  <a:spcPts val="0"/>
+                </a:spcAft>
+                <a:buClr>
+                  <a:srgbClr val="0A8276"/>
+                </a:buClr>
+                <a:buSzTx/>
+                <a:buFont typeface="Arial"/>
+                <a:buNone/>
+                <a:tabLst/>
+                <a:defRPr/>
+              </a:pPr>
+              <a:r>
+                <a:rPr kumimoji="0" lang="en-IN" sz="800" b="1" i="0" u="none" strike="noStrike" kern="0" cap="all" spc="0" normalizeH="0" baseline="0" noProof="0" dirty="0">
+                  <a:ln>
+                    <a:noFill/>
+                  </a:ln>
+                  <a:solidFill>
+                    <a:srgbClr val="FFFFFF"/>
+                  </a:solidFill>
+                  <a:effectLst/>
+                  <a:uLnTx/>
+                  <a:uFillTx/>
+                  <a:latin typeface="Montserrat" panose="00000500000000000000" pitchFamily="2" charset="0"/>
+                  <a:cs typeface="Arial"/>
+                  <a:sym typeface="Arial"/>
+                </a:rPr>
+                <a:t>CONNECT</a:t>
+              </a:r>
+              <a:endParaRPr kumimoji="0" lang="en-US" sz="800" b="1" i="0" u="none" strike="noStrike" kern="0" cap="all" spc="0" normalizeH="0" baseline="0" noProof="0" dirty="0">
+                <a:ln>
+                  <a:noFill/>
+                </a:ln>
+                <a:solidFill>
+                  <a:srgbClr val="FFFFFF"/>
+                </a:solidFill>
+                <a:effectLst/>
+                <a:uLnTx/>
+                <a:uFillTx/>
+                <a:latin typeface="Montserrat" panose="00000500000000000000" pitchFamily="2" charset="0"/>
+                <a:cs typeface="Arial"/>
+                <a:sym typeface="Arial"/>
+              </a:endParaRPr>
+            </a:p>
+          </p:txBody>
+        </p:sp>
+        <p:pic>
+          <p:nvPicPr>
+            <p:cNvPr id="59" name="Graphic 58" descr="Man outline">
+              <a:extLst>
+                <a:ext uri="{FF2B5EF4-FFF2-40B4-BE49-F238E27FC236}">
+                  <a16:creationId xmlns:a16="http://schemas.microsoft.com/office/drawing/2014/main" id="{369A8F6E-4593-48B3-D853-C0FE17345F39}"/>
+                </a:ext>
+              </a:extLst>
+            </p:cNvPr>
+            <p:cNvPicPr>
+              <a:picLocks noChangeAspect="1"/>
+            </p:cNvPicPr>
+            <p:nvPr/>
+          </p:nvPicPr>
+          <p:blipFill>
+            <a:blip r:embed="rId12">
+              <a:extLst>
+                <a:ext uri="{96DAC541-7B7A-43D3-8B79-37D633B846F1}">
+                  <asvg:svgBlip xmlns:asvg="http://schemas.microsoft.com/office/drawing/2016/SVG/main" r:embed="rId13"/>
+                </a:ext>
+              </a:extLst>
+            </a:blip>
+            <a:stretch>
+              <a:fillRect/>
+            </a:stretch>
+          </p:blipFill>
+          <p:spPr>
+            <a:xfrm>
+              <a:off x="5539626" y="3906559"/>
+              <a:ext cx="253373" cy="253373"/>
+            </a:xfrm>
+            <a:prstGeom prst="rect">
+              <a:avLst/>
+            </a:prstGeom>
+          </p:spPr>
+        </p:pic>
+        <p:sp>
+          <p:nvSpPr>
+            <p:cNvPr id="60" name="TextBox 59">
+              <a:extLst>
+                <a:ext uri="{FF2B5EF4-FFF2-40B4-BE49-F238E27FC236}">
+                  <a16:creationId xmlns:a16="http://schemas.microsoft.com/office/drawing/2014/main" id="{B02DD352-D82D-3020-1E54-38EAE95F6D5E}"/>
+                </a:ext>
+              </a:extLst>
+            </p:cNvPr>
+            <p:cNvSpPr txBox="1"/>
+            <p:nvPr/>
+          </p:nvSpPr>
+          <p:spPr bwMode="auto">
+            <a:xfrm>
+              <a:off x="7306740" y="3295966"/>
+              <a:ext cx="656785" cy="137923"/>
+            </a:xfrm>
+            <a:prstGeom prst="rect">
+              <a:avLst/>
+            </a:prstGeom>
+            <a:noFill/>
+            <a:ln w="9525">
+              <a:noFill/>
+              <a:miter lim="800000"/>
+              <a:headEnd/>
+              <a:tailEnd/>
+            </a:ln>
+            <a:effectLst/>
+          </p:spPr>
+          <p:txBody>
+            <a:bodyPr wrap="square" lIns="0" tIns="0" rIns="0" bIns="0" rtlCol="0" anchor="t" anchorCtr="0">
+              <a:spAutoFit/>
+            </a:bodyPr>
+            <a:lstStyle/>
+            <a:p>
+              <a:pPr marL="0" marR="0" lvl="0" indent="0" algn="ctr" defTabSz="432000" rtl="0" eaLnBrk="0" fontAlgn="auto" latinLnBrk="0" hangingPunct="0">
+                <a:lnSpc>
+                  <a:spcPct val="120000"/>
+                </a:lnSpc>
+                <a:spcBef>
+                  <a:spcPts val="0"/>
+                </a:spcBef>
+                <a:spcAft>
+                  <a:spcPts val="0"/>
+                </a:spcAft>
+                <a:buClr>
+                  <a:srgbClr val="0A8276"/>
+                </a:buClr>
+                <a:buSzTx/>
+                <a:buFont typeface="Arial"/>
+                <a:buNone/>
+                <a:tabLst/>
+                <a:defRPr/>
+              </a:pPr>
+              <a:r>
+                <a:rPr kumimoji="0" lang="en-IN" sz="800" b="1" i="0" u="none" strike="noStrike" kern="0" cap="all" spc="0" normalizeH="0" baseline="0" noProof="0" dirty="0">
+                  <a:ln>
+                    <a:noFill/>
+                  </a:ln>
+                  <a:solidFill>
+                    <a:srgbClr val="FFFFFF"/>
+                  </a:solidFill>
+                  <a:effectLst/>
+                  <a:uLnTx/>
+                  <a:uFillTx/>
+                  <a:latin typeface="Montserrat" panose="00000500000000000000" pitchFamily="2" charset="0"/>
+                  <a:cs typeface="Arial"/>
+                  <a:sym typeface="Arial"/>
+                </a:rPr>
+                <a:t>LOW</a:t>
+              </a:r>
+              <a:endParaRPr kumimoji="0" lang="en-US" sz="800" b="1" i="0" u="none" strike="noStrike" kern="0" cap="all" spc="0" normalizeH="0" baseline="0" noProof="0" dirty="0">
+                <a:ln>
+                  <a:noFill/>
+                </a:ln>
+                <a:solidFill>
+                  <a:srgbClr val="FFFFFF"/>
+                </a:solidFill>
+                <a:effectLst/>
+                <a:uLnTx/>
+                <a:uFillTx/>
+                <a:latin typeface="Montserrat" panose="00000500000000000000" pitchFamily="2" charset="0"/>
+                <a:cs typeface="Arial"/>
+                <a:sym typeface="Arial"/>
+              </a:endParaRPr>
+            </a:p>
+          </p:txBody>
+        </p:sp>
+      </p:grpSp>
+      <p:sp>
+        <p:nvSpPr>
+          <p:cNvPr id="8" name="Rectangle 7">
+            <a:extLst>
+              <a:ext uri="{FF2B5EF4-FFF2-40B4-BE49-F238E27FC236}">
+                <a16:creationId xmlns:a16="http://schemas.microsoft.com/office/drawing/2014/main" id="{4B768814-E581-68BB-4503-9A09D46F4C6A}"/>
+              </a:ext>
+            </a:extLst>
+          </p:cNvPr>
+          <p:cNvSpPr/>
+          <p:nvPr/>
+        </p:nvSpPr>
+        <p:spPr bwMode="auto">
+          <a:xfrm>
+            <a:off x="421300" y="902754"/>
+            <a:ext cx="1524000" cy="1524000"/>
+          </a:xfrm>
+          <a:prstGeom prst="rect">
+            <a:avLst/>
+          </a:prstGeom>
+          <a:solidFill>
+            <a:schemeClr val="tx2"/>
+          </a:solidFill>
+          <a:ln w="9525">
+            <a:noFill/>
+            <a:miter lim="800000"/>
+            <a:headEnd/>
+            <a:tailEnd/>
+          </a:ln>
+        </p:spPr>
+        <p:txBody>
+          <a:bodyPr wrap="square" lIns="72000" tIns="72000" rIns="72000" bIns="72000" rtlCol="0" anchor="ctr"/>
+          <a:lstStyle/>
+          <a:p>
+            <a:pPr algn="ctr" defTabSz="576000" eaLnBrk="0" hangingPunct="0">
+              <a:lnSpc>
+                <a:spcPct val="120000"/>
+              </a:lnSpc>
+            </a:pPr>
+            <a:endParaRPr lang="en-IN" sz="1600" baseline="0" dirty="0">
+              <a:solidFill>
+                <a:schemeClr val="bg1"/>
+              </a:solidFill>
+              <a:latin typeface="+mn-lt"/>
+              <a:ea typeface="+mn-ea"/>
+              <a:cs typeface="+mn-cs"/>
+            </a:endParaRPr>
+          </a:p>
+        </p:txBody>
+      </p:sp>
+      <p:grpSp>
+        <p:nvGrpSpPr>
+          <p:cNvPr id="79" name="Group 78">
+            <a:extLst>
+              <a:ext uri="{FF2B5EF4-FFF2-40B4-BE49-F238E27FC236}">
+                <a16:creationId xmlns:a16="http://schemas.microsoft.com/office/drawing/2014/main" id="{C46F0834-4259-72C6-B550-25974943D457}"/>
+              </a:ext>
+            </a:extLst>
+          </p:cNvPr>
+          <p:cNvGrpSpPr/>
+          <p:nvPr/>
+        </p:nvGrpSpPr>
+        <p:grpSpPr>
+          <a:xfrm>
+            <a:off x="555585" y="1019175"/>
+            <a:ext cx="1257660" cy="1295400"/>
+            <a:chOff x="555585" y="1019175"/>
+            <a:chExt cx="1257660" cy="1295400"/>
+          </a:xfrm>
+          <a:effectLst>
+            <a:glow>
+              <a:schemeClr val="bg1">
+                <a:alpha val="10000"/>
+              </a:schemeClr>
+            </a:glow>
+            <a:outerShdw blurRad="63500" sx="102000" sy="102000" algn="ctr" rotWithShape="0">
+              <a:prstClr val="black">
+                <a:alpha val="40000"/>
+              </a:prstClr>
+            </a:outerShdw>
+          </a:effectLst>
+        </p:grpSpPr>
+        <p:cxnSp>
+          <p:nvCxnSpPr>
+            <p:cNvPr id="10" name="Straight Connector 9">
+              <a:extLst>
+                <a:ext uri="{FF2B5EF4-FFF2-40B4-BE49-F238E27FC236}">
+                  <a16:creationId xmlns:a16="http://schemas.microsoft.com/office/drawing/2014/main" id="{5414BAC8-D1B5-50EB-9676-E19DD2D0DC3B}"/>
+                </a:ext>
+              </a:extLst>
+            </p:cNvPr>
+            <p:cNvCxnSpPr>
+              <a:cxnSpLocks/>
+            </p:cNvCxnSpPr>
+            <p:nvPr/>
+          </p:nvCxnSpPr>
+          <p:spPr>
+            <a:xfrm>
+              <a:off x="555585" y="1843523"/>
+              <a:ext cx="1257660" cy="0"/>
+            </a:xfrm>
+            <a:prstGeom prst="line">
+              <a:avLst/>
+            </a:prstGeom>
+            <a:ln w="3175">
+              <a:gradFill flip="none" rotWithShape="1">
+                <a:gsLst>
+                  <a:gs pos="0">
+                    <a:srgbClr val="0A8276">
+                      <a:alpha val="0"/>
+                    </a:srgbClr>
+                  </a:gs>
+                  <a:gs pos="20000">
+                    <a:schemeClr val="bg1">
+                      <a:alpha val="50000"/>
+                    </a:schemeClr>
+                  </a:gs>
+                  <a:gs pos="80000">
+                    <a:schemeClr val="bg1">
+                      <a:alpha val="50000"/>
+                    </a:schemeClr>
+                  </a:gs>
+                  <a:gs pos="100000">
+                    <a:srgbClr val="0A8276">
+                      <a:alpha val="0"/>
+                    </a:srgbClr>
+                  </a:gs>
+                </a:gsLst>
+                <a:path path="circle">
+                  <a:fillToRect l="100000" t="100000"/>
+                </a:path>
+                <a:tileRect r="-100000" b="-100000"/>
+              </a:gradFill>
+              <a:tailEnd type="none"/>
+            </a:ln>
+            <a:effectLst>
+              <a:glow rad="25400">
+                <a:schemeClr val="accent1">
+                  <a:satMod val="175000"/>
+                  <a:alpha val="20000"/>
+                </a:schemeClr>
+              </a:glow>
+            </a:effectLst>
+          </p:spPr>
+          <p:style>
+            <a:lnRef idx="1">
+              <a:schemeClr val="accent1"/>
+            </a:lnRef>
+            <a:fillRef idx="0">
+              <a:schemeClr val="accent1"/>
+            </a:fillRef>
+            <a:effectRef idx="0">
+              <a:schemeClr val="accent1"/>
+            </a:effectRef>
+            <a:fontRef idx="minor">
+              <a:schemeClr val="tx1"/>
+            </a:fontRef>
+          </p:style>
+        </p:cxnSp>
+        <p:cxnSp>
+          <p:nvCxnSpPr>
+            <p:cNvPr id="21" name="Straight Connector 20">
+              <a:extLst>
+                <a:ext uri="{FF2B5EF4-FFF2-40B4-BE49-F238E27FC236}">
+                  <a16:creationId xmlns:a16="http://schemas.microsoft.com/office/drawing/2014/main" id="{D1CA9B50-2659-3651-55E5-B238F0368869}"/>
+                </a:ext>
+              </a:extLst>
+            </p:cNvPr>
+            <p:cNvCxnSpPr>
+              <a:cxnSpLocks/>
+            </p:cNvCxnSpPr>
+            <p:nvPr/>
+          </p:nvCxnSpPr>
+          <p:spPr>
+            <a:xfrm>
+              <a:off x="555585" y="1725759"/>
+              <a:ext cx="1257660" cy="0"/>
+            </a:xfrm>
+            <a:prstGeom prst="line">
+              <a:avLst/>
+            </a:prstGeom>
+            <a:ln w="3175">
+              <a:gradFill flip="none" rotWithShape="1">
+                <a:gsLst>
+                  <a:gs pos="0">
+                    <a:srgbClr val="0A8276">
+                      <a:alpha val="0"/>
+                    </a:srgbClr>
+                  </a:gs>
+                  <a:gs pos="20000">
+                    <a:schemeClr val="bg1">
+                      <a:alpha val="50000"/>
+                    </a:schemeClr>
+                  </a:gs>
+                  <a:gs pos="80000">
+                    <a:schemeClr val="bg1">
+                      <a:alpha val="50000"/>
+                    </a:schemeClr>
+                  </a:gs>
+                  <a:gs pos="100000">
+                    <a:srgbClr val="0A8276">
+                      <a:alpha val="0"/>
+                    </a:srgbClr>
+                  </a:gs>
+                </a:gsLst>
+                <a:path path="circle">
+                  <a:fillToRect l="100000" t="100000"/>
+                </a:path>
+                <a:tileRect r="-100000" b="-100000"/>
+              </a:gradFill>
+              <a:tailEnd type="none"/>
+            </a:ln>
+            <a:effectLst>
+              <a:glow rad="25400">
+                <a:schemeClr val="accent1">
+                  <a:satMod val="175000"/>
+                  <a:alpha val="20000"/>
+                </a:schemeClr>
+              </a:glow>
+            </a:effectLst>
+          </p:spPr>
+          <p:style>
+            <a:lnRef idx="1">
+              <a:schemeClr val="accent1"/>
+            </a:lnRef>
+            <a:fillRef idx="0">
+              <a:schemeClr val="accent1"/>
+            </a:fillRef>
+            <a:effectRef idx="0">
+              <a:schemeClr val="accent1"/>
+            </a:effectRef>
+            <a:fontRef idx="minor">
+              <a:schemeClr val="tx1"/>
+            </a:fontRef>
+          </p:style>
+        </p:cxnSp>
+        <p:cxnSp>
+          <p:nvCxnSpPr>
+            <p:cNvPr id="23" name="Straight Connector 22">
+              <a:extLst>
+                <a:ext uri="{FF2B5EF4-FFF2-40B4-BE49-F238E27FC236}">
+                  <a16:creationId xmlns:a16="http://schemas.microsoft.com/office/drawing/2014/main" id="{B38C5902-0C6B-3981-C50B-1915F7958308}"/>
+                </a:ext>
+              </a:extLst>
+            </p:cNvPr>
+            <p:cNvCxnSpPr>
+              <a:cxnSpLocks/>
+            </p:cNvCxnSpPr>
+            <p:nvPr/>
+          </p:nvCxnSpPr>
+          <p:spPr>
+            <a:xfrm>
+              <a:off x="555585" y="1607995"/>
+              <a:ext cx="1257660" cy="0"/>
+            </a:xfrm>
+            <a:prstGeom prst="line">
+              <a:avLst/>
+            </a:prstGeom>
+            <a:ln w="3175">
+              <a:gradFill flip="none" rotWithShape="1">
+                <a:gsLst>
+                  <a:gs pos="0">
+                    <a:srgbClr val="0A8276">
+                      <a:alpha val="0"/>
+                    </a:srgbClr>
+                  </a:gs>
+                  <a:gs pos="20000">
+                    <a:schemeClr val="bg1">
+                      <a:alpha val="50000"/>
+                    </a:schemeClr>
+                  </a:gs>
+                  <a:gs pos="80000">
+                    <a:schemeClr val="bg1">
+                      <a:alpha val="50000"/>
+                    </a:schemeClr>
+                  </a:gs>
+                  <a:gs pos="100000">
+                    <a:srgbClr val="0A8276">
+                      <a:alpha val="0"/>
+                    </a:srgbClr>
+                  </a:gs>
+                </a:gsLst>
+                <a:path path="circle">
+                  <a:fillToRect l="100000" t="100000"/>
+                </a:path>
+                <a:tileRect r="-100000" b="-100000"/>
+              </a:gradFill>
+              <a:tailEnd type="none"/>
+            </a:ln>
+            <a:effectLst>
+              <a:glow rad="25400">
+                <a:schemeClr val="accent1">
+                  <a:satMod val="175000"/>
+                  <a:alpha val="20000"/>
+                </a:schemeClr>
+              </a:glow>
+            </a:effectLst>
+          </p:spPr>
+          <p:style>
+            <a:lnRef idx="1">
+              <a:schemeClr val="accent1"/>
+            </a:lnRef>
+            <a:fillRef idx="0">
+              <a:schemeClr val="accent1"/>
+            </a:fillRef>
+            <a:effectRef idx="0">
+              <a:schemeClr val="accent1"/>
+            </a:effectRef>
+            <a:fontRef idx="minor">
+              <a:schemeClr val="tx1"/>
+            </a:fontRef>
+          </p:style>
+        </p:cxnSp>
+        <p:cxnSp>
+          <p:nvCxnSpPr>
+            <p:cNvPr id="25" name="Straight Connector 24">
+              <a:extLst>
+                <a:ext uri="{FF2B5EF4-FFF2-40B4-BE49-F238E27FC236}">
+                  <a16:creationId xmlns:a16="http://schemas.microsoft.com/office/drawing/2014/main" id="{7D2C3272-175D-35BA-A06C-099872255D3D}"/>
+                </a:ext>
+              </a:extLst>
+            </p:cNvPr>
+            <p:cNvCxnSpPr>
+              <a:cxnSpLocks/>
+            </p:cNvCxnSpPr>
+            <p:nvPr/>
+          </p:nvCxnSpPr>
+          <p:spPr>
+            <a:xfrm>
+              <a:off x="555585" y="1490231"/>
+              <a:ext cx="1257660" cy="0"/>
+            </a:xfrm>
+            <a:prstGeom prst="line">
+              <a:avLst/>
+            </a:prstGeom>
+            <a:ln w="3175">
+              <a:gradFill flip="none" rotWithShape="1">
+                <a:gsLst>
+                  <a:gs pos="0">
+                    <a:srgbClr val="0A8276">
+                      <a:alpha val="0"/>
+                    </a:srgbClr>
+                  </a:gs>
+                  <a:gs pos="20000">
+                    <a:schemeClr val="bg1">
+                      <a:alpha val="50000"/>
+                    </a:schemeClr>
+                  </a:gs>
+                  <a:gs pos="80000">
+                    <a:schemeClr val="bg1">
+                      <a:alpha val="50000"/>
+                    </a:schemeClr>
+                  </a:gs>
+                  <a:gs pos="100000">
+                    <a:srgbClr val="0A8276">
+                      <a:alpha val="0"/>
+                    </a:srgbClr>
+                  </a:gs>
+                </a:gsLst>
+                <a:path path="circle">
+                  <a:fillToRect l="100000" t="100000"/>
+                </a:path>
+                <a:tileRect r="-100000" b="-100000"/>
+              </a:gradFill>
+              <a:tailEnd type="none"/>
+            </a:ln>
+            <a:effectLst>
+              <a:glow rad="25400">
+                <a:schemeClr val="accent1">
+                  <a:satMod val="175000"/>
+                  <a:alpha val="20000"/>
+                </a:schemeClr>
+              </a:glow>
+            </a:effectLst>
+          </p:spPr>
+          <p:style>
+            <a:lnRef idx="1">
+              <a:schemeClr val="accent1"/>
+            </a:lnRef>
+            <a:fillRef idx="0">
+              <a:schemeClr val="accent1"/>
+            </a:fillRef>
+            <a:effectRef idx="0">
+              <a:schemeClr val="accent1"/>
+            </a:effectRef>
+            <a:fontRef idx="minor">
+              <a:schemeClr val="tx1"/>
+            </a:fontRef>
+          </p:style>
+        </p:cxnSp>
+        <p:cxnSp>
+          <p:nvCxnSpPr>
+            <p:cNvPr id="27" name="Straight Connector 26">
+              <a:extLst>
+                <a:ext uri="{FF2B5EF4-FFF2-40B4-BE49-F238E27FC236}">
+                  <a16:creationId xmlns:a16="http://schemas.microsoft.com/office/drawing/2014/main" id="{7C5314BB-7574-F865-13AA-533F767BA93E}"/>
+                </a:ext>
+              </a:extLst>
+            </p:cNvPr>
+            <p:cNvCxnSpPr>
+              <a:cxnSpLocks/>
+            </p:cNvCxnSpPr>
+            <p:nvPr/>
+          </p:nvCxnSpPr>
+          <p:spPr>
+            <a:xfrm>
+              <a:off x="555585" y="1372467"/>
+              <a:ext cx="1257660" cy="0"/>
+            </a:xfrm>
+            <a:prstGeom prst="line">
+              <a:avLst/>
+            </a:prstGeom>
+            <a:ln w="3175">
+              <a:gradFill flip="none" rotWithShape="1">
+                <a:gsLst>
+                  <a:gs pos="0">
+                    <a:srgbClr val="0A8276">
+                      <a:alpha val="0"/>
+                    </a:srgbClr>
+                  </a:gs>
+                  <a:gs pos="20000">
+                    <a:schemeClr val="bg1">
+                      <a:alpha val="50000"/>
+                    </a:schemeClr>
+                  </a:gs>
+                  <a:gs pos="80000">
+                    <a:schemeClr val="bg1">
+                      <a:alpha val="50000"/>
+                    </a:schemeClr>
+                  </a:gs>
+                  <a:gs pos="100000">
+                    <a:srgbClr val="0A8276">
+                      <a:alpha val="0"/>
+                    </a:srgbClr>
+                  </a:gs>
+                </a:gsLst>
+                <a:path path="circle">
+                  <a:fillToRect l="100000" t="100000"/>
+                </a:path>
+                <a:tileRect r="-100000" b="-100000"/>
+              </a:gradFill>
+              <a:tailEnd type="none"/>
+            </a:ln>
+            <a:effectLst>
+              <a:glow rad="25400">
+                <a:schemeClr val="accent1">
+                  <a:satMod val="175000"/>
+                  <a:alpha val="20000"/>
+                </a:schemeClr>
+              </a:glow>
+            </a:effectLst>
+          </p:spPr>
+          <p:style>
+            <a:lnRef idx="1">
+              <a:schemeClr val="accent1"/>
+            </a:lnRef>
+            <a:fillRef idx="0">
+              <a:schemeClr val="accent1"/>
+            </a:fillRef>
+            <a:effectRef idx="0">
+              <a:schemeClr val="accent1"/>
+            </a:effectRef>
+            <a:fontRef idx="minor">
+              <a:schemeClr val="tx1"/>
+            </a:fontRef>
+          </p:style>
+        </p:cxnSp>
+        <p:cxnSp>
+          <p:nvCxnSpPr>
+            <p:cNvPr id="30" name="Straight Connector 29">
+              <a:extLst>
+                <a:ext uri="{FF2B5EF4-FFF2-40B4-BE49-F238E27FC236}">
+                  <a16:creationId xmlns:a16="http://schemas.microsoft.com/office/drawing/2014/main" id="{931CCD20-4FB2-B15D-30CF-FC8DE97B94D9}"/>
+                </a:ext>
+              </a:extLst>
+            </p:cNvPr>
+            <p:cNvCxnSpPr>
+              <a:cxnSpLocks/>
+            </p:cNvCxnSpPr>
+            <p:nvPr/>
+          </p:nvCxnSpPr>
+          <p:spPr>
+            <a:xfrm>
+              <a:off x="555585" y="1254703"/>
+              <a:ext cx="1257660" cy="0"/>
+            </a:xfrm>
+            <a:prstGeom prst="line">
+              <a:avLst/>
+            </a:prstGeom>
+            <a:ln w="3175">
+              <a:gradFill flip="none" rotWithShape="1">
+                <a:gsLst>
+                  <a:gs pos="0">
+                    <a:srgbClr val="0A8276">
+                      <a:alpha val="0"/>
+                    </a:srgbClr>
+                  </a:gs>
+                  <a:gs pos="20000">
+                    <a:schemeClr val="bg1">
+                      <a:alpha val="50000"/>
+                    </a:schemeClr>
+                  </a:gs>
+                  <a:gs pos="80000">
+                    <a:schemeClr val="bg1">
+                      <a:alpha val="50000"/>
+                    </a:schemeClr>
+                  </a:gs>
+                  <a:gs pos="100000">
+                    <a:srgbClr val="0A8276">
+                      <a:alpha val="0"/>
+                    </a:srgbClr>
+                  </a:gs>
+                </a:gsLst>
+                <a:path path="circle">
+                  <a:fillToRect l="100000" t="100000"/>
+                </a:path>
+                <a:tileRect r="-100000" b="-100000"/>
+              </a:gradFill>
+              <a:tailEnd type="none"/>
+            </a:ln>
+            <a:effectLst>
+              <a:glow rad="25400">
+                <a:schemeClr val="accent1">
+                  <a:satMod val="175000"/>
+                  <a:alpha val="20000"/>
+                </a:schemeClr>
+              </a:glow>
+            </a:effectLst>
+          </p:spPr>
+          <p:style>
+            <a:lnRef idx="1">
+              <a:schemeClr val="accent1"/>
+            </a:lnRef>
+            <a:fillRef idx="0">
+              <a:schemeClr val="accent1"/>
+            </a:fillRef>
+            <a:effectRef idx="0">
+              <a:schemeClr val="accent1"/>
+            </a:effectRef>
+            <a:fontRef idx="minor">
+              <a:schemeClr val="tx1"/>
+            </a:fontRef>
+          </p:style>
+        </p:cxnSp>
+        <p:cxnSp>
+          <p:nvCxnSpPr>
+            <p:cNvPr id="31" name="Straight Connector 30">
+              <a:extLst>
+                <a:ext uri="{FF2B5EF4-FFF2-40B4-BE49-F238E27FC236}">
+                  <a16:creationId xmlns:a16="http://schemas.microsoft.com/office/drawing/2014/main" id="{A4D4A515-BADC-0FEB-B3F3-0907D46812A7}"/>
+                </a:ext>
+              </a:extLst>
+            </p:cNvPr>
+            <p:cNvCxnSpPr>
+              <a:cxnSpLocks/>
+            </p:cNvCxnSpPr>
+            <p:nvPr/>
+          </p:nvCxnSpPr>
+          <p:spPr>
+            <a:xfrm>
+              <a:off x="555585" y="1136939"/>
+              <a:ext cx="1257660" cy="0"/>
+            </a:xfrm>
+            <a:prstGeom prst="line">
+              <a:avLst/>
+            </a:prstGeom>
+            <a:ln w="3175">
+              <a:gradFill flip="none" rotWithShape="1">
+                <a:gsLst>
+                  <a:gs pos="0">
+                    <a:srgbClr val="0A8276">
+                      <a:alpha val="0"/>
+                    </a:srgbClr>
+                  </a:gs>
+                  <a:gs pos="20000">
+                    <a:schemeClr val="bg1">
+                      <a:alpha val="50000"/>
+                    </a:schemeClr>
+                  </a:gs>
+                  <a:gs pos="80000">
+                    <a:schemeClr val="bg1">
+                      <a:alpha val="50000"/>
+                    </a:schemeClr>
+                  </a:gs>
+                  <a:gs pos="100000">
+                    <a:srgbClr val="0A8276">
+                      <a:alpha val="0"/>
+                    </a:srgbClr>
+                  </a:gs>
+                </a:gsLst>
+                <a:path path="circle">
+                  <a:fillToRect l="100000" t="100000"/>
+                </a:path>
+                <a:tileRect r="-100000" b="-100000"/>
+              </a:gradFill>
+              <a:tailEnd type="none"/>
+            </a:ln>
+            <a:effectLst>
+              <a:glow rad="25400">
+                <a:schemeClr val="accent1">
+                  <a:satMod val="175000"/>
+                  <a:alpha val="20000"/>
+                </a:schemeClr>
+              </a:glow>
+            </a:effectLst>
+          </p:spPr>
+          <p:style>
+            <a:lnRef idx="1">
+              <a:schemeClr val="accent1"/>
+            </a:lnRef>
+            <a:fillRef idx="0">
+              <a:schemeClr val="accent1"/>
+            </a:fillRef>
+            <a:effectRef idx="0">
+              <a:schemeClr val="accent1"/>
+            </a:effectRef>
+            <a:fontRef idx="minor">
+              <a:schemeClr val="tx1"/>
+            </a:fontRef>
+          </p:style>
+        </p:cxnSp>
+        <p:cxnSp>
+          <p:nvCxnSpPr>
+            <p:cNvPr id="44" name="Straight Connector 43">
+              <a:extLst>
+                <a:ext uri="{FF2B5EF4-FFF2-40B4-BE49-F238E27FC236}">
+                  <a16:creationId xmlns:a16="http://schemas.microsoft.com/office/drawing/2014/main" id="{9990AC54-28C1-E426-D297-D93E2826D088}"/>
+                </a:ext>
+              </a:extLst>
+            </p:cNvPr>
+            <p:cNvCxnSpPr>
+              <a:cxnSpLocks/>
+            </p:cNvCxnSpPr>
+            <p:nvPr/>
+          </p:nvCxnSpPr>
+          <p:spPr>
+            <a:xfrm>
+              <a:off x="555585" y="1019175"/>
+              <a:ext cx="1257660" cy="0"/>
+            </a:xfrm>
+            <a:prstGeom prst="line">
+              <a:avLst/>
+            </a:prstGeom>
+            <a:ln w="3175">
+              <a:gradFill flip="none" rotWithShape="1">
+                <a:gsLst>
+                  <a:gs pos="0">
+                    <a:srgbClr val="0A8276">
+                      <a:alpha val="0"/>
+                    </a:srgbClr>
+                  </a:gs>
+                  <a:gs pos="20000">
+                    <a:schemeClr val="bg1">
+                      <a:alpha val="50000"/>
+                    </a:schemeClr>
+                  </a:gs>
+                  <a:gs pos="80000">
+                    <a:schemeClr val="bg1">
+                      <a:alpha val="50000"/>
+                    </a:schemeClr>
+                  </a:gs>
+                  <a:gs pos="100000">
+                    <a:srgbClr val="0A8276">
+                      <a:alpha val="0"/>
+                    </a:srgbClr>
+                  </a:gs>
+                </a:gsLst>
+                <a:path path="circle">
+                  <a:fillToRect l="100000" t="100000"/>
+                </a:path>
+                <a:tileRect r="-100000" b="-100000"/>
+              </a:gradFill>
+              <a:tailEnd type="none"/>
+            </a:ln>
+            <a:effectLst>
+              <a:glow rad="25400">
+                <a:schemeClr val="accent1">
+                  <a:satMod val="175000"/>
+                  <a:alpha val="20000"/>
+                </a:schemeClr>
+              </a:glow>
+            </a:effectLst>
+          </p:spPr>
+          <p:style>
+            <a:lnRef idx="1">
+              <a:schemeClr val="accent1"/>
+            </a:lnRef>
+            <a:fillRef idx="0">
+              <a:schemeClr val="accent1"/>
+            </a:fillRef>
+            <a:effectRef idx="0">
+              <a:schemeClr val="accent1"/>
+            </a:effectRef>
+            <a:fontRef idx="minor">
+              <a:schemeClr val="tx1"/>
+            </a:fontRef>
+          </p:style>
+        </p:cxnSp>
+        <p:cxnSp>
+          <p:nvCxnSpPr>
+            <p:cNvPr id="45" name="Straight Connector 44">
+              <a:extLst>
+                <a:ext uri="{FF2B5EF4-FFF2-40B4-BE49-F238E27FC236}">
+                  <a16:creationId xmlns:a16="http://schemas.microsoft.com/office/drawing/2014/main" id="{69840CD8-82A3-1691-43DB-7E9DD97F91C9}"/>
+                </a:ext>
+              </a:extLst>
+            </p:cNvPr>
+            <p:cNvCxnSpPr>
+              <a:cxnSpLocks/>
+            </p:cNvCxnSpPr>
+            <p:nvPr/>
+          </p:nvCxnSpPr>
+          <p:spPr>
+            <a:xfrm>
+              <a:off x="555585" y="2314575"/>
+              <a:ext cx="1257660" cy="0"/>
+            </a:xfrm>
+            <a:prstGeom prst="line">
+              <a:avLst/>
+            </a:prstGeom>
+            <a:ln w="3175">
+              <a:gradFill flip="none" rotWithShape="1">
+                <a:gsLst>
+                  <a:gs pos="0">
+                    <a:srgbClr val="0A8276">
+                      <a:alpha val="0"/>
+                    </a:srgbClr>
+                  </a:gs>
+                  <a:gs pos="20000">
+                    <a:schemeClr val="bg1">
+                      <a:alpha val="50000"/>
+                    </a:schemeClr>
+                  </a:gs>
+                  <a:gs pos="80000">
+                    <a:schemeClr val="bg1">
+                      <a:alpha val="50000"/>
+                    </a:schemeClr>
+                  </a:gs>
+                  <a:gs pos="100000">
+                    <a:srgbClr val="0A8276">
+                      <a:alpha val="0"/>
+                    </a:srgbClr>
+                  </a:gs>
+                </a:gsLst>
+                <a:path path="circle">
+                  <a:fillToRect l="100000" t="100000"/>
+                </a:path>
+                <a:tileRect r="-100000" b="-100000"/>
+              </a:gradFill>
+              <a:tailEnd type="none"/>
+            </a:ln>
+            <a:effectLst>
+              <a:glow rad="25400">
+                <a:schemeClr val="accent1">
+                  <a:satMod val="175000"/>
+                  <a:alpha val="20000"/>
+                </a:schemeClr>
+              </a:glow>
+            </a:effectLst>
+          </p:spPr>
+          <p:style>
+            <a:lnRef idx="1">
+              <a:schemeClr val="accent1"/>
+            </a:lnRef>
+            <a:fillRef idx="0">
+              <a:schemeClr val="accent1"/>
+            </a:fillRef>
+            <a:effectRef idx="0">
+              <a:schemeClr val="accent1"/>
+            </a:effectRef>
+            <a:fontRef idx="minor">
+              <a:schemeClr val="tx1"/>
+            </a:fontRef>
+          </p:style>
+        </p:cxnSp>
+        <p:cxnSp>
+          <p:nvCxnSpPr>
+            <p:cNvPr id="47" name="Straight Connector 46">
+              <a:extLst>
+                <a:ext uri="{FF2B5EF4-FFF2-40B4-BE49-F238E27FC236}">
+                  <a16:creationId xmlns:a16="http://schemas.microsoft.com/office/drawing/2014/main" id="{8500B78B-A21D-802D-4B7A-B76D78EDB284}"/>
+                </a:ext>
+              </a:extLst>
+            </p:cNvPr>
+            <p:cNvCxnSpPr>
+              <a:cxnSpLocks/>
+            </p:cNvCxnSpPr>
+            <p:nvPr/>
+          </p:nvCxnSpPr>
+          <p:spPr>
+            <a:xfrm>
+              <a:off x="555585" y="2196815"/>
+              <a:ext cx="1257660" cy="0"/>
+            </a:xfrm>
+            <a:prstGeom prst="line">
+              <a:avLst/>
+            </a:prstGeom>
+            <a:ln w="3175">
+              <a:gradFill flip="none" rotWithShape="1">
+                <a:gsLst>
+                  <a:gs pos="0">
+                    <a:srgbClr val="0A8276">
+                      <a:alpha val="0"/>
+                    </a:srgbClr>
+                  </a:gs>
+                  <a:gs pos="20000">
+                    <a:schemeClr val="bg1">
+                      <a:alpha val="50000"/>
+                    </a:schemeClr>
+                  </a:gs>
+                  <a:gs pos="80000">
+                    <a:schemeClr val="bg1">
+                      <a:alpha val="50000"/>
+                    </a:schemeClr>
+                  </a:gs>
+                  <a:gs pos="100000">
+                    <a:srgbClr val="0A8276">
+                      <a:alpha val="0"/>
+                    </a:srgbClr>
+                  </a:gs>
+                </a:gsLst>
+                <a:path path="circle">
+                  <a:fillToRect l="100000" t="100000"/>
+                </a:path>
+                <a:tileRect r="-100000" b="-100000"/>
+              </a:gradFill>
+              <a:tailEnd type="none"/>
+            </a:ln>
+            <a:effectLst>
+              <a:glow rad="25400">
+                <a:schemeClr val="accent1">
+                  <a:satMod val="175000"/>
+                  <a:alpha val="20000"/>
+                </a:schemeClr>
+              </a:glow>
+            </a:effectLst>
+          </p:spPr>
+          <p:style>
+            <a:lnRef idx="1">
+              <a:schemeClr val="accent1"/>
+            </a:lnRef>
+            <a:fillRef idx="0">
+              <a:schemeClr val="accent1"/>
+            </a:fillRef>
+            <a:effectRef idx="0">
+              <a:schemeClr val="accent1"/>
+            </a:effectRef>
+            <a:fontRef idx="minor">
+              <a:schemeClr val="tx1"/>
+            </a:fontRef>
+          </p:style>
+        </p:cxnSp>
+        <p:cxnSp>
+          <p:nvCxnSpPr>
+            <p:cNvPr id="61" name="Straight Connector 60">
+              <a:extLst>
+                <a:ext uri="{FF2B5EF4-FFF2-40B4-BE49-F238E27FC236}">
+                  <a16:creationId xmlns:a16="http://schemas.microsoft.com/office/drawing/2014/main" id="{9CA2FAB9-B448-C6A4-5759-1DE9D508A105}"/>
+                </a:ext>
+              </a:extLst>
+            </p:cNvPr>
+            <p:cNvCxnSpPr>
+              <a:cxnSpLocks/>
+            </p:cNvCxnSpPr>
+            <p:nvPr/>
+          </p:nvCxnSpPr>
+          <p:spPr>
+            <a:xfrm>
+              <a:off x="555585" y="2079051"/>
+              <a:ext cx="1257660" cy="0"/>
+            </a:xfrm>
+            <a:prstGeom prst="line">
+              <a:avLst/>
+            </a:prstGeom>
+            <a:ln w="3175">
+              <a:gradFill flip="none" rotWithShape="1">
+                <a:gsLst>
+                  <a:gs pos="0">
+                    <a:srgbClr val="0A8276">
+                      <a:alpha val="0"/>
+                    </a:srgbClr>
+                  </a:gs>
+                  <a:gs pos="20000">
+                    <a:schemeClr val="bg1">
+                      <a:alpha val="50000"/>
+                    </a:schemeClr>
+                  </a:gs>
+                  <a:gs pos="80000">
+                    <a:schemeClr val="bg1">
+                      <a:alpha val="50000"/>
+                    </a:schemeClr>
+                  </a:gs>
+                  <a:gs pos="100000">
+                    <a:srgbClr val="0A8276">
+                      <a:alpha val="0"/>
+                    </a:srgbClr>
+                  </a:gs>
+                </a:gsLst>
+                <a:path path="circle">
+                  <a:fillToRect l="100000" t="100000"/>
+                </a:path>
+                <a:tileRect r="-100000" b="-100000"/>
+              </a:gradFill>
+              <a:tailEnd type="none"/>
+            </a:ln>
+            <a:effectLst>
+              <a:glow rad="25400">
+                <a:schemeClr val="accent1">
+                  <a:satMod val="175000"/>
+                  <a:alpha val="20000"/>
+                </a:schemeClr>
+              </a:glow>
+            </a:effectLst>
+          </p:spPr>
+          <p:style>
+            <a:lnRef idx="1">
+              <a:schemeClr val="accent1"/>
+            </a:lnRef>
+            <a:fillRef idx="0">
+              <a:schemeClr val="accent1"/>
+            </a:fillRef>
+            <a:effectRef idx="0">
+              <a:schemeClr val="accent1"/>
+            </a:effectRef>
+            <a:fontRef idx="minor">
+              <a:schemeClr val="tx1"/>
+            </a:fontRef>
+          </p:style>
+        </p:cxnSp>
+        <p:cxnSp>
+          <p:nvCxnSpPr>
+            <p:cNvPr id="62" name="Straight Connector 61">
+              <a:extLst>
+                <a:ext uri="{FF2B5EF4-FFF2-40B4-BE49-F238E27FC236}">
+                  <a16:creationId xmlns:a16="http://schemas.microsoft.com/office/drawing/2014/main" id="{BD86FF5D-4BBB-0751-ED0C-978E18B5C86C}"/>
+                </a:ext>
+              </a:extLst>
+            </p:cNvPr>
+            <p:cNvCxnSpPr>
+              <a:cxnSpLocks/>
+            </p:cNvCxnSpPr>
+            <p:nvPr/>
+          </p:nvCxnSpPr>
+          <p:spPr>
+            <a:xfrm>
+              <a:off x="555585" y="1961287"/>
+              <a:ext cx="1257660" cy="0"/>
+            </a:xfrm>
+            <a:prstGeom prst="line">
+              <a:avLst/>
+            </a:prstGeom>
+            <a:ln w="3175">
+              <a:gradFill flip="none" rotWithShape="1">
+                <a:gsLst>
+                  <a:gs pos="0">
+                    <a:srgbClr val="0A8276">
+                      <a:alpha val="0"/>
+                    </a:srgbClr>
+                  </a:gs>
+                  <a:gs pos="20000">
+                    <a:schemeClr val="bg1">
+                      <a:alpha val="50000"/>
+                    </a:schemeClr>
+                  </a:gs>
+                  <a:gs pos="80000">
+                    <a:schemeClr val="bg1">
+                      <a:alpha val="50000"/>
+                    </a:schemeClr>
+                  </a:gs>
+                  <a:gs pos="100000">
+                    <a:srgbClr val="0A8276">
+                      <a:alpha val="0"/>
+                    </a:srgbClr>
+                  </a:gs>
+                </a:gsLst>
+                <a:path path="circle">
+                  <a:fillToRect l="100000" t="100000"/>
+                </a:path>
+                <a:tileRect r="-100000" b="-100000"/>
+              </a:gradFill>
+              <a:tailEnd type="none"/>
+            </a:ln>
+            <a:effectLst>
+              <a:glow rad="25400">
+                <a:schemeClr val="accent1">
+                  <a:satMod val="175000"/>
+                  <a:alpha val="20000"/>
+                </a:schemeClr>
+              </a:glow>
+            </a:effectLst>
+          </p:spPr>
+          <p:style>
+            <a:lnRef idx="1">
+              <a:schemeClr val="accent1"/>
+            </a:lnRef>
+            <a:fillRef idx="0">
+              <a:schemeClr val="accent1"/>
+            </a:fillRef>
+            <a:effectRef idx="0">
+              <a:schemeClr val="accent1"/>
+            </a:effectRef>
+            <a:fontRef idx="minor">
+              <a:schemeClr val="tx1"/>
+            </a:fontRef>
+          </p:style>
+        </p:cxnSp>
+      </p:grpSp>
+      <p:pic>
+        <p:nvPicPr>
+          <p:cNvPr id="78" name="Picture 77">
+            <a:extLst>
+              <a:ext uri="{FF2B5EF4-FFF2-40B4-BE49-F238E27FC236}">
+                <a16:creationId xmlns:a16="http://schemas.microsoft.com/office/drawing/2014/main" id="{42D1C8E7-C150-9209-990F-B444816D1EC6}"/>
+              </a:ext>
+            </a:extLst>
+          </p:cNvPr>
+          <p:cNvPicPr>
+            <a:picLocks noChangeAspect="1"/>
+          </p:cNvPicPr>
+          <p:nvPr/>
+        </p:nvPicPr>
+        <p:blipFill>
+          <a:blip r:embed="rId14"/>
+          <a:stretch>
+            <a:fillRect/>
+          </a:stretch>
+        </p:blipFill>
+        <p:spPr>
+          <a:xfrm>
+            <a:off x="3503567" y="352748"/>
+            <a:ext cx="1977206" cy="1980193"/>
+          </a:xfrm>
+          <a:prstGeom prst="rect">
+            <a:avLst/>
+          </a:prstGeom>
+        </p:spPr>
+      </p:pic>
+      <p:grpSp>
+        <p:nvGrpSpPr>
+          <p:cNvPr id="93" name="Group 92">
+            <a:extLst>
+              <a:ext uri="{FF2B5EF4-FFF2-40B4-BE49-F238E27FC236}">
+                <a16:creationId xmlns:a16="http://schemas.microsoft.com/office/drawing/2014/main" id="{F660C8D0-3A31-32F7-77B4-18047B89C3E0}"/>
+              </a:ext>
+            </a:extLst>
+          </p:cNvPr>
+          <p:cNvGrpSpPr/>
+          <p:nvPr/>
+        </p:nvGrpSpPr>
+        <p:grpSpPr>
+          <a:xfrm>
+            <a:off x="552297" y="903104"/>
+            <a:ext cx="1260949" cy="1521770"/>
+            <a:chOff x="552297" y="903104"/>
+            <a:chExt cx="1260949" cy="1521770"/>
+          </a:xfrm>
+          <a:effectLst>
+            <a:glow>
+              <a:schemeClr val="bg1">
+                <a:lumMod val="95000"/>
+                <a:alpha val="10000"/>
+              </a:schemeClr>
+            </a:glow>
+            <a:outerShdw blurRad="63500" sx="102000" sy="102000" algn="ctr" rotWithShape="0">
+              <a:prstClr val="black">
+                <a:alpha val="40000"/>
+              </a:prstClr>
+            </a:outerShdw>
+          </a:effectLst>
+        </p:grpSpPr>
+        <p:cxnSp>
+          <p:nvCxnSpPr>
+            <p:cNvPr id="94" name="Straight Connector 93">
+              <a:extLst>
+                <a:ext uri="{FF2B5EF4-FFF2-40B4-BE49-F238E27FC236}">
+                  <a16:creationId xmlns:a16="http://schemas.microsoft.com/office/drawing/2014/main" id="{A821B288-DD17-CBB5-2926-09C3E5317A84}"/>
+                </a:ext>
+              </a:extLst>
+            </p:cNvPr>
+            <p:cNvCxnSpPr>
+              <a:cxnSpLocks/>
+            </p:cNvCxnSpPr>
+            <p:nvPr/>
+          </p:nvCxnSpPr>
+          <p:spPr>
+            <a:xfrm rot="16200000">
+              <a:off x="364572" y="1663989"/>
+              <a:ext cx="1521769" cy="0"/>
+            </a:xfrm>
+            <a:prstGeom prst="line">
+              <a:avLst/>
+            </a:prstGeom>
+            <a:ln w="3175">
+              <a:gradFill flip="none" rotWithShape="1">
+                <a:gsLst>
+                  <a:gs pos="0">
+                    <a:srgbClr val="0A8276">
+                      <a:alpha val="0"/>
+                    </a:srgbClr>
+                  </a:gs>
+                  <a:gs pos="20000">
+                    <a:schemeClr val="bg1">
+                      <a:alpha val="50000"/>
+                    </a:schemeClr>
+                  </a:gs>
+                  <a:gs pos="80000">
+                    <a:schemeClr val="bg1">
+                      <a:alpha val="50000"/>
+                    </a:schemeClr>
+                  </a:gs>
+                  <a:gs pos="100000">
+                    <a:srgbClr val="0A8276">
+                      <a:alpha val="0"/>
+                    </a:srgbClr>
+                  </a:gs>
+                </a:gsLst>
+                <a:path path="circle">
+                  <a:fillToRect l="100000" t="100000"/>
+                </a:path>
+                <a:tileRect r="-100000" b="-100000"/>
+              </a:gradFill>
+              <a:tailEnd type="none"/>
+            </a:ln>
+            <a:effectLst>
+              <a:glow rad="25400">
+                <a:schemeClr val="accent1">
+                  <a:satMod val="175000"/>
+                  <a:alpha val="20000"/>
+                </a:schemeClr>
+              </a:glow>
+            </a:effectLst>
+          </p:spPr>
+          <p:style>
+            <a:lnRef idx="1">
+              <a:schemeClr val="accent1"/>
+            </a:lnRef>
+            <a:fillRef idx="0">
+              <a:schemeClr val="accent1"/>
+            </a:fillRef>
+            <a:effectRef idx="0">
+              <a:schemeClr val="accent1"/>
+            </a:effectRef>
+            <a:fontRef idx="minor">
+              <a:schemeClr val="tx1"/>
+            </a:fontRef>
+          </p:style>
+        </p:cxnSp>
+        <p:cxnSp>
+          <p:nvCxnSpPr>
+            <p:cNvPr id="95" name="Straight Connector 94">
+              <a:extLst>
+                <a:ext uri="{FF2B5EF4-FFF2-40B4-BE49-F238E27FC236}">
+                  <a16:creationId xmlns:a16="http://schemas.microsoft.com/office/drawing/2014/main" id="{C970A3FA-8A0C-E0F8-46D3-D54A91EB9309}"/>
+                </a:ext>
+              </a:extLst>
+            </p:cNvPr>
+            <p:cNvCxnSpPr>
+              <a:cxnSpLocks/>
+            </p:cNvCxnSpPr>
+            <p:nvPr/>
+          </p:nvCxnSpPr>
+          <p:spPr>
+            <a:xfrm rot="16200000">
+              <a:off x="135308" y="1663989"/>
+              <a:ext cx="1521769" cy="0"/>
+            </a:xfrm>
+            <a:prstGeom prst="line">
+              <a:avLst/>
+            </a:prstGeom>
+            <a:ln w="3175">
+              <a:gradFill flip="none" rotWithShape="1">
+                <a:gsLst>
+                  <a:gs pos="0">
+                    <a:srgbClr val="0A8276">
+                      <a:alpha val="0"/>
+                    </a:srgbClr>
+                  </a:gs>
+                  <a:gs pos="20000">
+                    <a:schemeClr val="bg1">
+                      <a:alpha val="50000"/>
+                    </a:schemeClr>
+                  </a:gs>
+                  <a:gs pos="80000">
+                    <a:schemeClr val="bg1">
+                      <a:alpha val="50000"/>
+                    </a:schemeClr>
+                  </a:gs>
+                  <a:gs pos="100000">
+                    <a:srgbClr val="0A8276">
+                      <a:alpha val="0"/>
+                    </a:srgbClr>
+                  </a:gs>
+                </a:gsLst>
+                <a:path path="circle">
+                  <a:fillToRect l="100000" t="100000"/>
+                </a:path>
+                <a:tileRect r="-100000" b="-100000"/>
+              </a:gradFill>
+              <a:tailEnd type="none"/>
+            </a:ln>
+            <a:effectLst>
+              <a:glow rad="25400">
+                <a:schemeClr val="accent1">
+                  <a:satMod val="175000"/>
+                  <a:alpha val="20000"/>
+                </a:schemeClr>
+              </a:glow>
+            </a:effectLst>
+          </p:spPr>
+          <p:style>
+            <a:lnRef idx="1">
+              <a:schemeClr val="accent1"/>
+            </a:lnRef>
+            <a:fillRef idx="0">
+              <a:schemeClr val="accent1"/>
+            </a:fillRef>
+            <a:effectRef idx="0">
+              <a:schemeClr val="accent1"/>
+            </a:effectRef>
+            <a:fontRef idx="minor">
+              <a:schemeClr val="tx1"/>
+            </a:fontRef>
+          </p:style>
+        </p:cxnSp>
+        <p:cxnSp>
+          <p:nvCxnSpPr>
+            <p:cNvPr id="96" name="Straight Connector 95">
+              <a:extLst>
+                <a:ext uri="{FF2B5EF4-FFF2-40B4-BE49-F238E27FC236}">
+                  <a16:creationId xmlns:a16="http://schemas.microsoft.com/office/drawing/2014/main" id="{1F67528D-A314-FF77-277E-BE2ECCA2EB28}"/>
+                </a:ext>
+              </a:extLst>
+            </p:cNvPr>
+            <p:cNvCxnSpPr>
+              <a:cxnSpLocks/>
+            </p:cNvCxnSpPr>
+            <p:nvPr/>
+          </p:nvCxnSpPr>
+          <p:spPr>
+            <a:xfrm rot="16200000">
+              <a:off x="1052361" y="1663989"/>
+              <a:ext cx="1521769" cy="0"/>
+            </a:xfrm>
+            <a:prstGeom prst="line">
+              <a:avLst/>
+            </a:prstGeom>
+            <a:ln w="3175">
+              <a:gradFill flip="none" rotWithShape="1">
+                <a:gsLst>
+                  <a:gs pos="0">
+                    <a:srgbClr val="0A8276">
+                      <a:alpha val="0"/>
+                    </a:srgbClr>
+                  </a:gs>
+                  <a:gs pos="20000">
+                    <a:schemeClr val="bg1">
+                      <a:alpha val="50000"/>
+                    </a:schemeClr>
+                  </a:gs>
+                  <a:gs pos="80000">
+                    <a:schemeClr val="bg1">
+                      <a:alpha val="50000"/>
+                    </a:schemeClr>
+                  </a:gs>
+                  <a:gs pos="100000">
+                    <a:srgbClr val="0A8276">
+                      <a:alpha val="0"/>
+                    </a:srgbClr>
+                  </a:gs>
+                </a:gsLst>
+                <a:path path="circle">
+                  <a:fillToRect l="100000" t="100000"/>
+                </a:path>
+                <a:tileRect r="-100000" b="-100000"/>
+              </a:gradFill>
+              <a:tailEnd type="none"/>
+            </a:ln>
+            <a:effectLst>
+              <a:glow rad="25400">
+                <a:schemeClr val="accent1">
+                  <a:satMod val="175000"/>
+                  <a:alpha val="20000"/>
+                </a:schemeClr>
+              </a:glow>
+            </a:effectLst>
+          </p:spPr>
+          <p:style>
+            <a:lnRef idx="1">
+              <a:schemeClr val="accent1"/>
+            </a:lnRef>
+            <a:fillRef idx="0">
+              <a:schemeClr val="accent1"/>
+            </a:fillRef>
+            <a:effectRef idx="0">
+              <a:schemeClr val="accent1"/>
+            </a:effectRef>
+            <a:fontRef idx="minor">
+              <a:schemeClr val="tx1"/>
+            </a:fontRef>
+          </p:style>
+        </p:cxnSp>
+        <p:cxnSp>
+          <p:nvCxnSpPr>
+            <p:cNvPr id="97" name="Straight Connector 96">
+              <a:extLst>
+                <a:ext uri="{FF2B5EF4-FFF2-40B4-BE49-F238E27FC236}">
+                  <a16:creationId xmlns:a16="http://schemas.microsoft.com/office/drawing/2014/main" id="{C6592BC8-0B98-A2CC-CBD1-A63D61BFDECD}"/>
+                </a:ext>
+              </a:extLst>
+            </p:cNvPr>
+            <p:cNvCxnSpPr>
+              <a:cxnSpLocks/>
+            </p:cNvCxnSpPr>
+            <p:nvPr/>
+          </p:nvCxnSpPr>
+          <p:spPr>
+            <a:xfrm rot="16200000">
+              <a:off x="937732" y="1663989"/>
+              <a:ext cx="1521769" cy="0"/>
+            </a:xfrm>
+            <a:prstGeom prst="line">
+              <a:avLst/>
+            </a:prstGeom>
+            <a:ln w="3175">
+              <a:gradFill flip="none" rotWithShape="1">
+                <a:gsLst>
+                  <a:gs pos="0">
+                    <a:srgbClr val="0A8276">
+                      <a:alpha val="0"/>
+                    </a:srgbClr>
+                  </a:gs>
+                  <a:gs pos="20000">
+                    <a:schemeClr val="bg1">
+                      <a:alpha val="50000"/>
+                    </a:schemeClr>
+                  </a:gs>
+                  <a:gs pos="80000">
+                    <a:schemeClr val="bg1">
+                      <a:alpha val="50000"/>
+                    </a:schemeClr>
+                  </a:gs>
+                  <a:gs pos="100000">
+                    <a:srgbClr val="0A8276">
+                      <a:alpha val="0"/>
+                    </a:srgbClr>
+                  </a:gs>
+                </a:gsLst>
+                <a:path path="circle">
+                  <a:fillToRect l="100000" t="100000"/>
+                </a:path>
+                <a:tileRect r="-100000" b="-100000"/>
+              </a:gradFill>
+              <a:tailEnd type="none"/>
+            </a:ln>
+            <a:effectLst>
+              <a:glow rad="25400">
+                <a:schemeClr val="accent1">
+                  <a:satMod val="175000"/>
+                  <a:alpha val="20000"/>
+                </a:schemeClr>
+              </a:glow>
+            </a:effectLst>
+          </p:spPr>
+          <p:style>
+            <a:lnRef idx="1">
+              <a:schemeClr val="accent1"/>
+            </a:lnRef>
+            <a:fillRef idx="0">
+              <a:schemeClr val="accent1"/>
+            </a:fillRef>
+            <a:effectRef idx="0">
+              <a:schemeClr val="accent1"/>
+            </a:effectRef>
+            <a:fontRef idx="minor">
+              <a:schemeClr val="tx1"/>
+            </a:fontRef>
+          </p:style>
+        </p:cxnSp>
+        <p:cxnSp>
+          <p:nvCxnSpPr>
+            <p:cNvPr id="98" name="Straight Connector 97">
+              <a:extLst>
+                <a:ext uri="{FF2B5EF4-FFF2-40B4-BE49-F238E27FC236}">
+                  <a16:creationId xmlns:a16="http://schemas.microsoft.com/office/drawing/2014/main" id="{5712F02D-80A2-9C2D-82EA-4053A60352E3}"/>
+                </a:ext>
+              </a:extLst>
+            </p:cNvPr>
+            <p:cNvCxnSpPr>
+              <a:cxnSpLocks/>
+            </p:cNvCxnSpPr>
+            <p:nvPr/>
+          </p:nvCxnSpPr>
+          <p:spPr>
+            <a:xfrm rot="16200000">
+              <a:off x="823100" y="1663989"/>
+              <a:ext cx="1521769" cy="0"/>
+            </a:xfrm>
+            <a:prstGeom prst="line">
+              <a:avLst/>
+            </a:prstGeom>
+            <a:ln w="3175">
+              <a:gradFill flip="none" rotWithShape="1">
+                <a:gsLst>
+                  <a:gs pos="0">
+                    <a:srgbClr val="0A8276">
+                      <a:alpha val="0"/>
+                    </a:srgbClr>
+                  </a:gs>
+                  <a:gs pos="20000">
+                    <a:schemeClr val="bg1">
+                      <a:alpha val="50000"/>
+                    </a:schemeClr>
+                  </a:gs>
+                  <a:gs pos="80000">
+                    <a:schemeClr val="bg1">
+                      <a:alpha val="50000"/>
+                    </a:schemeClr>
+                  </a:gs>
+                  <a:gs pos="100000">
+                    <a:srgbClr val="0A8276">
+                      <a:alpha val="0"/>
+                    </a:srgbClr>
+                  </a:gs>
+                </a:gsLst>
+                <a:path path="circle">
+                  <a:fillToRect l="100000" t="100000"/>
+                </a:path>
+                <a:tileRect r="-100000" b="-100000"/>
+              </a:gradFill>
+              <a:tailEnd type="none"/>
+            </a:ln>
+            <a:effectLst>
+              <a:glow rad="25400">
+                <a:schemeClr val="accent1">
+                  <a:satMod val="175000"/>
+                  <a:alpha val="20000"/>
+                </a:schemeClr>
+              </a:glow>
+            </a:effectLst>
+          </p:spPr>
+          <p:style>
+            <a:lnRef idx="1">
+              <a:schemeClr val="accent1"/>
+            </a:lnRef>
+            <a:fillRef idx="0">
+              <a:schemeClr val="accent1"/>
+            </a:fillRef>
+            <a:effectRef idx="0">
+              <a:schemeClr val="accent1"/>
+            </a:effectRef>
+            <a:fontRef idx="minor">
+              <a:schemeClr val="tx1"/>
+            </a:fontRef>
+          </p:style>
+        </p:cxnSp>
+        <p:cxnSp>
+          <p:nvCxnSpPr>
+            <p:cNvPr id="99" name="Straight Connector 98">
+              <a:extLst>
+                <a:ext uri="{FF2B5EF4-FFF2-40B4-BE49-F238E27FC236}">
+                  <a16:creationId xmlns:a16="http://schemas.microsoft.com/office/drawing/2014/main" id="{7F7F927B-0CCE-828C-1947-2D1A397DC7B7}"/>
+                </a:ext>
+              </a:extLst>
+            </p:cNvPr>
+            <p:cNvCxnSpPr>
+              <a:cxnSpLocks/>
+            </p:cNvCxnSpPr>
+            <p:nvPr/>
+          </p:nvCxnSpPr>
+          <p:spPr>
+            <a:xfrm rot="16200000">
+              <a:off x="708468" y="1663990"/>
+              <a:ext cx="1521769" cy="0"/>
+            </a:xfrm>
+            <a:prstGeom prst="line">
+              <a:avLst/>
+            </a:prstGeom>
+            <a:ln w="3175">
+              <a:gradFill flip="none" rotWithShape="1">
+                <a:gsLst>
+                  <a:gs pos="0">
+                    <a:srgbClr val="0A8276">
+                      <a:alpha val="0"/>
+                    </a:srgbClr>
+                  </a:gs>
+                  <a:gs pos="20000">
+                    <a:schemeClr val="bg1">
+                      <a:alpha val="50000"/>
+                    </a:schemeClr>
+                  </a:gs>
+                  <a:gs pos="80000">
+                    <a:schemeClr val="bg1">
+                      <a:alpha val="50000"/>
+                    </a:schemeClr>
+                  </a:gs>
+                  <a:gs pos="100000">
+                    <a:srgbClr val="0A8276">
+                      <a:alpha val="0"/>
+                    </a:srgbClr>
+                  </a:gs>
+                </a:gsLst>
+                <a:path path="circle">
+                  <a:fillToRect l="100000" t="100000"/>
+                </a:path>
+                <a:tileRect r="-100000" b="-100000"/>
+              </a:gradFill>
+              <a:tailEnd type="none"/>
+            </a:ln>
+            <a:effectLst>
+              <a:glow rad="25400">
+                <a:schemeClr val="accent1">
+                  <a:satMod val="175000"/>
+                  <a:alpha val="20000"/>
+                </a:schemeClr>
+              </a:glow>
+            </a:effectLst>
+          </p:spPr>
+          <p:style>
+            <a:lnRef idx="1">
+              <a:schemeClr val="accent1"/>
+            </a:lnRef>
+            <a:fillRef idx="0">
+              <a:schemeClr val="accent1"/>
+            </a:fillRef>
+            <a:effectRef idx="0">
+              <a:schemeClr val="accent1"/>
+            </a:effectRef>
+            <a:fontRef idx="minor">
+              <a:schemeClr val="tx1"/>
+            </a:fontRef>
+          </p:style>
+        </p:cxnSp>
+        <p:cxnSp>
+          <p:nvCxnSpPr>
+            <p:cNvPr id="100" name="Straight Connector 99">
+              <a:extLst>
+                <a:ext uri="{FF2B5EF4-FFF2-40B4-BE49-F238E27FC236}">
+                  <a16:creationId xmlns:a16="http://schemas.microsoft.com/office/drawing/2014/main" id="{C00BED65-FEEB-4AA8-0AB0-B9E5C5909D98}"/>
+                </a:ext>
+              </a:extLst>
+            </p:cNvPr>
+            <p:cNvCxnSpPr>
+              <a:cxnSpLocks/>
+            </p:cNvCxnSpPr>
+            <p:nvPr/>
+          </p:nvCxnSpPr>
+          <p:spPr>
+            <a:xfrm rot="16200000">
+              <a:off x="-208588" y="1663989"/>
+              <a:ext cx="1521769" cy="0"/>
+            </a:xfrm>
+            <a:prstGeom prst="line">
+              <a:avLst/>
+            </a:prstGeom>
+            <a:ln w="3175">
+              <a:gradFill flip="none" rotWithShape="1">
+                <a:gsLst>
+                  <a:gs pos="0">
+                    <a:srgbClr val="0A8276">
+                      <a:alpha val="0"/>
+                    </a:srgbClr>
+                  </a:gs>
+                  <a:gs pos="20000">
+                    <a:schemeClr val="bg1">
+                      <a:alpha val="50000"/>
+                    </a:schemeClr>
+                  </a:gs>
+                  <a:gs pos="80000">
+                    <a:schemeClr val="bg1">
+                      <a:alpha val="50000"/>
+                    </a:schemeClr>
+                  </a:gs>
+                  <a:gs pos="100000">
+                    <a:srgbClr val="0A8276">
+                      <a:alpha val="0"/>
+                    </a:srgbClr>
+                  </a:gs>
+                </a:gsLst>
+                <a:path path="circle">
+                  <a:fillToRect l="100000" t="100000"/>
+                </a:path>
+                <a:tileRect r="-100000" b="-100000"/>
+              </a:gradFill>
+              <a:tailEnd type="none"/>
+            </a:ln>
+            <a:effectLst>
+              <a:glow rad="25400">
+                <a:schemeClr val="accent1">
+                  <a:satMod val="175000"/>
+                  <a:alpha val="20000"/>
+                </a:schemeClr>
+              </a:glow>
+            </a:effectLst>
+          </p:spPr>
+          <p:style>
+            <a:lnRef idx="1">
+              <a:schemeClr val="accent1"/>
+            </a:lnRef>
+            <a:fillRef idx="0">
+              <a:schemeClr val="accent1"/>
+            </a:fillRef>
+            <a:effectRef idx="0">
+              <a:schemeClr val="accent1"/>
+            </a:effectRef>
+            <a:fontRef idx="minor">
+              <a:schemeClr val="tx1"/>
+            </a:fontRef>
+          </p:style>
+        </p:cxnSp>
+        <p:cxnSp>
+          <p:nvCxnSpPr>
+            <p:cNvPr id="101" name="Straight Connector 100">
+              <a:extLst>
+                <a:ext uri="{FF2B5EF4-FFF2-40B4-BE49-F238E27FC236}">
+                  <a16:creationId xmlns:a16="http://schemas.microsoft.com/office/drawing/2014/main" id="{74EE46EC-654F-1203-FD95-D691744F6DE4}"/>
+                </a:ext>
+              </a:extLst>
+            </p:cNvPr>
+            <p:cNvCxnSpPr>
+              <a:cxnSpLocks/>
+            </p:cNvCxnSpPr>
+            <p:nvPr/>
+          </p:nvCxnSpPr>
+          <p:spPr>
+            <a:xfrm rot="16200000">
+              <a:off x="593836" y="1663990"/>
+              <a:ext cx="1521769" cy="0"/>
+            </a:xfrm>
+            <a:prstGeom prst="line">
+              <a:avLst/>
+            </a:prstGeom>
+            <a:ln w="3175">
+              <a:gradFill flip="none" rotWithShape="1">
+                <a:gsLst>
+                  <a:gs pos="0">
+                    <a:srgbClr val="0A8276">
+                      <a:alpha val="0"/>
+                    </a:srgbClr>
+                  </a:gs>
+                  <a:gs pos="20000">
+                    <a:schemeClr val="bg1">
+                      <a:alpha val="50000"/>
+                    </a:schemeClr>
+                  </a:gs>
+                  <a:gs pos="80000">
+                    <a:schemeClr val="bg1">
+                      <a:alpha val="50000"/>
+                    </a:schemeClr>
+                  </a:gs>
+                  <a:gs pos="100000">
+                    <a:srgbClr val="0A8276">
+                      <a:alpha val="0"/>
+                    </a:srgbClr>
+                  </a:gs>
+                </a:gsLst>
+                <a:path path="circle">
+                  <a:fillToRect l="100000" t="100000"/>
+                </a:path>
+                <a:tileRect r="-100000" b="-100000"/>
+              </a:gradFill>
+              <a:tailEnd type="none"/>
+            </a:ln>
+            <a:effectLst>
+              <a:glow rad="25400">
+                <a:schemeClr val="accent1">
+                  <a:satMod val="175000"/>
+                  <a:alpha val="20000"/>
+                </a:schemeClr>
+              </a:glow>
+            </a:effectLst>
+          </p:spPr>
+          <p:style>
+            <a:lnRef idx="1">
+              <a:schemeClr val="accent1"/>
+            </a:lnRef>
+            <a:fillRef idx="0">
+              <a:schemeClr val="accent1"/>
+            </a:fillRef>
+            <a:effectRef idx="0">
+              <a:schemeClr val="accent1"/>
+            </a:effectRef>
+            <a:fontRef idx="minor">
+              <a:schemeClr val="tx1"/>
+            </a:fontRef>
+          </p:style>
+        </p:cxnSp>
+        <p:cxnSp>
+          <p:nvCxnSpPr>
+            <p:cNvPr id="102" name="Straight Connector 101">
+              <a:extLst>
+                <a:ext uri="{FF2B5EF4-FFF2-40B4-BE49-F238E27FC236}">
+                  <a16:creationId xmlns:a16="http://schemas.microsoft.com/office/drawing/2014/main" id="{FD01D367-966D-6E8F-104E-434954B0C259}"/>
+                </a:ext>
+              </a:extLst>
+            </p:cNvPr>
+            <p:cNvCxnSpPr>
+              <a:cxnSpLocks/>
+            </p:cNvCxnSpPr>
+            <p:nvPr/>
+          </p:nvCxnSpPr>
+          <p:spPr>
+            <a:xfrm rot="16200000">
+              <a:off x="479204" y="1663990"/>
+              <a:ext cx="1521769" cy="0"/>
+            </a:xfrm>
+            <a:prstGeom prst="line">
+              <a:avLst/>
+            </a:prstGeom>
+            <a:ln w="3175">
+              <a:gradFill flip="none" rotWithShape="1">
+                <a:gsLst>
+                  <a:gs pos="0">
+                    <a:srgbClr val="0A8276">
+                      <a:alpha val="0"/>
+                    </a:srgbClr>
+                  </a:gs>
+                  <a:gs pos="20000">
+                    <a:schemeClr val="bg1">
+                      <a:alpha val="50000"/>
+                    </a:schemeClr>
+                  </a:gs>
+                  <a:gs pos="80000">
+                    <a:schemeClr val="bg1">
+                      <a:alpha val="50000"/>
+                    </a:schemeClr>
+                  </a:gs>
+                  <a:gs pos="100000">
+                    <a:srgbClr val="0A8276">
+                      <a:alpha val="0"/>
+                    </a:srgbClr>
+                  </a:gs>
+                </a:gsLst>
+                <a:path path="circle">
+                  <a:fillToRect l="100000" t="100000"/>
+                </a:path>
+                <a:tileRect r="-100000" b="-100000"/>
+              </a:gradFill>
+              <a:tailEnd type="none"/>
+            </a:ln>
+            <a:effectLst>
+              <a:glow rad="25400">
+                <a:schemeClr val="accent1">
+                  <a:satMod val="175000"/>
+                  <a:alpha val="20000"/>
+                </a:schemeClr>
+              </a:glow>
+            </a:effectLst>
+          </p:spPr>
+          <p:style>
+            <a:lnRef idx="1">
+              <a:schemeClr val="accent1"/>
+            </a:lnRef>
+            <a:fillRef idx="0">
+              <a:schemeClr val="accent1"/>
+            </a:fillRef>
+            <a:effectRef idx="0">
+              <a:schemeClr val="accent1"/>
+            </a:effectRef>
+            <a:fontRef idx="minor">
+              <a:schemeClr val="tx1"/>
+            </a:fontRef>
+          </p:style>
+        </p:cxnSp>
+        <p:cxnSp>
+          <p:nvCxnSpPr>
+            <p:cNvPr id="103" name="Straight Connector 102">
+              <a:extLst>
+                <a:ext uri="{FF2B5EF4-FFF2-40B4-BE49-F238E27FC236}">
+                  <a16:creationId xmlns:a16="http://schemas.microsoft.com/office/drawing/2014/main" id="{60C146C7-4656-F450-2A22-3F8B0D2BDFC0}"/>
+                </a:ext>
+              </a:extLst>
+            </p:cNvPr>
+            <p:cNvCxnSpPr>
+              <a:cxnSpLocks/>
+            </p:cNvCxnSpPr>
+            <p:nvPr/>
+          </p:nvCxnSpPr>
+          <p:spPr>
+            <a:xfrm rot="16200000">
+              <a:off x="-93956" y="1663989"/>
+              <a:ext cx="1521769" cy="0"/>
+            </a:xfrm>
+            <a:prstGeom prst="line">
+              <a:avLst/>
+            </a:prstGeom>
+            <a:ln w="3175">
+              <a:gradFill flip="none" rotWithShape="1">
+                <a:gsLst>
+                  <a:gs pos="0">
+                    <a:srgbClr val="0A8276">
+                      <a:alpha val="0"/>
+                    </a:srgbClr>
+                  </a:gs>
+                  <a:gs pos="20000">
+                    <a:schemeClr val="bg1">
+                      <a:alpha val="50000"/>
+                    </a:schemeClr>
+                  </a:gs>
+                  <a:gs pos="80000">
+                    <a:schemeClr val="bg1">
+                      <a:alpha val="50000"/>
+                    </a:schemeClr>
+                  </a:gs>
+                  <a:gs pos="100000">
+                    <a:srgbClr val="0A8276">
+                      <a:alpha val="0"/>
+                    </a:srgbClr>
+                  </a:gs>
+                </a:gsLst>
+                <a:path path="circle">
+                  <a:fillToRect l="100000" t="100000"/>
+                </a:path>
+                <a:tileRect r="-100000" b="-100000"/>
+              </a:gradFill>
+              <a:tailEnd type="none"/>
+            </a:ln>
+            <a:effectLst>
+              <a:glow rad="25400">
+                <a:schemeClr val="accent1">
+                  <a:satMod val="175000"/>
+                  <a:alpha val="20000"/>
+                </a:schemeClr>
+              </a:glow>
+            </a:effectLst>
+          </p:spPr>
+          <p:style>
+            <a:lnRef idx="1">
+              <a:schemeClr val="accent1"/>
+            </a:lnRef>
+            <a:fillRef idx="0">
+              <a:schemeClr val="accent1"/>
+            </a:fillRef>
+            <a:effectRef idx="0">
+              <a:schemeClr val="accent1"/>
+            </a:effectRef>
+            <a:fontRef idx="minor">
+              <a:schemeClr val="tx1"/>
+            </a:fontRef>
+          </p:style>
+        </p:cxnSp>
+        <p:cxnSp>
+          <p:nvCxnSpPr>
+            <p:cNvPr id="104" name="Straight Connector 103">
+              <a:extLst>
+                <a:ext uri="{FF2B5EF4-FFF2-40B4-BE49-F238E27FC236}">
+                  <a16:creationId xmlns:a16="http://schemas.microsoft.com/office/drawing/2014/main" id="{2D87D79C-F264-FC8B-AAC7-16247B79E790}"/>
+                </a:ext>
+              </a:extLst>
+            </p:cNvPr>
+            <p:cNvCxnSpPr>
+              <a:cxnSpLocks/>
+            </p:cNvCxnSpPr>
+            <p:nvPr/>
+          </p:nvCxnSpPr>
+          <p:spPr>
+            <a:xfrm rot="16200000">
+              <a:off x="20676" y="1663989"/>
+              <a:ext cx="1521769" cy="0"/>
+            </a:xfrm>
+            <a:prstGeom prst="line">
+              <a:avLst/>
+            </a:prstGeom>
+            <a:ln w="3175">
+              <a:gradFill flip="none" rotWithShape="1">
+                <a:gsLst>
+                  <a:gs pos="0">
+                    <a:srgbClr val="0A8276">
+                      <a:alpha val="0"/>
+                    </a:srgbClr>
+                  </a:gs>
+                  <a:gs pos="20000">
+                    <a:schemeClr val="bg1">
+                      <a:alpha val="50000"/>
+                    </a:schemeClr>
+                  </a:gs>
+                  <a:gs pos="80000">
+                    <a:schemeClr val="bg1">
+                      <a:alpha val="50000"/>
+                    </a:schemeClr>
+                  </a:gs>
+                  <a:gs pos="100000">
+                    <a:srgbClr val="0A8276">
+                      <a:alpha val="0"/>
+                    </a:srgbClr>
+                  </a:gs>
+                </a:gsLst>
+                <a:path path="circle">
+                  <a:fillToRect l="100000" t="100000"/>
+                </a:path>
+                <a:tileRect r="-100000" b="-100000"/>
+              </a:gradFill>
+              <a:tailEnd type="none"/>
+            </a:ln>
+            <a:effectLst>
+              <a:glow rad="25400">
+                <a:schemeClr val="accent1">
+                  <a:satMod val="175000"/>
+                  <a:alpha val="20000"/>
+                </a:schemeClr>
+              </a:glow>
+            </a:effectLst>
+          </p:spPr>
+          <p:style>
+            <a:lnRef idx="1">
+              <a:schemeClr val="accent1"/>
+            </a:lnRef>
+            <a:fillRef idx="0">
+              <a:schemeClr val="accent1"/>
+            </a:fillRef>
+            <a:effectRef idx="0">
+              <a:schemeClr val="accent1"/>
+            </a:effectRef>
+            <a:fontRef idx="minor">
+              <a:schemeClr val="tx1"/>
+            </a:fontRef>
+          </p:style>
+        </p:cxnSp>
+        <p:cxnSp>
+          <p:nvCxnSpPr>
+            <p:cNvPr id="105" name="Straight Connector 104">
+              <a:extLst>
+                <a:ext uri="{FF2B5EF4-FFF2-40B4-BE49-F238E27FC236}">
+                  <a16:creationId xmlns:a16="http://schemas.microsoft.com/office/drawing/2014/main" id="{C56740B9-2F4E-F53D-B1B8-61BF13D24959}"/>
+                </a:ext>
+              </a:extLst>
+            </p:cNvPr>
+            <p:cNvCxnSpPr>
+              <a:cxnSpLocks/>
+            </p:cNvCxnSpPr>
+            <p:nvPr/>
+          </p:nvCxnSpPr>
+          <p:spPr>
+            <a:xfrm rot="16200000">
+              <a:off x="249940" y="1663989"/>
+              <a:ext cx="1521769" cy="0"/>
+            </a:xfrm>
+            <a:prstGeom prst="line">
+              <a:avLst/>
+            </a:prstGeom>
+            <a:ln w="3175">
+              <a:gradFill flip="none" rotWithShape="1">
+                <a:gsLst>
+                  <a:gs pos="0">
+                    <a:srgbClr val="0A8276">
+                      <a:alpha val="0"/>
+                    </a:srgbClr>
+                  </a:gs>
+                  <a:gs pos="20000">
+                    <a:schemeClr val="bg1">
+                      <a:alpha val="50000"/>
+                    </a:schemeClr>
+                  </a:gs>
+                  <a:gs pos="80000">
+                    <a:schemeClr val="bg1">
+                      <a:alpha val="50000"/>
+                    </a:schemeClr>
+                  </a:gs>
+                  <a:gs pos="100000">
+                    <a:srgbClr val="0A8276">
+                      <a:alpha val="0"/>
+                    </a:srgbClr>
+                  </a:gs>
+                </a:gsLst>
+                <a:path path="circle">
+                  <a:fillToRect l="100000" t="100000"/>
+                </a:path>
+                <a:tileRect r="-100000" b="-100000"/>
+              </a:gradFill>
+              <a:tailEnd type="none"/>
+            </a:ln>
+            <a:effectLst>
+              <a:glow rad="25400">
+                <a:schemeClr val="accent1">
+                  <a:satMod val="175000"/>
+                  <a:alpha val="20000"/>
+                </a:schemeClr>
+              </a:glow>
+            </a:effectLst>
+          </p:spPr>
+          <p:style>
+            <a:lnRef idx="1">
+              <a:schemeClr val="accent1"/>
+            </a:lnRef>
+            <a:fillRef idx="0">
+              <a:schemeClr val="accent1"/>
+            </a:fillRef>
+            <a:effectRef idx="0">
+              <a:schemeClr val="accent1"/>
+            </a:effectRef>
+            <a:fontRef idx="minor">
+              <a:schemeClr val="tx1"/>
+            </a:fontRef>
+          </p:style>
+        </p:cxnSp>
+      </p:grpSp>
+    </p:spTree>
+    <p:extLst>
+      <p:ext uri="{BB962C8B-B14F-4D97-AF65-F5344CB8AC3E}">
+        <p14:creationId xmlns:p14="http://schemas.microsoft.com/office/powerpoint/2010/main" val="2981488331"/>
+      </p:ext>
+    </p:extLst>
+  </p:cSld>
+  <p:clrMapOvr>
+    <a:masterClrMapping/>
+  </p:clrMapOvr>
+</p:sld>
+</file>
+
+<file path=ppt/slides/slide4.xml><?xml version="1.0" encoding="utf-8"?>
+<p:sld xmlns:a="http://schemas.openxmlformats.org/drawingml/2006/main" xmlns:r="http://schemas.openxmlformats.org/officeDocument/2006/relationships" xmlns:p="http://schemas.openxmlformats.org/presentationml/2006/main">
+  <p:cSld>
+    <p:spTree>
+      <p:nvGrpSpPr>
         <p:cNvPr id="1" name=""/>
         <p:cNvGrpSpPr/>
         <p:nvPr/>
@@ -32487,7 +36875,7 @@
 </p:sld>
 </file>
 
-<file path=ppt/slides/slide4.xml><?xml version="1.0" encoding="utf-8"?>
+<file path=ppt/slides/slide5.xml><?xml version="1.0" encoding="utf-8"?>
 <p:sld xmlns:a="http://schemas.openxmlformats.org/drawingml/2006/main" xmlns:r="http://schemas.openxmlformats.org/officeDocument/2006/relationships" xmlns:p="http://schemas.openxmlformats.org/presentationml/2006/main">
   <p:cSld>
     <p:spTree>
@@ -32818,7 +37206,7 @@
 </p:sld>
 </file>
 
-<file path=ppt/slides/slide5.xml><?xml version="1.0" encoding="utf-8"?>
+<file path=ppt/slides/slide6.xml><?xml version="1.0" encoding="utf-8"?>
 <p:sld xmlns:a="http://schemas.openxmlformats.org/drawingml/2006/main" xmlns:r="http://schemas.openxmlformats.org/officeDocument/2006/relationships" xmlns:p="http://schemas.openxmlformats.org/presentationml/2006/main">
   <p:cSld>
     <p:spTree>
@@ -38354,6 +42742,34 @@
 </file>
 
 <file path=customXml/item1.xml><?xml version="1.0" encoding="utf-8"?>
+<p:properties xmlns:p="http://schemas.microsoft.com/office/2006/metadata/properties" xmlns:xsi="http://www.w3.org/2001/XMLSchema-instance" xmlns:pc="http://schemas.microsoft.com/office/infopath/2007/PartnerControls">
+  <documentManagement>
+    <SharedWithUsers xmlns="2935da7b-2887-4309-9f87-e2d2f1face2d">
+      <UserInfo>
+        <DisplayName>Gary.Sugita@infineon.com</DisplayName>
+        <AccountId>28</AccountId>
+        <AccountType/>
+      </UserInfo>
+      <UserInfo>
+        <DisplayName>sathishkumar.mani@infineon.com</DisplayName>
+        <AccountId>22</AccountId>
+        <AccountType/>
+      </UserInfo>
+    </SharedWithUsers>
+  </documentManagement>
+</p:properties>
+</file>
+
+<file path=customXml/item2.xml><?xml version="1.0" encoding="utf-8"?>
+<?mso-contentType ?>
+<FormTemplates xmlns="http://schemas.microsoft.com/sharepoint/v3/contenttype/forms">
+  <Display>DocumentLibraryForm</Display>
+  <Edit>DocumentLibraryForm</Edit>
+  <New>DocumentLibraryForm</New>
+</FormTemplates>
+</file>
+
+<file path=customXml/item3.xml><?xml version="1.0" encoding="utf-8"?>
 <ct:contentTypeSchema xmlns:ct="http://schemas.microsoft.com/office/2006/metadata/contentType" xmlns:ma="http://schemas.microsoft.com/office/2006/metadata/properties/metaAttributes" ct:_="" ma:_="" ma:contentTypeName="Document" ma:contentTypeID="0x010100D8AB49A64C458341A5ACE9D999E122D0" ma:contentTypeVersion="1" ma:contentTypeDescription="Create a new document." ma:contentTypeScope="" ma:versionID="603576765f6d0d553e9fe09050ab0684">
   <xsd:schema xmlns:xsd="http://www.w3.org/2001/XMLSchema" xmlns:xs="http://www.w3.org/2001/XMLSchema" xmlns:p="http://schemas.microsoft.com/office/2006/metadata/properties" xmlns:ns2="2935da7b-2887-4309-9f87-e2d2f1face2d" targetNamespace="http://schemas.microsoft.com/office/2006/metadata/properties" ma:root="true" ma:fieldsID="2e50b3088f5d49ffc31ff11709bb7e41" ns2:_="">
     <xsd:import namespace="2935da7b-2887-4309-9f87-e2d2f1face2d"/>
@@ -38493,35 +42909,31 @@
 </ct:contentTypeSchema>
 </file>
 
-<file path=customXml/item2.xml><?xml version="1.0" encoding="utf-8"?>
-<?mso-contentType ?>
-<FormTemplates xmlns="http://schemas.microsoft.com/sharepoint/v3/contenttype/forms">
-  <Display>DocumentLibraryForm</Display>
-  <Edit>DocumentLibraryForm</Edit>
-  <New>DocumentLibraryForm</New>
-</FormTemplates>
+<file path=customXml/itemProps1.xml><?xml version="1.0" encoding="utf-8"?>
+<ds:datastoreItem xmlns:ds="http://schemas.openxmlformats.org/officeDocument/2006/customXml" ds:itemID="{4B5F756E-BA2D-4907-BCB4-FE53490BAE44}">
+  <ds:schemaRefs>
+    <ds:schemaRef ds:uri="http://schemas.microsoft.com/office/2006/documentManagement/types"/>
+    <ds:schemaRef ds:uri="http://schemas.microsoft.com/office/2006/metadata/properties"/>
+    <ds:schemaRef ds:uri="http://schemas.openxmlformats.org/package/2006/metadata/core-properties"/>
+    <ds:schemaRef ds:uri="2935da7b-2887-4309-9f87-e2d2f1face2d"/>
+    <ds:schemaRef ds:uri="http://purl.org/dc/dcmitype/"/>
+    <ds:schemaRef ds:uri="http://purl.org/dc/elements/1.1/"/>
+    <ds:schemaRef ds:uri="http://purl.org/dc/terms/"/>
+    <ds:schemaRef ds:uri="http://schemas.microsoft.com/office/infopath/2007/PartnerControls"/>
+    <ds:schemaRef ds:uri="http://www.w3.org/XML/1998/namespace"/>
+  </ds:schemaRefs>
+</ds:datastoreItem>
 </file>
 
-<file path=customXml/item3.xml><?xml version="1.0" encoding="utf-8"?>
-<p:properties xmlns:p="http://schemas.microsoft.com/office/2006/metadata/properties" xmlns:xsi="http://www.w3.org/2001/XMLSchema-instance" xmlns:pc="http://schemas.microsoft.com/office/infopath/2007/PartnerControls">
-  <documentManagement>
-    <SharedWithUsers xmlns="2935da7b-2887-4309-9f87-e2d2f1face2d">
-      <UserInfo>
-        <DisplayName>Gary.Sugita@infineon.com</DisplayName>
-        <AccountId>28</AccountId>
-        <AccountType/>
-      </UserInfo>
-      <UserInfo>
-        <DisplayName>sathishkumar.mani@infineon.com</DisplayName>
-        <AccountId>22</AccountId>
-        <AccountType/>
-      </UserInfo>
-    </SharedWithUsers>
-  </documentManagement>
-</p:properties>
+<file path=customXml/itemProps2.xml><?xml version="1.0" encoding="utf-8"?>
+<ds:datastoreItem xmlns:ds="http://schemas.openxmlformats.org/officeDocument/2006/customXml" ds:itemID="{63735CEE-0640-4107-B0A2-D7FEDABFFAB6}">
+  <ds:schemaRefs>
+    <ds:schemaRef ds:uri="http://schemas.microsoft.com/sharepoint/v3/contenttype/forms"/>
+  </ds:schemaRefs>
+</ds:datastoreItem>
 </file>
 
-<file path=customXml/itemProps1.xml><?xml version="1.0" encoding="utf-8"?>
+<file path=customXml/itemProps3.xml><?xml version="1.0" encoding="utf-8"?>
 <ds:datastoreItem xmlns:ds="http://schemas.openxmlformats.org/officeDocument/2006/customXml" ds:itemID="{CBDA950C-28EF-4C16-B45F-9BFF23C6AE4B}">
   <ds:schemaRefs>
     <ds:schemaRef ds:uri="http://schemas.microsoft.com/office/2006/metadata/contentType"/>
@@ -38537,28 +42949,4 @@
     <ds:schemaRef ds:uri="http://schemas.microsoft.com/internal/obd"/>
   </ds:schemaRefs>
 </ds:datastoreItem>
-</file>
-
-<file path=customXml/itemProps2.xml><?xml version="1.0" encoding="utf-8"?>
-<ds:datastoreItem xmlns:ds="http://schemas.openxmlformats.org/officeDocument/2006/customXml" ds:itemID="{63735CEE-0640-4107-B0A2-D7FEDABFFAB6}">
-  <ds:schemaRefs>
-    <ds:schemaRef ds:uri="http://schemas.microsoft.com/sharepoint/v3/contenttype/forms"/>
-  </ds:schemaRefs>
-</ds:datastoreItem>
-</file>
-
-<file path=customXml/itemProps3.xml><?xml version="1.0" encoding="utf-8"?>
-<ds:datastoreItem xmlns:ds="http://schemas.openxmlformats.org/officeDocument/2006/customXml" ds:itemID="{4B5F756E-BA2D-4907-BCB4-FE53490BAE44}">
-  <ds:schemaRefs>
-    <ds:schemaRef ds:uri="http://schemas.microsoft.com/office/2006/documentManagement/types"/>
-    <ds:schemaRef ds:uri="http://schemas.microsoft.com/office/2006/metadata/properties"/>
-    <ds:schemaRef ds:uri="http://schemas.openxmlformats.org/package/2006/metadata/core-properties"/>
-    <ds:schemaRef ds:uri="2935da7b-2887-4309-9f87-e2d2f1face2d"/>
-    <ds:schemaRef ds:uri="http://purl.org/dc/dcmitype/"/>
-    <ds:schemaRef ds:uri="http://purl.org/dc/elements/1.1/"/>
-    <ds:schemaRef ds:uri="http://purl.org/dc/terms/"/>
-    <ds:schemaRef ds:uri="http://schemas.microsoft.com/office/infopath/2007/PartnerControls"/>
-    <ds:schemaRef ds:uri="http://www.w3.org/XML/1998/namespace"/>
-  </ds:schemaRefs>
-</ds:datastoreItem>
 </file>
--- a/proj_cm55/ui/design/ui_design_helper.pptx
+++ b/proj_cm55/ui/design/ui_design_helper.pptx
@@ -6,15 +6,17 @@
     <p:sldMasterId id="2147483661" r:id="rId5"/>
   </p:sldMasterIdLst>
   <p:notesMasterIdLst>
-    <p:notesMasterId r:id="rId12"/>
+    <p:notesMasterId r:id="rId14"/>
   </p:notesMasterIdLst>
   <p:sldIdLst>
     <p:sldId id="325" r:id="rId6"/>
-    <p:sldId id="392" r:id="rId7"/>
+    <p:sldId id="395" r:id="rId7"/>
     <p:sldId id="393" r:id="rId8"/>
-    <p:sldId id="389" r:id="rId9"/>
-    <p:sldId id="391" r:id="rId10"/>
-    <p:sldId id="350" r:id="rId11"/>
+    <p:sldId id="392" r:id="rId9"/>
+    <p:sldId id="394" r:id="rId10"/>
+    <p:sldId id="389" r:id="rId11"/>
+    <p:sldId id="391" r:id="rId12"/>
+    <p:sldId id="350" r:id="rId13"/>
   </p:sldIdLst>
   <p:sldSz cx="9144000" cy="5143500" type="screen16x9"/>
   <p:notesSz cx="6858000" cy="9144000"/>
@@ -257,8 +259,10 @@
         </p14:section>
         <p14:section name="Thermostat mockups" id="{EDED3ED7-758D-4023-9EF3-1F9BEEFCB6FE}">
           <p14:sldIdLst>
+            <p14:sldId id="395"/>
+            <p14:sldId id="393"/>
             <p14:sldId id="392"/>
-            <p14:sldId id="393"/>
+            <p14:sldId id="394"/>
             <p14:sldId id="389"/>
             <p14:sldId id="391"/>
             <p14:sldId id="350"/>
@@ -1178,7 +1182,7 @@
                 <a:tabLst/>
                 <a:defRPr/>
               </a:pPr>
-              <a:t>4</a:t>
+              <a:t>6</a:t>
             </a:fld>
             <a:endParaRPr kumimoji="0" lang="en-US" sz="800" b="0" i="0" u="none" strike="noStrike" kern="1200" cap="none" spc="0" normalizeH="0" baseline="0" noProof="0" dirty="0">
               <a:ln>
@@ -1595,7 +1599,7 @@
                 <a:tabLst/>
                 <a:defRPr/>
               </a:pPr>
-              <a:t>6</a:t>
+              <a:t>8</a:t>
             </a:fld>
             <a:endParaRPr kumimoji="0" lang="en-US" sz="800" b="0" i="0" u="none" strike="noStrike" kern="1200" cap="none" spc="0" normalizeH="0" baseline="0" noProof="0" dirty="0">
               <a:ln>
@@ -27431,6 +27435,3815 @@
 </file>
 
 <file path=ppt/slides/slide2.xml><?xml version="1.0" encoding="utf-8"?>
+<p:sld xmlns:a="http://schemas.openxmlformats.org/drawingml/2006/main" xmlns:r="http://schemas.openxmlformats.org/officeDocument/2006/relationships" xmlns:p="http://schemas.openxmlformats.org/presentationml/2006/main">
+  <p:cSld>
+    <p:spTree>
+      <p:nvGrpSpPr>
+        <p:cNvPr id="1" name=""/>
+        <p:cNvGrpSpPr/>
+        <p:nvPr/>
+      </p:nvGrpSpPr>
+      <p:grpSpPr>
+        <a:xfrm>
+          <a:off x="0" y="0"/>
+          <a:ext cx="0" cy="0"/>
+          <a:chOff x="0" y="0"/>
+          <a:chExt cx="0" cy="0"/>
+        </a:xfrm>
+      </p:grpSpPr>
+      <p:pic>
+        <p:nvPicPr>
+          <p:cNvPr id="15" name="Picture 14">
+            <a:extLst>
+              <a:ext uri="{FF2B5EF4-FFF2-40B4-BE49-F238E27FC236}">
+                <a16:creationId xmlns:a16="http://schemas.microsoft.com/office/drawing/2014/main" id="{FF5485EF-7D0D-499E-8FC9-67B810D8EEAC}"/>
+              </a:ext>
+            </a:extLst>
+          </p:cNvPr>
+          <p:cNvPicPr>
+            <a:picLocks noChangeAspect="1"/>
+          </p:cNvPicPr>
+          <p:nvPr/>
+        </p:nvPicPr>
+        <p:blipFill>
+          <a:blip r:embed="rId2"/>
+          <a:stretch>
+            <a:fillRect/>
+          </a:stretch>
+        </p:blipFill>
+        <p:spPr>
+          <a:xfrm>
+            <a:off x="421772" y="902754"/>
+            <a:ext cx="2929469" cy="2929469"/>
+          </a:xfrm>
+          <a:prstGeom prst="rect">
+            <a:avLst/>
+          </a:prstGeom>
+          <a:ln>
+            <a:noFill/>
+          </a:ln>
+        </p:spPr>
+      </p:pic>
+      <p:pic>
+        <p:nvPicPr>
+          <p:cNvPr id="24" name="Picture 23">
+            <a:extLst>
+              <a:ext uri="{FF2B5EF4-FFF2-40B4-BE49-F238E27FC236}">
+                <a16:creationId xmlns:a16="http://schemas.microsoft.com/office/drawing/2014/main" id="{3638CCAF-1505-4970-8060-EA83C0549FDE}"/>
+              </a:ext>
+            </a:extLst>
+          </p:cNvPr>
+          <p:cNvPicPr>
+            <a:picLocks noChangeAspect="1"/>
+          </p:cNvPicPr>
+          <p:nvPr/>
+        </p:nvPicPr>
+        <p:blipFill>
+          <a:blip r:embed="rId3">
+            <a:extLst>
+              <a:ext uri="{BEBA8EAE-BF5A-486C-A8C5-ECC9F3942E4B}">
+                <a14:imgProps xmlns:a14="http://schemas.microsoft.com/office/drawing/2010/main">
+                  <a14:imgLayer r:embed="rId4">
+                    <a14:imgEffect>
+                      <a14:brightnessContrast bright="-20000" contrast="-20000"/>
+                    </a14:imgEffect>
+                  </a14:imgLayer>
+                </a14:imgProps>
+              </a:ext>
+            </a:extLst>
+          </a:blip>
+          <a:stretch>
+            <a:fillRect/>
+          </a:stretch>
+        </p:blipFill>
+        <p:spPr>
+          <a:xfrm>
+            <a:off x="421772" y="899015"/>
+            <a:ext cx="2929469" cy="2929469"/>
+          </a:xfrm>
+          <a:prstGeom prst="rect">
+            <a:avLst/>
+          </a:prstGeom>
+          <a:ln>
+            <a:noFill/>
+          </a:ln>
+        </p:spPr>
+      </p:pic>
+      <p:sp>
+        <p:nvSpPr>
+          <p:cNvPr id="3" name="Title 2">
+            <a:extLst>
+              <a:ext uri="{FF2B5EF4-FFF2-40B4-BE49-F238E27FC236}">
+                <a16:creationId xmlns:a16="http://schemas.microsoft.com/office/drawing/2014/main" id="{F0A84F84-A86F-4A5D-9089-454D1EF6808A}"/>
+              </a:ext>
+            </a:extLst>
+          </p:cNvPr>
+          <p:cNvSpPr>
+            <a:spLocks noGrp="1"/>
+          </p:cNvSpPr>
+          <p:nvPr>
+            <p:ph type="title"/>
+          </p:nvPr>
+        </p:nvSpPr>
+        <p:spPr/>
+        <p:txBody>
+          <a:bodyPr/>
+          <a:lstStyle/>
+          <a:p>
+            <a:r>
+              <a:rPr lang="en-US" dirty="0"/>
+              <a:t>Better radar presence indication</a:t>
+            </a:r>
+          </a:p>
+        </p:txBody>
+      </p:sp>
+      <p:sp>
+        <p:nvSpPr>
+          <p:cNvPr id="4" name="Date Placeholder 3">
+            <a:extLst>
+              <a:ext uri="{FF2B5EF4-FFF2-40B4-BE49-F238E27FC236}">
+                <a16:creationId xmlns:a16="http://schemas.microsoft.com/office/drawing/2014/main" id="{78315EC6-B4F2-43EB-A549-C445226BC6F4}"/>
+              </a:ext>
+            </a:extLst>
+          </p:cNvPr>
+          <p:cNvSpPr>
+            <a:spLocks noGrp="1"/>
+          </p:cNvSpPr>
+          <p:nvPr>
+            <p:ph type="dt" sz="half" idx="14"/>
+          </p:nvPr>
+        </p:nvSpPr>
+        <p:spPr/>
+        <p:txBody>
+          <a:bodyPr/>
+          <a:lstStyle/>
+          <a:p>
+            <a:r>
+              <a:rPr lang="en-US" b="1"/>
+              <a:t> </a:t>
+            </a:r>
+            <a:endParaRPr lang="en-US" b="1" dirty="0"/>
+          </a:p>
+        </p:txBody>
+      </p:sp>
+      <p:sp>
+        <p:nvSpPr>
+          <p:cNvPr id="5" name="Footer Placeholder 4">
+            <a:extLst>
+              <a:ext uri="{FF2B5EF4-FFF2-40B4-BE49-F238E27FC236}">
+                <a16:creationId xmlns:a16="http://schemas.microsoft.com/office/drawing/2014/main" id="{55414843-5D75-4F78-9E9D-92D9A76FAA30}"/>
+              </a:ext>
+            </a:extLst>
+          </p:cNvPr>
+          <p:cNvSpPr>
+            <a:spLocks noGrp="1"/>
+          </p:cNvSpPr>
+          <p:nvPr>
+            <p:ph type="ftr" sz="quarter" idx="15"/>
+          </p:nvPr>
+        </p:nvSpPr>
+        <p:spPr/>
+        <p:txBody>
+          <a:bodyPr/>
+          <a:lstStyle/>
+          <a:p>
+            <a:endParaRPr lang="en-US" dirty="0"/>
+          </a:p>
+        </p:txBody>
+      </p:sp>
+      <p:sp>
+        <p:nvSpPr>
+          <p:cNvPr id="13" name="Rectangle 12">
+            <a:extLst>
+              <a:ext uri="{FF2B5EF4-FFF2-40B4-BE49-F238E27FC236}">
+                <a16:creationId xmlns:a16="http://schemas.microsoft.com/office/drawing/2014/main" id="{3EC43C52-326B-48AF-AB09-936079413910}"/>
+              </a:ext>
+            </a:extLst>
+          </p:cNvPr>
+          <p:cNvSpPr/>
+          <p:nvPr/>
+        </p:nvSpPr>
+        <p:spPr bwMode="auto">
+          <a:xfrm>
+            <a:off x="4751254" y="1313917"/>
+            <a:ext cx="317971" cy="3213634"/>
+          </a:xfrm>
+          <a:prstGeom prst="rect">
+            <a:avLst/>
+          </a:prstGeom>
+          <a:solidFill>
+            <a:srgbClr val="BFBFBF"/>
+          </a:solidFill>
+          <a:ln w="9525">
+            <a:noFill/>
+            <a:miter lim="800000"/>
+            <a:headEnd/>
+            <a:tailEnd/>
+          </a:ln>
+        </p:spPr>
+        <p:txBody>
+          <a:bodyPr wrap="square" lIns="72000" tIns="72000" rIns="72000" bIns="72000" rtlCol="0" anchor="ctr"/>
+          <a:lstStyle/>
+          <a:p>
+            <a:pPr algn="ctr" defTabSz="576000" eaLnBrk="0" hangingPunct="0">
+              <a:lnSpc>
+                <a:spcPct val="120000"/>
+              </a:lnSpc>
+            </a:pPr>
+            <a:endParaRPr lang="en-US" sz="1600" baseline="0" dirty="0">
+              <a:solidFill>
+                <a:schemeClr val="bg1"/>
+              </a:solidFill>
+              <a:latin typeface="+mn-lt"/>
+              <a:ea typeface="+mn-ea"/>
+              <a:cs typeface="+mn-cs"/>
+            </a:endParaRPr>
+          </a:p>
+        </p:txBody>
+      </p:sp>
+      <p:sp>
+        <p:nvSpPr>
+          <p:cNvPr id="7" name="Rectangle: Top Corners Rounded 6">
+            <a:extLst>
+              <a:ext uri="{FF2B5EF4-FFF2-40B4-BE49-F238E27FC236}">
+                <a16:creationId xmlns:a16="http://schemas.microsoft.com/office/drawing/2014/main" id="{0B02BF64-28D0-4A15-97A1-DFB49925E9C3}"/>
+              </a:ext>
+            </a:extLst>
+          </p:cNvPr>
+          <p:cNvSpPr/>
+          <p:nvPr/>
+        </p:nvSpPr>
+        <p:spPr bwMode="auto">
+          <a:xfrm rot="5400000">
+            <a:off x="66831" y="2041059"/>
+            <a:ext cx="1375200" cy="658425"/>
+          </a:xfrm>
+          <a:prstGeom prst="round2SameRect">
+            <a:avLst>
+              <a:gd name="adj1" fmla="val 44038"/>
+              <a:gd name="adj2" fmla="val 0"/>
+            </a:avLst>
+          </a:prstGeom>
+          <a:solidFill>
+            <a:srgbClr val="086259">
+              <a:alpha val="34902"/>
+            </a:srgbClr>
+          </a:solidFill>
+          <a:ln w="12700">
+            <a:solidFill>
+              <a:srgbClr val="9BBA43"/>
+            </a:solidFill>
+            <a:miter lim="800000"/>
+            <a:headEnd/>
+            <a:tailEnd/>
+          </a:ln>
+          <a:effectLst>
+            <a:outerShdw blurRad="50800" dist="38100" algn="l" rotWithShape="0">
+              <a:prstClr val="black">
+                <a:alpha val="40000"/>
+              </a:prstClr>
+            </a:outerShdw>
+          </a:effectLst>
+        </p:spPr>
+        <p:txBody>
+          <a:bodyPr wrap="square" lIns="72000" tIns="72000" rIns="72000" bIns="72000" rtlCol="0" anchor="ctr"/>
+          <a:lstStyle/>
+          <a:p>
+            <a:pPr algn="ctr" defTabSz="576000" eaLnBrk="0" hangingPunct="0">
+              <a:lnSpc>
+                <a:spcPct val="120000"/>
+              </a:lnSpc>
+            </a:pPr>
+            <a:endParaRPr lang="en-US" sz="1600" baseline="0" dirty="0">
+              <a:solidFill>
+                <a:schemeClr val="bg1"/>
+              </a:solidFill>
+              <a:latin typeface="+mn-lt"/>
+              <a:ea typeface="+mn-ea"/>
+              <a:cs typeface="+mn-cs"/>
+            </a:endParaRPr>
+          </a:p>
+        </p:txBody>
+      </p:sp>
+      <p:sp>
+        <p:nvSpPr>
+          <p:cNvPr id="16" name="Rectangle: Top Corners Rounded 15">
+            <a:extLst>
+              <a:ext uri="{FF2B5EF4-FFF2-40B4-BE49-F238E27FC236}">
+                <a16:creationId xmlns:a16="http://schemas.microsoft.com/office/drawing/2014/main" id="{943FD4F0-2A7A-469F-BDB6-4722D9314C10}"/>
+              </a:ext>
+            </a:extLst>
+          </p:cNvPr>
+          <p:cNvSpPr/>
+          <p:nvPr/>
+        </p:nvSpPr>
+        <p:spPr bwMode="auto">
+          <a:xfrm rot="16200000" flipH="1">
+            <a:off x="2326863" y="2041850"/>
+            <a:ext cx="1375200" cy="658425"/>
+          </a:xfrm>
+          <a:prstGeom prst="round2SameRect">
+            <a:avLst>
+              <a:gd name="adj1" fmla="val 44038"/>
+              <a:gd name="adj2" fmla="val 0"/>
+            </a:avLst>
+          </a:prstGeom>
+          <a:solidFill>
+            <a:srgbClr val="086259">
+              <a:alpha val="34902"/>
+            </a:srgbClr>
+          </a:solidFill>
+          <a:ln w="12700">
+            <a:solidFill>
+              <a:srgbClr val="9BBA43"/>
+            </a:solidFill>
+            <a:miter lim="800000"/>
+            <a:headEnd/>
+            <a:tailEnd/>
+          </a:ln>
+          <a:effectLst>
+            <a:outerShdw blurRad="50800" dist="38100" dir="10800000" algn="r" rotWithShape="0">
+              <a:prstClr val="black">
+                <a:alpha val="40000"/>
+              </a:prstClr>
+            </a:outerShdw>
+          </a:effectLst>
+        </p:spPr>
+        <p:txBody>
+          <a:bodyPr wrap="square" lIns="72000" tIns="72000" rIns="72000" bIns="72000" rtlCol="0" anchor="ctr"/>
+          <a:lstStyle/>
+          <a:p>
+            <a:pPr algn="ctr" defTabSz="576000" eaLnBrk="0" hangingPunct="0">
+              <a:lnSpc>
+                <a:spcPct val="120000"/>
+              </a:lnSpc>
+            </a:pPr>
+            <a:endParaRPr lang="en-US" sz="1600" baseline="0" dirty="0">
+              <a:solidFill>
+                <a:schemeClr val="bg1"/>
+              </a:solidFill>
+              <a:latin typeface="+mn-lt"/>
+              <a:ea typeface="+mn-ea"/>
+              <a:cs typeface="+mn-cs"/>
+            </a:endParaRPr>
+          </a:p>
+        </p:txBody>
+      </p:sp>
+      <p:sp>
+        <p:nvSpPr>
+          <p:cNvPr id="20" name="Block Arc 19">
+            <a:extLst>
+              <a:ext uri="{FF2B5EF4-FFF2-40B4-BE49-F238E27FC236}">
+                <a16:creationId xmlns:a16="http://schemas.microsoft.com/office/drawing/2014/main" id="{3BF68E85-16FA-4222-B39E-17B6D4CE36A6}"/>
+              </a:ext>
+            </a:extLst>
+          </p:cNvPr>
+          <p:cNvSpPr/>
+          <p:nvPr/>
+        </p:nvSpPr>
+        <p:spPr bwMode="auto">
+          <a:xfrm>
+            <a:off x="1222088" y="1700978"/>
+            <a:ext cx="1324717" cy="1324717"/>
+          </a:xfrm>
+          <a:prstGeom prst="blockArc">
+            <a:avLst>
+              <a:gd name="adj1" fmla="val 10800000"/>
+              <a:gd name="adj2" fmla="val 10799996"/>
+              <a:gd name="adj3" fmla="val 18018"/>
+            </a:avLst>
+          </a:prstGeom>
+          <a:gradFill>
+            <a:gsLst>
+              <a:gs pos="0">
+                <a:srgbClr val="656464"/>
+              </a:gs>
+              <a:gs pos="74000">
+                <a:srgbClr val="414852"/>
+              </a:gs>
+              <a:gs pos="100000">
+                <a:srgbClr val="39404A"/>
+              </a:gs>
+            </a:gsLst>
+            <a:lin ang="5400000" scaled="1"/>
+          </a:gradFill>
+          <a:ln w="9525">
+            <a:noFill/>
+            <a:miter lim="800000"/>
+            <a:headEnd/>
+            <a:tailEnd/>
+          </a:ln>
+          <a:effectLst>
+            <a:outerShdw blurRad="50800" dist="38100" dir="5400000" sx="101000" sy="101000" algn="t" rotWithShape="0">
+              <a:prstClr val="black">
+                <a:alpha val="40000"/>
+              </a:prstClr>
+            </a:outerShdw>
+          </a:effectLst>
+        </p:spPr>
+        <p:txBody>
+          <a:bodyPr wrap="square" lIns="72000" tIns="72000" rIns="72000" bIns="72000" rtlCol="0" anchor="ctr"/>
+          <a:lstStyle/>
+          <a:p>
+            <a:pPr algn="ctr" defTabSz="576000" eaLnBrk="0" hangingPunct="0">
+              <a:lnSpc>
+                <a:spcPct val="120000"/>
+              </a:lnSpc>
+            </a:pPr>
+            <a:endParaRPr lang="en-US" sz="1600" baseline="0" dirty="0">
+              <a:solidFill>
+                <a:schemeClr val="bg1"/>
+              </a:solidFill>
+              <a:latin typeface="+mn-lt"/>
+              <a:ea typeface="+mn-ea"/>
+              <a:cs typeface="+mn-cs"/>
+            </a:endParaRPr>
+          </a:p>
+        </p:txBody>
+      </p:sp>
+      <p:sp>
+        <p:nvSpPr>
+          <p:cNvPr id="2" name="Oval 1">
+            <a:extLst>
+              <a:ext uri="{FF2B5EF4-FFF2-40B4-BE49-F238E27FC236}">
+                <a16:creationId xmlns:a16="http://schemas.microsoft.com/office/drawing/2014/main" id="{65622311-4BC5-40AF-8223-CC2F9D32AAF9}"/>
+              </a:ext>
+            </a:extLst>
+          </p:cNvPr>
+          <p:cNvSpPr/>
+          <p:nvPr/>
+        </p:nvSpPr>
+        <p:spPr bwMode="auto">
+          <a:xfrm>
+            <a:off x="1460126" y="1940874"/>
+            <a:ext cx="844924" cy="844924"/>
+          </a:xfrm>
+          <a:prstGeom prst="ellipse">
+            <a:avLst/>
+          </a:prstGeom>
+          <a:gradFill>
+            <a:gsLst>
+              <a:gs pos="0">
+                <a:schemeClr val="tx1">
+                  <a:lumMod val="90000"/>
+                  <a:lumOff val="10000"/>
+                  <a:alpha val="80000"/>
+                </a:schemeClr>
+              </a:gs>
+              <a:gs pos="74000">
+                <a:srgbClr val="101820">
+                  <a:alpha val="80000"/>
+                </a:srgbClr>
+              </a:gs>
+              <a:gs pos="100000">
+                <a:srgbClr val="181820">
+                  <a:alpha val="80000"/>
+                </a:srgbClr>
+              </a:gs>
+            </a:gsLst>
+            <a:lin ang="5400000" scaled="1"/>
+          </a:gradFill>
+          <a:ln w="9525">
+            <a:solidFill>
+              <a:srgbClr val="5C676C"/>
+            </a:solidFill>
+            <a:miter lim="800000"/>
+            <a:headEnd/>
+            <a:tailEnd/>
+          </a:ln>
+        </p:spPr>
+        <p:txBody>
+          <a:bodyPr wrap="square" lIns="72000" tIns="72000" rIns="72000" bIns="72000" rtlCol="0" anchor="ctr"/>
+          <a:lstStyle/>
+          <a:p>
+            <a:pPr algn="ctr" defTabSz="576000" eaLnBrk="0" hangingPunct="0">
+              <a:lnSpc>
+                <a:spcPct val="120000"/>
+              </a:lnSpc>
+            </a:pPr>
+            <a:endParaRPr lang="en-US" sz="1600" baseline="0" dirty="0">
+              <a:solidFill>
+                <a:schemeClr val="bg1"/>
+              </a:solidFill>
+              <a:latin typeface="+mn-lt"/>
+              <a:ea typeface="+mn-ea"/>
+              <a:cs typeface="+mn-cs"/>
+            </a:endParaRPr>
+          </a:p>
+        </p:txBody>
+      </p:sp>
+      <p:grpSp>
+        <p:nvGrpSpPr>
+          <p:cNvPr id="28" name="Group 27">
+            <a:extLst>
+              <a:ext uri="{FF2B5EF4-FFF2-40B4-BE49-F238E27FC236}">
+                <a16:creationId xmlns:a16="http://schemas.microsoft.com/office/drawing/2014/main" id="{BFEE0C51-2C2C-4B1B-9B88-DFA9EB756982}"/>
+              </a:ext>
+            </a:extLst>
+          </p:cNvPr>
+          <p:cNvGrpSpPr/>
+          <p:nvPr/>
+        </p:nvGrpSpPr>
+        <p:grpSpPr>
+          <a:xfrm>
+            <a:off x="1506203" y="2055869"/>
+            <a:ext cx="833235" cy="648530"/>
+            <a:chOff x="1506203" y="2055869"/>
+            <a:chExt cx="833235" cy="648530"/>
+          </a:xfrm>
+        </p:grpSpPr>
+        <p:sp>
+          <p:nvSpPr>
+            <p:cNvPr id="9" name="Rectangle 8">
+              <a:extLst>
+                <a:ext uri="{FF2B5EF4-FFF2-40B4-BE49-F238E27FC236}">
+                  <a16:creationId xmlns:a16="http://schemas.microsoft.com/office/drawing/2014/main" id="{851FB621-9661-4603-AF66-8A3B2C696C18}"/>
+                </a:ext>
+              </a:extLst>
+            </p:cNvPr>
+            <p:cNvSpPr/>
+            <p:nvPr/>
+          </p:nvSpPr>
+          <p:spPr>
+            <a:xfrm>
+              <a:off x="1506203" y="2058068"/>
+              <a:ext cx="704039" cy="646331"/>
+            </a:xfrm>
+            <a:prstGeom prst="rect">
+              <a:avLst/>
+            </a:prstGeom>
+          </p:spPr>
+          <p:txBody>
+            <a:bodyPr wrap="none">
+              <a:spAutoFit/>
+            </a:bodyPr>
+            <a:lstStyle/>
+            <a:p>
+              <a:pPr algn="ctr"/>
+              <a:r>
+                <a:rPr lang="en-US" sz="3600" dirty="0">
+                  <a:solidFill>
+                    <a:schemeClr val="bg1">
+                      <a:lumMod val="95000"/>
+                    </a:schemeClr>
+                  </a:solidFill>
+                  <a:latin typeface="Roboto" panose="02000000000000000000" pitchFamily="2" charset="0"/>
+                  <a:ea typeface="Roboto" panose="02000000000000000000" pitchFamily="2" charset="0"/>
+                </a:rPr>
+                <a:t>27</a:t>
+              </a:r>
+            </a:p>
+          </p:txBody>
+        </p:sp>
+        <p:sp>
+          <p:nvSpPr>
+            <p:cNvPr id="26" name="Rectangle 25">
+              <a:extLst>
+                <a:ext uri="{FF2B5EF4-FFF2-40B4-BE49-F238E27FC236}">
+                  <a16:creationId xmlns:a16="http://schemas.microsoft.com/office/drawing/2014/main" id="{15845BD0-6237-44CA-A2E2-439DE06DB547}"/>
+                </a:ext>
+              </a:extLst>
+            </p:cNvPr>
+            <p:cNvSpPr/>
+            <p:nvPr/>
+          </p:nvSpPr>
+          <p:spPr>
+            <a:xfrm>
+              <a:off x="2010502" y="2055869"/>
+              <a:ext cx="328936" cy="523220"/>
+            </a:xfrm>
+            <a:prstGeom prst="rect">
+              <a:avLst/>
+            </a:prstGeom>
+          </p:spPr>
+          <p:txBody>
+            <a:bodyPr wrap="none">
+              <a:spAutoFit/>
+            </a:bodyPr>
+            <a:lstStyle/>
+            <a:p>
+              <a:pPr algn="ctr"/>
+              <a:r>
+                <a:rPr lang="en-US" altLang="en-US" sz="2800" dirty="0">
+                  <a:solidFill>
+                    <a:schemeClr val="bg1">
+                      <a:lumMod val="95000"/>
+                    </a:schemeClr>
+                  </a:solidFill>
+                  <a:latin typeface="Montserrat"/>
+                </a:rPr>
+                <a:t>°</a:t>
+              </a:r>
+              <a:endParaRPr lang="en-US" sz="2800" dirty="0">
+                <a:solidFill>
+                  <a:schemeClr val="bg1">
+                    <a:lumMod val="95000"/>
+                  </a:schemeClr>
+                </a:solidFill>
+                <a:latin typeface="Montserrat"/>
+                <a:ea typeface="Roboto" panose="02000000000000000000" pitchFamily="2" charset="0"/>
+              </a:endParaRPr>
+            </a:p>
+          </p:txBody>
+        </p:sp>
+      </p:grpSp>
+      <p:grpSp>
+        <p:nvGrpSpPr>
+          <p:cNvPr id="48" name="Group 47">
+            <a:extLst>
+              <a:ext uri="{FF2B5EF4-FFF2-40B4-BE49-F238E27FC236}">
+                <a16:creationId xmlns:a16="http://schemas.microsoft.com/office/drawing/2014/main" id="{712172F1-3646-431D-9CAB-04CBAB17926F}"/>
+              </a:ext>
+            </a:extLst>
+          </p:cNvPr>
+          <p:cNvGrpSpPr/>
+          <p:nvPr/>
+        </p:nvGrpSpPr>
+        <p:grpSpPr>
+          <a:xfrm>
+            <a:off x="323538" y="1825492"/>
+            <a:ext cx="2997336" cy="1918335"/>
+            <a:chOff x="4966189" y="2403842"/>
+            <a:chExt cx="2997336" cy="1918335"/>
+          </a:xfrm>
+        </p:grpSpPr>
+        <p:pic>
+          <p:nvPicPr>
+            <p:cNvPr id="49" name="Picture 48" descr="A black background with a circular design&#10;&#10;Description automatically generated">
+              <a:extLst>
+                <a:ext uri="{FF2B5EF4-FFF2-40B4-BE49-F238E27FC236}">
+                  <a16:creationId xmlns:a16="http://schemas.microsoft.com/office/drawing/2014/main" id="{579792C4-CE34-4DE8-8A61-4AC9EB4F2F92}"/>
+                </a:ext>
+              </a:extLst>
+            </p:cNvPr>
+            <p:cNvPicPr>
+              <a:picLocks noChangeAspect="1"/>
+            </p:cNvPicPr>
+            <p:nvPr/>
+          </p:nvPicPr>
+          <p:blipFill>
+            <a:blip r:embed="rId5">
+              <a:lum bright="70000" contrast="-70000"/>
+              <a:extLst>
+                <a:ext uri="{28A0092B-C50C-407E-A947-70E740481C1C}">
+                  <a14:useLocalDpi xmlns:a14="http://schemas.microsoft.com/office/drawing/2010/main" val="0"/>
+                </a:ext>
+              </a:extLst>
+            </a:blip>
+            <a:stretch>
+              <a:fillRect/>
+            </a:stretch>
+          </p:blipFill>
+          <p:spPr>
+            <a:xfrm>
+              <a:off x="7436566" y="2953793"/>
+              <a:ext cx="386261" cy="386261"/>
+            </a:xfrm>
+            <a:prstGeom prst="rect">
+              <a:avLst/>
+            </a:prstGeom>
+          </p:spPr>
+        </p:pic>
+        <p:pic>
+          <p:nvPicPr>
+            <p:cNvPr id="50" name="Picture 49" descr="A white line drawing of a leaf&#10;&#10;Description automatically generated">
+              <a:extLst>
+                <a:ext uri="{FF2B5EF4-FFF2-40B4-BE49-F238E27FC236}">
+                  <a16:creationId xmlns:a16="http://schemas.microsoft.com/office/drawing/2014/main" id="{49655F83-E267-46CC-828F-9898AC6E5D09}"/>
+                </a:ext>
+              </a:extLst>
+            </p:cNvPr>
+            <p:cNvPicPr>
+              <a:picLocks noChangeAspect="1"/>
+            </p:cNvPicPr>
+            <p:nvPr/>
+          </p:nvPicPr>
+          <p:blipFill>
+            <a:blip r:embed="rId6">
+              <a:extLst>
+                <a:ext uri="{28A0092B-C50C-407E-A947-70E740481C1C}">
+                  <a14:useLocalDpi xmlns:a14="http://schemas.microsoft.com/office/drawing/2010/main" val="0"/>
+                </a:ext>
+              </a:extLst>
+            </a:blip>
+            <a:stretch>
+              <a:fillRect/>
+            </a:stretch>
+          </p:blipFill>
+          <p:spPr>
+            <a:xfrm>
+              <a:off x="7472140" y="2421331"/>
+              <a:ext cx="310753" cy="310753"/>
+            </a:xfrm>
+            <a:prstGeom prst="rect">
+              <a:avLst/>
+            </a:prstGeom>
+          </p:spPr>
+        </p:pic>
+        <p:pic>
+          <p:nvPicPr>
+            <p:cNvPr id="51" name="Picture 50" descr="A wifi symbol on a black background&#10;&#10;Description automatically generated">
+              <a:extLst>
+                <a:ext uri="{FF2B5EF4-FFF2-40B4-BE49-F238E27FC236}">
+                  <a16:creationId xmlns:a16="http://schemas.microsoft.com/office/drawing/2014/main" id="{8284C9DA-5556-4C1E-8F56-0022285E0A14}"/>
+                </a:ext>
+              </a:extLst>
+            </p:cNvPr>
+            <p:cNvPicPr>
+              <a:picLocks noChangeAspect="1"/>
+            </p:cNvPicPr>
+            <p:nvPr/>
+          </p:nvPicPr>
+          <p:blipFill>
+            <a:blip r:embed="rId7">
+              <a:extLst>
+                <a:ext uri="{28A0092B-C50C-407E-A947-70E740481C1C}">
+                  <a14:useLocalDpi xmlns:a14="http://schemas.microsoft.com/office/drawing/2010/main" val="0"/>
+                </a:ext>
+              </a:extLst>
+            </a:blip>
+            <a:stretch>
+              <a:fillRect/>
+            </a:stretch>
+          </p:blipFill>
+          <p:spPr>
+            <a:xfrm>
+              <a:off x="5148779" y="2976250"/>
+              <a:ext cx="361847" cy="361847"/>
+            </a:xfrm>
+            <a:prstGeom prst="rect">
+              <a:avLst/>
+            </a:prstGeom>
+          </p:spPr>
+        </p:pic>
+        <p:pic>
+          <p:nvPicPr>
+            <p:cNvPr id="52" name="Picture 51" descr="A white line drawing of gears&#10;&#10;Description automatically generated">
+              <a:extLst>
+                <a:ext uri="{FF2B5EF4-FFF2-40B4-BE49-F238E27FC236}">
+                  <a16:creationId xmlns:a16="http://schemas.microsoft.com/office/drawing/2014/main" id="{2D9CB2B0-D297-4164-9F65-42A53798B833}"/>
+                </a:ext>
+              </a:extLst>
+            </p:cNvPr>
+            <p:cNvPicPr>
+              <a:picLocks noChangeAspect="1"/>
+            </p:cNvPicPr>
+            <p:nvPr/>
+          </p:nvPicPr>
+          <p:blipFill>
+            <a:blip r:embed="rId8">
+              <a:extLst>
+                <a:ext uri="{28A0092B-C50C-407E-A947-70E740481C1C}">
+                  <a14:useLocalDpi xmlns:a14="http://schemas.microsoft.com/office/drawing/2010/main" val="0"/>
+                </a:ext>
+              </a:extLst>
+            </a:blip>
+            <a:stretch>
+              <a:fillRect/>
+            </a:stretch>
+          </p:blipFill>
+          <p:spPr>
+            <a:xfrm>
+              <a:off x="5161806" y="2403842"/>
+              <a:ext cx="348820" cy="348820"/>
+            </a:xfrm>
+            <a:prstGeom prst="rect">
+              <a:avLst/>
+            </a:prstGeom>
+          </p:spPr>
+        </p:pic>
+        <p:pic>
+          <p:nvPicPr>
+            <p:cNvPr id="53" name="Picture 33">
+              <a:extLst>
+                <a:ext uri="{FF2B5EF4-FFF2-40B4-BE49-F238E27FC236}">
+                  <a16:creationId xmlns:a16="http://schemas.microsoft.com/office/drawing/2014/main" id="{DDFC75ED-D600-44A0-BC7A-7B9FF1C96D37}"/>
+                </a:ext>
+              </a:extLst>
+            </p:cNvPr>
+            <p:cNvPicPr>
+              <a:picLocks noChangeAspect="1"/>
+            </p:cNvPicPr>
+            <p:nvPr/>
+          </p:nvPicPr>
+          <p:blipFill>
+            <a:blip r:embed="rId9">
+              <a:extLst>
+                <a:ext uri="{96DAC541-7B7A-43D3-8B79-37D633B846F1}">
+                  <asvg:svgBlip xmlns:asvg="http://schemas.microsoft.com/office/drawing/2016/SVG/main" r:embed="rId10"/>
+                </a:ext>
+              </a:extLst>
+            </a:blip>
+            <a:srcRect/>
+            <a:stretch/>
+          </p:blipFill>
+          <p:spPr>
+            <a:xfrm>
+              <a:off x="7333356" y="3910651"/>
+              <a:ext cx="255929" cy="255929"/>
+            </a:xfrm>
+            <a:prstGeom prst="rect">
+              <a:avLst/>
+            </a:prstGeom>
+          </p:spPr>
+        </p:pic>
+        <p:sp>
+          <p:nvSpPr>
+            <p:cNvPr id="54" name="TextBox 53">
+              <a:extLst>
+                <a:ext uri="{FF2B5EF4-FFF2-40B4-BE49-F238E27FC236}">
+                  <a16:creationId xmlns:a16="http://schemas.microsoft.com/office/drawing/2014/main" id="{311EC639-3F46-47F8-8723-C4FADE95C7B7}"/>
+                </a:ext>
+              </a:extLst>
+            </p:cNvPr>
+            <p:cNvSpPr txBox="1"/>
+            <p:nvPr/>
+          </p:nvSpPr>
+          <p:spPr bwMode="auto">
+            <a:xfrm>
+              <a:off x="5010126" y="2726929"/>
+              <a:ext cx="656785" cy="136191"/>
+            </a:xfrm>
+            <a:prstGeom prst="rect">
+              <a:avLst/>
+            </a:prstGeom>
+            <a:noFill/>
+            <a:ln w="9525">
+              <a:noFill/>
+              <a:miter lim="800000"/>
+              <a:headEnd/>
+              <a:tailEnd/>
+            </a:ln>
+            <a:effectLst/>
+          </p:spPr>
+          <p:txBody>
+            <a:bodyPr wrap="square" lIns="0" tIns="0" rIns="0" bIns="0" rtlCol="0" anchor="t" anchorCtr="0">
+              <a:spAutoFit/>
+            </a:bodyPr>
+            <a:lstStyle/>
+            <a:p>
+              <a:pPr marL="0" marR="0" lvl="0" indent="0" algn="ctr" defTabSz="432000" rtl="0" eaLnBrk="0" fontAlgn="auto" latinLnBrk="0" hangingPunct="0">
+                <a:lnSpc>
+                  <a:spcPct val="120000"/>
+                </a:lnSpc>
+                <a:spcBef>
+                  <a:spcPts val="0"/>
+                </a:spcBef>
+                <a:spcAft>
+                  <a:spcPts val="0"/>
+                </a:spcAft>
+                <a:buClr>
+                  <a:srgbClr val="0A8276"/>
+                </a:buClr>
+                <a:buSzTx/>
+                <a:buFont typeface="Arial"/>
+                <a:buNone/>
+                <a:tabLst/>
+                <a:defRPr/>
+              </a:pPr>
+              <a:r>
+                <a:rPr kumimoji="0" lang="en-IN" sz="800" b="1" i="0" u="none" strike="noStrike" kern="0" cap="all" spc="0" normalizeH="0" baseline="0" noProof="0" dirty="0">
+                  <a:ln>
+                    <a:noFill/>
+                  </a:ln>
+                  <a:solidFill>
+                    <a:srgbClr val="FFFFFF"/>
+                  </a:solidFill>
+                  <a:effectLst/>
+                  <a:uLnTx/>
+                  <a:uFillTx/>
+                  <a:latin typeface="Montserrat" panose="00000500000000000000" pitchFamily="2" charset="0"/>
+                  <a:cs typeface="Arial"/>
+                  <a:sym typeface="Arial"/>
+                </a:rPr>
+                <a:t>SETTINGS</a:t>
+              </a:r>
+              <a:endParaRPr kumimoji="0" lang="en-US" sz="800" b="1" i="0" u="none" strike="noStrike" kern="0" cap="all" spc="0" normalizeH="0" baseline="0" noProof="0" dirty="0">
+                <a:ln>
+                  <a:noFill/>
+                </a:ln>
+                <a:solidFill>
+                  <a:srgbClr val="FFFFFF"/>
+                </a:solidFill>
+                <a:effectLst/>
+                <a:uLnTx/>
+                <a:uFillTx/>
+                <a:latin typeface="Montserrat" panose="00000500000000000000" pitchFamily="2" charset="0"/>
+                <a:cs typeface="Arial"/>
+                <a:sym typeface="Arial"/>
+              </a:endParaRPr>
+            </a:p>
+          </p:txBody>
+        </p:sp>
+        <p:sp>
+          <p:nvSpPr>
+            <p:cNvPr id="56" name="TextBox 55">
+              <a:extLst>
+                <a:ext uri="{FF2B5EF4-FFF2-40B4-BE49-F238E27FC236}">
+                  <a16:creationId xmlns:a16="http://schemas.microsoft.com/office/drawing/2014/main" id="{9CE00E8A-5A88-444F-98AF-00A61D41B0A1}"/>
+                </a:ext>
+              </a:extLst>
+            </p:cNvPr>
+            <p:cNvSpPr txBox="1"/>
+            <p:nvPr/>
+          </p:nvSpPr>
+          <p:spPr bwMode="auto">
+            <a:xfrm>
+              <a:off x="7272043" y="2704326"/>
+              <a:ext cx="656785" cy="136191"/>
+            </a:xfrm>
+            <a:prstGeom prst="rect">
+              <a:avLst/>
+            </a:prstGeom>
+            <a:noFill/>
+            <a:ln w="9525">
+              <a:noFill/>
+              <a:miter lim="800000"/>
+              <a:headEnd/>
+              <a:tailEnd/>
+            </a:ln>
+            <a:effectLst/>
+          </p:spPr>
+          <p:txBody>
+            <a:bodyPr wrap="square" lIns="0" tIns="0" rIns="0" bIns="0" rtlCol="0" anchor="t" anchorCtr="0">
+              <a:spAutoFit/>
+            </a:bodyPr>
+            <a:lstStyle/>
+            <a:p>
+              <a:pPr marL="0" marR="0" lvl="0" indent="0" algn="ctr" defTabSz="432000" rtl="0" eaLnBrk="0" fontAlgn="auto" latinLnBrk="0" hangingPunct="0">
+                <a:lnSpc>
+                  <a:spcPct val="120000"/>
+                </a:lnSpc>
+                <a:spcBef>
+                  <a:spcPts val="0"/>
+                </a:spcBef>
+                <a:spcAft>
+                  <a:spcPts val="0"/>
+                </a:spcAft>
+                <a:buClr>
+                  <a:srgbClr val="0A8276"/>
+                </a:buClr>
+                <a:buSzTx/>
+                <a:buFont typeface="Arial"/>
+                <a:buNone/>
+                <a:tabLst/>
+                <a:defRPr/>
+              </a:pPr>
+              <a:r>
+                <a:rPr kumimoji="0" lang="en-IN" sz="800" b="1" i="0" u="none" strike="noStrike" kern="0" cap="all" spc="0" normalizeH="0" baseline="0" noProof="0" dirty="0">
+                  <a:ln>
+                    <a:noFill/>
+                  </a:ln>
+                  <a:solidFill>
+                    <a:srgbClr val="FFFFFF"/>
+                  </a:solidFill>
+                  <a:effectLst/>
+                  <a:uLnTx/>
+                  <a:uFillTx/>
+                  <a:latin typeface="Montserrat" panose="00000500000000000000" pitchFamily="2" charset="0"/>
+                  <a:cs typeface="Arial"/>
+                  <a:sym typeface="Arial"/>
+                </a:rPr>
+                <a:t>MODE</a:t>
+              </a:r>
+              <a:endParaRPr kumimoji="0" lang="en-US" sz="800" b="1" i="0" u="none" strike="noStrike" kern="0" cap="all" spc="0" normalizeH="0" baseline="0" noProof="0" dirty="0">
+                <a:ln>
+                  <a:noFill/>
+                </a:ln>
+                <a:solidFill>
+                  <a:srgbClr val="FFFFFF"/>
+                </a:solidFill>
+                <a:effectLst/>
+                <a:uLnTx/>
+                <a:uFillTx/>
+                <a:latin typeface="Montserrat" panose="00000500000000000000" pitchFamily="2" charset="0"/>
+                <a:cs typeface="Arial"/>
+                <a:sym typeface="Arial"/>
+              </a:endParaRPr>
+            </a:p>
+          </p:txBody>
+        </p:sp>
+        <p:sp>
+          <p:nvSpPr>
+            <p:cNvPr id="57" name="TextBox 56">
+              <a:extLst>
+                <a:ext uri="{FF2B5EF4-FFF2-40B4-BE49-F238E27FC236}">
+                  <a16:creationId xmlns:a16="http://schemas.microsoft.com/office/drawing/2014/main" id="{2F3BF632-64B7-4563-8DF0-8C024CBE97A1}"/>
+                </a:ext>
+              </a:extLst>
+            </p:cNvPr>
+            <p:cNvSpPr txBox="1"/>
+            <p:nvPr/>
+          </p:nvSpPr>
+          <p:spPr bwMode="auto">
+            <a:xfrm>
+              <a:off x="7094229" y="4185986"/>
+              <a:ext cx="743757" cy="136191"/>
+            </a:xfrm>
+            <a:prstGeom prst="rect">
+              <a:avLst/>
+            </a:prstGeom>
+            <a:noFill/>
+            <a:ln w="9525">
+              <a:noFill/>
+              <a:miter lim="800000"/>
+              <a:headEnd/>
+              <a:tailEnd/>
+            </a:ln>
+            <a:effectLst/>
+          </p:spPr>
+          <p:txBody>
+            <a:bodyPr wrap="square" lIns="0" tIns="0" rIns="0" bIns="0" rtlCol="0" anchor="t" anchorCtr="0">
+              <a:spAutoFit/>
+            </a:bodyPr>
+            <a:lstStyle/>
+            <a:p>
+              <a:pPr marL="0" marR="0" lvl="0" indent="0" algn="ctr" defTabSz="432000" rtl="0" eaLnBrk="0" fontAlgn="auto" latinLnBrk="0" hangingPunct="0">
+                <a:lnSpc>
+                  <a:spcPct val="120000"/>
+                </a:lnSpc>
+                <a:spcBef>
+                  <a:spcPts val="0"/>
+                </a:spcBef>
+                <a:spcAft>
+                  <a:spcPts val="0"/>
+                </a:spcAft>
+                <a:buClr>
+                  <a:srgbClr val="0A8276"/>
+                </a:buClr>
+                <a:buSzTx/>
+                <a:buFont typeface="Arial"/>
+                <a:buNone/>
+                <a:tabLst/>
+                <a:defRPr/>
+              </a:pPr>
+              <a:r>
+                <a:rPr kumimoji="0" lang="en-IN" sz="800" b="1" i="0" u="none" strike="noStrike" kern="0" cap="all" spc="0" normalizeH="0" baseline="0" noProof="0" dirty="0">
+                  <a:ln>
+                    <a:noFill/>
+                  </a:ln>
+                  <a:solidFill>
+                    <a:srgbClr val="FFFFFF"/>
+                  </a:solidFill>
+                  <a:effectLst/>
+                  <a:uLnTx/>
+                  <a:uFillTx/>
+                  <a:latin typeface="Montserrat" panose="00000500000000000000" pitchFamily="2" charset="0"/>
+                  <a:cs typeface="Arial"/>
+                  <a:sym typeface="Arial"/>
+                </a:rPr>
+                <a:t>COMMAND</a:t>
+              </a:r>
+              <a:endParaRPr kumimoji="0" lang="en-US" sz="800" b="1" i="0" u="none" strike="noStrike" kern="0" cap="all" spc="0" normalizeH="0" baseline="0" noProof="0" dirty="0">
+                <a:ln>
+                  <a:noFill/>
+                </a:ln>
+                <a:solidFill>
+                  <a:srgbClr val="FFFFFF"/>
+                </a:solidFill>
+                <a:effectLst/>
+                <a:uLnTx/>
+                <a:uFillTx/>
+                <a:latin typeface="Montserrat" panose="00000500000000000000" pitchFamily="2" charset="0"/>
+                <a:cs typeface="Arial"/>
+                <a:sym typeface="Arial"/>
+              </a:endParaRPr>
+            </a:p>
+          </p:txBody>
+        </p:sp>
+        <p:sp>
+          <p:nvSpPr>
+            <p:cNvPr id="58" name="TextBox 57">
+              <a:extLst>
+                <a:ext uri="{FF2B5EF4-FFF2-40B4-BE49-F238E27FC236}">
+                  <a16:creationId xmlns:a16="http://schemas.microsoft.com/office/drawing/2014/main" id="{0A8EA8AD-E1DE-455C-9F6A-E4588407AD8F}"/>
+                </a:ext>
+              </a:extLst>
+            </p:cNvPr>
+            <p:cNvSpPr txBox="1"/>
+            <p:nvPr/>
+          </p:nvSpPr>
+          <p:spPr bwMode="auto">
+            <a:xfrm>
+              <a:off x="4966189" y="3302460"/>
+              <a:ext cx="743757" cy="136191"/>
+            </a:xfrm>
+            <a:prstGeom prst="rect">
+              <a:avLst/>
+            </a:prstGeom>
+            <a:noFill/>
+            <a:ln w="9525">
+              <a:noFill/>
+              <a:miter lim="800000"/>
+              <a:headEnd/>
+              <a:tailEnd/>
+            </a:ln>
+            <a:effectLst/>
+          </p:spPr>
+          <p:txBody>
+            <a:bodyPr wrap="square" lIns="0" tIns="0" rIns="0" bIns="0" rtlCol="0" anchor="t" anchorCtr="0">
+              <a:spAutoFit/>
+            </a:bodyPr>
+            <a:lstStyle/>
+            <a:p>
+              <a:pPr marL="0" marR="0" lvl="0" indent="0" algn="ctr" defTabSz="432000" rtl="0" eaLnBrk="0" fontAlgn="auto" latinLnBrk="0" hangingPunct="0">
+                <a:lnSpc>
+                  <a:spcPct val="120000"/>
+                </a:lnSpc>
+                <a:spcBef>
+                  <a:spcPts val="0"/>
+                </a:spcBef>
+                <a:spcAft>
+                  <a:spcPts val="0"/>
+                </a:spcAft>
+                <a:buClr>
+                  <a:srgbClr val="0A8276"/>
+                </a:buClr>
+                <a:buSzTx/>
+                <a:buFont typeface="Arial"/>
+                <a:buNone/>
+                <a:tabLst/>
+                <a:defRPr/>
+              </a:pPr>
+              <a:r>
+                <a:rPr kumimoji="0" lang="en-IN" sz="800" b="1" i="0" u="none" strike="noStrike" kern="0" cap="all" spc="0" normalizeH="0" baseline="0" noProof="0" dirty="0">
+                  <a:ln>
+                    <a:noFill/>
+                  </a:ln>
+                  <a:solidFill>
+                    <a:srgbClr val="FFFFFF"/>
+                  </a:solidFill>
+                  <a:effectLst/>
+                  <a:uLnTx/>
+                  <a:uFillTx/>
+                  <a:latin typeface="Montserrat" panose="00000500000000000000" pitchFamily="2" charset="0"/>
+                  <a:cs typeface="Arial"/>
+                  <a:sym typeface="Arial"/>
+                </a:rPr>
+                <a:t>CONNECT</a:t>
+              </a:r>
+              <a:endParaRPr kumimoji="0" lang="en-US" sz="800" b="1" i="0" u="none" strike="noStrike" kern="0" cap="all" spc="0" normalizeH="0" baseline="0" noProof="0" dirty="0">
+                <a:ln>
+                  <a:noFill/>
+                </a:ln>
+                <a:solidFill>
+                  <a:srgbClr val="FFFFFF"/>
+                </a:solidFill>
+                <a:effectLst/>
+                <a:uLnTx/>
+                <a:uFillTx/>
+                <a:latin typeface="Montserrat" panose="00000500000000000000" pitchFamily="2" charset="0"/>
+                <a:cs typeface="Arial"/>
+                <a:sym typeface="Arial"/>
+              </a:endParaRPr>
+            </a:p>
+          </p:txBody>
+        </p:sp>
+        <p:sp>
+          <p:nvSpPr>
+            <p:cNvPr id="60" name="TextBox 59">
+              <a:extLst>
+                <a:ext uri="{FF2B5EF4-FFF2-40B4-BE49-F238E27FC236}">
+                  <a16:creationId xmlns:a16="http://schemas.microsoft.com/office/drawing/2014/main" id="{D87D92E2-CB87-40F2-A943-D511A5F15BE5}"/>
+                </a:ext>
+              </a:extLst>
+            </p:cNvPr>
+            <p:cNvSpPr txBox="1"/>
+            <p:nvPr/>
+          </p:nvSpPr>
+          <p:spPr bwMode="auto">
+            <a:xfrm>
+              <a:off x="7306740" y="3295966"/>
+              <a:ext cx="656785" cy="137923"/>
+            </a:xfrm>
+            <a:prstGeom prst="rect">
+              <a:avLst/>
+            </a:prstGeom>
+            <a:noFill/>
+            <a:ln w="9525">
+              <a:noFill/>
+              <a:miter lim="800000"/>
+              <a:headEnd/>
+              <a:tailEnd/>
+            </a:ln>
+            <a:effectLst/>
+          </p:spPr>
+          <p:txBody>
+            <a:bodyPr wrap="square" lIns="0" tIns="0" rIns="0" bIns="0" rtlCol="0" anchor="t" anchorCtr="0">
+              <a:spAutoFit/>
+            </a:bodyPr>
+            <a:lstStyle/>
+            <a:p>
+              <a:pPr marL="0" marR="0" lvl="0" indent="0" algn="ctr" defTabSz="432000" rtl="0" eaLnBrk="0" fontAlgn="auto" latinLnBrk="0" hangingPunct="0">
+                <a:lnSpc>
+                  <a:spcPct val="120000"/>
+                </a:lnSpc>
+                <a:spcBef>
+                  <a:spcPts val="0"/>
+                </a:spcBef>
+                <a:spcAft>
+                  <a:spcPts val="0"/>
+                </a:spcAft>
+                <a:buClr>
+                  <a:srgbClr val="0A8276"/>
+                </a:buClr>
+                <a:buSzTx/>
+                <a:buFont typeface="Arial"/>
+                <a:buNone/>
+                <a:tabLst/>
+                <a:defRPr/>
+              </a:pPr>
+              <a:r>
+                <a:rPr kumimoji="0" lang="en-IN" sz="800" b="1" i="0" u="none" strike="noStrike" kern="0" cap="all" spc="0" normalizeH="0" baseline="0" noProof="0" dirty="0">
+                  <a:ln>
+                    <a:noFill/>
+                  </a:ln>
+                  <a:solidFill>
+                    <a:srgbClr val="FFFFFF"/>
+                  </a:solidFill>
+                  <a:effectLst/>
+                  <a:uLnTx/>
+                  <a:uFillTx/>
+                  <a:latin typeface="Montserrat" panose="00000500000000000000" pitchFamily="2" charset="0"/>
+                  <a:cs typeface="Arial"/>
+                  <a:sym typeface="Arial"/>
+                </a:rPr>
+                <a:t>LOW</a:t>
+              </a:r>
+              <a:endParaRPr kumimoji="0" lang="en-US" sz="800" b="1" i="0" u="none" strike="noStrike" kern="0" cap="all" spc="0" normalizeH="0" baseline="0" noProof="0" dirty="0">
+                <a:ln>
+                  <a:noFill/>
+                </a:ln>
+                <a:solidFill>
+                  <a:srgbClr val="FFFFFF"/>
+                </a:solidFill>
+                <a:effectLst/>
+                <a:uLnTx/>
+                <a:uFillTx/>
+                <a:latin typeface="Montserrat" panose="00000500000000000000" pitchFamily="2" charset="0"/>
+                <a:cs typeface="Arial"/>
+                <a:sym typeface="Arial"/>
+              </a:endParaRPr>
+            </a:p>
+          </p:txBody>
+        </p:sp>
+      </p:grpSp>
+      <p:pic>
+        <p:nvPicPr>
+          <p:cNvPr id="17" name="Picture 16">
+            <a:extLst>
+              <a:ext uri="{FF2B5EF4-FFF2-40B4-BE49-F238E27FC236}">
+                <a16:creationId xmlns:a16="http://schemas.microsoft.com/office/drawing/2014/main" id="{D5477414-00D1-B8C7-635A-3A93A24AA98F}"/>
+              </a:ext>
+            </a:extLst>
+          </p:cNvPr>
+          <p:cNvPicPr>
+            <a:picLocks noChangeAspect="1"/>
+          </p:cNvPicPr>
+          <p:nvPr/>
+        </p:nvPicPr>
+        <p:blipFill>
+          <a:blip r:embed="rId11"/>
+          <a:stretch>
+            <a:fillRect/>
+          </a:stretch>
+        </p:blipFill>
+        <p:spPr>
+          <a:xfrm>
+            <a:off x="4490917" y="687484"/>
+            <a:ext cx="3762177" cy="3762177"/>
+          </a:xfrm>
+          <a:prstGeom prst="rect">
+            <a:avLst/>
+          </a:prstGeom>
+        </p:spPr>
+      </p:pic>
+      <p:sp>
+        <p:nvSpPr>
+          <p:cNvPr id="18" name="TextBox 17">
+            <a:extLst>
+              <a:ext uri="{FF2B5EF4-FFF2-40B4-BE49-F238E27FC236}">
+                <a16:creationId xmlns:a16="http://schemas.microsoft.com/office/drawing/2014/main" id="{D4BBC91B-C94A-4029-881E-CEA7327DE556}"/>
+              </a:ext>
+            </a:extLst>
+          </p:cNvPr>
+          <p:cNvSpPr txBox="1"/>
+          <p:nvPr/>
+        </p:nvSpPr>
+        <p:spPr bwMode="auto">
+          <a:xfrm>
+            <a:off x="693877" y="3609913"/>
+            <a:ext cx="656785" cy="136191"/>
+          </a:xfrm>
+          <a:prstGeom prst="rect">
+            <a:avLst/>
+          </a:prstGeom>
+          <a:noFill/>
+          <a:ln w="9525">
+            <a:noFill/>
+            <a:miter lim="800000"/>
+            <a:headEnd/>
+            <a:tailEnd/>
+          </a:ln>
+          <a:effectLst/>
+        </p:spPr>
+        <p:txBody>
+          <a:bodyPr wrap="square" lIns="0" tIns="0" rIns="0" bIns="0" rtlCol="0" anchor="t" anchorCtr="0">
+            <a:spAutoFit/>
+          </a:bodyPr>
+          <a:lstStyle/>
+          <a:p>
+            <a:pPr marL="0" marR="0" lvl="0" indent="0" algn="ctr" defTabSz="432000" rtl="0" eaLnBrk="0" fontAlgn="auto" latinLnBrk="0" hangingPunct="0">
+              <a:lnSpc>
+                <a:spcPct val="120000"/>
+              </a:lnSpc>
+              <a:spcBef>
+                <a:spcPts val="0"/>
+              </a:spcBef>
+              <a:spcAft>
+                <a:spcPts val="0"/>
+              </a:spcAft>
+              <a:buClr>
+                <a:srgbClr val="0A8276"/>
+              </a:buClr>
+              <a:buSzTx/>
+              <a:buFont typeface="Arial"/>
+              <a:buNone/>
+              <a:tabLst/>
+              <a:defRPr/>
+            </a:pPr>
+            <a:r>
+              <a:rPr kumimoji="0" lang="en-IN" sz="800" b="1" i="0" u="none" strike="noStrike" kern="0" cap="all" spc="0" normalizeH="0" baseline="0" noProof="0" dirty="0">
+                <a:ln>
+                  <a:noFill/>
+                </a:ln>
+                <a:solidFill>
+                  <a:srgbClr val="FFFFFF"/>
+                </a:solidFill>
+                <a:effectLst/>
+                <a:uLnTx/>
+                <a:uFillTx/>
+                <a:latin typeface="Montserrat" panose="00000500000000000000" pitchFamily="2" charset="0"/>
+                <a:cs typeface="Arial"/>
+                <a:sym typeface="Arial"/>
+              </a:rPr>
+              <a:t>PRESENCE</a:t>
+            </a:r>
+            <a:endParaRPr kumimoji="0" lang="en-US" sz="800" b="1" i="0" u="none" strike="noStrike" kern="0" cap="all" spc="0" normalizeH="0" baseline="0" noProof="0" dirty="0">
+              <a:ln>
+                <a:noFill/>
+              </a:ln>
+              <a:solidFill>
+                <a:srgbClr val="FFFFFF"/>
+              </a:solidFill>
+              <a:effectLst/>
+              <a:uLnTx/>
+              <a:uFillTx/>
+              <a:latin typeface="Montserrat" panose="00000500000000000000" pitchFamily="2" charset="0"/>
+              <a:cs typeface="Arial"/>
+              <a:sym typeface="Arial"/>
+            </a:endParaRPr>
+          </a:p>
+        </p:txBody>
+      </p:sp>
+      <p:pic>
+        <p:nvPicPr>
+          <p:cNvPr id="21" name="Picture 20">
+            <a:extLst>
+              <a:ext uri="{FF2B5EF4-FFF2-40B4-BE49-F238E27FC236}">
+                <a16:creationId xmlns:a16="http://schemas.microsoft.com/office/drawing/2014/main" id="{1D98E331-BB11-62A5-8D3F-D9DA5F24FDB8}"/>
+              </a:ext>
+            </a:extLst>
+          </p:cNvPr>
+          <p:cNvPicPr>
+            <a:picLocks noChangeAspect="1"/>
+          </p:cNvPicPr>
+          <p:nvPr/>
+        </p:nvPicPr>
+        <p:blipFill>
+          <a:blip r:embed="rId12"/>
+          <a:stretch>
+            <a:fillRect/>
+          </a:stretch>
+        </p:blipFill>
+        <p:spPr>
+          <a:xfrm>
+            <a:off x="858684" y="3296680"/>
+            <a:ext cx="327169" cy="327169"/>
+          </a:xfrm>
+          <a:prstGeom prst="rect">
+            <a:avLst/>
+          </a:prstGeom>
+        </p:spPr>
+      </p:pic>
+    </p:spTree>
+    <p:extLst>
+      <p:ext uri="{BB962C8B-B14F-4D97-AF65-F5344CB8AC3E}">
+        <p14:creationId xmlns:p14="http://schemas.microsoft.com/office/powerpoint/2010/main" val="451680532"/>
+      </p:ext>
+    </p:extLst>
+  </p:cSld>
+  <p:clrMapOvr>
+    <a:masterClrMapping/>
+  </p:clrMapOvr>
+</p:sld>
+</file>
+
+<file path=ppt/slides/slide3.xml><?xml version="1.0" encoding="utf-8"?>
+<p:sld xmlns:a="http://schemas.openxmlformats.org/drawingml/2006/main" xmlns:r="http://schemas.openxmlformats.org/officeDocument/2006/relationships" xmlns:p="http://schemas.openxmlformats.org/presentationml/2006/main">
+  <p:cSld>
+    <p:spTree>
+      <p:nvGrpSpPr>
+        <p:cNvPr id="1" name="">
+          <a:extLst>
+            <a:ext uri="{FF2B5EF4-FFF2-40B4-BE49-F238E27FC236}">
+              <a16:creationId xmlns:a16="http://schemas.microsoft.com/office/drawing/2014/main" id="{ECB09173-A665-BDF3-D460-9031573C5D8F}"/>
+            </a:ext>
+          </a:extLst>
+        </p:cNvPr>
+        <p:cNvGrpSpPr/>
+        <p:nvPr/>
+      </p:nvGrpSpPr>
+      <p:grpSpPr>
+        <a:xfrm>
+          <a:off x="0" y="0"/>
+          <a:ext cx="0" cy="0"/>
+          <a:chOff x="0" y="0"/>
+          <a:chExt cx="0" cy="0"/>
+        </a:xfrm>
+      </p:grpSpPr>
+      <p:pic>
+        <p:nvPicPr>
+          <p:cNvPr id="70" name="Picture 69">
+            <a:extLst>
+              <a:ext uri="{FF2B5EF4-FFF2-40B4-BE49-F238E27FC236}">
+                <a16:creationId xmlns:a16="http://schemas.microsoft.com/office/drawing/2014/main" id="{96D2E277-F478-FC3C-4D9F-101F21ECB8B9}"/>
+              </a:ext>
+            </a:extLst>
+          </p:cNvPr>
+          <p:cNvPicPr>
+            <a:picLocks noChangeAspect="1"/>
+          </p:cNvPicPr>
+          <p:nvPr/>
+        </p:nvPicPr>
+        <p:blipFill>
+          <a:blip r:embed="rId2">
+            <a:extLst>
+              <a:ext uri="{BEBA8EAE-BF5A-486C-A8C5-ECC9F3942E4B}">
+                <a14:imgProps xmlns:a14="http://schemas.microsoft.com/office/drawing/2010/main">
+                  <a14:imgLayer r:embed="rId3">
+                    <a14:imgEffect>
+                      <a14:brightnessContrast bright="-20000" contrast="-20000"/>
+                    </a14:imgEffect>
+                  </a14:imgLayer>
+                </a14:imgProps>
+              </a:ext>
+            </a:extLst>
+          </a:blip>
+          <a:stretch>
+            <a:fillRect/>
+          </a:stretch>
+        </p:blipFill>
+        <p:spPr>
+          <a:xfrm>
+            <a:off x="421593" y="899015"/>
+            <a:ext cx="2921907" cy="2921907"/>
+          </a:xfrm>
+          <a:prstGeom prst="rect">
+            <a:avLst/>
+          </a:prstGeom>
+          <a:ln>
+            <a:noFill/>
+          </a:ln>
+        </p:spPr>
+      </p:pic>
+      <p:sp>
+        <p:nvSpPr>
+          <p:cNvPr id="135" name="Rectangle 134">
+            <a:extLst>
+              <a:ext uri="{FF2B5EF4-FFF2-40B4-BE49-F238E27FC236}">
+                <a16:creationId xmlns:a16="http://schemas.microsoft.com/office/drawing/2014/main" id="{B219D432-D108-A0B2-F3AC-128A9CC8E66E}"/>
+              </a:ext>
+            </a:extLst>
+          </p:cNvPr>
+          <p:cNvSpPr/>
+          <p:nvPr/>
+        </p:nvSpPr>
+        <p:spPr bwMode="auto">
+          <a:xfrm>
+            <a:off x="323538" y="4365515"/>
+            <a:ext cx="2138363" cy="408483"/>
+          </a:xfrm>
+          <a:prstGeom prst="rect">
+            <a:avLst/>
+          </a:prstGeom>
+          <a:solidFill>
+            <a:schemeClr val="tx2">
+              <a:lumMod val="75000"/>
+            </a:schemeClr>
+          </a:solidFill>
+          <a:ln w="9525">
+            <a:noFill/>
+            <a:miter lim="800000"/>
+            <a:headEnd/>
+            <a:tailEnd/>
+          </a:ln>
+        </p:spPr>
+        <p:txBody>
+          <a:bodyPr wrap="square" lIns="72000" tIns="72000" rIns="72000" bIns="72000" rtlCol="0" anchor="ctr"/>
+          <a:lstStyle/>
+          <a:p>
+            <a:pPr algn="ctr" defTabSz="576000" eaLnBrk="0" hangingPunct="0">
+              <a:lnSpc>
+                <a:spcPct val="120000"/>
+              </a:lnSpc>
+            </a:pPr>
+            <a:endParaRPr lang="en-IN" sz="1600" baseline="0" dirty="0">
+              <a:solidFill>
+                <a:schemeClr val="bg1"/>
+              </a:solidFill>
+              <a:latin typeface="+mn-lt"/>
+              <a:ea typeface="+mn-ea"/>
+              <a:cs typeface="+mn-cs"/>
+            </a:endParaRPr>
+          </a:p>
+        </p:txBody>
+      </p:sp>
+      <p:pic>
+        <p:nvPicPr>
+          <p:cNvPr id="17" name="Picture 16">
+            <a:extLst>
+              <a:ext uri="{FF2B5EF4-FFF2-40B4-BE49-F238E27FC236}">
+                <a16:creationId xmlns:a16="http://schemas.microsoft.com/office/drawing/2014/main" id="{EFE48AD4-693F-F3C5-3698-416C8488C562}"/>
+              </a:ext>
+            </a:extLst>
+          </p:cNvPr>
+          <p:cNvPicPr>
+            <a:picLocks noChangeAspect="1"/>
+          </p:cNvPicPr>
+          <p:nvPr/>
+        </p:nvPicPr>
+        <p:blipFill>
+          <a:blip r:embed="rId4"/>
+          <a:stretch>
+            <a:fillRect/>
+          </a:stretch>
+        </p:blipFill>
+        <p:spPr>
+          <a:xfrm>
+            <a:off x="4579565" y="1103883"/>
+            <a:ext cx="3201031" cy="3201031"/>
+          </a:xfrm>
+          <a:prstGeom prst="rect">
+            <a:avLst/>
+          </a:prstGeom>
+          <a:ln>
+            <a:solidFill>
+              <a:schemeClr val="tx1"/>
+            </a:solidFill>
+          </a:ln>
+        </p:spPr>
+      </p:pic>
+      <p:sp>
+        <p:nvSpPr>
+          <p:cNvPr id="3" name="Title 2">
+            <a:extLst>
+              <a:ext uri="{FF2B5EF4-FFF2-40B4-BE49-F238E27FC236}">
+                <a16:creationId xmlns:a16="http://schemas.microsoft.com/office/drawing/2014/main" id="{5B90D98B-05AB-6F24-FF83-B8B2C9354C4F}"/>
+              </a:ext>
+            </a:extLst>
+          </p:cNvPr>
+          <p:cNvSpPr>
+            <a:spLocks noGrp="1"/>
+          </p:cNvSpPr>
+          <p:nvPr>
+            <p:ph type="title"/>
+          </p:nvPr>
+        </p:nvSpPr>
+        <p:spPr>
+          <a:xfrm>
+            <a:off x="250343" y="131708"/>
+            <a:ext cx="7209801" cy="540000"/>
+          </a:xfrm>
+        </p:spPr>
+        <p:txBody>
+          <a:bodyPr/>
+          <a:lstStyle/>
+          <a:p>
+            <a:r>
+              <a:rPr lang="en-US" dirty="0"/>
+              <a:t>Background image</a:t>
+            </a:r>
+            <a:br>
+              <a:rPr lang="en-US" dirty="0"/>
+            </a:br>
+            <a:endParaRPr lang="en-US" dirty="0"/>
+          </a:p>
+        </p:txBody>
+      </p:sp>
+      <p:sp>
+        <p:nvSpPr>
+          <p:cNvPr id="4" name="Date Placeholder 3">
+            <a:extLst>
+              <a:ext uri="{FF2B5EF4-FFF2-40B4-BE49-F238E27FC236}">
+                <a16:creationId xmlns:a16="http://schemas.microsoft.com/office/drawing/2014/main" id="{4EE2E091-C9B6-A9A3-B0C1-7FE54A811B58}"/>
+              </a:ext>
+            </a:extLst>
+          </p:cNvPr>
+          <p:cNvSpPr>
+            <a:spLocks noGrp="1"/>
+          </p:cNvSpPr>
+          <p:nvPr>
+            <p:ph type="dt" sz="half" idx="14"/>
+          </p:nvPr>
+        </p:nvSpPr>
+        <p:spPr/>
+        <p:txBody>
+          <a:bodyPr/>
+          <a:lstStyle/>
+          <a:p>
+            <a:r>
+              <a:rPr lang="en-US" b="1"/>
+              <a:t> </a:t>
+            </a:r>
+            <a:endParaRPr lang="en-US" b="1" dirty="0"/>
+          </a:p>
+        </p:txBody>
+      </p:sp>
+      <p:sp>
+        <p:nvSpPr>
+          <p:cNvPr id="5" name="Footer Placeholder 4">
+            <a:extLst>
+              <a:ext uri="{FF2B5EF4-FFF2-40B4-BE49-F238E27FC236}">
+                <a16:creationId xmlns:a16="http://schemas.microsoft.com/office/drawing/2014/main" id="{352CABCB-F43B-87F3-8AF1-26728BF57277}"/>
+              </a:ext>
+            </a:extLst>
+          </p:cNvPr>
+          <p:cNvSpPr>
+            <a:spLocks noGrp="1"/>
+          </p:cNvSpPr>
+          <p:nvPr>
+            <p:ph type="ftr" sz="quarter" idx="15"/>
+          </p:nvPr>
+        </p:nvSpPr>
+        <p:spPr/>
+        <p:txBody>
+          <a:bodyPr/>
+          <a:lstStyle/>
+          <a:p>
+            <a:endParaRPr lang="en-US" dirty="0"/>
+          </a:p>
+        </p:txBody>
+      </p:sp>
+      <p:sp>
+        <p:nvSpPr>
+          <p:cNvPr id="7" name="Rectangle: Top Corners Rounded 6">
+            <a:extLst>
+              <a:ext uri="{FF2B5EF4-FFF2-40B4-BE49-F238E27FC236}">
+                <a16:creationId xmlns:a16="http://schemas.microsoft.com/office/drawing/2014/main" id="{2444B42D-B3E4-D255-0F16-AD9BDCB8A1FE}"/>
+              </a:ext>
+            </a:extLst>
+          </p:cNvPr>
+          <p:cNvSpPr/>
+          <p:nvPr/>
+        </p:nvSpPr>
+        <p:spPr bwMode="auto">
+          <a:xfrm rot="5400000">
+            <a:off x="66831" y="2041059"/>
+            <a:ext cx="1375200" cy="658425"/>
+          </a:xfrm>
+          <a:prstGeom prst="round2SameRect">
+            <a:avLst>
+              <a:gd name="adj1" fmla="val 44038"/>
+              <a:gd name="adj2" fmla="val 0"/>
+            </a:avLst>
+          </a:prstGeom>
+          <a:solidFill>
+            <a:srgbClr val="086259">
+              <a:alpha val="34902"/>
+            </a:srgbClr>
+          </a:solidFill>
+          <a:ln w="12700">
+            <a:solidFill>
+              <a:srgbClr val="9BBA43"/>
+            </a:solidFill>
+            <a:miter lim="800000"/>
+            <a:headEnd/>
+            <a:tailEnd/>
+          </a:ln>
+          <a:effectLst>
+            <a:outerShdw blurRad="50800" dist="38100" algn="l" rotWithShape="0">
+              <a:prstClr val="black">
+                <a:alpha val="40000"/>
+              </a:prstClr>
+            </a:outerShdw>
+          </a:effectLst>
+        </p:spPr>
+        <p:txBody>
+          <a:bodyPr wrap="square" lIns="72000" tIns="72000" rIns="72000" bIns="72000" rtlCol="0" anchor="ctr"/>
+          <a:lstStyle/>
+          <a:p>
+            <a:pPr algn="ctr" defTabSz="576000" eaLnBrk="0" hangingPunct="0">
+              <a:lnSpc>
+                <a:spcPct val="120000"/>
+              </a:lnSpc>
+            </a:pPr>
+            <a:endParaRPr lang="en-US" sz="1600" baseline="0" dirty="0">
+              <a:solidFill>
+                <a:schemeClr val="bg1"/>
+              </a:solidFill>
+              <a:latin typeface="+mn-lt"/>
+              <a:ea typeface="+mn-ea"/>
+              <a:cs typeface="+mn-cs"/>
+            </a:endParaRPr>
+          </a:p>
+        </p:txBody>
+      </p:sp>
+      <p:sp>
+        <p:nvSpPr>
+          <p:cNvPr id="16" name="Rectangle: Top Corners Rounded 15">
+            <a:extLst>
+              <a:ext uri="{FF2B5EF4-FFF2-40B4-BE49-F238E27FC236}">
+                <a16:creationId xmlns:a16="http://schemas.microsoft.com/office/drawing/2014/main" id="{D5959FBF-54AA-C9B8-92FB-B9B25C426EDA}"/>
+              </a:ext>
+            </a:extLst>
+          </p:cNvPr>
+          <p:cNvSpPr/>
+          <p:nvPr/>
+        </p:nvSpPr>
+        <p:spPr bwMode="auto">
+          <a:xfrm rot="16200000" flipH="1">
+            <a:off x="2326863" y="2041850"/>
+            <a:ext cx="1375200" cy="658425"/>
+          </a:xfrm>
+          <a:prstGeom prst="round2SameRect">
+            <a:avLst>
+              <a:gd name="adj1" fmla="val 44038"/>
+              <a:gd name="adj2" fmla="val 0"/>
+            </a:avLst>
+          </a:prstGeom>
+          <a:solidFill>
+            <a:srgbClr val="086259">
+              <a:alpha val="34902"/>
+            </a:srgbClr>
+          </a:solidFill>
+          <a:ln w="12700">
+            <a:solidFill>
+              <a:srgbClr val="9BBA43"/>
+            </a:solidFill>
+            <a:miter lim="800000"/>
+            <a:headEnd/>
+            <a:tailEnd/>
+          </a:ln>
+          <a:effectLst>
+            <a:outerShdw blurRad="50800" dist="38100" dir="10800000" algn="r" rotWithShape="0">
+              <a:prstClr val="black">
+                <a:alpha val="40000"/>
+              </a:prstClr>
+            </a:outerShdw>
+          </a:effectLst>
+        </p:spPr>
+        <p:txBody>
+          <a:bodyPr wrap="square" lIns="72000" tIns="72000" rIns="72000" bIns="72000" rtlCol="0" anchor="ctr"/>
+          <a:lstStyle/>
+          <a:p>
+            <a:pPr algn="ctr" defTabSz="576000" eaLnBrk="0" hangingPunct="0">
+              <a:lnSpc>
+                <a:spcPct val="120000"/>
+              </a:lnSpc>
+            </a:pPr>
+            <a:endParaRPr lang="en-US" sz="1600" baseline="0" dirty="0">
+              <a:solidFill>
+                <a:schemeClr val="bg1"/>
+              </a:solidFill>
+              <a:latin typeface="+mn-lt"/>
+              <a:ea typeface="+mn-ea"/>
+              <a:cs typeface="+mn-cs"/>
+            </a:endParaRPr>
+          </a:p>
+        </p:txBody>
+      </p:sp>
+      <p:sp>
+        <p:nvSpPr>
+          <p:cNvPr id="20" name="Block Arc 19">
+            <a:extLst>
+              <a:ext uri="{FF2B5EF4-FFF2-40B4-BE49-F238E27FC236}">
+                <a16:creationId xmlns:a16="http://schemas.microsoft.com/office/drawing/2014/main" id="{4B8E31D3-347B-5E1E-2B55-2547AAC0CA6A}"/>
+              </a:ext>
+            </a:extLst>
+          </p:cNvPr>
+          <p:cNvSpPr/>
+          <p:nvPr/>
+        </p:nvSpPr>
+        <p:spPr bwMode="auto">
+          <a:xfrm>
+            <a:off x="1222088" y="1700978"/>
+            <a:ext cx="1324717" cy="1324717"/>
+          </a:xfrm>
+          <a:prstGeom prst="blockArc">
+            <a:avLst>
+              <a:gd name="adj1" fmla="val 10800000"/>
+              <a:gd name="adj2" fmla="val 10799996"/>
+              <a:gd name="adj3" fmla="val 18018"/>
+            </a:avLst>
+          </a:prstGeom>
+          <a:gradFill>
+            <a:gsLst>
+              <a:gs pos="0">
+                <a:srgbClr val="656464"/>
+              </a:gs>
+              <a:gs pos="74000">
+                <a:srgbClr val="414852"/>
+              </a:gs>
+              <a:gs pos="100000">
+                <a:srgbClr val="39404A"/>
+              </a:gs>
+            </a:gsLst>
+            <a:lin ang="5400000" scaled="1"/>
+          </a:gradFill>
+          <a:ln w="9525">
+            <a:noFill/>
+            <a:miter lim="800000"/>
+            <a:headEnd/>
+            <a:tailEnd/>
+          </a:ln>
+          <a:effectLst>
+            <a:outerShdw blurRad="50800" dist="38100" dir="5400000" sx="101000" sy="101000" algn="t" rotWithShape="0">
+              <a:prstClr val="black">
+                <a:alpha val="40000"/>
+              </a:prstClr>
+            </a:outerShdw>
+          </a:effectLst>
+        </p:spPr>
+        <p:txBody>
+          <a:bodyPr wrap="square" lIns="72000" tIns="72000" rIns="72000" bIns="72000" rtlCol="0" anchor="ctr"/>
+          <a:lstStyle/>
+          <a:p>
+            <a:pPr algn="ctr" defTabSz="576000" eaLnBrk="0" hangingPunct="0">
+              <a:lnSpc>
+                <a:spcPct val="120000"/>
+              </a:lnSpc>
+            </a:pPr>
+            <a:endParaRPr lang="en-US" sz="1600" baseline="0" dirty="0">
+              <a:solidFill>
+                <a:schemeClr val="bg1"/>
+              </a:solidFill>
+              <a:latin typeface="+mn-lt"/>
+              <a:ea typeface="+mn-ea"/>
+              <a:cs typeface="+mn-cs"/>
+            </a:endParaRPr>
+          </a:p>
+        </p:txBody>
+      </p:sp>
+      <p:sp>
+        <p:nvSpPr>
+          <p:cNvPr id="2" name="Oval 1">
+            <a:extLst>
+              <a:ext uri="{FF2B5EF4-FFF2-40B4-BE49-F238E27FC236}">
+                <a16:creationId xmlns:a16="http://schemas.microsoft.com/office/drawing/2014/main" id="{F67FAB3A-80B1-CBB6-77A0-1028E4FC1785}"/>
+              </a:ext>
+            </a:extLst>
+          </p:cNvPr>
+          <p:cNvSpPr/>
+          <p:nvPr/>
+        </p:nvSpPr>
+        <p:spPr bwMode="auto">
+          <a:xfrm>
+            <a:off x="1460126" y="1940874"/>
+            <a:ext cx="844924" cy="844924"/>
+          </a:xfrm>
+          <a:prstGeom prst="ellipse">
+            <a:avLst/>
+          </a:prstGeom>
+          <a:gradFill>
+            <a:gsLst>
+              <a:gs pos="0">
+                <a:schemeClr val="tx1">
+                  <a:lumMod val="90000"/>
+                  <a:lumOff val="10000"/>
+                  <a:alpha val="80000"/>
+                </a:schemeClr>
+              </a:gs>
+              <a:gs pos="74000">
+                <a:srgbClr val="101820">
+                  <a:alpha val="80000"/>
+                </a:srgbClr>
+              </a:gs>
+              <a:gs pos="100000">
+                <a:srgbClr val="181820">
+                  <a:alpha val="80000"/>
+                </a:srgbClr>
+              </a:gs>
+            </a:gsLst>
+            <a:lin ang="5400000" scaled="1"/>
+          </a:gradFill>
+          <a:ln w="9525">
+            <a:solidFill>
+              <a:srgbClr val="5C676C"/>
+            </a:solidFill>
+            <a:miter lim="800000"/>
+            <a:headEnd/>
+            <a:tailEnd/>
+          </a:ln>
+        </p:spPr>
+        <p:txBody>
+          <a:bodyPr wrap="square" lIns="72000" tIns="72000" rIns="72000" bIns="72000" rtlCol="0" anchor="ctr"/>
+          <a:lstStyle/>
+          <a:p>
+            <a:pPr algn="ctr" defTabSz="576000" eaLnBrk="0" hangingPunct="0">
+              <a:lnSpc>
+                <a:spcPct val="120000"/>
+              </a:lnSpc>
+            </a:pPr>
+            <a:endParaRPr lang="en-US" sz="1600" baseline="0" dirty="0">
+              <a:solidFill>
+                <a:schemeClr val="bg1"/>
+              </a:solidFill>
+              <a:latin typeface="+mn-lt"/>
+              <a:ea typeface="+mn-ea"/>
+              <a:cs typeface="+mn-cs"/>
+            </a:endParaRPr>
+          </a:p>
+        </p:txBody>
+      </p:sp>
+      <p:grpSp>
+        <p:nvGrpSpPr>
+          <p:cNvPr id="28" name="Group 27">
+            <a:extLst>
+              <a:ext uri="{FF2B5EF4-FFF2-40B4-BE49-F238E27FC236}">
+                <a16:creationId xmlns:a16="http://schemas.microsoft.com/office/drawing/2014/main" id="{5345348D-57E7-CC0F-EC94-833B2979B8B2}"/>
+              </a:ext>
+            </a:extLst>
+          </p:cNvPr>
+          <p:cNvGrpSpPr/>
+          <p:nvPr/>
+        </p:nvGrpSpPr>
+        <p:grpSpPr>
+          <a:xfrm>
+            <a:off x="1506203" y="2055869"/>
+            <a:ext cx="833235" cy="648530"/>
+            <a:chOff x="1506203" y="2055869"/>
+            <a:chExt cx="833235" cy="648530"/>
+          </a:xfrm>
+        </p:grpSpPr>
+        <p:sp>
+          <p:nvSpPr>
+            <p:cNvPr id="9" name="Rectangle 8">
+              <a:extLst>
+                <a:ext uri="{FF2B5EF4-FFF2-40B4-BE49-F238E27FC236}">
+                  <a16:creationId xmlns:a16="http://schemas.microsoft.com/office/drawing/2014/main" id="{BA748786-CF78-DB2C-31B3-9C16688193EE}"/>
+                </a:ext>
+              </a:extLst>
+            </p:cNvPr>
+            <p:cNvSpPr/>
+            <p:nvPr/>
+          </p:nvSpPr>
+          <p:spPr>
+            <a:xfrm>
+              <a:off x="1506203" y="2058068"/>
+              <a:ext cx="704039" cy="646331"/>
+            </a:xfrm>
+            <a:prstGeom prst="rect">
+              <a:avLst/>
+            </a:prstGeom>
+          </p:spPr>
+          <p:txBody>
+            <a:bodyPr wrap="none">
+              <a:spAutoFit/>
+            </a:bodyPr>
+            <a:lstStyle/>
+            <a:p>
+              <a:pPr algn="ctr"/>
+              <a:r>
+                <a:rPr lang="en-US" sz="3600" dirty="0">
+                  <a:solidFill>
+                    <a:schemeClr val="bg1">
+                      <a:lumMod val="95000"/>
+                    </a:schemeClr>
+                  </a:solidFill>
+                  <a:latin typeface="Roboto" panose="02000000000000000000" pitchFamily="2" charset="0"/>
+                  <a:ea typeface="Roboto" panose="02000000000000000000" pitchFamily="2" charset="0"/>
+                </a:rPr>
+                <a:t>27</a:t>
+              </a:r>
+            </a:p>
+          </p:txBody>
+        </p:sp>
+        <p:sp>
+          <p:nvSpPr>
+            <p:cNvPr id="26" name="Rectangle 25">
+              <a:extLst>
+                <a:ext uri="{FF2B5EF4-FFF2-40B4-BE49-F238E27FC236}">
+                  <a16:creationId xmlns:a16="http://schemas.microsoft.com/office/drawing/2014/main" id="{461708DE-B36C-C5DB-1F0A-257F49503AC6}"/>
+                </a:ext>
+              </a:extLst>
+            </p:cNvPr>
+            <p:cNvSpPr/>
+            <p:nvPr/>
+          </p:nvSpPr>
+          <p:spPr>
+            <a:xfrm>
+              <a:off x="2010502" y="2055869"/>
+              <a:ext cx="328936" cy="523220"/>
+            </a:xfrm>
+            <a:prstGeom prst="rect">
+              <a:avLst/>
+            </a:prstGeom>
+          </p:spPr>
+          <p:txBody>
+            <a:bodyPr wrap="none">
+              <a:spAutoFit/>
+            </a:bodyPr>
+            <a:lstStyle/>
+            <a:p>
+              <a:pPr algn="ctr"/>
+              <a:r>
+                <a:rPr lang="en-US" altLang="en-US" sz="2800" dirty="0">
+                  <a:solidFill>
+                    <a:schemeClr val="bg1">
+                      <a:lumMod val="95000"/>
+                    </a:schemeClr>
+                  </a:solidFill>
+                  <a:latin typeface="Montserrat"/>
+                </a:rPr>
+                <a:t>°</a:t>
+              </a:r>
+              <a:endParaRPr lang="en-US" sz="2800" dirty="0">
+                <a:solidFill>
+                  <a:schemeClr val="bg1">
+                    <a:lumMod val="95000"/>
+                  </a:schemeClr>
+                </a:solidFill>
+                <a:latin typeface="Montserrat"/>
+                <a:ea typeface="Roboto" panose="02000000000000000000" pitchFamily="2" charset="0"/>
+              </a:endParaRPr>
+            </a:p>
+          </p:txBody>
+        </p:sp>
+      </p:grpSp>
+      <p:grpSp>
+        <p:nvGrpSpPr>
+          <p:cNvPr id="48" name="Group 47">
+            <a:extLst>
+              <a:ext uri="{FF2B5EF4-FFF2-40B4-BE49-F238E27FC236}">
+                <a16:creationId xmlns:a16="http://schemas.microsoft.com/office/drawing/2014/main" id="{02C31CD5-7106-1E0E-4FDF-C46B7A25E6D4}"/>
+              </a:ext>
+            </a:extLst>
+          </p:cNvPr>
+          <p:cNvGrpSpPr/>
+          <p:nvPr/>
+        </p:nvGrpSpPr>
+        <p:grpSpPr>
+          <a:xfrm>
+            <a:off x="342597" y="1892952"/>
+            <a:ext cx="3032950" cy="1892069"/>
+            <a:chOff x="4985753" y="2421331"/>
+            <a:chExt cx="3114721" cy="1943080"/>
+          </a:xfrm>
+        </p:grpSpPr>
+        <p:pic>
+          <p:nvPicPr>
+            <p:cNvPr id="49" name="Picture 48" descr="A black background with a circular design&#10;&#10;Description automatically generated">
+              <a:extLst>
+                <a:ext uri="{FF2B5EF4-FFF2-40B4-BE49-F238E27FC236}">
+                  <a16:creationId xmlns:a16="http://schemas.microsoft.com/office/drawing/2014/main" id="{63214B3F-DF22-0FA3-BA6C-F8590C62ED6F}"/>
+                </a:ext>
+              </a:extLst>
+            </p:cNvPr>
+            <p:cNvPicPr>
+              <a:picLocks noChangeAspect="1"/>
+            </p:cNvPicPr>
+            <p:nvPr/>
+          </p:nvPicPr>
+          <p:blipFill>
+            <a:blip r:embed="rId5">
+              <a:lum bright="70000" contrast="-70000"/>
+              <a:extLst>
+                <a:ext uri="{28A0092B-C50C-407E-A947-70E740481C1C}">
+                  <a14:useLocalDpi xmlns:a14="http://schemas.microsoft.com/office/drawing/2010/main" val="0"/>
+                </a:ext>
+              </a:extLst>
+            </a:blip>
+            <a:stretch>
+              <a:fillRect/>
+            </a:stretch>
+          </p:blipFill>
+          <p:spPr>
+            <a:xfrm>
+              <a:off x="7573516" y="2953793"/>
+              <a:ext cx="386261" cy="386261"/>
+            </a:xfrm>
+            <a:prstGeom prst="rect">
+              <a:avLst/>
+            </a:prstGeom>
+          </p:spPr>
+        </p:pic>
+        <p:pic>
+          <p:nvPicPr>
+            <p:cNvPr id="50" name="Picture 49" descr="A white line drawing of a leaf&#10;&#10;Description automatically generated">
+              <a:extLst>
+                <a:ext uri="{FF2B5EF4-FFF2-40B4-BE49-F238E27FC236}">
+                  <a16:creationId xmlns:a16="http://schemas.microsoft.com/office/drawing/2014/main" id="{5695B650-3B6C-D13F-5D64-82A4301EAE2A}"/>
+                </a:ext>
+              </a:extLst>
+            </p:cNvPr>
+            <p:cNvPicPr>
+              <a:picLocks noChangeAspect="1"/>
+            </p:cNvPicPr>
+            <p:nvPr/>
+          </p:nvPicPr>
+          <p:blipFill>
+            <a:blip r:embed="rId6">
+              <a:extLst>
+                <a:ext uri="{28A0092B-C50C-407E-A947-70E740481C1C}">
+                  <a14:useLocalDpi xmlns:a14="http://schemas.microsoft.com/office/drawing/2010/main" val="0"/>
+                </a:ext>
+              </a:extLst>
+            </a:blip>
+            <a:stretch>
+              <a:fillRect/>
+            </a:stretch>
+          </p:blipFill>
+          <p:spPr>
+            <a:xfrm>
+              <a:off x="7609088" y="2421331"/>
+              <a:ext cx="310753" cy="310753"/>
+            </a:xfrm>
+            <a:prstGeom prst="rect">
+              <a:avLst/>
+            </a:prstGeom>
+          </p:spPr>
+        </p:pic>
+        <p:pic>
+          <p:nvPicPr>
+            <p:cNvPr id="51" name="Picture 50" descr="A wifi symbol on a black background&#10;&#10;Description automatically generated">
+              <a:extLst>
+                <a:ext uri="{FF2B5EF4-FFF2-40B4-BE49-F238E27FC236}">
+                  <a16:creationId xmlns:a16="http://schemas.microsoft.com/office/drawing/2014/main" id="{88E06A24-E74D-8F84-6EFA-F581C0B67749}"/>
+                </a:ext>
+              </a:extLst>
+            </p:cNvPr>
+            <p:cNvPicPr>
+              <a:picLocks noChangeAspect="1"/>
+            </p:cNvPicPr>
+            <p:nvPr/>
+          </p:nvPicPr>
+          <p:blipFill>
+            <a:blip r:embed="rId7">
+              <a:extLst>
+                <a:ext uri="{28A0092B-C50C-407E-A947-70E740481C1C}">
+                  <a14:useLocalDpi xmlns:a14="http://schemas.microsoft.com/office/drawing/2010/main" val="0"/>
+                </a:ext>
+              </a:extLst>
+            </a:blip>
+            <a:stretch>
+              <a:fillRect/>
+            </a:stretch>
+          </p:blipFill>
+          <p:spPr>
+            <a:xfrm>
+              <a:off x="5158562" y="2990924"/>
+              <a:ext cx="361847" cy="361847"/>
+            </a:xfrm>
+            <a:prstGeom prst="rect">
+              <a:avLst/>
+            </a:prstGeom>
+          </p:spPr>
+        </p:pic>
+        <p:pic>
+          <p:nvPicPr>
+            <p:cNvPr id="52" name="Picture 51" descr="A white line drawing of gears&#10;&#10;Description automatically generated">
+              <a:extLst>
+                <a:ext uri="{FF2B5EF4-FFF2-40B4-BE49-F238E27FC236}">
+                  <a16:creationId xmlns:a16="http://schemas.microsoft.com/office/drawing/2014/main" id="{F505A953-A8F9-CC16-DA6A-D8A1206B34F1}"/>
+                </a:ext>
+              </a:extLst>
+            </p:cNvPr>
+            <p:cNvPicPr>
+              <a:picLocks noChangeAspect="1"/>
+            </p:cNvPicPr>
+            <p:nvPr/>
+          </p:nvPicPr>
+          <p:blipFill>
+            <a:blip r:embed="rId8">
+              <a:extLst>
+                <a:ext uri="{28A0092B-C50C-407E-A947-70E740481C1C}">
+                  <a14:useLocalDpi xmlns:a14="http://schemas.microsoft.com/office/drawing/2010/main" val="0"/>
+                </a:ext>
+              </a:extLst>
+            </a:blip>
+            <a:stretch>
+              <a:fillRect/>
+            </a:stretch>
+          </p:blipFill>
+          <p:spPr>
+            <a:xfrm>
+              <a:off x="5187444" y="2424588"/>
+              <a:ext cx="317109" cy="317110"/>
+            </a:xfrm>
+            <a:prstGeom prst="rect">
+              <a:avLst/>
+            </a:prstGeom>
+          </p:spPr>
+        </p:pic>
+        <p:pic>
+          <p:nvPicPr>
+            <p:cNvPr id="53" name="Picture 33">
+              <a:extLst>
+                <a:ext uri="{FF2B5EF4-FFF2-40B4-BE49-F238E27FC236}">
+                  <a16:creationId xmlns:a16="http://schemas.microsoft.com/office/drawing/2014/main" id="{5C563DE6-43D0-443C-734F-BEADAFE4532F}"/>
+                </a:ext>
+              </a:extLst>
+            </p:cNvPr>
+            <p:cNvPicPr>
+              <a:picLocks noChangeAspect="1"/>
+            </p:cNvPicPr>
+            <p:nvPr/>
+          </p:nvPicPr>
+          <p:blipFill>
+            <a:blip r:embed="rId9">
+              <a:extLst>
+                <a:ext uri="{96DAC541-7B7A-43D3-8B79-37D633B846F1}">
+                  <asvg:svgBlip xmlns:asvg="http://schemas.microsoft.com/office/drawing/2016/SVG/main" r:embed="rId10"/>
+                </a:ext>
+              </a:extLst>
+            </a:blip>
+            <a:srcRect/>
+            <a:stretch/>
+          </p:blipFill>
+          <p:spPr>
+            <a:xfrm>
+              <a:off x="7333356" y="3910651"/>
+              <a:ext cx="255929" cy="255929"/>
+            </a:xfrm>
+            <a:prstGeom prst="rect">
+              <a:avLst/>
+            </a:prstGeom>
+          </p:spPr>
+        </p:pic>
+        <p:sp>
+          <p:nvSpPr>
+            <p:cNvPr id="54" name="TextBox 53">
+              <a:extLst>
+                <a:ext uri="{FF2B5EF4-FFF2-40B4-BE49-F238E27FC236}">
+                  <a16:creationId xmlns:a16="http://schemas.microsoft.com/office/drawing/2014/main" id="{0F4E4AF1-568F-25B6-6985-15B7721AB31F}"/>
+                </a:ext>
+              </a:extLst>
+            </p:cNvPr>
+            <p:cNvSpPr txBox="1"/>
+            <p:nvPr/>
+          </p:nvSpPr>
+          <p:spPr bwMode="auto">
+            <a:xfrm>
+              <a:off x="5015017" y="2731821"/>
+              <a:ext cx="656785" cy="122347"/>
+            </a:xfrm>
+            <a:prstGeom prst="rect">
+              <a:avLst/>
+            </a:prstGeom>
+            <a:noFill/>
+            <a:ln w="9525">
+              <a:noFill/>
+              <a:miter lim="800000"/>
+              <a:headEnd/>
+              <a:tailEnd/>
+            </a:ln>
+            <a:effectLst/>
+          </p:spPr>
+          <p:txBody>
+            <a:bodyPr wrap="square" lIns="0" tIns="0" rIns="0" bIns="0" rtlCol="0" anchor="t" anchorCtr="0">
+              <a:spAutoFit/>
+            </a:bodyPr>
+            <a:lstStyle/>
+            <a:p>
+              <a:pPr marL="0" marR="0" lvl="0" indent="0" algn="ctr" defTabSz="432000" rtl="0" eaLnBrk="0" fontAlgn="auto" latinLnBrk="0" hangingPunct="0">
+                <a:lnSpc>
+                  <a:spcPct val="120000"/>
+                </a:lnSpc>
+                <a:spcBef>
+                  <a:spcPts val="0"/>
+                </a:spcBef>
+                <a:spcAft>
+                  <a:spcPts val="0"/>
+                </a:spcAft>
+                <a:buClr>
+                  <a:srgbClr val="0A8276"/>
+                </a:buClr>
+                <a:buSzTx/>
+                <a:buFont typeface="Arial"/>
+                <a:buNone/>
+                <a:tabLst/>
+                <a:defRPr/>
+              </a:pPr>
+              <a:r>
+                <a:rPr kumimoji="0" lang="en-IN" sz="700" b="1" i="0" u="none" strike="noStrike" kern="0" cap="all" spc="0" normalizeH="0" baseline="0" noProof="0" dirty="0">
+                  <a:ln>
+                    <a:noFill/>
+                  </a:ln>
+                  <a:solidFill>
+                    <a:srgbClr val="FFFFFF"/>
+                  </a:solidFill>
+                  <a:effectLst/>
+                  <a:uLnTx/>
+                  <a:uFillTx/>
+                  <a:latin typeface="Montserrat" panose="00000500000000000000" pitchFamily="2" charset="0"/>
+                  <a:cs typeface="Arial"/>
+                  <a:sym typeface="Arial"/>
+                </a:rPr>
+                <a:t>SETTINGS</a:t>
+              </a:r>
+              <a:endParaRPr kumimoji="0" lang="en-US" sz="700" b="1" i="0" u="none" strike="noStrike" kern="0" cap="all" spc="0" normalizeH="0" baseline="0" noProof="0" dirty="0">
+                <a:ln>
+                  <a:noFill/>
+                </a:ln>
+                <a:solidFill>
+                  <a:srgbClr val="FFFFFF"/>
+                </a:solidFill>
+                <a:effectLst/>
+                <a:uLnTx/>
+                <a:uFillTx/>
+                <a:latin typeface="Montserrat" panose="00000500000000000000" pitchFamily="2" charset="0"/>
+                <a:cs typeface="Arial"/>
+                <a:sym typeface="Arial"/>
+              </a:endParaRPr>
+            </a:p>
+          </p:txBody>
+        </p:sp>
+        <p:sp>
+          <p:nvSpPr>
+            <p:cNvPr id="55" name="TextBox 54">
+              <a:extLst>
+                <a:ext uri="{FF2B5EF4-FFF2-40B4-BE49-F238E27FC236}">
+                  <a16:creationId xmlns:a16="http://schemas.microsoft.com/office/drawing/2014/main" id="{3426DA74-29F4-F3B0-E66B-DAF8BD6EA517}"/>
+                </a:ext>
+              </a:extLst>
+            </p:cNvPr>
+            <p:cNvSpPr txBox="1"/>
+            <p:nvPr/>
+          </p:nvSpPr>
+          <p:spPr bwMode="auto">
+            <a:xfrm>
+              <a:off x="5341419" y="4242064"/>
+              <a:ext cx="656785" cy="122347"/>
+            </a:xfrm>
+            <a:prstGeom prst="rect">
+              <a:avLst/>
+            </a:prstGeom>
+            <a:noFill/>
+            <a:ln w="9525">
+              <a:noFill/>
+              <a:miter lim="800000"/>
+              <a:headEnd/>
+              <a:tailEnd/>
+            </a:ln>
+            <a:effectLst/>
+          </p:spPr>
+          <p:txBody>
+            <a:bodyPr wrap="square" lIns="0" tIns="0" rIns="0" bIns="0" rtlCol="0" anchor="t" anchorCtr="0">
+              <a:spAutoFit/>
+            </a:bodyPr>
+            <a:lstStyle/>
+            <a:p>
+              <a:pPr marL="0" marR="0" lvl="0" indent="0" algn="ctr" defTabSz="432000" rtl="0" eaLnBrk="0" fontAlgn="auto" latinLnBrk="0" hangingPunct="0">
+                <a:lnSpc>
+                  <a:spcPct val="120000"/>
+                </a:lnSpc>
+                <a:spcBef>
+                  <a:spcPts val="0"/>
+                </a:spcBef>
+                <a:spcAft>
+                  <a:spcPts val="0"/>
+                </a:spcAft>
+                <a:buClr>
+                  <a:srgbClr val="0A8276"/>
+                </a:buClr>
+                <a:buSzTx/>
+                <a:buFont typeface="Arial"/>
+                <a:buNone/>
+                <a:tabLst/>
+                <a:defRPr/>
+              </a:pPr>
+              <a:r>
+                <a:rPr kumimoji="0" lang="en-IN" sz="700" b="1" i="0" u="none" strike="noStrike" kern="0" cap="all" spc="0" normalizeH="0" baseline="0" noProof="0" dirty="0">
+                  <a:ln>
+                    <a:noFill/>
+                  </a:ln>
+                  <a:solidFill>
+                    <a:srgbClr val="FFFFFF"/>
+                  </a:solidFill>
+                  <a:effectLst/>
+                  <a:uLnTx/>
+                  <a:uFillTx/>
+                  <a:latin typeface="Montserrat" panose="00000500000000000000" pitchFamily="2" charset="0"/>
+                  <a:cs typeface="Arial"/>
+                  <a:sym typeface="Arial"/>
+                </a:rPr>
+                <a:t>PRESENCE</a:t>
+              </a:r>
+              <a:endParaRPr kumimoji="0" lang="en-US" sz="700" b="1" i="0" u="none" strike="noStrike" kern="0" cap="all" spc="0" normalizeH="0" baseline="0" noProof="0" dirty="0">
+                <a:ln>
+                  <a:noFill/>
+                </a:ln>
+                <a:solidFill>
+                  <a:srgbClr val="FFFFFF"/>
+                </a:solidFill>
+                <a:effectLst/>
+                <a:uLnTx/>
+                <a:uFillTx/>
+                <a:latin typeface="Montserrat" panose="00000500000000000000" pitchFamily="2" charset="0"/>
+                <a:cs typeface="Arial"/>
+                <a:sym typeface="Arial"/>
+              </a:endParaRPr>
+            </a:p>
+          </p:txBody>
+        </p:sp>
+        <p:sp>
+          <p:nvSpPr>
+            <p:cNvPr id="56" name="TextBox 55">
+              <a:extLst>
+                <a:ext uri="{FF2B5EF4-FFF2-40B4-BE49-F238E27FC236}">
+                  <a16:creationId xmlns:a16="http://schemas.microsoft.com/office/drawing/2014/main" id="{70806EC7-8043-E8EF-5A02-4806289109A7}"/>
+                </a:ext>
+              </a:extLst>
+            </p:cNvPr>
+            <p:cNvSpPr txBox="1"/>
+            <p:nvPr/>
+          </p:nvSpPr>
+          <p:spPr bwMode="auto">
+            <a:xfrm>
+              <a:off x="7404102" y="2719000"/>
+              <a:ext cx="656785" cy="122347"/>
+            </a:xfrm>
+            <a:prstGeom prst="rect">
+              <a:avLst/>
+            </a:prstGeom>
+            <a:noFill/>
+            <a:ln w="9525">
+              <a:noFill/>
+              <a:miter lim="800000"/>
+              <a:headEnd/>
+              <a:tailEnd/>
+            </a:ln>
+            <a:effectLst/>
+          </p:spPr>
+          <p:txBody>
+            <a:bodyPr wrap="square" lIns="0" tIns="0" rIns="0" bIns="0" rtlCol="0" anchor="t" anchorCtr="0">
+              <a:spAutoFit/>
+            </a:bodyPr>
+            <a:lstStyle/>
+            <a:p>
+              <a:pPr marL="0" marR="0" lvl="0" indent="0" algn="ctr" defTabSz="432000" rtl="0" eaLnBrk="0" fontAlgn="auto" latinLnBrk="0" hangingPunct="0">
+                <a:lnSpc>
+                  <a:spcPct val="120000"/>
+                </a:lnSpc>
+                <a:spcBef>
+                  <a:spcPts val="0"/>
+                </a:spcBef>
+                <a:spcAft>
+                  <a:spcPts val="0"/>
+                </a:spcAft>
+                <a:buClr>
+                  <a:srgbClr val="0A8276"/>
+                </a:buClr>
+                <a:buSzTx/>
+                <a:buFont typeface="Arial"/>
+                <a:buNone/>
+                <a:tabLst/>
+                <a:defRPr/>
+              </a:pPr>
+              <a:r>
+                <a:rPr kumimoji="0" lang="en-IN" sz="700" b="1" i="0" u="none" strike="noStrike" kern="0" cap="all" spc="0" normalizeH="0" baseline="0" noProof="0" dirty="0">
+                  <a:ln>
+                    <a:noFill/>
+                  </a:ln>
+                  <a:solidFill>
+                    <a:srgbClr val="FFFFFF"/>
+                  </a:solidFill>
+                  <a:effectLst/>
+                  <a:uLnTx/>
+                  <a:uFillTx/>
+                  <a:latin typeface="Montserrat" panose="00000500000000000000" pitchFamily="2" charset="0"/>
+                  <a:cs typeface="Arial"/>
+                  <a:sym typeface="Arial"/>
+                </a:rPr>
+                <a:t>MODE</a:t>
+              </a:r>
+              <a:endParaRPr kumimoji="0" lang="en-US" sz="700" b="1" i="0" u="none" strike="noStrike" kern="0" cap="all" spc="0" normalizeH="0" baseline="0" noProof="0" dirty="0">
+                <a:ln>
+                  <a:noFill/>
+                </a:ln>
+                <a:solidFill>
+                  <a:srgbClr val="FFFFFF"/>
+                </a:solidFill>
+                <a:effectLst/>
+                <a:uLnTx/>
+                <a:uFillTx/>
+                <a:latin typeface="Montserrat" panose="00000500000000000000" pitchFamily="2" charset="0"/>
+                <a:cs typeface="Arial"/>
+                <a:sym typeface="Arial"/>
+              </a:endParaRPr>
+            </a:p>
+          </p:txBody>
+        </p:sp>
+        <p:sp>
+          <p:nvSpPr>
+            <p:cNvPr id="57" name="TextBox 56">
+              <a:extLst>
+                <a:ext uri="{FF2B5EF4-FFF2-40B4-BE49-F238E27FC236}">
+                  <a16:creationId xmlns:a16="http://schemas.microsoft.com/office/drawing/2014/main" id="{DA013A13-0D06-47CF-BAA7-CC8204DA928C}"/>
+                </a:ext>
+              </a:extLst>
+            </p:cNvPr>
+            <p:cNvSpPr txBox="1"/>
+            <p:nvPr/>
+          </p:nvSpPr>
+          <p:spPr bwMode="auto">
+            <a:xfrm>
+              <a:off x="7099120" y="4239783"/>
+              <a:ext cx="743757" cy="122347"/>
+            </a:xfrm>
+            <a:prstGeom prst="rect">
+              <a:avLst/>
+            </a:prstGeom>
+            <a:noFill/>
+            <a:ln w="9525">
+              <a:noFill/>
+              <a:miter lim="800000"/>
+              <a:headEnd/>
+              <a:tailEnd/>
+            </a:ln>
+            <a:effectLst/>
+          </p:spPr>
+          <p:txBody>
+            <a:bodyPr wrap="square" lIns="0" tIns="0" rIns="0" bIns="0" rtlCol="0" anchor="t" anchorCtr="0">
+              <a:spAutoFit/>
+            </a:bodyPr>
+            <a:lstStyle/>
+            <a:p>
+              <a:pPr marL="0" marR="0" lvl="0" indent="0" algn="ctr" defTabSz="432000" rtl="0" eaLnBrk="0" fontAlgn="auto" latinLnBrk="0" hangingPunct="0">
+                <a:lnSpc>
+                  <a:spcPct val="120000"/>
+                </a:lnSpc>
+                <a:spcBef>
+                  <a:spcPts val="0"/>
+                </a:spcBef>
+                <a:spcAft>
+                  <a:spcPts val="0"/>
+                </a:spcAft>
+                <a:buClr>
+                  <a:srgbClr val="0A8276"/>
+                </a:buClr>
+                <a:buSzTx/>
+                <a:buFont typeface="Arial"/>
+                <a:buNone/>
+                <a:tabLst/>
+                <a:defRPr/>
+              </a:pPr>
+              <a:r>
+                <a:rPr kumimoji="0" lang="en-IN" sz="700" b="1" i="0" u="none" strike="noStrike" kern="0" cap="all" spc="0" normalizeH="0" baseline="0" noProof="0" dirty="0">
+                  <a:ln>
+                    <a:noFill/>
+                  </a:ln>
+                  <a:solidFill>
+                    <a:srgbClr val="FFFFFF"/>
+                  </a:solidFill>
+                  <a:effectLst/>
+                  <a:uLnTx/>
+                  <a:uFillTx/>
+                  <a:latin typeface="Montserrat" panose="00000500000000000000" pitchFamily="2" charset="0"/>
+                  <a:cs typeface="Arial"/>
+                  <a:sym typeface="Arial"/>
+                </a:rPr>
+                <a:t>COMMAND</a:t>
+              </a:r>
+              <a:endParaRPr kumimoji="0" lang="en-US" sz="700" b="1" i="0" u="none" strike="noStrike" kern="0" cap="all" spc="0" normalizeH="0" baseline="0" noProof="0" dirty="0">
+                <a:ln>
+                  <a:noFill/>
+                </a:ln>
+                <a:solidFill>
+                  <a:srgbClr val="FFFFFF"/>
+                </a:solidFill>
+                <a:effectLst/>
+                <a:uLnTx/>
+                <a:uFillTx/>
+                <a:latin typeface="Montserrat" panose="00000500000000000000" pitchFamily="2" charset="0"/>
+                <a:cs typeface="Arial"/>
+                <a:sym typeface="Arial"/>
+              </a:endParaRPr>
+            </a:p>
+          </p:txBody>
+        </p:sp>
+        <p:sp>
+          <p:nvSpPr>
+            <p:cNvPr id="58" name="TextBox 57">
+              <a:extLst>
+                <a:ext uri="{FF2B5EF4-FFF2-40B4-BE49-F238E27FC236}">
+                  <a16:creationId xmlns:a16="http://schemas.microsoft.com/office/drawing/2014/main" id="{1C5FF157-6D09-6B97-44DB-02269F2ABC2D}"/>
+                </a:ext>
+              </a:extLst>
+            </p:cNvPr>
+            <p:cNvSpPr txBox="1"/>
+            <p:nvPr/>
+          </p:nvSpPr>
+          <p:spPr bwMode="auto">
+            <a:xfrm>
+              <a:off x="4985753" y="3322026"/>
+              <a:ext cx="743757" cy="122347"/>
+            </a:xfrm>
+            <a:prstGeom prst="rect">
+              <a:avLst/>
+            </a:prstGeom>
+            <a:noFill/>
+            <a:ln w="9525">
+              <a:noFill/>
+              <a:miter lim="800000"/>
+              <a:headEnd/>
+              <a:tailEnd/>
+            </a:ln>
+            <a:effectLst/>
+          </p:spPr>
+          <p:txBody>
+            <a:bodyPr wrap="square" lIns="0" tIns="0" rIns="0" bIns="0" rtlCol="0" anchor="t" anchorCtr="0">
+              <a:spAutoFit/>
+            </a:bodyPr>
+            <a:lstStyle/>
+            <a:p>
+              <a:pPr marL="0" marR="0" lvl="0" indent="0" algn="ctr" defTabSz="432000" rtl="0" eaLnBrk="0" fontAlgn="auto" latinLnBrk="0" hangingPunct="0">
+                <a:lnSpc>
+                  <a:spcPct val="120000"/>
+                </a:lnSpc>
+                <a:spcBef>
+                  <a:spcPts val="0"/>
+                </a:spcBef>
+                <a:spcAft>
+                  <a:spcPts val="0"/>
+                </a:spcAft>
+                <a:buClr>
+                  <a:srgbClr val="0A8276"/>
+                </a:buClr>
+                <a:buSzTx/>
+                <a:buFont typeface="Arial"/>
+                <a:buNone/>
+                <a:tabLst/>
+                <a:defRPr/>
+              </a:pPr>
+              <a:r>
+                <a:rPr kumimoji="0" lang="en-IN" sz="700" b="1" i="0" u="none" strike="noStrike" kern="0" cap="all" spc="0" normalizeH="0" baseline="0" noProof="0" dirty="0">
+                  <a:ln>
+                    <a:noFill/>
+                  </a:ln>
+                  <a:solidFill>
+                    <a:srgbClr val="FFFFFF"/>
+                  </a:solidFill>
+                  <a:effectLst/>
+                  <a:uLnTx/>
+                  <a:uFillTx/>
+                  <a:latin typeface="Montserrat" panose="00000500000000000000" pitchFamily="2" charset="0"/>
+                  <a:cs typeface="Arial"/>
+                  <a:sym typeface="Arial"/>
+                </a:rPr>
+                <a:t>CONNECT</a:t>
+              </a:r>
+              <a:endParaRPr kumimoji="0" lang="en-US" sz="700" b="1" i="0" u="none" strike="noStrike" kern="0" cap="all" spc="0" normalizeH="0" baseline="0" noProof="0" dirty="0">
+                <a:ln>
+                  <a:noFill/>
+                </a:ln>
+                <a:solidFill>
+                  <a:srgbClr val="FFFFFF"/>
+                </a:solidFill>
+                <a:effectLst/>
+                <a:uLnTx/>
+                <a:uFillTx/>
+                <a:latin typeface="Montserrat" panose="00000500000000000000" pitchFamily="2" charset="0"/>
+                <a:cs typeface="Arial"/>
+                <a:sym typeface="Arial"/>
+              </a:endParaRPr>
+            </a:p>
+          </p:txBody>
+        </p:sp>
+        <p:pic>
+          <p:nvPicPr>
+            <p:cNvPr id="59" name="Graphic 58" descr="Man outline">
+              <a:extLst>
+                <a:ext uri="{FF2B5EF4-FFF2-40B4-BE49-F238E27FC236}">
+                  <a16:creationId xmlns:a16="http://schemas.microsoft.com/office/drawing/2014/main" id="{369A8F6E-4593-48B3-D853-C0FE17345F39}"/>
+                </a:ext>
+              </a:extLst>
+            </p:cNvPr>
+            <p:cNvPicPr>
+              <a:picLocks noChangeAspect="1"/>
+            </p:cNvPicPr>
+            <p:nvPr/>
+          </p:nvPicPr>
+          <p:blipFill>
+            <a:blip r:embed="rId11">
+              <a:extLst>
+                <a:ext uri="{96DAC541-7B7A-43D3-8B79-37D633B846F1}">
+                  <asvg:svgBlip xmlns:asvg="http://schemas.microsoft.com/office/drawing/2016/SVG/main" r:embed="rId12"/>
+                </a:ext>
+              </a:extLst>
+            </a:blip>
+            <a:stretch>
+              <a:fillRect/>
+            </a:stretch>
+          </p:blipFill>
+          <p:spPr>
+            <a:xfrm>
+              <a:off x="5539626" y="3906559"/>
+              <a:ext cx="253373" cy="253373"/>
+            </a:xfrm>
+            <a:prstGeom prst="rect">
+              <a:avLst/>
+            </a:prstGeom>
+          </p:spPr>
+        </p:pic>
+        <p:sp>
+          <p:nvSpPr>
+            <p:cNvPr id="60" name="TextBox 59">
+              <a:extLst>
+                <a:ext uri="{FF2B5EF4-FFF2-40B4-BE49-F238E27FC236}">
+                  <a16:creationId xmlns:a16="http://schemas.microsoft.com/office/drawing/2014/main" id="{B02DD352-D82D-3020-1E54-38EAE95F6D5E}"/>
+                </a:ext>
+              </a:extLst>
+            </p:cNvPr>
+            <p:cNvSpPr txBox="1"/>
+            <p:nvPr/>
+          </p:nvSpPr>
+          <p:spPr bwMode="auto">
+            <a:xfrm>
+              <a:off x="7443689" y="3325312"/>
+              <a:ext cx="656785" cy="122347"/>
+            </a:xfrm>
+            <a:prstGeom prst="rect">
+              <a:avLst/>
+            </a:prstGeom>
+            <a:noFill/>
+            <a:ln w="9525">
+              <a:noFill/>
+              <a:miter lim="800000"/>
+              <a:headEnd/>
+              <a:tailEnd/>
+            </a:ln>
+            <a:effectLst/>
+          </p:spPr>
+          <p:txBody>
+            <a:bodyPr wrap="square" lIns="0" tIns="0" rIns="0" bIns="0" rtlCol="0" anchor="t" anchorCtr="0">
+              <a:spAutoFit/>
+            </a:bodyPr>
+            <a:lstStyle/>
+            <a:p>
+              <a:pPr marL="0" marR="0" lvl="0" indent="0" algn="ctr" defTabSz="432000" rtl="0" eaLnBrk="0" fontAlgn="auto" latinLnBrk="0" hangingPunct="0">
+                <a:lnSpc>
+                  <a:spcPct val="120000"/>
+                </a:lnSpc>
+                <a:spcBef>
+                  <a:spcPts val="0"/>
+                </a:spcBef>
+                <a:spcAft>
+                  <a:spcPts val="0"/>
+                </a:spcAft>
+                <a:buClr>
+                  <a:srgbClr val="0A8276"/>
+                </a:buClr>
+                <a:buSzTx/>
+                <a:buFont typeface="Arial"/>
+                <a:buNone/>
+                <a:tabLst/>
+                <a:defRPr/>
+              </a:pPr>
+              <a:r>
+                <a:rPr kumimoji="0" lang="en-IN" sz="700" b="1" i="0" u="none" strike="noStrike" kern="0" cap="all" spc="0" normalizeH="0" baseline="0" noProof="0" dirty="0">
+                  <a:ln>
+                    <a:noFill/>
+                  </a:ln>
+                  <a:solidFill>
+                    <a:srgbClr val="FFFFFF"/>
+                  </a:solidFill>
+                  <a:effectLst/>
+                  <a:uLnTx/>
+                  <a:uFillTx/>
+                  <a:latin typeface="Montserrat" panose="00000500000000000000" pitchFamily="2" charset="0"/>
+                  <a:cs typeface="Arial"/>
+                  <a:sym typeface="Arial"/>
+                </a:rPr>
+                <a:t>LOW</a:t>
+              </a:r>
+              <a:endParaRPr kumimoji="0" lang="en-US" sz="700" b="1" i="0" u="none" strike="noStrike" kern="0" cap="all" spc="0" normalizeH="0" baseline="0" noProof="0" dirty="0">
+                <a:ln>
+                  <a:noFill/>
+                </a:ln>
+                <a:solidFill>
+                  <a:srgbClr val="FFFFFF"/>
+                </a:solidFill>
+                <a:effectLst/>
+                <a:uLnTx/>
+                <a:uFillTx/>
+                <a:latin typeface="Montserrat" panose="00000500000000000000" pitchFamily="2" charset="0"/>
+                <a:cs typeface="Arial"/>
+                <a:sym typeface="Arial"/>
+              </a:endParaRPr>
+            </a:p>
+          </p:txBody>
+        </p:sp>
+      </p:grpSp>
+      <p:sp>
+        <p:nvSpPr>
+          <p:cNvPr id="22" name="Rectangle: Top Corners Rounded 21">
+            <a:extLst>
+              <a:ext uri="{FF2B5EF4-FFF2-40B4-BE49-F238E27FC236}">
+                <a16:creationId xmlns:a16="http://schemas.microsoft.com/office/drawing/2014/main" id="{9F20BB76-7199-47F8-6012-F5406F4D62EB}"/>
+              </a:ext>
+            </a:extLst>
+          </p:cNvPr>
+          <p:cNvSpPr/>
+          <p:nvPr/>
+        </p:nvSpPr>
+        <p:spPr bwMode="auto">
+          <a:xfrm rot="10800000">
+            <a:off x="4715726" y="1087623"/>
+            <a:ext cx="2916905" cy="585522"/>
+          </a:xfrm>
+          <a:prstGeom prst="round2SameRect">
+            <a:avLst>
+              <a:gd name="adj1" fmla="val 44038"/>
+              <a:gd name="adj2" fmla="val 0"/>
+            </a:avLst>
+          </a:prstGeom>
+          <a:solidFill>
+            <a:srgbClr val="086259">
+              <a:alpha val="50000"/>
+            </a:srgbClr>
+          </a:solidFill>
+          <a:ln w="12700">
+            <a:solidFill>
+              <a:srgbClr val="9BBA43"/>
+            </a:solidFill>
+            <a:miter lim="800000"/>
+            <a:headEnd/>
+            <a:tailEnd/>
+          </a:ln>
+          <a:effectLst>
+            <a:outerShdw blurRad="63500" dist="38100" dir="5400000" sx="101000" sy="101000" algn="t" rotWithShape="0">
+              <a:prstClr val="black">
+                <a:alpha val="50000"/>
+              </a:prstClr>
+            </a:outerShdw>
+          </a:effectLst>
+        </p:spPr>
+        <p:txBody>
+          <a:bodyPr wrap="square" lIns="72000" tIns="72000" rIns="72000" bIns="72000" rtlCol="0" anchor="ctr"/>
+          <a:lstStyle/>
+          <a:p>
+            <a:pPr algn="ctr" defTabSz="576000" eaLnBrk="0" hangingPunct="0">
+              <a:lnSpc>
+                <a:spcPct val="120000"/>
+              </a:lnSpc>
+            </a:pPr>
+            <a:endParaRPr lang="en-US" sz="1600" baseline="0" dirty="0">
+              <a:solidFill>
+                <a:schemeClr val="bg1"/>
+              </a:solidFill>
+              <a:latin typeface="+mn-lt"/>
+              <a:ea typeface="+mn-ea"/>
+              <a:cs typeface="+mn-cs"/>
+            </a:endParaRPr>
+          </a:p>
+        </p:txBody>
+      </p:sp>
+      <p:sp>
+        <p:nvSpPr>
+          <p:cNvPr id="69" name="Rectangle: Top Corners Rounded 68">
+            <a:extLst>
+              <a:ext uri="{FF2B5EF4-FFF2-40B4-BE49-F238E27FC236}">
+                <a16:creationId xmlns:a16="http://schemas.microsoft.com/office/drawing/2014/main" id="{10483FE2-5AE6-E339-1363-B899B20A181F}"/>
+              </a:ext>
+            </a:extLst>
+          </p:cNvPr>
+          <p:cNvSpPr/>
+          <p:nvPr/>
+        </p:nvSpPr>
+        <p:spPr bwMode="auto">
+          <a:xfrm rot="10800000">
+            <a:off x="554573" y="869279"/>
+            <a:ext cx="2663154" cy="543053"/>
+          </a:xfrm>
+          <a:prstGeom prst="round2SameRect">
+            <a:avLst>
+              <a:gd name="adj1" fmla="val 37899"/>
+              <a:gd name="adj2" fmla="val 0"/>
+            </a:avLst>
+          </a:prstGeom>
+          <a:solidFill>
+            <a:srgbClr val="086259">
+              <a:alpha val="50000"/>
+            </a:srgbClr>
+          </a:solidFill>
+          <a:ln w="12700">
+            <a:solidFill>
+              <a:srgbClr val="9BBA43"/>
+            </a:solidFill>
+            <a:miter lim="800000"/>
+            <a:headEnd/>
+            <a:tailEnd/>
+          </a:ln>
+          <a:effectLst>
+            <a:outerShdw blurRad="63500" dist="38100" dir="5400000" sx="101000" sy="101000" algn="t" rotWithShape="0">
+              <a:prstClr val="black">
+                <a:alpha val="50000"/>
+              </a:prstClr>
+            </a:outerShdw>
+          </a:effectLst>
+        </p:spPr>
+        <p:txBody>
+          <a:bodyPr wrap="square" lIns="72000" tIns="72000" rIns="72000" bIns="72000" rtlCol="0" anchor="ctr"/>
+          <a:lstStyle/>
+          <a:p>
+            <a:pPr algn="ctr" defTabSz="576000" eaLnBrk="0" hangingPunct="0">
+              <a:lnSpc>
+                <a:spcPct val="120000"/>
+              </a:lnSpc>
+            </a:pPr>
+            <a:endParaRPr lang="en-US" sz="1600" baseline="0" dirty="0">
+              <a:solidFill>
+                <a:schemeClr val="bg1"/>
+              </a:solidFill>
+              <a:latin typeface="+mn-lt"/>
+              <a:ea typeface="+mn-ea"/>
+              <a:cs typeface="+mn-cs"/>
+            </a:endParaRPr>
+          </a:p>
+        </p:txBody>
+      </p:sp>
+      <p:sp>
+        <p:nvSpPr>
+          <p:cNvPr id="90" name="Rectangle 89">
+            <a:extLst>
+              <a:ext uri="{FF2B5EF4-FFF2-40B4-BE49-F238E27FC236}">
+                <a16:creationId xmlns:a16="http://schemas.microsoft.com/office/drawing/2014/main" id="{498DA128-7118-AD06-9D48-43212ADBFA3F}"/>
+              </a:ext>
+            </a:extLst>
+          </p:cNvPr>
+          <p:cNvSpPr/>
+          <p:nvPr/>
+        </p:nvSpPr>
+        <p:spPr bwMode="auto">
+          <a:xfrm>
+            <a:off x="987605" y="4508953"/>
+            <a:ext cx="133652" cy="225561"/>
+          </a:xfrm>
+          <a:prstGeom prst="rect">
+            <a:avLst/>
+          </a:prstGeom>
+          <a:solidFill>
+            <a:schemeClr val="accent4"/>
+          </a:solidFill>
+          <a:ln w="9525">
+            <a:noFill/>
+            <a:miter lim="800000"/>
+            <a:headEnd/>
+            <a:tailEnd/>
+          </a:ln>
+          <a:effectLst>
+            <a:glow rad="38100">
+              <a:schemeClr val="accent4">
+                <a:satMod val="175000"/>
+                <a:alpha val="20000"/>
+              </a:schemeClr>
+            </a:glow>
+          </a:effectLst>
+        </p:spPr>
+        <p:txBody>
+          <a:bodyPr wrap="square" lIns="72000" tIns="72000" rIns="72000" bIns="72000" rtlCol="0" anchor="ctr"/>
+          <a:lstStyle/>
+          <a:p>
+            <a:pPr algn="ctr" defTabSz="576000" eaLnBrk="0" hangingPunct="0">
+              <a:lnSpc>
+                <a:spcPct val="120000"/>
+              </a:lnSpc>
+            </a:pPr>
+            <a:endParaRPr lang="en-IN" sz="1600" baseline="0" dirty="0">
+              <a:solidFill>
+                <a:schemeClr val="bg1"/>
+              </a:solidFill>
+              <a:latin typeface="+mn-lt"/>
+              <a:ea typeface="+mn-ea"/>
+              <a:cs typeface="+mn-cs"/>
+            </a:endParaRPr>
+          </a:p>
+        </p:txBody>
+      </p:sp>
+      <p:sp>
+        <p:nvSpPr>
+          <p:cNvPr id="91" name="Rectangle 90">
+            <a:extLst>
+              <a:ext uri="{FF2B5EF4-FFF2-40B4-BE49-F238E27FC236}">
+                <a16:creationId xmlns:a16="http://schemas.microsoft.com/office/drawing/2014/main" id="{6F1C4B3C-1FF1-12F2-C402-A0E297232BB2}"/>
+              </a:ext>
+            </a:extLst>
+          </p:cNvPr>
+          <p:cNvSpPr/>
+          <p:nvPr/>
+        </p:nvSpPr>
+        <p:spPr bwMode="auto">
+          <a:xfrm>
+            <a:off x="987605" y="4469380"/>
+            <a:ext cx="133652" cy="41425"/>
+          </a:xfrm>
+          <a:prstGeom prst="rect">
+            <a:avLst/>
+          </a:prstGeom>
+          <a:solidFill>
+            <a:schemeClr val="accent5">
+              <a:alpha val="40000"/>
+            </a:schemeClr>
+          </a:solidFill>
+          <a:ln w="9525">
+            <a:noFill/>
+            <a:miter lim="800000"/>
+            <a:headEnd/>
+            <a:tailEnd/>
+          </a:ln>
+        </p:spPr>
+        <p:txBody>
+          <a:bodyPr wrap="square" lIns="72000" tIns="72000" rIns="72000" bIns="72000" rtlCol="0" anchor="ctr"/>
+          <a:lstStyle/>
+          <a:p>
+            <a:pPr algn="ctr" defTabSz="576000" eaLnBrk="0" hangingPunct="0">
+              <a:lnSpc>
+                <a:spcPct val="120000"/>
+              </a:lnSpc>
+            </a:pPr>
+            <a:endParaRPr lang="en-IN" sz="1600" baseline="0" dirty="0">
+              <a:solidFill>
+                <a:schemeClr val="bg1"/>
+              </a:solidFill>
+              <a:latin typeface="+mn-lt"/>
+              <a:ea typeface="+mn-ea"/>
+              <a:cs typeface="+mn-cs"/>
+            </a:endParaRPr>
+          </a:p>
+        </p:txBody>
+      </p:sp>
+      <p:sp>
+        <p:nvSpPr>
+          <p:cNvPr id="92" name="Rectangle 91">
+            <a:extLst>
+              <a:ext uri="{FF2B5EF4-FFF2-40B4-BE49-F238E27FC236}">
+                <a16:creationId xmlns:a16="http://schemas.microsoft.com/office/drawing/2014/main" id="{F5DA86AB-B8CC-B643-FF31-EECE85090AC7}"/>
+              </a:ext>
+            </a:extLst>
+          </p:cNvPr>
+          <p:cNvSpPr/>
+          <p:nvPr/>
+        </p:nvSpPr>
+        <p:spPr bwMode="auto">
+          <a:xfrm>
+            <a:off x="987605" y="4430371"/>
+            <a:ext cx="133652" cy="39674"/>
+          </a:xfrm>
+          <a:prstGeom prst="rect">
+            <a:avLst/>
+          </a:prstGeom>
+          <a:solidFill>
+            <a:schemeClr val="accent3">
+              <a:alpha val="40000"/>
+            </a:schemeClr>
+          </a:solidFill>
+          <a:ln w="9525">
+            <a:noFill/>
+            <a:miter lim="800000"/>
+            <a:headEnd/>
+            <a:tailEnd/>
+          </a:ln>
+        </p:spPr>
+        <p:txBody>
+          <a:bodyPr wrap="square" lIns="72000" tIns="72000" rIns="72000" bIns="72000" rtlCol="0" anchor="ctr"/>
+          <a:lstStyle/>
+          <a:p>
+            <a:pPr algn="ctr" defTabSz="576000" eaLnBrk="0" hangingPunct="0">
+              <a:lnSpc>
+                <a:spcPct val="120000"/>
+              </a:lnSpc>
+            </a:pPr>
+            <a:endParaRPr lang="en-IN" sz="1600" baseline="0" dirty="0">
+              <a:solidFill>
+                <a:schemeClr val="bg1"/>
+              </a:solidFill>
+              <a:latin typeface="+mn-lt"/>
+              <a:ea typeface="+mn-ea"/>
+              <a:cs typeface="+mn-cs"/>
+            </a:endParaRPr>
+          </a:p>
+        </p:txBody>
+      </p:sp>
+      <p:sp>
+        <p:nvSpPr>
+          <p:cNvPr id="106" name="Rectangle 105">
+            <a:extLst>
+              <a:ext uri="{FF2B5EF4-FFF2-40B4-BE49-F238E27FC236}">
+                <a16:creationId xmlns:a16="http://schemas.microsoft.com/office/drawing/2014/main" id="{E1D8067D-519A-01D4-EF79-DD05895B88D6}"/>
+              </a:ext>
+            </a:extLst>
+          </p:cNvPr>
+          <p:cNvSpPr/>
+          <p:nvPr/>
+        </p:nvSpPr>
+        <p:spPr bwMode="auto">
+          <a:xfrm>
+            <a:off x="987605" y="4389047"/>
+            <a:ext cx="133652" cy="41425"/>
+          </a:xfrm>
+          <a:prstGeom prst="rect">
+            <a:avLst/>
+          </a:prstGeom>
+          <a:solidFill>
+            <a:srgbClr val="FF0000">
+              <a:alpha val="40000"/>
+            </a:srgbClr>
+          </a:solidFill>
+          <a:ln w="9525">
+            <a:noFill/>
+            <a:miter lim="800000"/>
+            <a:headEnd/>
+            <a:tailEnd/>
+          </a:ln>
+        </p:spPr>
+        <p:txBody>
+          <a:bodyPr wrap="square" lIns="72000" tIns="72000" rIns="72000" bIns="72000" rtlCol="0" anchor="ctr"/>
+          <a:lstStyle/>
+          <a:p>
+            <a:pPr algn="ctr" defTabSz="576000" eaLnBrk="0" hangingPunct="0">
+              <a:lnSpc>
+                <a:spcPct val="120000"/>
+              </a:lnSpc>
+            </a:pPr>
+            <a:endParaRPr lang="en-IN" sz="1600" baseline="0" dirty="0">
+              <a:solidFill>
+                <a:schemeClr val="bg1"/>
+              </a:solidFill>
+              <a:latin typeface="+mn-lt"/>
+              <a:ea typeface="+mn-ea"/>
+              <a:cs typeface="+mn-cs"/>
+            </a:endParaRPr>
+          </a:p>
+        </p:txBody>
+      </p:sp>
+      <p:sp>
+        <p:nvSpPr>
+          <p:cNvPr id="136" name="Rectangle 135">
+            <a:extLst>
+              <a:ext uri="{FF2B5EF4-FFF2-40B4-BE49-F238E27FC236}">
+                <a16:creationId xmlns:a16="http://schemas.microsoft.com/office/drawing/2014/main" id="{AAF7EF64-BD9F-CEE6-60CE-3287EB3FDE2B}"/>
+              </a:ext>
+            </a:extLst>
+          </p:cNvPr>
+          <p:cNvSpPr/>
+          <p:nvPr/>
+        </p:nvSpPr>
+        <p:spPr bwMode="auto">
+          <a:xfrm>
+            <a:off x="1206831" y="4688795"/>
+            <a:ext cx="133652" cy="45719"/>
+          </a:xfrm>
+          <a:prstGeom prst="rect">
+            <a:avLst/>
+          </a:prstGeom>
+          <a:solidFill>
+            <a:schemeClr val="accent4">
+              <a:alpha val="40000"/>
+            </a:schemeClr>
+          </a:solidFill>
+          <a:ln w="9525">
+            <a:noFill/>
+            <a:miter lim="800000"/>
+            <a:headEnd/>
+            <a:tailEnd/>
+          </a:ln>
+          <a:effectLst/>
+        </p:spPr>
+        <p:txBody>
+          <a:bodyPr wrap="square" lIns="72000" tIns="72000" rIns="72000" bIns="72000" rtlCol="0" anchor="ctr"/>
+          <a:lstStyle/>
+          <a:p>
+            <a:pPr algn="ctr" defTabSz="576000" eaLnBrk="0" hangingPunct="0">
+              <a:lnSpc>
+                <a:spcPct val="120000"/>
+              </a:lnSpc>
+            </a:pPr>
+            <a:endParaRPr lang="en-IN" sz="1600" baseline="0" dirty="0">
+              <a:solidFill>
+                <a:schemeClr val="bg1"/>
+              </a:solidFill>
+              <a:latin typeface="+mn-lt"/>
+              <a:ea typeface="+mn-ea"/>
+              <a:cs typeface="+mn-cs"/>
+            </a:endParaRPr>
+          </a:p>
+        </p:txBody>
+      </p:sp>
+      <p:sp>
+        <p:nvSpPr>
+          <p:cNvPr id="137" name="Rectangle 136">
+            <a:extLst>
+              <a:ext uri="{FF2B5EF4-FFF2-40B4-BE49-F238E27FC236}">
+                <a16:creationId xmlns:a16="http://schemas.microsoft.com/office/drawing/2014/main" id="{A98BABDD-2428-8B8A-8D93-A49F1D2824B5}"/>
+              </a:ext>
+            </a:extLst>
+          </p:cNvPr>
+          <p:cNvSpPr/>
+          <p:nvPr/>
+        </p:nvSpPr>
+        <p:spPr bwMode="auto">
+          <a:xfrm>
+            <a:off x="1206831" y="4469380"/>
+            <a:ext cx="133652" cy="219415"/>
+          </a:xfrm>
+          <a:prstGeom prst="rect">
+            <a:avLst/>
+          </a:prstGeom>
+          <a:solidFill>
+            <a:schemeClr val="accent5"/>
+          </a:solidFill>
+          <a:ln w="9525">
+            <a:noFill/>
+            <a:miter lim="800000"/>
+            <a:headEnd/>
+            <a:tailEnd/>
+          </a:ln>
+          <a:effectLst>
+            <a:glow rad="38100">
+              <a:schemeClr val="accent5">
+                <a:alpha val="20000"/>
+              </a:schemeClr>
+            </a:glow>
+          </a:effectLst>
+        </p:spPr>
+        <p:txBody>
+          <a:bodyPr wrap="square" lIns="72000" tIns="72000" rIns="72000" bIns="72000" rtlCol="0" anchor="ctr"/>
+          <a:lstStyle/>
+          <a:p>
+            <a:pPr algn="ctr" defTabSz="576000" eaLnBrk="0" hangingPunct="0">
+              <a:lnSpc>
+                <a:spcPct val="120000"/>
+              </a:lnSpc>
+            </a:pPr>
+            <a:endParaRPr lang="en-IN" sz="1600" dirty="0">
+              <a:solidFill>
+                <a:schemeClr val="bg1"/>
+              </a:solidFill>
+              <a:latin typeface="+mn-lt"/>
+              <a:ea typeface="+mn-ea"/>
+              <a:cs typeface="+mn-cs"/>
+            </a:endParaRPr>
+          </a:p>
+        </p:txBody>
+      </p:sp>
+      <p:sp>
+        <p:nvSpPr>
+          <p:cNvPr id="138" name="Rectangle 137">
+            <a:extLst>
+              <a:ext uri="{FF2B5EF4-FFF2-40B4-BE49-F238E27FC236}">
+                <a16:creationId xmlns:a16="http://schemas.microsoft.com/office/drawing/2014/main" id="{82E548FD-A545-1A82-19B0-F5F222EE4EE1}"/>
+              </a:ext>
+            </a:extLst>
+          </p:cNvPr>
+          <p:cNvSpPr/>
+          <p:nvPr/>
+        </p:nvSpPr>
+        <p:spPr bwMode="auto">
+          <a:xfrm>
+            <a:off x="1206831" y="4430371"/>
+            <a:ext cx="133652" cy="39674"/>
+          </a:xfrm>
+          <a:prstGeom prst="rect">
+            <a:avLst/>
+          </a:prstGeom>
+          <a:solidFill>
+            <a:schemeClr val="accent3">
+              <a:alpha val="40000"/>
+            </a:schemeClr>
+          </a:solidFill>
+          <a:ln w="9525">
+            <a:noFill/>
+            <a:miter lim="800000"/>
+            <a:headEnd/>
+            <a:tailEnd/>
+          </a:ln>
+        </p:spPr>
+        <p:txBody>
+          <a:bodyPr wrap="square" lIns="72000" tIns="72000" rIns="72000" bIns="72000" rtlCol="0" anchor="ctr"/>
+          <a:lstStyle/>
+          <a:p>
+            <a:pPr algn="ctr" defTabSz="576000" eaLnBrk="0" hangingPunct="0">
+              <a:lnSpc>
+                <a:spcPct val="120000"/>
+              </a:lnSpc>
+            </a:pPr>
+            <a:endParaRPr lang="en-IN" sz="1600" baseline="0" dirty="0">
+              <a:solidFill>
+                <a:schemeClr val="bg1"/>
+              </a:solidFill>
+              <a:latin typeface="+mn-lt"/>
+              <a:ea typeface="+mn-ea"/>
+              <a:cs typeface="+mn-cs"/>
+            </a:endParaRPr>
+          </a:p>
+        </p:txBody>
+      </p:sp>
+      <p:sp>
+        <p:nvSpPr>
+          <p:cNvPr id="139" name="Rectangle 138">
+            <a:extLst>
+              <a:ext uri="{FF2B5EF4-FFF2-40B4-BE49-F238E27FC236}">
+                <a16:creationId xmlns:a16="http://schemas.microsoft.com/office/drawing/2014/main" id="{E06EB590-ACAD-87D7-651A-C89EA3126CBC}"/>
+              </a:ext>
+            </a:extLst>
+          </p:cNvPr>
+          <p:cNvSpPr/>
+          <p:nvPr/>
+        </p:nvSpPr>
+        <p:spPr bwMode="auto">
+          <a:xfrm>
+            <a:off x="1206831" y="4389047"/>
+            <a:ext cx="133652" cy="41425"/>
+          </a:xfrm>
+          <a:prstGeom prst="rect">
+            <a:avLst/>
+          </a:prstGeom>
+          <a:solidFill>
+            <a:srgbClr val="FF0000">
+              <a:alpha val="40000"/>
+            </a:srgbClr>
+          </a:solidFill>
+          <a:ln w="9525">
+            <a:noFill/>
+            <a:miter lim="800000"/>
+            <a:headEnd/>
+            <a:tailEnd/>
+          </a:ln>
+        </p:spPr>
+        <p:txBody>
+          <a:bodyPr wrap="square" lIns="72000" tIns="72000" rIns="72000" bIns="72000" rtlCol="0" anchor="ctr"/>
+          <a:lstStyle/>
+          <a:p>
+            <a:pPr algn="ctr" defTabSz="576000" eaLnBrk="0" hangingPunct="0">
+              <a:lnSpc>
+                <a:spcPct val="120000"/>
+              </a:lnSpc>
+            </a:pPr>
+            <a:endParaRPr lang="en-IN" sz="1600" baseline="0" dirty="0">
+              <a:solidFill>
+                <a:schemeClr val="bg1"/>
+              </a:solidFill>
+              <a:latin typeface="+mn-lt"/>
+              <a:ea typeface="+mn-ea"/>
+              <a:cs typeface="+mn-cs"/>
+            </a:endParaRPr>
+          </a:p>
+        </p:txBody>
+      </p:sp>
+      <p:sp>
+        <p:nvSpPr>
+          <p:cNvPr id="140" name="Rectangle 139">
+            <a:extLst>
+              <a:ext uri="{FF2B5EF4-FFF2-40B4-BE49-F238E27FC236}">
+                <a16:creationId xmlns:a16="http://schemas.microsoft.com/office/drawing/2014/main" id="{57E37716-49E8-66E5-0FCE-C13881CB147E}"/>
+              </a:ext>
+            </a:extLst>
+          </p:cNvPr>
+          <p:cNvSpPr/>
+          <p:nvPr/>
+        </p:nvSpPr>
+        <p:spPr bwMode="auto">
+          <a:xfrm>
+            <a:off x="1426057" y="4688795"/>
+            <a:ext cx="133652" cy="45719"/>
+          </a:xfrm>
+          <a:prstGeom prst="rect">
+            <a:avLst/>
+          </a:prstGeom>
+          <a:solidFill>
+            <a:schemeClr val="accent4">
+              <a:alpha val="40000"/>
+            </a:schemeClr>
+          </a:solidFill>
+          <a:ln w="9525">
+            <a:noFill/>
+            <a:miter lim="800000"/>
+            <a:headEnd/>
+            <a:tailEnd/>
+          </a:ln>
+          <a:effectLst/>
+        </p:spPr>
+        <p:txBody>
+          <a:bodyPr wrap="square" lIns="72000" tIns="72000" rIns="72000" bIns="72000" rtlCol="0" anchor="ctr"/>
+          <a:lstStyle/>
+          <a:p>
+            <a:pPr algn="ctr" defTabSz="576000" eaLnBrk="0" hangingPunct="0">
+              <a:lnSpc>
+                <a:spcPct val="120000"/>
+              </a:lnSpc>
+            </a:pPr>
+            <a:endParaRPr lang="en-IN" sz="1600" baseline="0" dirty="0">
+              <a:solidFill>
+                <a:schemeClr val="bg1"/>
+              </a:solidFill>
+              <a:latin typeface="+mn-lt"/>
+              <a:ea typeface="+mn-ea"/>
+              <a:cs typeface="+mn-cs"/>
+            </a:endParaRPr>
+          </a:p>
+        </p:txBody>
+      </p:sp>
+      <p:sp>
+        <p:nvSpPr>
+          <p:cNvPr id="141" name="Rectangle 140">
+            <a:extLst>
+              <a:ext uri="{FF2B5EF4-FFF2-40B4-BE49-F238E27FC236}">
+                <a16:creationId xmlns:a16="http://schemas.microsoft.com/office/drawing/2014/main" id="{93CDA15A-41EA-8ED7-2195-40D6547CACD4}"/>
+              </a:ext>
+            </a:extLst>
+          </p:cNvPr>
+          <p:cNvSpPr/>
+          <p:nvPr/>
+        </p:nvSpPr>
+        <p:spPr bwMode="auto">
+          <a:xfrm>
+            <a:off x="1426057" y="4643076"/>
+            <a:ext cx="133652" cy="45719"/>
+          </a:xfrm>
+          <a:prstGeom prst="rect">
+            <a:avLst/>
+          </a:prstGeom>
+          <a:solidFill>
+            <a:schemeClr val="accent5">
+              <a:alpha val="40000"/>
+            </a:schemeClr>
+          </a:solidFill>
+          <a:ln w="9525">
+            <a:noFill/>
+            <a:miter lim="800000"/>
+            <a:headEnd/>
+            <a:tailEnd/>
+          </a:ln>
+        </p:spPr>
+        <p:txBody>
+          <a:bodyPr wrap="square" lIns="72000" tIns="72000" rIns="72000" bIns="72000" rtlCol="0" anchor="ctr"/>
+          <a:lstStyle/>
+          <a:p>
+            <a:pPr algn="ctr" defTabSz="576000" eaLnBrk="0" hangingPunct="0">
+              <a:lnSpc>
+                <a:spcPct val="120000"/>
+              </a:lnSpc>
+            </a:pPr>
+            <a:endParaRPr lang="en-IN" sz="1600" dirty="0">
+              <a:solidFill>
+                <a:schemeClr val="bg1"/>
+              </a:solidFill>
+              <a:latin typeface="+mn-lt"/>
+              <a:ea typeface="+mn-ea"/>
+              <a:cs typeface="+mn-cs"/>
+            </a:endParaRPr>
+          </a:p>
+        </p:txBody>
+      </p:sp>
+      <p:sp>
+        <p:nvSpPr>
+          <p:cNvPr id="142" name="Rectangle 141">
+            <a:extLst>
+              <a:ext uri="{FF2B5EF4-FFF2-40B4-BE49-F238E27FC236}">
+                <a16:creationId xmlns:a16="http://schemas.microsoft.com/office/drawing/2014/main" id="{84AAA494-3049-691F-04CC-9EC30CA62178}"/>
+              </a:ext>
+            </a:extLst>
+          </p:cNvPr>
+          <p:cNvSpPr/>
+          <p:nvPr/>
+        </p:nvSpPr>
+        <p:spPr bwMode="auto">
+          <a:xfrm>
+            <a:off x="1426057" y="4430370"/>
+            <a:ext cx="133652" cy="212705"/>
+          </a:xfrm>
+          <a:prstGeom prst="rect">
+            <a:avLst/>
+          </a:prstGeom>
+          <a:solidFill>
+            <a:schemeClr val="accent3"/>
+          </a:solidFill>
+          <a:ln w="9525">
+            <a:noFill/>
+            <a:miter lim="800000"/>
+            <a:headEnd/>
+            <a:tailEnd/>
+          </a:ln>
+          <a:effectLst>
+            <a:glow rad="38100">
+              <a:schemeClr val="accent3">
+                <a:alpha val="20000"/>
+              </a:schemeClr>
+            </a:glow>
+          </a:effectLst>
+        </p:spPr>
+        <p:txBody>
+          <a:bodyPr wrap="square" lIns="72000" tIns="72000" rIns="72000" bIns="72000" rtlCol="0" anchor="ctr"/>
+          <a:lstStyle/>
+          <a:p>
+            <a:pPr algn="ctr" defTabSz="576000" eaLnBrk="0" hangingPunct="0">
+              <a:lnSpc>
+                <a:spcPct val="120000"/>
+              </a:lnSpc>
+            </a:pPr>
+            <a:endParaRPr lang="en-IN" sz="1600" dirty="0">
+              <a:solidFill>
+                <a:schemeClr val="bg1"/>
+              </a:solidFill>
+              <a:latin typeface="+mn-lt"/>
+              <a:ea typeface="+mn-ea"/>
+              <a:cs typeface="+mn-cs"/>
+            </a:endParaRPr>
+          </a:p>
+        </p:txBody>
+      </p:sp>
+      <p:sp>
+        <p:nvSpPr>
+          <p:cNvPr id="143" name="Rectangle 142">
+            <a:extLst>
+              <a:ext uri="{FF2B5EF4-FFF2-40B4-BE49-F238E27FC236}">
+                <a16:creationId xmlns:a16="http://schemas.microsoft.com/office/drawing/2014/main" id="{7560C158-E3EB-A789-67C0-CD12502B8E95}"/>
+              </a:ext>
+            </a:extLst>
+          </p:cNvPr>
+          <p:cNvSpPr/>
+          <p:nvPr/>
+        </p:nvSpPr>
+        <p:spPr bwMode="auto">
+          <a:xfrm>
+            <a:off x="1426057" y="4389047"/>
+            <a:ext cx="133652" cy="41425"/>
+          </a:xfrm>
+          <a:prstGeom prst="rect">
+            <a:avLst/>
+          </a:prstGeom>
+          <a:solidFill>
+            <a:srgbClr val="FF0000">
+              <a:alpha val="40000"/>
+            </a:srgbClr>
+          </a:solidFill>
+          <a:ln w="9525">
+            <a:noFill/>
+            <a:miter lim="800000"/>
+            <a:headEnd/>
+            <a:tailEnd/>
+          </a:ln>
+        </p:spPr>
+        <p:txBody>
+          <a:bodyPr wrap="square" lIns="72000" tIns="72000" rIns="72000" bIns="72000" rtlCol="0" anchor="ctr"/>
+          <a:lstStyle/>
+          <a:p>
+            <a:pPr algn="ctr" defTabSz="576000" eaLnBrk="0" hangingPunct="0">
+              <a:lnSpc>
+                <a:spcPct val="120000"/>
+              </a:lnSpc>
+            </a:pPr>
+            <a:endParaRPr lang="en-IN" sz="1600" baseline="0" dirty="0">
+              <a:solidFill>
+                <a:schemeClr val="bg1"/>
+              </a:solidFill>
+              <a:latin typeface="+mn-lt"/>
+              <a:ea typeface="+mn-ea"/>
+              <a:cs typeface="+mn-cs"/>
+            </a:endParaRPr>
+          </a:p>
+        </p:txBody>
+      </p:sp>
+      <p:sp>
+        <p:nvSpPr>
+          <p:cNvPr id="145" name="Rectangle 144">
+            <a:extLst>
+              <a:ext uri="{FF2B5EF4-FFF2-40B4-BE49-F238E27FC236}">
+                <a16:creationId xmlns:a16="http://schemas.microsoft.com/office/drawing/2014/main" id="{3BBE0F94-B061-75A0-E48A-D02D3C78D4B4}"/>
+              </a:ext>
+            </a:extLst>
+          </p:cNvPr>
+          <p:cNvSpPr/>
+          <p:nvPr/>
+        </p:nvSpPr>
+        <p:spPr bwMode="auto">
+          <a:xfrm>
+            <a:off x="1615140" y="4688795"/>
+            <a:ext cx="133652" cy="45719"/>
+          </a:xfrm>
+          <a:prstGeom prst="rect">
+            <a:avLst/>
+          </a:prstGeom>
+          <a:solidFill>
+            <a:schemeClr val="accent4">
+              <a:alpha val="40000"/>
+            </a:schemeClr>
+          </a:solidFill>
+          <a:ln w="9525">
+            <a:noFill/>
+            <a:miter lim="800000"/>
+            <a:headEnd/>
+            <a:tailEnd/>
+          </a:ln>
+          <a:effectLst/>
+        </p:spPr>
+        <p:txBody>
+          <a:bodyPr wrap="square" lIns="72000" tIns="72000" rIns="72000" bIns="72000" rtlCol="0" anchor="ctr"/>
+          <a:lstStyle/>
+          <a:p>
+            <a:pPr algn="ctr" defTabSz="576000" eaLnBrk="0" hangingPunct="0">
+              <a:lnSpc>
+                <a:spcPct val="120000"/>
+              </a:lnSpc>
+            </a:pPr>
+            <a:endParaRPr lang="en-IN" sz="1600" baseline="0" dirty="0">
+              <a:solidFill>
+                <a:schemeClr val="bg1"/>
+              </a:solidFill>
+              <a:latin typeface="+mn-lt"/>
+              <a:ea typeface="+mn-ea"/>
+              <a:cs typeface="+mn-cs"/>
+            </a:endParaRPr>
+          </a:p>
+        </p:txBody>
+      </p:sp>
+      <p:sp>
+        <p:nvSpPr>
+          <p:cNvPr id="146" name="Rectangle 145">
+            <a:extLst>
+              <a:ext uri="{FF2B5EF4-FFF2-40B4-BE49-F238E27FC236}">
+                <a16:creationId xmlns:a16="http://schemas.microsoft.com/office/drawing/2014/main" id="{B46B5CA6-70AC-65CB-64C7-55AC84F9B3C1}"/>
+              </a:ext>
+            </a:extLst>
+          </p:cNvPr>
+          <p:cNvSpPr/>
+          <p:nvPr/>
+        </p:nvSpPr>
+        <p:spPr bwMode="auto">
+          <a:xfrm>
+            <a:off x="1615140" y="4643076"/>
+            <a:ext cx="133652" cy="45719"/>
+          </a:xfrm>
+          <a:prstGeom prst="rect">
+            <a:avLst/>
+          </a:prstGeom>
+          <a:solidFill>
+            <a:schemeClr val="accent5">
+              <a:alpha val="40000"/>
+            </a:schemeClr>
+          </a:solidFill>
+          <a:ln w="9525">
+            <a:noFill/>
+            <a:miter lim="800000"/>
+            <a:headEnd/>
+            <a:tailEnd/>
+          </a:ln>
+        </p:spPr>
+        <p:txBody>
+          <a:bodyPr wrap="square" lIns="72000" tIns="72000" rIns="72000" bIns="72000" rtlCol="0" anchor="ctr"/>
+          <a:lstStyle/>
+          <a:p>
+            <a:pPr algn="ctr" defTabSz="576000" eaLnBrk="0" hangingPunct="0">
+              <a:lnSpc>
+                <a:spcPct val="120000"/>
+              </a:lnSpc>
+            </a:pPr>
+            <a:endParaRPr lang="en-IN" sz="1600" dirty="0">
+              <a:solidFill>
+                <a:schemeClr val="bg1"/>
+              </a:solidFill>
+              <a:latin typeface="+mn-lt"/>
+              <a:ea typeface="+mn-ea"/>
+              <a:cs typeface="+mn-cs"/>
+            </a:endParaRPr>
+          </a:p>
+        </p:txBody>
+      </p:sp>
+      <p:sp>
+        <p:nvSpPr>
+          <p:cNvPr id="147" name="Rectangle 146">
+            <a:extLst>
+              <a:ext uri="{FF2B5EF4-FFF2-40B4-BE49-F238E27FC236}">
+                <a16:creationId xmlns:a16="http://schemas.microsoft.com/office/drawing/2014/main" id="{14E32CEE-91A1-F876-BDAF-F8A57560A80C}"/>
+              </a:ext>
+            </a:extLst>
+          </p:cNvPr>
+          <p:cNvSpPr/>
+          <p:nvPr/>
+        </p:nvSpPr>
+        <p:spPr bwMode="auto">
+          <a:xfrm>
+            <a:off x="1615140" y="4597356"/>
+            <a:ext cx="133652" cy="45719"/>
+          </a:xfrm>
+          <a:prstGeom prst="rect">
+            <a:avLst/>
+          </a:prstGeom>
+          <a:solidFill>
+            <a:schemeClr val="accent3">
+              <a:alpha val="40000"/>
+            </a:schemeClr>
+          </a:solidFill>
+          <a:ln w="9525">
+            <a:noFill/>
+            <a:miter lim="800000"/>
+            <a:headEnd/>
+            <a:tailEnd/>
+          </a:ln>
+        </p:spPr>
+        <p:txBody>
+          <a:bodyPr wrap="square" lIns="72000" tIns="72000" rIns="72000" bIns="72000" rtlCol="0" anchor="ctr"/>
+          <a:lstStyle/>
+          <a:p>
+            <a:pPr algn="ctr" defTabSz="576000" eaLnBrk="0" hangingPunct="0">
+              <a:lnSpc>
+                <a:spcPct val="120000"/>
+              </a:lnSpc>
+            </a:pPr>
+            <a:endParaRPr lang="en-IN" sz="1600" dirty="0">
+              <a:solidFill>
+                <a:schemeClr val="bg1"/>
+              </a:solidFill>
+              <a:latin typeface="+mn-lt"/>
+              <a:ea typeface="+mn-ea"/>
+              <a:cs typeface="+mn-cs"/>
+            </a:endParaRPr>
+          </a:p>
+        </p:txBody>
+      </p:sp>
+      <p:sp>
+        <p:nvSpPr>
+          <p:cNvPr id="148" name="Rectangle 147">
+            <a:extLst>
+              <a:ext uri="{FF2B5EF4-FFF2-40B4-BE49-F238E27FC236}">
+                <a16:creationId xmlns:a16="http://schemas.microsoft.com/office/drawing/2014/main" id="{2F601E27-98F6-3A11-5A17-98047CDF4754}"/>
+              </a:ext>
+            </a:extLst>
+          </p:cNvPr>
+          <p:cNvSpPr/>
+          <p:nvPr/>
+        </p:nvSpPr>
+        <p:spPr bwMode="auto">
+          <a:xfrm>
+            <a:off x="1615140" y="4389047"/>
+            <a:ext cx="133652" cy="208308"/>
+          </a:xfrm>
+          <a:prstGeom prst="rect">
+            <a:avLst/>
+          </a:prstGeom>
+          <a:solidFill>
+            <a:srgbClr val="FF0000"/>
+          </a:solidFill>
+          <a:ln w="9525">
+            <a:noFill/>
+            <a:miter lim="800000"/>
+            <a:headEnd/>
+            <a:tailEnd/>
+          </a:ln>
+          <a:effectLst>
+            <a:glow rad="38100">
+              <a:srgbClr val="FF0000">
+                <a:alpha val="20000"/>
+              </a:srgbClr>
+            </a:glow>
+          </a:effectLst>
+        </p:spPr>
+        <p:txBody>
+          <a:bodyPr wrap="square" lIns="72000" tIns="72000" rIns="72000" bIns="72000" rtlCol="0" anchor="ctr"/>
+          <a:lstStyle/>
+          <a:p>
+            <a:pPr algn="ctr" defTabSz="576000" eaLnBrk="0" hangingPunct="0">
+              <a:lnSpc>
+                <a:spcPct val="120000"/>
+              </a:lnSpc>
+            </a:pPr>
+            <a:endParaRPr lang="en-IN" sz="1600" dirty="0">
+              <a:solidFill>
+                <a:schemeClr val="bg1"/>
+              </a:solidFill>
+              <a:latin typeface="+mn-lt"/>
+              <a:ea typeface="+mn-ea"/>
+              <a:cs typeface="+mn-cs"/>
+            </a:endParaRPr>
+          </a:p>
+        </p:txBody>
+      </p:sp>
+    </p:spTree>
+    <p:extLst>
+      <p:ext uri="{BB962C8B-B14F-4D97-AF65-F5344CB8AC3E}">
+        <p14:creationId xmlns:p14="http://schemas.microsoft.com/office/powerpoint/2010/main" val="2981488331"/>
+      </p:ext>
+    </p:extLst>
+  </p:cSld>
+  <p:clrMapOvr>
+    <a:masterClrMapping/>
+  </p:clrMapOvr>
+</p:sld>
+</file>
+
+<file path=ppt/slides/slide4.xml><?xml version="1.0" encoding="utf-8"?>
 <p:sld xmlns:a="http://schemas.openxmlformats.org/drawingml/2006/main" xmlns:r="http://schemas.openxmlformats.org/officeDocument/2006/relationships" xmlns:p="http://schemas.openxmlformats.org/presentationml/2006/main">
   <p:cSld>
     <p:spTree>
@@ -29823,7 +33636,7 @@
 </p:sld>
 </file>
 
-<file path=ppt/slides/slide3.xml><?xml version="1.0" encoding="utf-8"?>
+<file path=ppt/slides/slide5.xml><?xml version="1.0" encoding="utf-8"?>
 <p:sld xmlns:a="http://schemas.openxmlformats.org/drawingml/2006/main" xmlns:r="http://schemas.openxmlformats.org/officeDocument/2006/relationships" xmlns:p="http://schemas.openxmlformats.org/presentationml/2006/main">
   <p:cSld>
     <p:spTree>
@@ -30010,100 +33823,6 @@
           </a:p>
         </p:txBody>
       </p:sp>
-      <p:pic>
-        <p:nvPicPr>
-          <p:cNvPr id="11" name="Picture 10">
-            <a:extLst>
-              <a:ext uri="{FF2B5EF4-FFF2-40B4-BE49-F238E27FC236}">
-                <a16:creationId xmlns:a16="http://schemas.microsoft.com/office/drawing/2014/main" id="{7BD31CB9-A70A-69F4-6EC4-CECBFD0469CA}"/>
-              </a:ext>
-            </a:extLst>
-          </p:cNvPr>
-          <p:cNvPicPr>
-            <a:picLocks noChangeAspect="1"/>
-          </p:cNvPicPr>
-          <p:nvPr/>
-        </p:nvPicPr>
-        <p:blipFill>
-          <a:blip r:embed="rId5"/>
-          <a:stretch>
-            <a:fillRect/>
-          </a:stretch>
-        </p:blipFill>
-        <p:spPr>
-          <a:xfrm>
-            <a:off x="5062648" y="1436155"/>
-            <a:ext cx="3112182" cy="2929469"/>
-          </a:xfrm>
-          <a:prstGeom prst="rect">
-            <a:avLst/>
-          </a:prstGeom>
-        </p:spPr>
-      </p:pic>
-      <p:sp>
-        <p:nvSpPr>
-          <p:cNvPr id="12" name="Rectangle: Top Corners Rounded 11">
-            <a:extLst>
-              <a:ext uri="{FF2B5EF4-FFF2-40B4-BE49-F238E27FC236}">
-                <a16:creationId xmlns:a16="http://schemas.microsoft.com/office/drawing/2014/main" id="{D1A19880-9901-8093-8FFA-F2AC7F3FC3D5}"/>
-              </a:ext>
-            </a:extLst>
-          </p:cNvPr>
-          <p:cNvSpPr/>
-          <p:nvPr/>
-        </p:nvSpPr>
-        <p:spPr bwMode="auto">
-          <a:xfrm rot="5400000">
-            <a:off x="4624746" y="2574458"/>
-            <a:ext cx="1375200" cy="658425"/>
-          </a:xfrm>
-          <a:prstGeom prst="round2SameRect">
-            <a:avLst>
-              <a:gd name="adj1" fmla="val 44038"/>
-              <a:gd name="adj2" fmla="val 0"/>
-            </a:avLst>
-          </a:prstGeom>
-          <a:solidFill>
-            <a:srgbClr val="086259">
-              <a:alpha val="34902"/>
-            </a:srgbClr>
-          </a:solidFill>
-          <a:ln w="12700">
-            <a:solidFill>
-              <a:srgbClr val="9BBA43"/>
-            </a:solidFill>
-            <a:miter lim="800000"/>
-            <a:headEnd/>
-            <a:tailEnd/>
-          </a:ln>
-          <a:effectLst>
-            <a:outerShdw blurRad="50800" dist="38100" algn="l" rotWithShape="0">
-              <a:prstClr val="black">
-                <a:alpha val="40000"/>
-              </a:prstClr>
-            </a:outerShdw>
-          </a:effectLst>
-        </p:spPr>
-        <p:txBody>
-          <a:bodyPr wrap="square" lIns="72000" tIns="72000" rIns="72000" bIns="72000" rtlCol="0" anchor="ctr"/>
-          <a:lstStyle/>
-          <a:p>
-            <a:pPr algn="ctr" defTabSz="576000" eaLnBrk="0" hangingPunct="0">
-              <a:lnSpc>
-                <a:spcPct val="120000"/>
-              </a:lnSpc>
-            </a:pPr>
-            <a:endParaRPr lang="en-US" sz="1600" baseline="0" dirty="0">
-              <a:solidFill>
-                <a:schemeClr val="bg1"/>
-              </a:solidFill>
-              <a:latin typeface="+mn-lt"/>
-              <a:ea typeface="+mn-ea"/>
-              <a:cs typeface="+mn-cs"/>
-            </a:endParaRPr>
-          </a:p>
-        </p:txBody>
-      </p:sp>
       <p:sp>
         <p:nvSpPr>
           <p:cNvPr id="13" name="Rectangle 12">
@@ -30119,56 +33838,6 @@
         <p:spPr bwMode="auto">
           <a:xfrm>
             <a:off x="4751254" y="1313917"/>
-            <a:ext cx="317971" cy="3213634"/>
-          </a:xfrm>
-          <a:prstGeom prst="rect">
-            <a:avLst/>
-          </a:prstGeom>
-          <a:solidFill>
-            <a:srgbClr val="BFBFBF"/>
-          </a:solidFill>
-          <a:ln w="9525">
-            <a:noFill/>
-            <a:miter lim="800000"/>
-            <a:headEnd/>
-            <a:tailEnd/>
-          </a:ln>
-        </p:spPr>
-        <p:txBody>
-          <a:bodyPr wrap="square" lIns="72000" tIns="72000" rIns="72000" bIns="72000" rtlCol="0" anchor="ctr"/>
-          <a:lstStyle/>
-          <a:p>
-            <a:pPr algn="ctr" defTabSz="576000" eaLnBrk="0" hangingPunct="0">
-              <a:lnSpc>
-                <a:spcPct val="120000"/>
-              </a:lnSpc>
-            </a:pPr>
-            <a:endParaRPr lang="en-US" sz="1600" baseline="0" dirty="0">
-              <a:solidFill>
-                <a:schemeClr val="bg1"/>
-              </a:solidFill>
-              <a:latin typeface="+mn-lt"/>
-              <a:ea typeface="+mn-ea"/>
-              <a:cs typeface="+mn-cs"/>
-            </a:endParaRPr>
-          </a:p>
-        </p:txBody>
-      </p:sp>
-      <p:sp>
-        <p:nvSpPr>
-          <p:cNvPr id="14" name="Rectangle 13">
-            <a:extLst>
-              <a:ext uri="{FF2B5EF4-FFF2-40B4-BE49-F238E27FC236}">
-                <a16:creationId xmlns:a16="http://schemas.microsoft.com/office/drawing/2014/main" id="{77A050AF-FBC2-BA79-54B2-A3EECA4DB4B3}"/>
-              </a:ext>
-            </a:extLst>
-          </p:cNvPr>
-          <p:cNvSpPr/>
-          <p:nvPr/>
-        </p:nvSpPr>
-        <p:spPr bwMode="auto">
-          <a:xfrm>
-            <a:off x="8057259" y="1313917"/>
             <a:ext cx="317971" cy="3213634"/>
           </a:xfrm>
           <a:prstGeom prst="rect">
@@ -30590,852 +34259,6 @@
           </p:txBody>
         </p:sp>
       </p:grpSp>
-      <p:sp>
-        <p:nvSpPr>
-          <p:cNvPr id="43" name="Double Bracket 42">
-            <a:extLst>
-              <a:ext uri="{FF2B5EF4-FFF2-40B4-BE49-F238E27FC236}">
-                <a16:creationId xmlns:a16="http://schemas.microsoft.com/office/drawing/2014/main" id="{683EF5B0-C85B-EC5B-AEA0-21177705346F}"/>
-              </a:ext>
-            </a:extLst>
-          </p:cNvPr>
-          <p:cNvSpPr/>
-          <p:nvPr/>
-        </p:nvSpPr>
-        <p:spPr>
-          <a:xfrm>
-            <a:off x="5567070" y="3942005"/>
-            <a:ext cx="216496" cy="219755"/>
-          </a:xfrm>
-          <a:prstGeom prst="bracketPair">
-            <a:avLst/>
-          </a:prstGeom>
-          <a:ln w="9525">
-            <a:solidFill>
-              <a:schemeClr val="bg1"/>
-            </a:solidFill>
-            <a:tailEnd type="none"/>
-          </a:ln>
-        </p:spPr>
-        <p:style>
-          <a:lnRef idx="1">
-            <a:schemeClr val="accent1"/>
-          </a:lnRef>
-          <a:fillRef idx="0">
-            <a:schemeClr val="accent1"/>
-          </a:fillRef>
-          <a:effectRef idx="0">
-            <a:schemeClr val="accent1"/>
-          </a:effectRef>
-          <a:fontRef idx="minor">
-            <a:schemeClr val="tx1"/>
-          </a:fontRef>
-        </p:style>
-        <p:txBody>
-          <a:bodyPr rtlCol="0" anchor="ctr"/>
-          <a:lstStyle/>
-          <a:p>
-            <a:pPr marL="0" marR="0" lvl="0" indent="0" algn="ctr" defTabSz="914400" rtl="0" eaLnBrk="1" fontAlgn="auto" latinLnBrk="0" hangingPunct="1">
-              <a:lnSpc>
-                <a:spcPct val="100000"/>
-              </a:lnSpc>
-              <a:spcBef>
-                <a:spcPts val="0"/>
-              </a:spcBef>
-              <a:spcAft>
-                <a:spcPts val="0"/>
-              </a:spcAft>
-              <a:buClr>
-                <a:srgbClr val="000000"/>
-              </a:buClr>
-              <a:buSzTx/>
-              <a:buFont typeface="Arial"/>
-              <a:buNone/>
-              <a:tabLst/>
-              <a:defRPr/>
-            </a:pPr>
-            <a:endParaRPr kumimoji="0" lang="en-US" sz="1400" b="0" i="0" u="none" strike="noStrike" kern="0" cap="none" spc="0" normalizeH="0" baseline="0" noProof="0">
-              <a:ln>
-                <a:noFill/>
-              </a:ln>
-              <a:solidFill>
-                <a:srgbClr val="1D1D1D"/>
-              </a:solidFill>
-              <a:effectLst/>
-              <a:uLnTx/>
-              <a:uFillTx/>
-              <a:latin typeface="Arial"/>
-              <a:cs typeface="Arial"/>
-              <a:sym typeface="Arial"/>
-            </a:endParaRPr>
-          </a:p>
-        </p:txBody>
-      </p:sp>
-      <p:grpSp>
-        <p:nvGrpSpPr>
-          <p:cNvPr id="29" name="Group 28">
-            <a:extLst>
-              <a:ext uri="{FF2B5EF4-FFF2-40B4-BE49-F238E27FC236}">
-                <a16:creationId xmlns:a16="http://schemas.microsoft.com/office/drawing/2014/main" id="{E83CFD5E-94BD-24E5-6F92-5E3845D96B25}"/>
-              </a:ext>
-            </a:extLst>
-          </p:cNvPr>
-          <p:cNvGrpSpPr/>
-          <p:nvPr/>
-        </p:nvGrpSpPr>
-        <p:grpSpPr>
-          <a:xfrm>
-            <a:off x="4966189" y="2403842"/>
-            <a:ext cx="3060836" cy="1920612"/>
-            <a:chOff x="4966189" y="2403842"/>
-            <a:chExt cx="3060836" cy="1920612"/>
-          </a:xfrm>
-        </p:grpSpPr>
-        <p:pic>
-          <p:nvPicPr>
-            <p:cNvPr id="32" name="Picture 31" descr="A black background with a circular design&#10;&#10;Description automatically generated">
-              <a:extLst>
-                <a:ext uri="{FF2B5EF4-FFF2-40B4-BE49-F238E27FC236}">
-                  <a16:creationId xmlns:a16="http://schemas.microsoft.com/office/drawing/2014/main" id="{114BE58E-7E31-8BED-EBC6-D6CF0F8EC3D9}"/>
-                </a:ext>
-              </a:extLst>
-            </p:cNvPr>
-            <p:cNvPicPr>
-              <a:picLocks noChangeAspect="1"/>
-            </p:cNvPicPr>
-            <p:nvPr/>
-          </p:nvPicPr>
-          <p:blipFill>
-            <a:blip r:embed="rId6">
-              <a:lum bright="70000" contrast="-70000"/>
-              <a:extLst>
-                <a:ext uri="{28A0092B-C50C-407E-A947-70E740481C1C}">
-                  <a14:useLocalDpi xmlns:a14="http://schemas.microsoft.com/office/drawing/2010/main" val="0"/>
-                </a:ext>
-              </a:extLst>
-            </a:blip>
-            <a:stretch>
-              <a:fillRect/>
-            </a:stretch>
-          </p:blipFill>
-          <p:spPr>
-            <a:xfrm>
-              <a:off x="7500066" y="2953793"/>
-              <a:ext cx="386261" cy="386261"/>
-            </a:xfrm>
-            <a:prstGeom prst="rect">
-              <a:avLst/>
-            </a:prstGeom>
-          </p:spPr>
-        </p:pic>
-        <p:pic>
-          <p:nvPicPr>
-            <p:cNvPr id="33" name="Picture 32" descr="A white line drawing of a leaf&#10;&#10;Description automatically generated">
-              <a:extLst>
-                <a:ext uri="{FF2B5EF4-FFF2-40B4-BE49-F238E27FC236}">
-                  <a16:creationId xmlns:a16="http://schemas.microsoft.com/office/drawing/2014/main" id="{07BC21CB-D1D4-4BCE-6271-AE6812A83212}"/>
-                </a:ext>
-              </a:extLst>
-            </p:cNvPr>
-            <p:cNvPicPr>
-              <a:picLocks noChangeAspect="1"/>
-            </p:cNvPicPr>
-            <p:nvPr/>
-          </p:nvPicPr>
-          <p:blipFill>
-            <a:blip r:embed="rId7">
-              <a:extLst>
-                <a:ext uri="{28A0092B-C50C-407E-A947-70E740481C1C}">
-                  <a14:useLocalDpi xmlns:a14="http://schemas.microsoft.com/office/drawing/2010/main" val="0"/>
-                </a:ext>
-              </a:extLst>
-            </a:blip>
-            <a:stretch>
-              <a:fillRect/>
-            </a:stretch>
-          </p:blipFill>
-          <p:spPr>
-            <a:xfrm>
-              <a:off x="7535640" y="2421331"/>
-              <a:ext cx="310753" cy="310753"/>
-            </a:xfrm>
-            <a:prstGeom prst="rect">
-              <a:avLst/>
-            </a:prstGeom>
-          </p:spPr>
-        </p:pic>
-        <p:pic>
-          <p:nvPicPr>
-            <p:cNvPr id="34" name="Picture 33" descr="A wifi symbol on a black background&#10;&#10;Description automatically generated">
-              <a:extLst>
-                <a:ext uri="{FF2B5EF4-FFF2-40B4-BE49-F238E27FC236}">
-                  <a16:creationId xmlns:a16="http://schemas.microsoft.com/office/drawing/2014/main" id="{8DE16084-A8F0-B1D5-A361-6D562B123230}"/>
-                </a:ext>
-              </a:extLst>
-            </p:cNvPr>
-            <p:cNvPicPr>
-              <a:picLocks noChangeAspect="1"/>
-            </p:cNvPicPr>
-            <p:nvPr/>
-          </p:nvPicPr>
-          <p:blipFill>
-            <a:blip r:embed="rId8">
-              <a:extLst>
-                <a:ext uri="{28A0092B-C50C-407E-A947-70E740481C1C}">
-                  <a14:useLocalDpi xmlns:a14="http://schemas.microsoft.com/office/drawing/2010/main" val="0"/>
-                </a:ext>
-              </a:extLst>
-            </a:blip>
-            <a:stretch>
-              <a:fillRect/>
-            </a:stretch>
-          </p:blipFill>
-          <p:spPr>
-            <a:xfrm>
-              <a:off x="5148779" y="2976250"/>
-              <a:ext cx="361847" cy="361847"/>
-            </a:xfrm>
-            <a:prstGeom prst="rect">
-              <a:avLst/>
-            </a:prstGeom>
-          </p:spPr>
-        </p:pic>
-        <p:pic>
-          <p:nvPicPr>
-            <p:cNvPr id="35" name="Picture 34" descr="A white line drawing of gears&#10;&#10;Description automatically generated">
-              <a:extLst>
-                <a:ext uri="{FF2B5EF4-FFF2-40B4-BE49-F238E27FC236}">
-                  <a16:creationId xmlns:a16="http://schemas.microsoft.com/office/drawing/2014/main" id="{E341D023-B2DE-0D3B-6422-AC8080E26DD7}"/>
-                </a:ext>
-              </a:extLst>
-            </p:cNvPr>
-            <p:cNvPicPr>
-              <a:picLocks noChangeAspect="1"/>
-            </p:cNvPicPr>
-            <p:nvPr/>
-          </p:nvPicPr>
-          <p:blipFill>
-            <a:blip r:embed="rId9">
-              <a:extLst>
-                <a:ext uri="{28A0092B-C50C-407E-A947-70E740481C1C}">
-                  <a14:useLocalDpi xmlns:a14="http://schemas.microsoft.com/office/drawing/2010/main" val="0"/>
-                </a:ext>
-              </a:extLst>
-            </a:blip>
-            <a:stretch>
-              <a:fillRect/>
-            </a:stretch>
-          </p:blipFill>
-          <p:spPr>
-            <a:xfrm>
-              <a:off x="5161806" y="2403842"/>
-              <a:ext cx="348820" cy="348820"/>
-            </a:xfrm>
-            <a:prstGeom prst="rect">
-              <a:avLst/>
-            </a:prstGeom>
-          </p:spPr>
-        </p:pic>
-        <p:pic>
-          <p:nvPicPr>
-            <p:cNvPr id="36" name="Picture 33">
-              <a:extLst>
-                <a:ext uri="{FF2B5EF4-FFF2-40B4-BE49-F238E27FC236}">
-                  <a16:creationId xmlns:a16="http://schemas.microsoft.com/office/drawing/2014/main" id="{08DF1BDC-460A-B239-9525-EDBAC20224D6}"/>
-                </a:ext>
-              </a:extLst>
-            </p:cNvPr>
-            <p:cNvPicPr>
-              <a:picLocks noChangeAspect="1"/>
-            </p:cNvPicPr>
-            <p:nvPr/>
-          </p:nvPicPr>
-          <p:blipFill>
-            <a:blip r:embed="rId10">
-              <a:extLst>
-                <a:ext uri="{96DAC541-7B7A-43D3-8B79-37D633B846F1}">
-                  <asvg:svgBlip xmlns:asvg="http://schemas.microsoft.com/office/drawing/2016/SVG/main" r:embed="rId11"/>
-                </a:ext>
-              </a:extLst>
-            </a:blip>
-            <a:srcRect/>
-            <a:stretch/>
-          </p:blipFill>
-          <p:spPr>
-            <a:xfrm>
-              <a:off x="7333356" y="3910651"/>
-              <a:ext cx="255929" cy="255929"/>
-            </a:xfrm>
-            <a:prstGeom prst="rect">
-              <a:avLst/>
-            </a:prstGeom>
-          </p:spPr>
-        </p:pic>
-        <p:sp>
-          <p:nvSpPr>
-            <p:cNvPr id="37" name="TextBox 36">
-              <a:extLst>
-                <a:ext uri="{FF2B5EF4-FFF2-40B4-BE49-F238E27FC236}">
-                  <a16:creationId xmlns:a16="http://schemas.microsoft.com/office/drawing/2014/main" id="{976FA7AB-F633-4E39-6977-7D469BCBEDBD}"/>
-                </a:ext>
-              </a:extLst>
-            </p:cNvPr>
-            <p:cNvSpPr txBox="1"/>
-            <p:nvPr/>
-          </p:nvSpPr>
-          <p:spPr bwMode="auto">
-            <a:xfrm>
-              <a:off x="5010126" y="2726929"/>
-              <a:ext cx="656785" cy="136191"/>
-            </a:xfrm>
-            <a:prstGeom prst="rect">
-              <a:avLst/>
-            </a:prstGeom>
-            <a:noFill/>
-            <a:ln w="9525">
-              <a:noFill/>
-              <a:miter lim="800000"/>
-              <a:headEnd/>
-              <a:tailEnd/>
-            </a:ln>
-            <a:effectLst/>
-          </p:spPr>
-          <p:txBody>
-            <a:bodyPr wrap="square" lIns="0" tIns="0" rIns="0" bIns="0" rtlCol="0" anchor="t" anchorCtr="0">
-              <a:spAutoFit/>
-            </a:bodyPr>
-            <a:lstStyle/>
-            <a:p>
-              <a:pPr marL="0" marR="0" lvl="0" indent="0" algn="ctr" defTabSz="432000" rtl="0" eaLnBrk="0" fontAlgn="auto" latinLnBrk="0" hangingPunct="0">
-                <a:lnSpc>
-                  <a:spcPct val="120000"/>
-                </a:lnSpc>
-                <a:spcBef>
-                  <a:spcPts val="0"/>
-                </a:spcBef>
-                <a:spcAft>
-                  <a:spcPts val="0"/>
-                </a:spcAft>
-                <a:buClr>
-                  <a:srgbClr val="0A8276"/>
-                </a:buClr>
-                <a:buSzTx/>
-                <a:buFont typeface="Arial"/>
-                <a:buNone/>
-                <a:tabLst/>
-                <a:defRPr/>
-              </a:pPr>
-              <a:r>
-                <a:rPr kumimoji="0" lang="en-IN" sz="800" b="1" i="0" u="none" strike="noStrike" kern="0" cap="all" spc="0" normalizeH="0" baseline="0" noProof="0" dirty="0">
-                  <a:ln>
-                    <a:noFill/>
-                  </a:ln>
-                  <a:solidFill>
-                    <a:srgbClr val="FFFFFF"/>
-                  </a:solidFill>
-                  <a:effectLst/>
-                  <a:uLnTx/>
-                  <a:uFillTx/>
-                  <a:latin typeface="Montserrat" panose="00000500000000000000" pitchFamily="2" charset="0"/>
-                  <a:cs typeface="Arial"/>
-                  <a:sym typeface="Arial"/>
-                </a:rPr>
-                <a:t>SETTINGS</a:t>
-              </a:r>
-              <a:endParaRPr kumimoji="0" lang="en-US" sz="800" b="1" i="0" u="none" strike="noStrike" kern="0" cap="all" spc="0" normalizeH="0" baseline="0" noProof="0" dirty="0">
-                <a:ln>
-                  <a:noFill/>
-                </a:ln>
-                <a:solidFill>
-                  <a:srgbClr val="FFFFFF"/>
-                </a:solidFill>
-                <a:effectLst/>
-                <a:uLnTx/>
-                <a:uFillTx/>
-                <a:latin typeface="Montserrat" panose="00000500000000000000" pitchFamily="2" charset="0"/>
-                <a:cs typeface="Arial"/>
-                <a:sym typeface="Arial"/>
-              </a:endParaRPr>
-            </a:p>
-          </p:txBody>
-        </p:sp>
-        <p:sp>
-          <p:nvSpPr>
-            <p:cNvPr id="38" name="TextBox 37">
-              <a:extLst>
-                <a:ext uri="{FF2B5EF4-FFF2-40B4-BE49-F238E27FC236}">
-                  <a16:creationId xmlns:a16="http://schemas.microsoft.com/office/drawing/2014/main" id="{07CABD05-A4B9-8C75-81D4-F255E61776CD}"/>
-                </a:ext>
-              </a:extLst>
-            </p:cNvPr>
-            <p:cNvSpPr txBox="1"/>
-            <p:nvPr/>
-          </p:nvSpPr>
-          <p:spPr bwMode="auto">
-            <a:xfrm>
-              <a:off x="5336528" y="4188263"/>
-              <a:ext cx="656785" cy="136191"/>
-            </a:xfrm>
-            <a:prstGeom prst="rect">
-              <a:avLst/>
-            </a:prstGeom>
-            <a:noFill/>
-            <a:ln w="9525">
-              <a:noFill/>
-              <a:miter lim="800000"/>
-              <a:headEnd/>
-              <a:tailEnd/>
-            </a:ln>
-            <a:effectLst/>
-          </p:spPr>
-          <p:txBody>
-            <a:bodyPr wrap="square" lIns="0" tIns="0" rIns="0" bIns="0" rtlCol="0" anchor="t" anchorCtr="0">
-              <a:spAutoFit/>
-            </a:bodyPr>
-            <a:lstStyle/>
-            <a:p>
-              <a:pPr marL="0" marR="0" lvl="0" indent="0" algn="ctr" defTabSz="432000" rtl="0" eaLnBrk="0" fontAlgn="auto" latinLnBrk="0" hangingPunct="0">
-                <a:lnSpc>
-                  <a:spcPct val="120000"/>
-                </a:lnSpc>
-                <a:spcBef>
-                  <a:spcPts val="0"/>
-                </a:spcBef>
-                <a:spcAft>
-                  <a:spcPts val="0"/>
-                </a:spcAft>
-                <a:buClr>
-                  <a:srgbClr val="0A8276"/>
-                </a:buClr>
-                <a:buSzTx/>
-                <a:buFont typeface="Arial"/>
-                <a:buNone/>
-                <a:tabLst/>
-                <a:defRPr/>
-              </a:pPr>
-              <a:r>
-                <a:rPr kumimoji="0" lang="en-IN" sz="800" b="1" i="0" u="none" strike="noStrike" kern="0" cap="all" spc="0" normalizeH="0" baseline="0" noProof="0" dirty="0">
-                  <a:ln>
-                    <a:noFill/>
-                  </a:ln>
-                  <a:solidFill>
-                    <a:srgbClr val="FFFFFF"/>
-                  </a:solidFill>
-                  <a:effectLst/>
-                  <a:uLnTx/>
-                  <a:uFillTx/>
-                  <a:latin typeface="Montserrat" panose="00000500000000000000" pitchFamily="2" charset="0"/>
-                  <a:cs typeface="Arial"/>
-                  <a:sym typeface="Arial"/>
-                </a:rPr>
-                <a:t>PRESENCE</a:t>
-              </a:r>
-              <a:endParaRPr kumimoji="0" lang="en-US" sz="800" b="1" i="0" u="none" strike="noStrike" kern="0" cap="all" spc="0" normalizeH="0" baseline="0" noProof="0" dirty="0">
-                <a:ln>
-                  <a:noFill/>
-                </a:ln>
-                <a:solidFill>
-                  <a:srgbClr val="FFFFFF"/>
-                </a:solidFill>
-                <a:effectLst/>
-                <a:uLnTx/>
-                <a:uFillTx/>
-                <a:latin typeface="Montserrat" panose="00000500000000000000" pitchFamily="2" charset="0"/>
-                <a:cs typeface="Arial"/>
-                <a:sym typeface="Arial"/>
-              </a:endParaRPr>
-            </a:p>
-          </p:txBody>
-        </p:sp>
-        <p:sp>
-          <p:nvSpPr>
-            <p:cNvPr id="39" name="TextBox 38">
-              <a:extLst>
-                <a:ext uri="{FF2B5EF4-FFF2-40B4-BE49-F238E27FC236}">
-                  <a16:creationId xmlns:a16="http://schemas.microsoft.com/office/drawing/2014/main" id="{FF75D99D-A8D4-4695-7CAA-71C94EFD07F6}"/>
-                </a:ext>
-              </a:extLst>
-            </p:cNvPr>
-            <p:cNvSpPr txBox="1"/>
-            <p:nvPr/>
-          </p:nvSpPr>
-          <p:spPr bwMode="auto">
-            <a:xfrm>
-              <a:off x="7335543" y="2704326"/>
-              <a:ext cx="656785" cy="136191"/>
-            </a:xfrm>
-            <a:prstGeom prst="rect">
-              <a:avLst/>
-            </a:prstGeom>
-            <a:noFill/>
-            <a:ln w="9525">
-              <a:noFill/>
-              <a:miter lim="800000"/>
-              <a:headEnd/>
-              <a:tailEnd/>
-            </a:ln>
-            <a:effectLst/>
-          </p:spPr>
-          <p:txBody>
-            <a:bodyPr wrap="square" lIns="0" tIns="0" rIns="0" bIns="0" rtlCol="0" anchor="t" anchorCtr="0">
-              <a:spAutoFit/>
-            </a:bodyPr>
-            <a:lstStyle/>
-            <a:p>
-              <a:pPr marL="0" marR="0" lvl="0" indent="0" algn="ctr" defTabSz="432000" rtl="0" eaLnBrk="0" fontAlgn="auto" latinLnBrk="0" hangingPunct="0">
-                <a:lnSpc>
-                  <a:spcPct val="120000"/>
-                </a:lnSpc>
-                <a:spcBef>
-                  <a:spcPts val="0"/>
-                </a:spcBef>
-                <a:spcAft>
-                  <a:spcPts val="0"/>
-                </a:spcAft>
-                <a:buClr>
-                  <a:srgbClr val="0A8276"/>
-                </a:buClr>
-                <a:buSzTx/>
-                <a:buFont typeface="Arial"/>
-                <a:buNone/>
-                <a:tabLst/>
-                <a:defRPr/>
-              </a:pPr>
-              <a:r>
-                <a:rPr kumimoji="0" lang="en-IN" sz="800" b="1" i="0" u="none" strike="noStrike" kern="0" cap="all" spc="0" normalizeH="0" baseline="0" noProof="0" dirty="0">
-                  <a:ln>
-                    <a:noFill/>
-                  </a:ln>
-                  <a:solidFill>
-                    <a:srgbClr val="FFFFFF"/>
-                  </a:solidFill>
-                  <a:effectLst/>
-                  <a:uLnTx/>
-                  <a:uFillTx/>
-                  <a:latin typeface="Montserrat" panose="00000500000000000000" pitchFamily="2" charset="0"/>
-                  <a:cs typeface="Arial"/>
-                  <a:sym typeface="Arial"/>
-                </a:rPr>
-                <a:t>MODE</a:t>
-              </a:r>
-              <a:endParaRPr kumimoji="0" lang="en-US" sz="800" b="1" i="0" u="none" strike="noStrike" kern="0" cap="all" spc="0" normalizeH="0" baseline="0" noProof="0" dirty="0">
-                <a:ln>
-                  <a:noFill/>
-                </a:ln>
-                <a:solidFill>
-                  <a:srgbClr val="FFFFFF"/>
-                </a:solidFill>
-                <a:effectLst/>
-                <a:uLnTx/>
-                <a:uFillTx/>
-                <a:latin typeface="Montserrat" panose="00000500000000000000" pitchFamily="2" charset="0"/>
-                <a:cs typeface="Arial"/>
-                <a:sym typeface="Arial"/>
-              </a:endParaRPr>
-            </a:p>
-          </p:txBody>
-        </p:sp>
-        <p:sp>
-          <p:nvSpPr>
-            <p:cNvPr id="40" name="TextBox 39">
-              <a:extLst>
-                <a:ext uri="{FF2B5EF4-FFF2-40B4-BE49-F238E27FC236}">
-                  <a16:creationId xmlns:a16="http://schemas.microsoft.com/office/drawing/2014/main" id="{DE19353D-1B1B-0E4E-F888-AAAEABF24895}"/>
-                </a:ext>
-              </a:extLst>
-            </p:cNvPr>
-            <p:cNvSpPr txBox="1"/>
-            <p:nvPr/>
-          </p:nvSpPr>
-          <p:spPr bwMode="auto">
-            <a:xfrm>
-              <a:off x="7094229" y="4185986"/>
-              <a:ext cx="743757" cy="136191"/>
-            </a:xfrm>
-            <a:prstGeom prst="rect">
-              <a:avLst/>
-            </a:prstGeom>
-            <a:noFill/>
-            <a:ln w="9525">
-              <a:noFill/>
-              <a:miter lim="800000"/>
-              <a:headEnd/>
-              <a:tailEnd/>
-            </a:ln>
-            <a:effectLst/>
-          </p:spPr>
-          <p:txBody>
-            <a:bodyPr wrap="square" lIns="0" tIns="0" rIns="0" bIns="0" rtlCol="0" anchor="t" anchorCtr="0">
-              <a:spAutoFit/>
-            </a:bodyPr>
-            <a:lstStyle/>
-            <a:p>
-              <a:pPr marL="0" marR="0" lvl="0" indent="0" algn="ctr" defTabSz="432000" rtl="0" eaLnBrk="0" fontAlgn="auto" latinLnBrk="0" hangingPunct="0">
-                <a:lnSpc>
-                  <a:spcPct val="120000"/>
-                </a:lnSpc>
-                <a:spcBef>
-                  <a:spcPts val="0"/>
-                </a:spcBef>
-                <a:spcAft>
-                  <a:spcPts val="0"/>
-                </a:spcAft>
-                <a:buClr>
-                  <a:srgbClr val="0A8276"/>
-                </a:buClr>
-                <a:buSzTx/>
-                <a:buFont typeface="Arial"/>
-                <a:buNone/>
-                <a:tabLst/>
-                <a:defRPr/>
-              </a:pPr>
-              <a:r>
-                <a:rPr kumimoji="0" lang="en-IN" sz="800" b="1" i="0" u="none" strike="noStrike" kern="0" cap="all" spc="0" normalizeH="0" baseline="0" noProof="0" dirty="0">
-                  <a:ln>
-                    <a:noFill/>
-                  </a:ln>
-                  <a:solidFill>
-                    <a:srgbClr val="FFFFFF"/>
-                  </a:solidFill>
-                  <a:effectLst/>
-                  <a:uLnTx/>
-                  <a:uFillTx/>
-                  <a:latin typeface="Montserrat" panose="00000500000000000000" pitchFamily="2" charset="0"/>
-                  <a:cs typeface="Arial"/>
-                  <a:sym typeface="Arial"/>
-                </a:rPr>
-                <a:t>COMMAND</a:t>
-              </a:r>
-              <a:endParaRPr kumimoji="0" lang="en-US" sz="800" b="1" i="0" u="none" strike="noStrike" kern="0" cap="all" spc="0" normalizeH="0" baseline="0" noProof="0" dirty="0">
-                <a:ln>
-                  <a:noFill/>
-                </a:ln>
-                <a:solidFill>
-                  <a:srgbClr val="FFFFFF"/>
-                </a:solidFill>
-                <a:effectLst/>
-                <a:uLnTx/>
-                <a:uFillTx/>
-                <a:latin typeface="Montserrat" panose="00000500000000000000" pitchFamily="2" charset="0"/>
-                <a:cs typeface="Arial"/>
-                <a:sym typeface="Arial"/>
-              </a:endParaRPr>
-            </a:p>
-          </p:txBody>
-        </p:sp>
-        <p:sp>
-          <p:nvSpPr>
-            <p:cNvPr id="41" name="TextBox 40">
-              <a:extLst>
-                <a:ext uri="{FF2B5EF4-FFF2-40B4-BE49-F238E27FC236}">
-                  <a16:creationId xmlns:a16="http://schemas.microsoft.com/office/drawing/2014/main" id="{DB24DD64-30D8-381D-6ED6-D13E7B664267}"/>
-                </a:ext>
-              </a:extLst>
-            </p:cNvPr>
-            <p:cNvSpPr txBox="1"/>
-            <p:nvPr/>
-          </p:nvSpPr>
-          <p:spPr bwMode="auto">
-            <a:xfrm>
-              <a:off x="4966189" y="3302460"/>
-              <a:ext cx="743757" cy="136191"/>
-            </a:xfrm>
-            <a:prstGeom prst="rect">
-              <a:avLst/>
-            </a:prstGeom>
-            <a:noFill/>
-            <a:ln w="9525">
-              <a:noFill/>
-              <a:miter lim="800000"/>
-              <a:headEnd/>
-              <a:tailEnd/>
-            </a:ln>
-            <a:effectLst/>
-          </p:spPr>
-          <p:txBody>
-            <a:bodyPr wrap="square" lIns="0" tIns="0" rIns="0" bIns="0" rtlCol="0" anchor="t" anchorCtr="0">
-              <a:spAutoFit/>
-            </a:bodyPr>
-            <a:lstStyle/>
-            <a:p>
-              <a:pPr marL="0" marR="0" lvl="0" indent="0" algn="ctr" defTabSz="432000" rtl="0" eaLnBrk="0" fontAlgn="auto" latinLnBrk="0" hangingPunct="0">
-                <a:lnSpc>
-                  <a:spcPct val="120000"/>
-                </a:lnSpc>
-                <a:spcBef>
-                  <a:spcPts val="0"/>
-                </a:spcBef>
-                <a:spcAft>
-                  <a:spcPts val="0"/>
-                </a:spcAft>
-                <a:buClr>
-                  <a:srgbClr val="0A8276"/>
-                </a:buClr>
-                <a:buSzTx/>
-                <a:buFont typeface="Arial"/>
-                <a:buNone/>
-                <a:tabLst/>
-                <a:defRPr/>
-              </a:pPr>
-              <a:r>
-                <a:rPr kumimoji="0" lang="en-IN" sz="800" b="1" i="0" u="none" strike="noStrike" kern="0" cap="all" spc="0" normalizeH="0" baseline="0" noProof="0" dirty="0">
-                  <a:ln>
-                    <a:noFill/>
-                  </a:ln>
-                  <a:solidFill>
-                    <a:srgbClr val="FFFFFF"/>
-                  </a:solidFill>
-                  <a:effectLst/>
-                  <a:uLnTx/>
-                  <a:uFillTx/>
-                  <a:latin typeface="Montserrat" panose="00000500000000000000" pitchFamily="2" charset="0"/>
-                  <a:cs typeface="Arial"/>
-                  <a:sym typeface="Arial"/>
-                </a:rPr>
-                <a:t>CONNECT</a:t>
-              </a:r>
-              <a:endParaRPr kumimoji="0" lang="en-US" sz="800" b="1" i="0" u="none" strike="noStrike" kern="0" cap="all" spc="0" normalizeH="0" baseline="0" noProof="0" dirty="0">
-                <a:ln>
-                  <a:noFill/>
-                </a:ln>
-                <a:solidFill>
-                  <a:srgbClr val="FFFFFF"/>
-                </a:solidFill>
-                <a:effectLst/>
-                <a:uLnTx/>
-                <a:uFillTx/>
-                <a:latin typeface="Montserrat" panose="00000500000000000000" pitchFamily="2" charset="0"/>
-                <a:cs typeface="Arial"/>
-                <a:sym typeface="Arial"/>
-              </a:endParaRPr>
-            </a:p>
-          </p:txBody>
-        </p:sp>
-        <p:pic>
-          <p:nvPicPr>
-            <p:cNvPr id="42" name="Graphic 41" descr="Man outline">
-              <a:extLst>
-                <a:ext uri="{FF2B5EF4-FFF2-40B4-BE49-F238E27FC236}">
-                  <a16:creationId xmlns:a16="http://schemas.microsoft.com/office/drawing/2014/main" id="{7B727CE7-1925-3C34-1F02-A86807E9936F}"/>
-                </a:ext>
-              </a:extLst>
-            </p:cNvPr>
-            <p:cNvPicPr>
-              <a:picLocks noChangeAspect="1"/>
-            </p:cNvPicPr>
-            <p:nvPr/>
-          </p:nvPicPr>
-          <p:blipFill>
-            <a:blip r:embed="rId12">
-              <a:extLst>
-                <a:ext uri="{96DAC541-7B7A-43D3-8B79-37D633B846F1}">
-                  <asvg:svgBlip xmlns:asvg="http://schemas.microsoft.com/office/drawing/2016/SVG/main" r:embed="rId13"/>
-                </a:ext>
-              </a:extLst>
-            </a:blip>
-            <a:stretch>
-              <a:fillRect/>
-            </a:stretch>
-          </p:blipFill>
-          <p:spPr>
-            <a:xfrm>
-              <a:off x="5539626" y="3906559"/>
-              <a:ext cx="253373" cy="253373"/>
-            </a:xfrm>
-            <a:prstGeom prst="rect">
-              <a:avLst/>
-            </a:prstGeom>
-          </p:spPr>
-        </p:pic>
-        <p:sp>
-          <p:nvSpPr>
-            <p:cNvPr id="46" name="TextBox 45">
-              <a:extLst>
-                <a:ext uri="{FF2B5EF4-FFF2-40B4-BE49-F238E27FC236}">
-                  <a16:creationId xmlns:a16="http://schemas.microsoft.com/office/drawing/2014/main" id="{45D086A6-7137-A0D8-8CDE-45AD8AB39A37}"/>
-                </a:ext>
-              </a:extLst>
-            </p:cNvPr>
-            <p:cNvSpPr txBox="1"/>
-            <p:nvPr/>
-          </p:nvSpPr>
-          <p:spPr bwMode="auto">
-            <a:xfrm>
-              <a:off x="7370240" y="3295966"/>
-              <a:ext cx="656785" cy="137923"/>
-            </a:xfrm>
-            <a:prstGeom prst="rect">
-              <a:avLst/>
-            </a:prstGeom>
-            <a:noFill/>
-            <a:ln w="9525">
-              <a:noFill/>
-              <a:miter lim="800000"/>
-              <a:headEnd/>
-              <a:tailEnd/>
-            </a:ln>
-            <a:effectLst/>
-          </p:spPr>
-          <p:txBody>
-            <a:bodyPr wrap="square" lIns="0" tIns="0" rIns="0" bIns="0" rtlCol="0" anchor="t" anchorCtr="0">
-              <a:spAutoFit/>
-            </a:bodyPr>
-            <a:lstStyle/>
-            <a:p>
-              <a:pPr marL="0" marR="0" lvl="0" indent="0" algn="ctr" defTabSz="432000" rtl="0" eaLnBrk="0" fontAlgn="auto" latinLnBrk="0" hangingPunct="0">
-                <a:lnSpc>
-                  <a:spcPct val="120000"/>
-                </a:lnSpc>
-                <a:spcBef>
-                  <a:spcPts val="0"/>
-                </a:spcBef>
-                <a:spcAft>
-                  <a:spcPts val="0"/>
-                </a:spcAft>
-                <a:buClr>
-                  <a:srgbClr val="0A8276"/>
-                </a:buClr>
-                <a:buSzTx/>
-                <a:buFont typeface="Arial"/>
-                <a:buNone/>
-                <a:tabLst/>
-                <a:defRPr/>
-              </a:pPr>
-              <a:r>
-                <a:rPr kumimoji="0" lang="en-IN" sz="800" b="1" i="0" u="none" strike="noStrike" kern="0" cap="all" spc="0" normalizeH="0" baseline="0" noProof="0" dirty="0">
-                  <a:ln>
-                    <a:noFill/>
-                  </a:ln>
-                  <a:solidFill>
-                    <a:srgbClr val="FFFFFF"/>
-                  </a:solidFill>
-                  <a:effectLst/>
-                  <a:uLnTx/>
-                  <a:uFillTx/>
-                  <a:latin typeface="Montserrat" panose="00000500000000000000" pitchFamily="2" charset="0"/>
-                  <a:cs typeface="Arial"/>
-                  <a:sym typeface="Arial"/>
-                </a:rPr>
-                <a:t>LOW</a:t>
-              </a:r>
-              <a:endParaRPr kumimoji="0" lang="en-US" sz="800" b="1" i="0" u="none" strike="noStrike" kern="0" cap="all" spc="0" normalizeH="0" baseline="0" noProof="0" dirty="0">
-                <a:ln>
-                  <a:noFill/>
-                </a:ln>
-                <a:solidFill>
-                  <a:srgbClr val="FFFFFF"/>
-                </a:solidFill>
-                <a:effectLst/>
-                <a:uLnTx/>
-                <a:uFillTx/>
-                <a:latin typeface="Montserrat" panose="00000500000000000000" pitchFamily="2" charset="0"/>
-                <a:cs typeface="Arial"/>
-                <a:sym typeface="Arial"/>
-              </a:endParaRPr>
-            </a:p>
-          </p:txBody>
-        </p:sp>
-      </p:grpSp>
       <p:grpSp>
         <p:nvGrpSpPr>
           <p:cNvPr id="48" name="Group 47">
@@ -31471,7 +34294,7 @@
             <p:nvPr/>
           </p:nvPicPr>
           <p:blipFill>
-            <a:blip r:embed="rId6">
+            <a:blip r:embed="rId5">
               <a:lum bright="70000" contrast="-70000"/>
               <a:extLst>
                 <a:ext uri="{28A0092B-C50C-407E-A947-70E740481C1C}">
@@ -31508,7 +34331,7 @@
             <p:nvPr/>
           </p:nvPicPr>
           <p:blipFill>
-            <a:blip r:embed="rId7">
+            <a:blip r:embed="rId6">
               <a:extLst>
                 <a:ext uri="{28A0092B-C50C-407E-A947-70E740481C1C}">
                   <a14:useLocalDpi xmlns:a14="http://schemas.microsoft.com/office/drawing/2010/main" val="0"/>
@@ -31544,7 +34367,7 @@
             <p:nvPr/>
           </p:nvPicPr>
           <p:blipFill>
-            <a:blip r:embed="rId8">
+            <a:blip r:embed="rId7">
               <a:extLst>
                 <a:ext uri="{28A0092B-C50C-407E-A947-70E740481C1C}">
                   <a14:useLocalDpi xmlns:a14="http://schemas.microsoft.com/office/drawing/2010/main" val="0"/>
@@ -31580,7 +34403,7 @@
             <p:nvPr/>
           </p:nvPicPr>
           <p:blipFill>
-            <a:blip r:embed="rId9">
+            <a:blip r:embed="rId8">
               <a:extLst>
                 <a:ext uri="{28A0092B-C50C-407E-A947-70E740481C1C}">
                   <a14:useLocalDpi xmlns:a14="http://schemas.microsoft.com/office/drawing/2010/main" val="0"/>
@@ -31616,10 +34439,10 @@
             <p:nvPr/>
           </p:nvPicPr>
           <p:blipFill>
-            <a:blip r:embed="rId10">
+            <a:blip r:embed="rId9">
               <a:extLst>
                 <a:ext uri="{96DAC541-7B7A-43D3-8B79-37D633B846F1}">
-                  <asvg:svgBlip xmlns:asvg="http://schemas.microsoft.com/office/drawing/2016/SVG/main" r:embed="rId11"/>
+                  <asvg:svgBlip xmlns:asvg="http://schemas.microsoft.com/office/drawing/2016/SVG/main" r:embed="rId10"/>
                 </a:ext>
               </a:extLst>
             </a:blip>
@@ -32091,10 +34914,10 @@
             <p:nvPr/>
           </p:nvPicPr>
           <p:blipFill>
-            <a:blip r:embed="rId12">
+            <a:blip r:embed="rId11">
               <a:extLst>
                 <a:ext uri="{96DAC541-7B7A-43D3-8B79-37D633B846F1}">
-                  <asvg:svgBlip xmlns:asvg="http://schemas.microsoft.com/office/drawing/2016/SVG/main" r:embed="rId13"/>
+                  <asvg:svgBlip xmlns:asvg="http://schemas.microsoft.com/office/drawing/2016/SVG/main" r:embed="rId12"/>
                 </a:ext>
               </a:extLst>
             </a:blip>
@@ -33208,36 +36031,6 @@
           </p:style>
         </p:cxnSp>
       </p:grpSp>
-      <p:pic>
-        <p:nvPicPr>
-          <p:cNvPr id="78" name="Picture 77">
-            <a:extLst>
-              <a:ext uri="{FF2B5EF4-FFF2-40B4-BE49-F238E27FC236}">
-                <a16:creationId xmlns:a16="http://schemas.microsoft.com/office/drawing/2014/main" id="{42D1C8E7-C150-9209-990F-B444816D1EC6}"/>
-              </a:ext>
-            </a:extLst>
-          </p:cNvPr>
-          <p:cNvPicPr>
-            <a:picLocks noChangeAspect="1"/>
-          </p:cNvPicPr>
-          <p:nvPr/>
-        </p:nvPicPr>
-        <p:blipFill>
-          <a:blip r:embed="rId14"/>
-          <a:stretch>
-            <a:fillRect/>
-          </a:stretch>
-        </p:blipFill>
-        <p:spPr>
-          <a:xfrm>
-            <a:off x="3503567" y="352748"/>
-            <a:ext cx="1977206" cy="1980193"/>
-          </a:xfrm>
-          <a:prstGeom prst="rect">
-            <a:avLst/>
-          </a:prstGeom>
-        </p:spPr>
-      </p:pic>
       <p:grpSp>
         <p:nvGrpSpPr>
           <p:cNvPr id="93" name="Group 92">
@@ -34196,10 +36989,3204 @@
           </p:style>
         </p:cxnSp>
       </p:grpSp>
+      <p:pic>
+        <p:nvPicPr>
+          <p:cNvPr id="6" name="Picture 5">
+            <a:extLst>
+              <a:ext uri="{FF2B5EF4-FFF2-40B4-BE49-F238E27FC236}">
+                <a16:creationId xmlns:a16="http://schemas.microsoft.com/office/drawing/2014/main" id="{9441BA5D-FB3E-5A6D-BC1E-D4111E4F1E29}"/>
+              </a:ext>
+            </a:extLst>
+          </p:cNvPr>
+          <p:cNvPicPr>
+            <a:picLocks noChangeAspect="1"/>
+          </p:cNvPicPr>
+          <p:nvPr/>
+        </p:nvPicPr>
+        <p:blipFill>
+          <a:blip r:embed="rId2"/>
+          <a:stretch>
+            <a:fillRect/>
+          </a:stretch>
+        </p:blipFill>
+        <p:spPr>
+          <a:xfrm>
+            <a:off x="4431920" y="963878"/>
+            <a:ext cx="2929469" cy="2929469"/>
+          </a:xfrm>
+          <a:prstGeom prst="rect">
+            <a:avLst/>
+          </a:prstGeom>
+          <a:ln>
+            <a:noFill/>
+          </a:ln>
+        </p:spPr>
+      </p:pic>
+      <p:pic>
+        <p:nvPicPr>
+          <p:cNvPr id="11" name="Picture 10">
+            <a:extLst>
+              <a:ext uri="{FF2B5EF4-FFF2-40B4-BE49-F238E27FC236}">
+                <a16:creationId xmlns:a16="http://schemas.microsoft.com/office/drawing/2014/main" id="{DC9C4962-81E2-1EAE-8760-8E4D25EF1FA4}"/>
+              </a:ext>
+            </a:extLst>
+          </p:cNvPr>
+          <p:cNvPicPr>
+            <a:picLocks noChangeAspect="1"/>
+          </p:cNvPicPr>
+          <p:nvPr/>
+        </p:nvPicPr>
+        <p:blipFill>
+          <a:blip r:embed="rId3">
+            <a:extLst>
+              <a:ext uri="{BEBA8EAE-BF5A-486C-A8C5-ECC9F3942E4B}">
+                <a14:imgProps xmlns:a14="http://schemas.microsoft.com/office/drawing/2010/main">
+                  <a14:imgLayer r:embed="rId4">
+                    <a14:imgEffect>
+                      <a14:brightnessContrast bright="-20000" contrast="-20000"/>
+                    </a14:imgEffect>
+                  </a14:imgLayer>
+                </a14:imgProps>
+              </a:ext>
+            </a:extLst>
+          </a:blip>
+          <a:stretch>
+            <a:fillRect/>
+          </a:stretch>
+        </p:blipFill>
+        <p:spPr>
+          <a:xfrm>
+            <a:off x="4431920" y="960139"/>
+            <a:ext cx="2929469" cy="2929469"/>
+          </a:xfrm>
+          <a:prstGeom prst="rect">
+            <a:avLst/>
+          </a:prstGeom>
+          <a:ln>
+            <a:noFill/>
+          </a:ln>
+        </p:spPr>
+      </p:pic>
+      <p:sp>
+        <p:nvSpPr>
+          <p:cNvPr id="12" name="Rectangle: Top Corners Rounded 11">
+            <a:extLst>
+              <a:ext uri="{FF2B5EF4-FFF2-40B4-BE49-F238E27FC236}">
+                <a16:creationId xmlns:a16="http://schemas.microsoft.com/office/drawing/2014/main" id="{82E0B311-AB84-CB11-8CAC-6C4572774A9B}"/>
+              </a:ext>
+            </a:extLst>
+          </p:cNvPr>
+          <p:cNvSpPr/>
+          <p:nvPr/>
+        </p:nvSpPr>
+        <p:spPr bwMode="auto">
+          <a:xfrm rot="5400000">
+            <a:off x="4076979" y="2102183"/>
+            <a:ext cx="1375200" cy="658425"/>
+          </a:xfrm>
+          <a:prstGeom prst="round2SameRect">
+            <a:avLst>
+              <a:gd name="adj1" fmla="val 44038"/>
+              <a:gd name="adj2" fmla="val 0"/>
+            </a:avLst>
+          </a:prstGeom>
+          <a:solidFill>
+            <a:srgbClr val="086259">
+              <a:alpha val="34902"/>
+            </a:srgbClr>
+          </a:solidFill>
+          <a:ln w="12700">
+            <a:solidFill>
+              <a:srgbClr val="9BBA43"/>
+            </a:solidFill>
+            <a:miter lim="800000"/>
+            <a:headEnd/>
+            <a:tailEnd/>
+          </a:ln>
+          <a:effectLst>
+            <a:outerShdw blurRad="50800" dist="38100" algn="l" rotWithShape="0">
+              <a:prstClr val="black">
+                <a:alpha val="40000"/>
+              </a:prstClr>
+            </a:outerShdw>
+          </a:effectLst>
+        </p:spPr>
+        <p:txBody>
+          <a:bodyPr wrap="square" lIns="72000" tIns="72000" rIns="72000" bIns="72000" rtlCol="0" anchor="ctr"/>
+          <a:lstStyle/>
+          <a:p>
+            <a:pPr algn="ctr" defTabSz="576000" eaLnBrk="0" hangingPunct="0">
+              <a:lnSpc>
+                <a:spcPct val="120000"/>
+              </a:lnSpc>
+            </a:pPr>
+            <a:endParaRPr lang="en-US" sz="1600" baseline="0" dirty="0">
+              <a:solidFill>
+                <a:schemeClr val="bg1"/>
+              </a:solidFill>
+              <a:latin typeface="+mn-lt"/>
+              <a:ea typeface="+mn-ea"/>
+              <a:cs typeface="+mn-cs"/>
+            </a:endParaRPr>
+          </a:p>
+        </p:txBody>
+      </p:sp>
+      <p:sp>
+        <p:nvSpPr>
+          <p:cNvPr id="14" name="Rectangle: Top Corners Rounded 13">
+            <a:extLst>
+              <a:ext uri="{FF2B5EF4-FFF2-40B4-BE49-F238E27FC236}">
+                <a16:creationId xmlns:a16="http://schemas.microsoft.com/office/drawing/2014/main" id="{8485DD44-5691-764F-2748-5B67347748AA}"/>
+              </a:ext>
+            </a:extLst>
+          </p:cNvPr>
+          <p:cNvSpPr/>
+          <p:nvPr/>
+        </p:nvSpPr>
+        <p:spPr bwMode="auto">
+          <a:xfrm rot="16200000" flipH="1">
+            <a:off x="6337011" y="2102974"/>
+            <a:ext cx="1375200" cy="658425"/>
+          </a:xfrm>
+          <a:prstGeom prst="round2SameRect">
+            <a:avLst>
+              <a:gd name="adj1" fmla="val 44038"/>
+              <a:gd name="adj2" fmla="val 0"/>
+            </a:avLst>
+          </a:prstGeom>
+          <a:solidFill>
+            <a:srgbClr val="086259">
+              <a:alpha val="34902"/>
+            </a:srgbClr>
+          </a:solidFill>
+          <a:ln w="12700">
+            <a:solidFill>
+              <a:srgbClr val="9BBA43"/>
+            </a:solidFill>
+            <a:miter lim="800000"/>
+            <a:headEnd/>
+            <a:tailEnd/>
+          </a:ln>
+          <a:effectLst>
+            <a:outerShdw blurRad="50800" dist="38100" dir="10800000" algn="r" rotWithShape="0">
+              <a:prstClr val="black">
+                <a:alpha val="40000"/>
+              </a:prstClr>
+            </a:outerShdw>
+          </a:effectLst>
+        </p:spPr>
+        <p:txBody>
+          <a:bodyPr wrap="square" lIns="72000" tIns="72000" rIns="72000" bIns="72000" rtlCol="0" anchor="ctr"/>
+          <a:lstStyle/>
+          <a:p>
+            <a:pPr algn="ctr" defTabSz="576000" eaLnBrk="0" hangingPunct="0">
+              <a:lnSpc>
+                <a:spcPct val="120000"/>
+              </a:lnSpc>
+            </a:pPr>
+            <a:endParaRPr lang="en-US" sz="1600" baseline="0" dirty="0">
+              <a:solidFill>
+                <a:schemeClr val="bg1"/>
+              </a:solidFill>
+              <a:latin typeface="+mn-lt"/>
+              <a:ea typeface="+mn-ea"/>
+              <a:cs typeface="+mn-cs"/>
+            </a:endParaRPr>
+          </a:p>
+        </p:txBody>
+      </p:sp>
+      <p:sp>
+        <p:nvSpPr>
+          <p:cNvPr id="18" name="Block Arc 17">
+            <a:extLst>
+              <a:ext uri="{FF2B5EF4-FFF2-40B4-BE49-F238E27FC236}">
+                <a16:creationId xmlns:a16="http://schemas.microsoft.com/office/drawing/2014/main" id="{96C32426-0E15-9EF8-E205-75BC6FEB7E4E}"/>
+              </a:ext>
+            </a:extLst>
+          </p:cNvPr>
+          <p:cNvSpPr/>
+          <p:nvPr/>
+        </p:nvSpPr>
+        <p:spPr bwMode="auto">
+          <a:xfrm>
+            <a:off x="5232236" y="1762102"/>
+            <a:ext cx="1324717" cy="1324717"/>
+          </a:xfrm>
+          <a:prstGeom prst="blockArc">
+            <a:avLst>
+              <a:gd name="adj1" fmla="val 10800000"/>
+              <a:gd name="adj2" fmla="val 10799996"/>
+              <a:gd name="adj3" fmla="val 18018"/>
+            </a:avLst>
+          </a:prstGeom>
+          <a:gradFill>
+            <a:gsLst>
+              <a:gs pos="0">
+                <a:srgbClr val="656464"/>
+              </a:gs>
+              <a:gs pos="74000">
+                <a:srgbClr val="414852"/>
+              </a:gs>
+              <a:gs pos="100000">
+                <a:srgbClr val="39404A"/>
+              </a:gs>
+            </a:gsLst>
+            <a:lin ang="5400000" scaled="1"/>
+          </a:gradFill>
+          <a:ln w="9525">
+            <a:noFill/>
+            <a:miter lim="800000"/>
+            <a:headEnd/>
+            <a:tailEnd/>
+          </a:ln>
+          <a:effectLst>
+            <a:outerShdw blurRad="50800" dist="38100" dir="5400000" sx="101000" sy="101000" algn="t" rotWithShape="0">
+              <a:prstClr val="black">
+                <a:alpha val="40000"/>
+              </a:prstClr>
+            </a:outerShdw>
+          </a:effectLst>
+        </p:spPr>
+        <p:txBody>
+          <a:bodyPr wrap="square" lIns="72000" tIns="72000" rIns="72000" bIns="72000" rtlCol="0" anchor="ctr"/>
+          <a:lstStyle/>
+          <a:p>
+            <a:pPr algn="ctr" defTabSz="576000" eaLnBrk="0" hangingPunct="0">
+              <a:lnSpc>
+                <a:spcPct val="120000"/>
+              </a:lnSpc>
+            </a:pPr>
+            <a:endParaRPr lang="en-US" sz="1600" baseline="0" dirty="0">
+              <a:solidFill>
+                <a:schemeClr val="bg1"/>
+              </a:solidFill>
+              <a:latin typeface="+mn-lt"/>
+              <a:ea typeface="+mn-ea"/>
+              <a:cs typeface="+mn-cs"/>
+            </a:endParaRPr>
+          </a:p>
+        </p:txBody>
+      </p:sp>
+      <p:sp>
+        <p:nvSpPr>
+          <p:cNvPr id="19" name="Oval 18">
+            <a:extLst>
+              <a:ext uri="{FF2B5EF4-FFF2-40B4-BE49-F238E27FC236}">
+                <a16:creationId xmlns:a16="http://schemas.microsoft.com/office/drawing/2014/main" id="{AB9B8F39-9E98-5BFC-A6E7-C0F6A658D20E}"/>
+              </a:ext>
+            </a:extLst>
+          </p:cNvPr>
+          <p:cNvSpPr/>
+          <p:nvPr/>
+        </p:nvSpPr>
+        <p:spPr bwMode="auto">
+          <a:xfrm>
+            <a:off x="5470274" y="2001998"/>
+            <a:ext cx="844924" cy="844924"/>
+          </a:xfrm>
+          <a:prstGeom prst="ellipse">
+            <a:avLst/>
+          </a:prstGeom>
+          <a:gradFill>
+            <a:gsLst>
+              <a:gs pos="0">
+                <a:schemeClr val="tx1">
+                  <a:lumMod val="90000"/>
+                  <a:lumOff val="10000"/>
+                  <a:alpha val="80000"/>
+                </a:schemeClr>
+              </a:gs>
+              <a:gs pos="74000">
+                <a:srgbClr val="101820">
+                  <a:alpha val="80000"/>
+                </a:srgbClr>
+              </a:gs>
+              <a:gs pos="100000">
+                <a:srgbClr val="181820">
+                  <a:alpha val="80000"/>
+                </a:srgbClr>
+              </a:gs>
+            </a:gsLst>
+            <a:lin ang="5400000" scaled="1"/>
+          </a:gradFill>
+          <a:ln w="9525">
+            <a:solidFill>
+              <a:srgbClr val="5C676C"/>
+            </a:solidFill>
+            <a:miter lim="800000"/>
+            <a:headEnd/>
+            <a:tailEnd/>
+          </a:ln>
+        </p:spPr>
+        <p:txBody>
+          <a:bodyPr wrap="square" lIns="72000" tIns="72000" rIns="72000" bIns="72000" rtlCol="0" anchor="ctr"/>
+          <a:lstStyle/>
+          <a:p>
+            <a:pPr algn="ctr" defTabSz="576000" eaLnBrk="0" hangingPunct="0">
+              <a:lnSpc>
+                <a:spcPct val="120000"/>
+              </a:lnSpc>
+            </a:pPr>
+            <a:endParaRPr lang="en-US" sz="1600" baseline="0" dirty="0">
+              <a:solidFill>
+                <a:schemeClr val="bg1"/>
+              </a:solidFill>
+              <a:latin typeface="+mn-lt"/>
+              <a:ea typeface="+mn-ea"/>
+              <a:cs typeface="+mn-cs"/>
+            </a:endParaRPr>
+          </a:p>
+        </p:txBody>
+      </p:sp>
+      <p:grpSp>
+        <p:nvGrpSpPr>
+          <p:cNvPr id="22" name="Group 21">
+            <a:extLst>
+              <a:ext uri="{FF2B5EF4-FFF2-40B4-BE49-F238E27FC236}">
+                <a16:creationId xmlns:a16="http://schemas.microsoft.com/office/drawing/2014/main" id="{048BCB2D-D250-E271-1F27-1D889069F2BB}"/>
+              </a:ext>
+            </a:extLst>
+          </p:cNvPr>
+          <p:cNvGrpSpPr/>
+          <p:nvPr/>
+        </p:nvGrpSpPr>
+        <p:grpSpPr>
+          <a:xfrm>
+            <a:off x="5516351" y="2116993"/>
+            <a:ext cx="833235" cy="648530"/>
+            <a:chOff x="1506203" y="2055869"/>
+            <a:chExt cx="833235" cy="648530"/>
+          </a:xfrm>
+        </p:grpSpPr>
+        <p:sp>
+          <p:nvSpPr>
+            <p:cNvPr id="29" name="Rectangle 28">
+              <a:extLst>
+                <a:ext uri="{FF2B5EF4-FFF2-40B4-BE49-F238E27FC236}">
+                  <a16:creationId xmlns:a16="http://schemas.microsoft.com/office/drawing/2014/main" id="{192E39F5-B836-0F6C-CA5D-169309062B1F}"/>
+                </a:ext>
+              </a:extLst>
+            </p:cNvPr>
+            <p:cNvSpPr/>
+            <p:nvPr/>
+          </p:nvSpPr>
+          <p:spPr>
+            <a:xfrm>
+              <a:off x="1506203" y="2058068"/>
+              <a:ext cx="704039" cy="646331"/>
+            </a:xfrm>
+            <a:prstGeom prst="rect">
+              <a:avLst/>
+            </a:prstGeom>
+          </p:spPr>
+          <p:txBody>
+            <a:bodyPr wrap="none">
+              <a:spAutoFit/>
+            </a:bodyPr>
+            <a:lstStyle/>
+            <a:p>
+              <a:pPr algn="ctr"/>
+              <a:r>
+                <a:rPr lang="en-US" sz="3600" dirty="0">
+                  <a:solidFill>
+                    <a:schemeClr val="bg1">
+                      <a:lumMod val="95000"/>
+                    </a:schemeClr>
+                  </a:solidFill>
+                  <a:latin typeface="Roboto" panose="02000000000000000000" pitchFamily="2" charset="0"/>
+                  <a:ea typeface="Roboto" panose="02000000000000000000" pitchFamily="2" charset="0"/>
+                </a:rPr>
+                <a:t>27</a:t>
+              </a:r>
+            </a:p>
+          </p:txBody>
+        </p:sp>
+        <p:sp>
+          <p:nvSpPr>
+            <p:cNvPr id="32" name="Rectangle 31">
+              <a:extLst>
+                <a:ext uri="{FF2B5EF4-FFF2-40B4-BE49-F238E27FC236}">
+                  <a16:creationId xmlns:a16="http://schemas.microsoft.com/office/drawing/2014/main" id="{9213EBD2-4B14-4E50-C08E-5CC48CD7C930}"/>
+                </a:ext>
+              </a:extLst>
+            </p:cNvPr>
+            <p:cNvSpPr/>
+            <p:nvPr/>
+          </p:nvSpPr>
+          <p:spPr>
+            <a:xfrm>
+              <a:off x="2010502" y="2055869"/>
+              <a:ext cx="328936" cy="523220"/>
+            </a:xfrm>
+            <a:prstGeom prst="rect">
+              <a:avLst/>
+            </a:prstGeom>
+          </p:spPr>
+          <p:txBody>
+            <a:bodyPr wrap="none">
+              <a:spAutoFit/>
+            </a:bodyPr>
+            <a:lstStyle/>
+            <a:p>
+              <a:pPr algn="ctr"/>
+              <a:r>
+                <a:rPr lang="en-US" altLang="en-US" sz="2800" dirty="0">
+                  <a:solidFill>
+                    <a:schemeClr val="bg1">
+                      <a:lumMod val="95000"/>
+                    </a:schemeClr>
+                  </a:solidFill>
+                  <a:latin typeface="Montserrat"/>
+                </a:rPr>
+                <a:t>°</a:t>
+              </a:r>
+              <a:endParaRPr lang="en-US" sz="2800" dirty="0">
+                <a:solidFill>
+                  <a:schemeClr val="bg1">
+                    <a:lumMod val="95000"/>
+                  </a:schemeClr>
+                </a:solidFill>
+                <a:latin typeface="Montserrat"/>
+                <a:ea typeface="Roboto" panose="02000000000000000000" pitchFamily="2" charset="0"/>
+              </a:endParaRPr>
+            </a:p>
+          </p:txBody>
+        </p:sp>
+      </p:grpSp>
+      <p:grpSp>
+        <p:nvGrpSpPr>
+          <p:cNvPr id="33" name="Group 32">
+            <a:extLst>
+              <a:ext uri="{FF2B5EF4-FFF2-40B4-BE49-F238E27FC236}">
+                <a16:creationId xmlns:a16="http://schemas.microsoft.com/office/drawing/2014/main" id="{941515A9-9EAF-11EC-CADA-156F48B85A66}"/>
+              </a:ext>
+            </a:extLst>
+          </p:cNvPr>
+          <p:cNvGrpSpPr/>
+          <p:nvPr/>
+        </p:nvGrpSpPr>
+        <p:grpSpPr>
+          <a:xfrm>
+            <a:off x="4333686" y="1886616"/>
+            <a:ext cx="2997336" cy="1920612"/>
+            <a:chOff x="4966189" y="2403842"/>
+            <a:chExt cx="2997336" cy="1920612"/>
+          </a:xfrm>
+        </p:grpSpPr>
+        <p:pic>
+          <p:nvPicPr>
+            <p:cNvPr id="34" name="Picture 33" descr="A black background with a circular design&#10;&#10;Description automatically generated">
+              <a:extLst>
+                <a:ext uri="{FF2B5EF4-FFF2-40B4-BE49-F238E27FC236}">
+                  <a16:creationId xmlns:a16="http://schemas.microsoft.com/office/drawing/2014/main" id="{AEF50FF6-CF02-62F8-AA70-1755F7D75F78}"/>
+                </a:ext>
+              </a:extLst>
+            </p:cNvPr>
+            <p:cNvPicPr>
+              <a:picLocks noChangeAspect="1"/>
+            </p:cNvPicPr>
+            <p:nvPr/>
+          </p:nvPicPr>
+          <p:blipFill>
+            <a:blip r:embed="rId5">
+              <a:lum bright="70000" contrast="-70000"/>
+              <a:extLst>
+                <a:ext uri="{28A0092B-C50C-407E-A947-70E740481C1C}">
+                  <a14:useLocalDpi xmlns:a14="http://schemas.microsoft.com/office/drawing/2010/main" val="0"/>
+                </a:ext>
+              </a:extLst>
+            </a:blip>
+            <a:stretch>
+              <a:fillRect/>
+            </a:stretch>
+          </p:blipFill>
+          <p:spPr>
+            <a:xfrm>
+              <a:off x="7436566" y="2953793"/>
+              <a:ext cx="386261" cy="386261"/>
+            </a:xfrm>
+            <a:prstGeom prst="rect">
+              <a:avLst/>
+            </a:prstGeom>
+          </p:spPr>
+        </p:pic>
+        <p:pic>
+          <p:nvPicPr>
+            <p:cNvPr id="35" name="Picture 34" descr="A white line drawing of a leaf&#10;&#10;Description automatically generated">
+              <a:extLst>
+                <a:ext uri="{FF2B5EF4-FFF2-40B4-BE49-F238E27FC236}">
+                  <a16:creationId xmlns:a16="http://schemas.microsoft.com/office/drawing/2014/main" id="{C93B45AD-D2F4-8245-CF0A-C1647AB78264}"/>
+                </a:ext>
+              </a:extLst>
+            </p:cNvPr>
+            <p:cNvPicPr>
+              <a:picLocks noChangeAspect="1"/>
+            </p:cNvPicPr>
+            <p:nvPr/>
+          </p:nvPicPr>
+          <p:blipFill>
+            <a:blip r:embed="rId6">
+              <a:extLst>
+                <a:ext uri="{28A0092B-C50C-407E-A947-70E740481C1C}">
+                  <a14:useLocalDpi xmlns:a14="http://schemas.microsoft.com/office/drawing/2010/main" val="0"/>
+                </a:ext>
+              </a:extLst>
+            </a:blip>
+            <a:stretch>
+              <a:fillRect/>
+            </a:stretch>
+          </p:blipFill>
+          <p:spPr>
+            <a:xfrm>
+              <a:off x="7472140" y="2421331"/>
+              <a:ext cx="310753" cy="310753"/>
+            </a:xfrm>
+            <a:prstGeom prst="rect">
+              <a:avLst/>
+            </a:prstGeom>
+          </p:spPr>
+        </p:pic>
+        <p:pic>
+          <p:nvPicPr>
+            <p:cNvPr id="36" name="Picture 35" descr="A wifi symbol on a black background&#10;&#10;Description automatically generated">
+              <a:extLst>
+                <a:ext uri="{FF2B5EF4-FFF2-40B4-BE49-F238E27FC236}">
+                  <a16:creationId xmlns:a16="http://schemas.microsoft.com/office/drawing/2014/main" id="{1249410C-FF55-B2BB-3EFB-612A07734020}"/>
+                </a:ext>
+              </a:extLst>
+            </p:cNvPr>
+            <p:cNvPicPr>
+              <a:picLocks noChangeAspect="1"/>
+            </p:cNvPicPr>
+            <p:nvPr/>
+          </p:nvPicPr>
+          <p:blipFill>
+            <a:blip r:embed="rId7">
+              <a:extLst>
+                <a:ext uri="{28A0092B-C50C-407E-A947-70E740481C1C}">
+                  <a14:useLocalDpi xmlns:a14="http://schemas.microsoft.com/office/drawing/2010/main" val="0"/>
+                </a:ext>
+              </a:extLst>
+            </a:blip>
+            <a:stretch>
+              <a:fillRect/>
+            </a:stretch>
+          </p:blipFill>
+          <p:spPr>
+            <a:xfrm>
+              <a:off x="5148779" y="2976250"/>
+              <a:ext cx="361847" cy="361847"/>
+            </a:xfrm>
+            <a:prstGeom prst="rect">
+              <a:avLst/>
+            </a:prstGeom>
+          </p:spPr>
+        </p:pic>
+        <p:pic>
+          <p:nvPicPr>
+            <p:cNvPr id="37" name="Picture 36" descr="A white line drawing of gears&#10;&#10;Description automatically generated">
+              <a:extLst>
+                <a:ext uri="{FF2B5EF4-FFF2-40B4-BE49-F238E27FC236}">
+                  <a16:creationId xmlns:a16="http://schemas.microsoft.com/office/drawing/2014/main" id="{04B0A2CF-351A-3919-6D03-0E64CA0DC75B}"/>
+                </a:ext>
+              </a:extLst>
+            </p:cNvPr>
+            <p:cNvPicPr>
+              <a:picLocks noChangeAspect="1"/>
+            </p:cNvPicPr>
+            <p:nvPr/>
+          </p:nvPicPr>
+          <p:blipFill>
+            <a:blip r:embed="rId8">
+              <a:extLst>
+                <a:ext uri="{28A0092B-C50C-407E-A947-70E740481C1C}">
+                  <a14:useLocalDpi xmlns:a14="http://schemas.microsoft.com/office/drawing/2010/main" val="0"/>
+                </a:ext>
+              </a:extLst>
+            </a:blip>
+            <a:stretch>
+              <a:fillRect/>
+            </a:stretch>
+          </p:blipFill>
+          <p:spPr>
+            <a:xfrm>
+              <a:off x="5161806" y="2403842"/>
+              <a:ext cx="348820" cy="348820"/>
+            </a:xfrm>
+            <a:prstGeom prst="rect">
+              <a:avLst/>
+            </a:prstGeom>
+          </p:spPr>
+        </p:pic>
+        <p:pic>
+          <p:nvPicPr>
+            <p:cNvPr id="38" name="Picture 33">
+              <a:extLst>
+                <a:ext uri="{FF2B5EF4-FFF2-40B4-BE49-F238E27FC236}">
+                  <a16:creationId xmlns:a16="http://schemas.microsoft.com/office/drawing/2014/main" id="{4A257E74-BA07-5281-F968-87880F1A3946}"/>
+                </a:ext>
+              </a:extLst>
+            </p:cNvPr>
+            <p:cNvPicPr>
+              <a:picLocks noChangeAspect="1"/>
+            </p:cNvPicPr>
+            <p:nvPr/>
+          </p:nvPicPr>
+          <p:blipFill>
+            <a:blip r:embed="rId9">
+              <a:extLst>
+                <a:ext uri="{96DAC541-7B7A-43D3-8B79-37D633B846F1}">
+                  <asvg:svgBlip xmlns:asvg="http://schemas.microsoft.com/office/drawing/2016/SVG/main" r:embed="rId10"/>
+                </a:ext>
+              </a:extLst>
+            </a:blip>
+            <a:srcRect/>
+            <a:stretch/>
+          </p:blipFill>
+          <p:spPr>
+            <a:xfrm>
+              <a:off x="7333356" y="3910651"/>
+              <a:ext cx="255929" cy="255929"/>
+            </a:xfrm>
+            <a:prstGeom prst="rect">
+              <a:avLst/>
+            </a:prstGeom>
+          </p:spPr>
+        </p:pic>
+        <p:sp>
+          <p:nvSpPr>
+            <p:cNvPr id="39" name="TextBox 38">
+              <a:extLst>
+                <a:ext uri="{FF2B5EF4-FFF2-40B4-BE49-F238E27FC236}">
+                  <a16:creationId xmlns:a16="http://schemas.microsoft.com/office/drawing/2014/main" id="{311CB056-2145-D6AD-8B4E-10FBF2AD5AB7}"/>
+                </a:ext>
+              </a:extLst>
+            </p:cNvPr>
+            <p:cNvSpPr txBox="1"/>
+            <p:nvPr/>
+          </p:nvSpPr>
+          <p:spPr bwMode="auto">
+            <a:xfrm>
+              <a:off x="5010126" y="2726929"/>
+              <a:ext cx="656785" cy="136191"/>
+            </a:xfrm>
+            <a:prstGeom prst="rect">
+              <a:avLst/>
+            </a:prstGeom>
+            <a:noFill/>
+            <a:ln w="9525">
+              <a:noFill/>
+              <a:miter lim="800000"/>
+              <a:headEnd/>
+              <a:tailEnd/>
+            </a:ln>
+            <a:effectLst/>
+          </p:spPr>
+          <p:txBody>
+            <a:bodyPr wrap="square" lIns="0" tIns="0" rIns="0" bIns="0" rtlCol="0" anchor="t" anchorCtr="0">
+              <a:spAutoFit/>
+            </a:bodyPr>
+            <a:lstStyle/>
+            <a:p>
+              <a:pPr marL="0" marR="0" lvl="0" indent="0" algn="ctr" defTabSz="432000" rtl="0" eaLnBrk="0" fontAlgn="auto" latinLnBrk="0" hangingPunct="0">
+                <a:lnSpc>
+                  <a:spcPct val="120000"/>
+                </a:lnSpc>
+                <a:spcBef>
+                  <a:spcPts val="0"/>
+                </a:spcBef>
+                <a:spcAft>
+                  <a:spcPts val="0"/>
+                </a:spcAft>
+                <a:buClr>
+                  <a:srgbClr val="0A8276"/>
+                </a:buClr>
+                <a:buSzTx/>
+                <a:buFont typeface="Arial"/>
+                <a:buNone/>
+                <a:tabLst/>
+                <a:defRPr/>
+              </a:pPr>
+              <a:r>
+                <a:rPr kumimoji="0" lang="en-IN" sz="800" b="1" i="0" u="none" strike="noStrike" kern="0" cap="all" spc="0" normalizeH="0" baseline="0" noProof="0" dirty="0">
+                  <a:ln>
+                    <a:noFill/>
+                  </a:ln>
+                  <a:solidFill>
+                    <a:srgbClr val="FFFFFF"/>
+                  </a:solidFill>
+                  <a:effectLst/>
+                  <a:uLnTx/>
+                  <a:uFillTx/>
+                  <a:latin typeface="Montserrat" panose="00000500000000000000" pitchFamily="2" charset="0"/>
+                  <a:cs typeface="Arial"/>
+                  <a:sym typeface="Arial"/>
+                </a:rPr>
+                <a:t>SETTINGS</a:t>
+              </a:r>
+              <a:endParaRPr kumimoji="0" lang="en-US" sz="800" b="1" i="0" u="none" strike="noStrike" kern="0" cap="all" spc="0" normalizeH="0" baseline="0" noProof="0" dirty="0">
+                <a:ln>
+                  <a:noFill/>
+                </a:ln>
+                <a:solidFill>
+                  <a:srgbClr val="FFFFFF"/>
+                </a:solidFill>
+                <a:effectLst/>
+                <a:uLnTx/>
+                <a:uFillTx/>
+                <a:latin typeface="Montserrat" panose="00000500000000000000" pitchFamily="2" charset="0"/>
+                <a:cs typeface="Arial"/>
+                <a:sym typeface="Arial"/>
+              </a:endParaRPr>
+            </a:p>
+          </p:txBody>
+        </p:sp>
+        <p:sp>
+          <p:nvSpPr>
+            <p:cNvPr id="40" name="TextBox 39">
+              <a:extLst>
+                <a:ext uri="{FF2B5EF4-FFF2-40B4-BE49-F238E27FC236}">
+                  <a16:creationId xmlns:a16="http://schemas.microsoft.com/office/drawing/2014/main" id="{80841171-6FFF-90FA-1E77-7EDC3762E0B0}"/>
+                </a:ext>
+              </a:extLst>
+            </p:cNvPr>
+            <p:cNvSpPr txBox="1"/>
+            <p:nvPr/>
+          </p:nvSpPr>
+          <p:spPr bwMode="auto">
+            <a:xfrm>
+              <a:off x="5336528" y="4188263"/>
+              <a:ext cx="656785" cy="136191"/>
+            </a:xfrm>
+            <a:prstGeom prst="rect">
+              <a:avLst/>
+            </a:prstGeom>
+            <a:noFill/>
+            <a:ln w="9525">
+              <a:noFill/>
+              <a:miter lim="800000"/>
+              <a:headEnd/>
+              <a:tailEnd/>
+            </a:ln>
+            <a:effectLst/>
+          </p:spPr>
+          <p:txBody>
+            <a:bodyPr wrap="square" lIns="0" tIns="0" rIns="0" bIns="0" rtlCol="0" anchor="t" anchorCtr="0">
+              <a:spAutoFit/>
+            </a:bodyPr>
+            <a:lstStyle/>
+            <a:p>
+              <a:pPr marL="0" marR="0" lvl="0" indent="0" algn="ctr" defTabSz="432000" rtl="0" eaLnBrk="0" fontAlgn="auto" latinLnBrk="0" hangingPunct="0">
+                <a:lnSpc>
+                  <a:spcPct val="120000"/>
+                </a:lnSpc>
+                <a:spcBef>
+                  <a:spcPts val="0"/>
+                </a:spcBef>
+                <a:spcAft>
+                  <a:spcPts val="0"/>
+                </a:spcAft>
+                <a:buClr>
+                  <a:srgbClr val="0A8276"/>
+                </a:buClr>
+                <a:buSzTx/>
+                <a:buFont typeface="Arial"/>
+                <a:buNone/>
+                <a:tabLst/>
+                <a:defRPr/>
+              </a:pPr>
+              <a:r>
+                <a:rPr kumimoji="0" lang="en-IN" sz="800" b="1" i="0" u="none" strike="noStrike" kern="0" cap="all" spc="0" normalizeH="0" baseline="0" noProof="0" dirty="0">
+                  <a:ln>
+                    <a:noFill/>
+                  </a:ln>
+                  <a:solidFill>
+                    <a:srgbClr val="FFFFFF"/>
+                  </a:solidFill>
+                  <a:effectLst/>
+                  <a:uLnTx/>
+                  <a:uFillTx/>
+                  <a:latin typeface="Montserrat" panose="00000500000000000000" pitchFamily="2" charset="0"/>
+                  <a:cs typeface="Arial"/>
+                  <a:sym typeface="Arial"/>
+                </a:rPr>
+                <a:t>PRESENCE</a:t>
+              </a:r>
+              <a:endParaRPr kumimoji="0" lang="en-US" sz="800" b="1" i="0" u="none" strike="noStrike" kern="0" cap="all" spc="0" normalizeH="0" baseline="0" noProof="0" dirty="0">
+                <a:ln>
+                  <a:noFill/>
+                </a:ln>
+                <a:solidFill>
+                  <a:srgbClr val="FFFFFF"/>
+                </a:solidFill>
+                <a:effectLst/>
+                <a:uLnTx/>
+                <a:uFillTx/>
+                <a:latin typeface="Montserrat" panose="00000500000000000000" pitchFamily="2" charset="0"/>
+                <a:cs typeface="Arial"/>
+                <a:sym typeface="Arial"/>
+              </a:endParaRPr>
+            </a:p>
+          </p:txBody>
+        </p:sp>
+        <p:sp>
+          <p:nvSpPr>
+            <p:cNvPr id="41" name="TextBox 40">
+              <a:extLst>
+                <a:ext uri="{FF2B5EF4-FFF2-40B4-BE49-F238E27FC236}">
+                  <a16:creationId xmlns:a16="http://schemas.microsoft.com/office/drawing/2014/main" id="{408DE29E-2292-4907-BC8F-ACED6764DD48}"/>
+                </a:ext>
+              </a:extLst>
+            </p:cNvPr>
+            <p:cNvSpPr txBox="1"/>
+            <p:nvPr/>
+          </p:nvSpPr>
+          <p:spPr bwMode="auto">
+            <a:xfrm>
+              <a:off x="7272043" y="2704326"/>
+              <a:ext cx="656785" cy="136191"/>
+            </a:xfrm>
+            <a:prstGeom prst="rect">
+              <a:avLst/>
+            </a:prstGeom>
+            <a:noFill/>
+            <a:ln w="9525">
+              <a:noFill/>
+              <a:miter lim="800000"/>
+              <a:headEnd/>
+              <a:tailEnd/>
+            </a:ln>
+            <a:effectLst/>
+          </p:spPr>
+          <p:txBody>
+            <a:bodyPr wrap="square" lIns="0" tIns="0" rIns="0" bIns="0" rtlCol="0" anchor="t" anchorCtr="0">
+              <a:spAutoFit/>
+            </a:bodyPr>
+            <a:lstStyle/>
+            <a:p>
+              <a:pPr marL="0" marR="0" lvl="0" indent="0" algn="ctr" defTabSz="432000" rtl="0" eaLnBrk="0" fontAlgn="auto" latinLnBrk="0" hangingPunct="0">
+                <a:lnSpc>
+                  <a:spcPct val="120000"/>
+                </a:lnSpc>
+                <a:spcBef>
+                  <a:spcPts val="0"/>
+                </a:spcBef>
+                <a:spcAft>
+                  <a:spcPts val="0"/>
+                </a:spcAft>
+                <a:buClr>
+                  <a:srgbClr val="0A8276"/>
+                </a:buClr>
+                <a:buSzTx/>
+                <a:buFont typeface="Arial"/>
+                <a:buNone/>
+                <a:tabLst/>
+                <a:defRPr/>
+              </a:pPr>
+              <a:r>
+                <a:rPr kumimoji="0" lang="en-IN" sz="800" b="1" i="0" u="none" strike="noStrike" kern="0" cap="all" spc="0" normalizeH="0" baseline="0" noProof="0" dirty="0">
+                  <a:ln>
+                    <a:noFill/>
+                  </a:ln>
+                  <a:solidFill>
+                    <a:srgbClr val="FFFFFF"/>
+                  </a:solidFill>
+                  <a:effectLst/>
+                  <a:uLnTx/>
+                  <a:uFillTx/>
+                  <a:latin typeface="Montserrat" panose="00000500000000000000" pitchFamily="2" charset="0"/>
+                  <a:cs typeface="Arial"/>
+                  <a:sym typeface="Arial"/>
+                </a:rPr>
+                <a:t>MODE</a:t>
+              </a:r>
+              <a:endParaRPr kumimoji="0" lang="en-US" sz="800" b="1" i="0" u="none" strike="noStrike" kern="0" cap="all" spc="0" normalizeH="0" baseline="0" noProof="0" dirty="0">
+                <a:ln>
+                  <a:noFill/>
+                </a:ln>
+                <a:solidFill>
+                  <a:srgbClr val="FFFFFF"/>
+                </a:solidFill>
+                <a:effectLst/>
+                <a:uLnTx/>
+                <a:uFillTx/>
+                <a:latin typeface="Montserrat" panose="00000500000000000000" pitchFamily="2" charset="0"/>
+                <a:cs typeface="Arial"/>
+                <a:sym typeface="Arial"/>
+              </a:endParaRPr>
+            </a:p>
+          </p:txBody>
+        </p:sp>
+        <p:sp>
+          <p:nvSpPr>
+            <p:cNvPr id="42" name="TextBox 41">
+              <a:extLst>
+                <a:ext uri="{FF2B5EF4-FFF2-40B4-BE49-F238E27FC236}">
+                  <a16:creationId xmlns:a16="http://schemas.microsoft.com/office/drawing/2014/main" id="{1FCE2392-5616-8B39-9EFE-EC6675AB9968}"/>
+                </a:ext>
+              </a:extLst>
+            </p:cNvPr>
+            <p:cNvSpPr txBox="1"/>
+            <p:nvPr/>
+          </p:nvSpPr>
+          <p:spPr bwMode="auto">
+            <a:xfrm>
+              <a:off x="7094229" y="4185986"/>
+              <a:ext cx="743757" cy="136191"/>
+            </a:xfrm>
+            <a:prstGeom prst="rect">
+              <a:avLst/>
+            </a:prstGeom>
+            <a:noFill/>
+            <a:ln w="9525">
+              <a:noFill/>
+              <a:miter lim="800000"/>
+              <a:headEnd/>
+              <a:tailEnd/>
+            </a:ln>
+            <a:effectLst/>
+          </p:spPr>
+          <p:txBody>
+            <a:bodyPr wrap="square" lIns="0" tIns="0" rIns="0" bIns="0" rtlCol="0" anchor="t" anchorCtr="0">
+              <a:spAutoFit/>
+            </a:bodyPr>
+            <a:lstStyle/>
+            <a:p>
+              <a:pPr marL="0" marR="0" lvl="0" indent="0" algn="ctr" defTabSz="432000" rtl="0" eaLnBrk="0" fontAlgn="auto" latinLnBrk="0" hangingPunct="0">
+                <a:lnSpc>
+                  <a:spcPct val="120000"/>
+                </a:lnSpc>
+                <a:spcBef>
+                  <a:spcPts val="0"/>
+                </a:spcBef>
+                <a:spcAft>
+                  <a:spcPts val="0"/>
+                </a:spcAft>
+                <a:buClr>
+                  <a:srgbClr val="0A8276"/>
+                </a:buClr>
+                <a:buSzTx/>
+                <a:buFont typeface="Arial"/>
+                <a:buNone/>
+                <a:tabLst/>
+                <a:defRPr/>
+              </a:pPr>
+              <a:r>
+                <a:rPr kumimoji="0" lang="en-IN" sz="800" b="1" i="0" u="none" strike="noStrike" kern="0" cap="all" spc="0" normalizeH="0" baseline="0" noProof="0" dirty="0">
+                  <a:ln>
+                    <a:noFill/>
+                  </a:ln>
+                  <a:solidFill>
+                    <a:srgbClr val="FFFFFF"/>
+                  </a:solidFill>
+                  <a:effectLst/>
+                  <a:uLnTx/>
+                  <a:uFillTx/>
+                  <a:latin typeface="Montserrat" panose="00000500000000000000" pitchFamily="2" charset="0"/>
+                  <a:cs typeface="Arial"/>
+                  <a:sym typeface="Arial"/>
+                </a:rPr>
+                <a:t>COMMAND</a:t>
+              </a:r>
+              <a:endParaRPr kumimoji="0" lang="en-US" sz="800" b="1" i="0" u="none" strike="noStrike" kern="0" cap="all" spc="0" normalizeH="0" baseline="0" noProof="0" dirty="0">
+                <a:ln>
+                  <a:noFill/>
+                </a:ln>
+                <a:solidFill>
+                  <a:srgbClr val="FFFFFF"/>
+                </a:solidFill>
+                <a:effectLst/>
+                <a:uLnTx/>
+                <a:uFillTx/>
+                <a:latin typeface="Montserrat" panose="00000500000000000000" pitchFamily="2" charset="0"/>
+                <a:cs typeface="Arial"/>
+                <a:sym typeface="Arial"/>
+              </a:endParaRPr>
+            </a:p>
+          </p:txBody>
+        </p:sp>
+        <p:sp>
+          <p:nvSpPr>
+            <p:cNvPr id="43" name="TextBox 42">
+              <a:extLst>
+                <a:ext uri="{FF2B5EF4-FFF2-40B4-BE49-F238E27FC236}">
+                  <a16:creationId xmlns:a16="http://schemas.microsoft.com/office/drawing/2014/main" id="{04FA0A8C-9590-5373-059F-771435078CE9}"/>
+                </a:ext>
+              </a:extLst>
+            </p:cNvPr>
+            <p:cNvSpPr txBox="1"/>
+            <p:nvPr/>
+          </p:nvSpPr>
+          <p:spPr bwMode="auto">
+            <a:xfrm>
+              <a:off x="4966189" y="3302460"/>
+              <a:ext cx="743757" cy="136191"/>
+            </a:xfrm>
+            <a:prstGeom prst="rect">
+              <a:avLst/>
+            </a:prstGeom>
+            <a:noFill/>
+            <a:ln w="9525">
+              <a:noFill/>
+              <a:miter lim="800000"/>
+              <a:headEnd/>
+              <a:tailEnd/>
+            </a:ln>
+            <a:effectLst/>
+          </p:spPr>
+          <p:txBody>
+            <a:bodyPr wrap="square" lIns="0" tIns="0" rIns="0" bIns="0" rtlCol="0" anchor="t" anchorCtr="0">
+              <a:spAutoFit/>
+            </a:bodyPr>
+            <a:lstStyle/>
+            <a:p>
+              <a:pPr marL="0" marR="0" lvl="0" indent="0" algn="ctr" defTabSz="432000" rtl="0" eaLnBrk="0" fontAlgn="auto" latinLnBrk="0" hangingPunct="0">
+                <a:lnSpc>
+                  <a:spcPct val="120000"/>
+                </a:lnSpc>
+                <a:spcBef>
+                  <a:spcPts val="0"/>
+                </a:spcBef>
+                <a:spcAft>
+                  <a:spcPts val="0"/>
+                </a:spcAft>
+                <a:buClr>
+                  <a:srgbClr val="0A8276"/>
+                </a:buClr>
+                <a:buSzTx/>
+                <a:buFont typeface="Arial"/>
+                <a:buNone/>
+                <a:tabLst/>
+                <a:defRPr/>
+              </a:pPr>
+              <a:r>
+                <a:rPr kumimoji="0" lang="en-IN" sz="800" b="1" i="0" u="none" strike="noStrike" kern="0" cap="all" spc="0" normalizeH="0" baseline="0" noProof="0" dirty="0">
+                  <a:ln>
+                    <a:noFill/>
+                  </a:ln>
+                  <a:solidFill>
+                    <a:srgbClr val="FFFFFF"/>
+                  </a:solidFill>
+                  <a:effectLst/>
+                  <a:uLnTx/>
+                  <a:uFillTx/>
+                  <a:latin typeface="Montserrat" panose="00000500000000000000" pitchFamily="2" charset="0"/>
+                  <a:cs typeface="Arial"/>
+                  <a:sym typeface="Arial"/>
+                </a:rPr>
+                <a:t>CONNECT</a:t>
+              </a:r>
+              <a:endParaRPr kumimoji="0" lang="en-US" sz="800" b="1" i="0" u="none" strike="noStrike" kern="0" cap="all" spc="0" normalizeH="0" baseline="0" noProof="0" dirty="0">
+                <a:ln>
+                  <a:noFill/>
+                </a:ln>
+                <a:solidFill>
+                  <a:srgbClr val="FFFFFF"/>
+                </a:solidFill>
+                <a:effectLst/>
+                <a:uLnTx/>
+                <a:uFillTx/>
+                <a:latin typeface="Montserrat" panose="00000500000000000000" pitchFamily="2" charset="0"/>
+                <a:cs typeface="Arial"/>
+                <a:sym typeface="Arial"/>
+              </a:endParaRPr>
+            </a:p>
+          </p:txBody>
+        </p:sp>
+        <p:pic>
+          <p:nvPicPr>
+            <p:cNvPr id="46" name="Graphic 45" descr="Man outline">
+              <a:extLst>
+                <a:ext uri="{FF2B5EF4-FFF2-40B4-BE49-F238E27FC236}">
+                  <a16:creationId xmlns:a16="http://schemas.microsoft.com/office/drawing/2014/main" id="{75AF7728-66D4-0D82-CBA7-3577A7C986EC}"/>
+                </a:ext>
+              </a:extLst>
+            </p:cNvPr>
+            <p:cNvPicPr>
+              <a:picLocks noChangeAspect="1"/>
+            </p:cNvPicPr>
+            <p:nvPr/>
+          </p:nvPicPr>
+          <p:blipFill>
+            <a:blip r:embed="rId11">
+              <a:extLst>
+                <a:ext uri="{96DAC541-7B7A-43D3-8B79-37D633B846F1}">
+                  <asvg:svgBlip xmlns:asvg="http://schemas.microsoft.com/office/drawing/2016/SVG/main" r:embed="rId12"/>
+                </a:ext>
+              </a:extLst>
+            </a:blip>
+            <a:stretch>
+              <a:fillRect/>
+            </a:stretch>
+          </p:blipFill>
+          <p:spPr>
+            <a:xfrm>
+              <a:off x="5539626" y="3906559"/>
+              <a:ext cx="253373" cy="253373"/>
+            </a:xfrm>
+            <a:prstGeom prst="rect">
+              <a:avLst/>
+            </a:prstGeom>
+          </p:spPr>
+        </p:pic>
+        <p:sp>
+          <p:nvSpPr>
+            <p:cNvPr id="63" name="TextBox 62">
+              <a:extLst>
+                <a:ext uri="{FF2B5EF4-FFF2-40B4-BE49-F238E27FC236}">
+                  <a16:creationId xmlns:a16="http://schemas.microsoft.com/office/drawing/2014/main" id="{AE136698-A878-FBD3-DD94-79E4CDDB7A15}"/>
+                </a:ext>
+              </a:extLst>
+            </p:cNvPr>
+            <p:cNvSpPr txBox="1"/>
+            <p:nvPr/>
+          </p:nvSpPr>
+          <p:spPr bwMode="auto">
+            <a:xfrm>
+              <a:off x="7306740" y="3295966"/>
+              <a:ext cx="656785" cy="137923"/>
+            </a:xfrm>
+            <a:prstGeom prst="rect">
+              <a:avLst/>
+            </a:prstGeom>
+            <a:noFill/>
+            <a:ln w="9525">
+              <a:noFill/>
+              <a:miter lim="800000"/>
+              <a:headEnd/>
+              <a:tailEnd/>
+            </a:ln>
+            <a:effectLst/>
+          </p:spPr>
+          <p:txBody>
+            <a:bodyPr wrap="square" lIns="0" tIns="0" rIns="0" bIns="0" rtlCol="0" anchor="t" anchorCtr="0">
+              <a:spAutoFit/>
+            </a:bodyPr>
+            <a:lstStyle/>
+            <a:p>
+              <a:pPr marL="0" marR="0" lvl="0" indent="0" algn="ctr" defTabSz="432000" rtl="0" eaLnBrk="0" fontAlgn="auto" latinLnBrk="0" hangingPunct="0">
+                <a:lnSpc>
+                  <a:spcPct val="120000"/>
+                </a:lnSpc>
+                <a:spcBef>
+                  <a:spcPts val="0"/>
+                </a:spcBef>
+                <a:spcAft>
+                  <a:spcPts val="0"/>
+                </a:spcAft>
+                <a:buClr>
+                  <a:srgbClr val="0A8276"/>
+                </a:buClr>
+                <a:buSzTx/>
+                <a:buFont typeface="Arial"/>
+                <a:buNone/>
+                <a:tabLst/>
+                <a:defRPr/>
+              </a:pPr>
+              <a:r>
+                <a:rPr kumimoji="0" lang="en-IN" sz="800" b="1" i="0" u="none" strike="noStrike" kern="0" cap="all" spc="0" normalizeH="0" baseline="0" noProof="0" dirty="0">
+                  <a:ln>
+                    <a:noFill/>
+                  </a:ln>
+                  <a:solidFill>
+                    <a:srgbClr val="FFFFFF"/>
+                  </a:solidFill>
+                  <a:effectLst/>
+                  <a:uLnTx/>
+                  <a:uFillTx/>
+                  <a:latin typeface="Montserrat" panose="00000500000000000000" pitchFamily="2" charset="0"/>
+                  <a:cs typeface="Arial"/>
+                  <a:sym typeface="Arial"/>
+                </a:rPr>
+                <a:t>LOW</a:t>
+              </a:r>
+              <a:endParaRPr kumimoji="0" lang="en-US" sz="800" b="1" i="0" u="none" strike="noStrike" kern="0" cap="all" spc="0" normalizeH="0" baseline="0" noProof="0" dirty="0">
+                <a:ln>
+                  <a:noFill/>
+                </a:ln>
+                <a:solidFill>
+                  <a:srgbClr val="FFFFFF"/>
+                </a:solidFill>
+                <a:effectLst/>
+                <a:uLnTx/>
+                <a:uFillTx/>
+                <a:latin typeface="Montserrat" panose="00000500000000000000" pitchFamily="2" charset="0"/>
+                <a:cs typeface="Arial"/>
+                <a:sym typeface="Arial"/>
+              </a:endParaRPr>
+            </a:p>
+          </p:txBody>
+        </p:sp>
+      </p:grpSp>
+      <p:sp>
+        <p:nvSpPr>
+          <p:cNvPr id="64" name="Rectangle 63">
+            <a:extLst>
+              <a:ext uri="{FF2B5EF4-FFF2-40B4-BE49-F238E27FC236}">
+                <a16:creationId xmlns:a16="http://schemas.microsoft.com/office/drawing/2014/main" id="{3A1DBBDB-9B11-E0DA-12CB-42EAFC868023}"/>
+              </a:ext>
+            </a:extLst>
+          </p:cNvPr>
+          <p:cNvSpPr/>
+          <p:nvPr/>
+        </p:nvSpPr>
+        <p:spPr bwMode="auto">
+          <a:xfrm>
+            <a:off x="4431448" y="963878"/>
+            <a:ext cx="1524000" cy="1524000"/>
+          </a:xfrm>
+          <a:prstGeom prst="rect">
+            <a:avLst/>
+          </a:prstGeom>
+          <a:solidFill>
+            <a:schemeClr val="tx2"/>
+          </a:solidFill>
+          <a:ln w="9525">
+            <a:noFill/>
+            <a:miter lim="800000"/>
+            <a:headEnd/>
+            <a:tailEnd/>
+          </a:ln>
+        </p:spPr>
+        <p:txBody>
+          <a:bodyPr wrap="square" lIns="72000" tIns="72000" rIns="72000" bIns="72000" rtlCol="0" anchor="ctr"/>
+          <a:lstStyle/>
+          <a:p>
+            <a:pPr algn="ctr" defTabSz="576000" eaLnBrk="0" hangingPunct="0">
+              <a:lnSpc>
+                <a:spcPct val="120000"/>
+              </a:lnSpc>
+            </a:pPr>
+            <a:endParaRPr lang="en-IN" sz="1600" baseline="0" dirty="0">
+              <a:solidFill>
+                <a:schemeClr val="bg1"/>
+              </a:solidFill>
+              <a:latin typeface="+mn-lt"/>
+              <a:ea typeface="+mn-ea"/>
+              <a:cs typeface="+mn-cs"/>
+            </a:endParaRPr>
+          </a:p>
+        </p:txBody>
+      </p:sp>
+      <p:grpSp>
+        <p:nvGrpSpPr>
+          <p:cNvPr id="65" name="Group 64">
+            <a:extLst>
+              <a:ext uri="{FF2B5EF4-FFF2-40B4-BE49-F238E27FC236}">
+                <a16:creationId xmlns:a16="http://schemas.microsoft.com/office/drawing/2014/main" id="{B6AF667B-9254-E2BF-FC7C-DD604B5688B5}"/>
+              </a:ext>
+            </a:extLst>
+          </p:cNvPr>
+          <p:cNvGrpSpPr/>
+          <p:nvPr/>
+        </p:nvGrpSpPr>
+        <p:grpSpPr>
+          <a:xfrm>
+            <a:off x="4565733" y="1080299"/>
+            <a:ext cx="1257660" cy="1295400"/>
+            <a:chOff x="555585" y="1019175"/>
+            <a:chExt cx="1257660" cy="1295400"/>
+          </a:xfrm>
+          <a:effectLst>
+            <a:glow>
+              <a:schemeClr val="bg1">
+                <a:alpha val="10000"/>
+              </a:schemeClr>
+            </a:glow>
+            <a:outerShdw blurRad="63500" sx="102000" sy="102000" algn="ctr" rotWithShape="0">
+              <a:prstClr val="black">
+                <a:alpha val="40000"/>
+              </a:prstClr>
+            </a:outerShdw>
+          </a:effectLst>
+        </p:grpSpPr>
+        <p:cxnSp>
+          <p:nvCxnSpPr>
+            <p:cNvPr id="66" name="Straight Connector 65">
+              <a:extLst>
+                <a:ext uri="{FF2B5EF4-FFF2-40B4-BE49-F238E27FC236}">
+                  <a16:creationId xmlns:a16="http://schemas.microsoft.com/office/drawing/2014/main" id="{3CF0422E-CAD1-B33C-B546-8F92898FA182}"/>
+                </a:ext>
+              </a:extLst>
+            </p:cNvPr>
+            <p:cNvCxnSpPr>
+              <a:cxnSpLocks/>
+            </p:cNvCxnSpPr>
+            <p:nvPr/>
+          </p:nvCxnSpPr>
+          <p:spPr>
+            <a:xfrm>
+              <a:off x="555585" y="1843523"/>
+              <a:ext cx="1257660" cy="0"/>
+            </a:xfrm>
+            <a:prstGeom prst="line">
+              <a:avLst/>
+            </a:prstGeom>
+            <a:ln w="3175">
+              <a:gradFill flip="none" rotWithShape="1">
+                <a:gsLst>
+                  <a:gs pos="0">
+                    <a:srgbClr val="0A8276">
+                      <a:alpha val="0"/>
+                    </a:srgbClr>
+                  </a:gs>
+                  <a:gs pos="20000">
+                    <a:schemeClr val="bg1">
+                      <a:alpha val="50000"/>
+                    </a:schemeClr>
+                  </a:gs>
+                  <a:gs pos="80000">
+                    <a:schemeClr val="bg1">
+                      <a:alpha val="50000"/>
+                    </a:schemeClr>
+                  </a:gs>
+                  <a:gs pos="100000">
+                    <a:srgbClr val="0A8276">
+                      <a:alpha val="0"/>
+                    </a:srgbClr>
+                  </a:gs>
+                </a:gsLst>
+                <a:path path="circle">
+                  <a:fillToRect l="100000" t="100000"/>
+                </a:path>
+                <a:tileRect r="-100000" b="-100000"/>
+              </a:gradFill>
+              <a:tailEnd type="none"/>
+            </a:ln>
+            <a:effectLst>
+              <a:glow rad="25400">
+                <a:schemeClr val="accent1">
+                  <a:satMod val="175000"/>
+                  <a:alpha val="20000"/>
+                </a:schemeClr>
+              </a:glow>
+            </a:effectLst>
+          </p:spPr>
+          <p:style>
+            <a:lnRef idx="1">
+              <a:schemeClr val="accent1"/>
+            </a:lnRef>
+            <a:fillRef idx="0">
+              <a:schemeClr val="accent1"/>
+            </a:fillRef>
+            <a:effectRef idx="0">
+              <a:schemeClr val="accent1"/>
+            </a:effectRef>
+            <a:fontRef idx="minor">
+              <a:schemeClr val="tx1"/>
+            </a:fontRef>
+          </p:style>
+        </p:cxnSp>
+        <p:cxnSp>
+          <p:nvCxnSpPr>
+            <p:cNvPr id="67" name="Straight Connector 66">
+              <a:extLst>
+                <a:ext uri="{FF2B5EF4-FFF2-40B4-BE49-F238E27FC236}">
+                  <a16:creationId xmlns:a16="http://schemas.microsoft.com/office/drawing/2014/main" id="{D791030A-FE30-8455-834B-7C086682EC3A}"/>
+                </a:ext>
+              </a:extLst>
+            </p:cNvPr>
+            <p:cNvCxnSpPr>
+              <a:cxnSpLocks/>
+            </p:cNvCxnSpPr>
+            <p:nvPr/>
+          </p:nvCxnSpPr>
+          <p:spPr>
+            <a:xfrm>
+              <a:off x="555585" y="1725759"/>
+              <a:ext cx="1257660" cy="0"/>
+            </a:xfrm>
+            <a:prstGeom prst="line">
+              <a:avLst/>
+            </a:prstGeom>
+            <a:ln w="3175">
+              <a:gradFill flip="none" rotWithShape="1">
+                <a:gsLst>
+                  <a:gs pos="0">
+                    <a:srgbClr val="0A8276">
+                      <a:alpha val="0"/>
+                    </a:srgbClr>
+                  </a:gs>
+                  <a:gs pos="20000">
+                    <a:schemeClr val="bg1">
+                      <a:alpha val="50000"/>
+                    </a:schemeClr>
+                  </a:gs>
+                  <a:gs pos="80000">
+                    <a:schemeClr val="bg1">
+                      <a:alpha val="50000"/>
+                    </a:schemeClr>
+                  </a:gs>
+                  <a:gs pos="100000">
+                    <a:srgbClr val="0A8276">
+                      <a:alpha val="0"/>
+                    </a:srgbClr>
+                  </a:gs>
+                </a:gsLst>
+                <a:path path="circle">
+                  <a:fillToRect l="100000" t="100000"/>
+                </a:path>
+                <a:tileRect r="-100000" b="-100000"/>
+              </a:gradFill>
+              <a:tailEnd type="none"/>
+            </a:ln>
+            <a:effectLst>
+              <a:glow rad="25400">
+                <a:schemeClr val="accent1">
+                  <a:satMod val="175000"/>
+                  <a:alpha val="20000"/>
+                </a:schemeClr>
+              </a:glow>
+            </a:effectLst>
+          </p:spPr>
+          <p:style>
+            <a:lnRef idx="1">
+              <a:schemeClr val="accent1"/>
+            </a:lnRef>
+            <a:fillRef idx="0">
+              <a:schemeClr val="accent1"/>
+            </a:fillRef>
+            <a:effectRef idx="0">
+              <a:schemeClr val="accent1"/>
+            </a:effectRef>
+            <a:fontRef idx="minor">
+              <a:schemeClr val="tx1"/>
+            </a:fontRef>
+          </p:style>
+        </p:cxnSp>
+        <p:cxnSp>
+          <p:nvCxnSpPr>
+            <p:cNvPr id="68" name="Straight Connector 67">
+              <a:extLst>
+                <a:ext uri="{FF2B5EF4-FFF2-40B4-BE49-F238E27FC236}">
+                  <a16:creationId xmlns:a16="http://schemas.microsoft.com/office/drawing/2014/main" id="{B7F3F3AB-DF38-4D5A-C0A1-38576D86E9EB}"/>
+                </a:ext>
+              </a:extLst>
+            </p:cNvPr>
+            <p:cNvCxnSpPr>
+              <a:cxnSpLocks/>
+            </p:cNvCxnSpPr>
+            <p:nvPr/>
+          </p:nvCxnSpPr>
+          <p:spPr>
+            <a:xfrm>
+              <a:off x="555585" y="1607995"/>
+              <a:ext cx="1257660" cy="0"/>
+            </a:xfrm>
+            <a:prstGeom prst="line">
+              <a:avLst/>
+            </a:prstGeom>
+            <a:ln w="3175">
+              <a:gradFill flip="none" rotWithShape="1">
+                <a:gsLst>
+                  <a:gs pos="0">
+                    <a:srgbClr val="0A8276">
+                      <a:alpha val="0"/>
+                    </a:srgbClr>
+                  </a:gs>
+                  <a:gs pos="20000">
+                    <a:schemeClr val="bg1">
+                      <a:alpha val="50000"/>
+                    </a:schemeClr>
+                  </a:gs>
+                  <a:gs pos="80000">
+                    <a:schemeClr val="bg1">
+                      <a:alpha val="50000"/>
+                    </a:schemeClr>
+                  </a:gs>
+                  <a:gs pos="100000">
+                    <a:srgbClr val="0A8276">
+                      <a:alpha val="0"/>
+                    </a:srgbClr>
+                  </a:gs>
+                </a:gsLst>
+                <a:path path="circle">
+                  <a:fillToRect l="100000" t="100000"/>
+                </a:path>
+                <a:tileRect r="-100000" b="-100000"/>
+              </a:gradFill>
+              <a:tailEnd type="none"/>
+            </a:ln>
+            <a:effectLst>
+              <a:glow rad="25400">
+                <a:schemeClr val="accent1">
+                  <a:satMod val="175000"/>
+                  <a:alpha val="20000"/>
+                </a:schemeClr>
+              </a:glow>
+            </a:effectLst>
+          </p:spPr>
+          <p:style>
+            <a:lnRef idx="1">
+              <a:schemeClr val="accent1"/>
+            </a:lnRef>
+            <a:fillRef idx="0">
+              <a:schemeClr val="accent1"/>
+            </a:fillRef>
+            <a:effectRef idx="0">
+              <a:schemeClr val="accent1"/>
+            </a:effectRef>
+            <a:fontRef idx="minor">
+              <a:schemeClr val="tx1"/>
+            </a:fontRef>
+          </p:style>
+        </p:cxnSp>
+        <p:cxnSp>
+          <p:nvCxnSpPr>
+            <p:cNvPr id="69" name="Straight Connector 68">
+              <a:extLst>
+                <a:ext uri="{FF2B5EF4-FFF2-40B4-BE49-F238E27FC236}">
+                  <a16:creationId xmlns:a16="http://schemas.microsoft.com/office/drawing/2014/main" id="{CF38EB52-5E68-0B50-5CDA-575D789E0F6C}"/>
+                </a:ext>
+              </a:extLst>
+            </p:cNvPr>
+            <p:cNvCxnSpPr>
+              <a:cxnSpLocks/>
+            </p:cNvCxnSpPr>
+            <p:nvPr/>
+          </p:nvCxnSpPr>
+          <p:spPr>
+            <a:xfrm>
+              <a:off x="555585" y="1490231"/>
+              <a:ext cx="1257660" cy="0"/>
+            </a:xfrm>
+            <a:prstGeom prst="line">
+              <a:avLst/>
+            </a:prstGeom>
+            <a:ln w="3175">
+              <a:gradFill flip="none" rotWithShape="1">
+                <a:gsLst>
+                  <a:gs pos="0">
+                    <a:srgbClr val="0A8276">
+                      <a:alpha val="0"/>
+                    </a:srgbClr>
+                  </a:gs>
+                  <a:gs pos="20000">
+                    <a:schemeClr val="bg1">
+                      <a:alpha val="50000"/>
+                    </a:schemeClr>
+                  </a:gs>
+                  <a:gs pos="80000">
+                    <a:schemeClr val="bg1">
+                      <a:alpha val="50000"/>
+                    </a:schemeClr>
+                  </a:gs>
+                  <a:gs pos="100000">
+                    <a:srgbClr val="0A8276">
+                      <a:alpha val="0"/>
+                    </a:srgbClr>
+                  </a:gs>
+                </a:gsLst>
+                <a:path path="circle">
+                  <a:fillToRect l="100000" t="100000"/>
+                </a:path>
+                <a:tileRect r="-100000" b="-100000"/>
+              </a:gradFill>
+              <a:tailEnd type="none"/>
+            </a:ln>
+            <a:effectLst>
+              <a:glow rad="25400">
+                <a:schemeClr val="accent1">
+                  <a:satMod val="175000"/>
+                  <a:alpha val="20000"/>
+                </a:schemeClr>
+              </a:glow>
+            </a:effectLst>
+          </p:spPr>
+          <p:style>
+            <a:lnRef idx="1">
+              <a:schemeClr val="accent1"/>
+            </a:lnRef>
+            <a:fillRef idx="0">
+              <a:schemeClr val="accent1"/>
+            </a:fillRef>
+            <a:effectRef idx="0">
+              <a:schemeClr val="accent1"/>
+            </a:effectRef>
+            <a:fontRef idx="minor">
+              <a:schemeClr val="tx1"/>
+            </a:fontRef>
+          </p:style>
+        </p:cxnSp>
+        <p:cxnSp>
+          <p:nvCxnSpPr>
+            <p:cNvPr id="70" name="Straight Connector 69">
+              <a:extLst>
+                <a:ext uri="{FF2B5EF4-FFF2-40B4-BE49-F238E27FC236}">
+                  <a16:creationId xmlns:a16="http://schemas.microsoft.com/office/drawing/2014/main" id="{4B34F590-3F40-03CA-99A3-F1E9816D33BE}"/>
+                </a:ext>
+              </a:extLst>
+            </p:cNvPr>
+            <p:cNvCxnSpPr>
+              <a:cxnSpLocks/>
+            </p:cNvCxnSpPr>
+            <p:nvPr/>
+          </p:nvCxnSpPr>
+          <p:spPr>
+            <a:xfrm>
+              <a:off x="555585" y="1372467"/>
+              <a:ext cx="1257660" cy="0"/>
+            </a:xfrm>
+            <a:prstGeom prst="line">
+              <a:avLst/>
+            </a:prstGeom>
+            <a:ln w="3175">
+              <a:gradFill flip="none" rotWithShape="1">
+                <a:gsLst>
+                  <a:gs pos="0">
+                    <a:srgbClr val="0A8276">
+                      <a:alpha val="0"/>
+                    </a:srgbClr>
+                  </a:gs>
+                  <a:gs pos="20000">
+                    <a:schemeClr val="bg1">
+                      <a:alpha val="50000"/>
+                    </a:schemeClr>
+                  </a:gs>
+                  <a:gs pos="80000">
+                    <a:schemeClr val="bg1">
+                      <a:alpha val="50000"/>
+                    </a:schemeClr>
+                  </a:gs>
+                  <a:gs pos="100000">
+                    <a:srgbClr val="0A8276">
+                      <a:alpha val="0"/>
+                    </a:srgbClr>
+                  </a:gs>
+                </a:gsLst>
+                <a:path path="circle">
+                  <a:fillToRect l="100000" t="100000"/>
+                </a:path>
+                <a:tileRect r="-100000" b="-100000"/>
+              </a:gradFill>
+              <a:tailEnd type="none"/>
+            </a:ln>
+            <a:effectLst>
+              <a:glow rad="25400">
+                <a:schemeClr val="accent1">
+                  <a:satMod val="175000"/>
+                  <a:alpha val="20000"/>
+                </a:schemeClr>
+              </a:glow>
+            </a:effectLst>
+          </p:spPr>
+          <p:style>
+            <a:lnRef idx="1">
+              <a:schemeClr val="accent1"/>
+            </a:lnRef>
+            <a:fillRef idx="0">
+              <a:schemeClr val="accent1"/>
+            </a:fillRef>
+            <a:effectRef idx="0">
+              <a:schemeClr val="accent1"/>
+            </a:effectRef>
+            <a:fontRef idx="minor">
+              <a:schemeClr val="tx1"/>
+            </a:fontRef>
+          </p:style>
+        </p:cxnSp>
+        <p:cxnSp>
+          <p:nvCxnSpPr>
+            <p:cNvPr id="71" name="Straight Connector 70">
+              <a:extLst>
+                <a:ext uri="{FF2B5EF4-FFF2-40B4-BE49-F238E27FC236}">
+                  <a16:creationId xmlns:a16="http://schemas.microsoft.com/office/drawing/2014/main" id="{6BECD5B2-0F39-66DC-B529-B56BD5A5CAC2}"/>
+                </a:ext>
+              </a:extLst>
+            </p:cNvPr>
+            <p:cNvCxnSpPr>
+              <a:cxnSpLocks/>
+            </p:cNvCxnSpPr>
+            <p:nvPr/>
+          </p:nvCxnSpPr>
+          <p:spPr>
+            <a:xfrm>
+              <a:off x="555585" y="1254703"/>
+              <a:ext cx="1257660" cy="0"/>
+            </a:xfrm>
+            <a:prstGeom prst="line">
+              <a:avLst/>
+            </a:prstGeom>
+            <a:ln w="3175">
+              <a:gradFill flip="none" rotWithShape="1">
+                <a:gsLst>
+                  <a:gs pos="0">
+                    <a:srgbClr val="0A8276">
+                      <a:alpha val="0"/>
+                    </a:srgbClr>
+                  </a:gs>
+                  <a:gs pos="20000">
+                    <a:schemeClr val="bg1">
+                      <a:alpha val="50000"/>
+                    </a:schemeClr>
+                  </a:gs>
+                  <a:gs pos="80000">
+                    <a:schemeClr val="bg1">
+                      <a:alpha val="50000"/>
+                    </a:schemeClr>
+                  </a:gs>
+                  <a:gs pos="100000">
+                    <a:srgbClr val="0A8276">
+                      <a:alpha val="0"/>
+                    </a:srgbClr>
+                  </a:gs>
+                </a:gsLst>
+                <a:path path="circle">
+                  <a:fillToRect l="100000" t="100000"/>
+                </a:path>
+                <a:tileRect r="-100000" b="-100000"/>
+              </a:gradFill>
+              <a:tailEnd type="none"/>
+            </a:ln>
+            <a:effectLst>
+              <a:glow rad="25400">
+                <a:schemeClr val="accent1">
+                  <a:satMod val="175000"/>
+                  <a:alpha val="20000"/>
+                </a:schemeClr>
+              </a:glow>
+            </a:effectLst>
+          </p:spPr>
+          <p:style>
+            <a:lnRef idx="1">
+              <a:schemeClr val="accent1"/>
+            </a:lnRef>
+            <a:fillRef idx="0">
+              <a:schemeClr val="accent1"/>
+            </a:fillRef>
+            <a:effectRef idx="0">
+              <a:schemeClr val="accent1"/>
+            </a:effectRef>
+            <a:fontRef idx="minor">
+              <a:schemeClr val="tx1"/>
+            </a:fontRef>
+          </p:style>
+        </p:cxnSp>
+        <p:cxnSp>
+          <p:nvCxnSpPr>
+            <p:cNvPr id="72" name="Straight Connector 71">
+              <a:extLst>
+                <a:ext uri="{FF2B5EF4-FFF2-40B4-BE49-F238E27FC236}">
+                  <a16:creationId xmlns:a16="http://schemas.microsoft.com/office/drawing/2014/main" id="{4AE4546B-2029-846B-242D-4DB8CB5DBE7C}"/>
+                </a:ext>
+              </a:extLst>
+            </p:cNvPr>
+            <p:cNvCxnSpPr>
+              <a:cxnSpLocks/>
+            </p:cNvCxnSpPr>
+            <p:nvPr/>
+          </p:nvCxnSpPr>
+          <p:spPr>
+            <a:xfrm>
+              <a:off x="555585" y="1136939"/>
+              <a:ext cx="1257660" cy="0"/>
+            </a:xfrm>
+            <a:prstGeom prst="line">
+              <a:avLst/>
+            </a:prstGeom>
+            <a:ln w="3175">
+              <a:gradFill flip="none" rotWithShape="1">
+                <a:gsLst>
+                  <a:gs pos="0">
+                    <a:srgbClr val="0A8276">
+                      <a:alpha val="0"/>
+                    </a:srgbClr>
+                  </a:gs>
+                  <a:gs pos="20000">
+                    <a:schemeClr val="bg1">
+                      <a:alpha val="50000"/>
+                    </a:schemeClr>
+                  </a:gs>
+                  <a:gs pos="80000">
+                    <a:schemeClr val="bg1">
+                      <a:alpha val="50000"/>
+                    </a:schemeClr>
+                  </a:gs>
+                  <a:gs pos="100000">
+                    <a:srgbClr val="0A8276">
+                      <a:alpha val="0"/>
+                    </a:srgbClr>
+                  </a:gs>
+                </a:gsLst>
+                <a:path path="circle">
+                  <a:fillToRect l="100000" t="100000"/>
+                </a:path>
+                <a:tileRect r="-100000" b="-100000"/>
+              </a:gradFill>
+              <a:tailEnd type="none"/>
+            </a:ln>
+            <a:effectLst>
+              <a:glow rad="25400">
+                <a:schemeClr val="accent1">
+                  <a:satMod val="175000"/>
+                  <a:alpha val="20000"/>
+                </a:schemeClr>
+              </a:glow>
+            </a:effectLst>
+          </p:spPr>
+          <p:style>
+            <a:lnRef idx="1">
+              <a:schemeClr val="accent1"/>
+            </a:lnRef>
+            <a:fillRef idx="0">
+              <a:schemeClr val="accent1"/>
+            </a:fillRef>
+            <a:effectRef idx="0">
+              <a:schemeClr val="accent1"/>
+            </a:effectRef>
+            <a:fontRef idx="minor">
+              <a:schemeClr val="tx1"/>
+            </a:fontRef>
+          </p:style>
+        </p:cxnSp>
+        <p:cxnSp>
+          <p:nvCxnSpPr>
+            <p:cNvPr id="73" name="Straight Connector 72">
+              <a:extLst>
+                <a:ext uri="{FF2B5EF4-FFF2-40B4-BE49-F238E27FC236}">
+                  <a16:creationId xmlns:a16="http://schemas.microsoft.com/office/drawing/2014/main" id="{E4C2C8A3-A9F2-E7AE-2FD0-4B213E9E115E}"/>
+                </a:ext>
+              </a:extLst>
+            </p:cNvPr>
+            <p:cNvCxnSpPr>
+              <a:cxnSpLocks/>
+            </p:cNvCxnSpPr>
+            <p:nvPr/>
+          </p:nvCxnSpPr>
+          <p:spPr>
+            <a:xfrm>
+              <a:off x="555585" y="1019175"/>
+              <a:ext cx="1257660" cy="0"/>
+            </a:xfrm>
+            <a:prstGeom prst="line">
+              <a:avLst/>
+            </a:prstGeom>
+            <a:ln w="3175">
+              <a:gradFill flip="none" rotWithShape="1">
+                <a:gsLst>
+                  <a:gs pos="0">
+                    <a:srgbClr val="0A8276">
+                      <a:alpha val="0"/>
+                    </a:srgbClr>
+                  </a:gs>
+                  <a:gs pos="20000">
+                    <a:schemeClr val="bg1">
+                      <a:alpha val="50000"/>
+                    </a:schemeClr>
+                  </a:gs>
+                  <a:gs pos="80000">
+                    <a:schemeClr val="bg1">
+                      <a:alpha val="50000"/>
+                    </a:schemeClr>
+                  </a:gs>
+                  <a:gs pos="100000">
+                    <a:srgbClr val="0A8276">
+                      <a:alpha val="0"/>
+                    </a:srgbClr>
+                  </a:gs>
+                </a:gsLst>
+                <a:path path="circle">
+                  <a:fillToRect l="100000" t="100000"/>
+                </a:path>
+                <a:tileRect r="-100000" b="-100000"/>
+              </a:gradFill>
+              <a:tailEnd type="none"/>
+            </a:ln>
+            <a:effectLst>
+              <a:glow rad="25400">
+                <a:schemeClr val="accent1">
+                  <a:satMod val="175000"/>
+                  <a:alpha val="20000"/>
+                </a:schemeClr>
+              </a:glow>
+            </a:effectLst>
+          </p:spPr>
+          <p:style>
+            <a:lnRef idx="1">
+              <a:schemeClr val="accent1"/>
+            </a:lnRef>
+            <a:fillRef idx="0">
+              <a:schemeClr val="accent1"/>
+            </a:fillRef>
+            <a:effectRef idx="0">
+              <a:schemeClr val="accent1"/>
+            </a:effectRef>
+            <a:fontRef idx="minor">
+              <a:schemeClr val="tx1"/>
+            </a:fontRef>
+          </p:style>
+        </p:cxnSp>
+        <p:cxnSp>
+          <p:nvCxnSpPr>
+            <p:cNvPr id="74" name="Straight Connector 73">
+              <a:extLst>
+                <a:ext uri="{FF2B5EF4-FFF2-40B4-BE49-F238E27FC236}">
+                  <a16:creationId xmlns:a16="http://schemas.microsoft.com/office/drawing/2014/main" id="{82F4DB2B-5D40-6C81-6483-DA5CB006F52D}"/>
+                </a:ext>
+              </a:extLst>
+            </p:cNvPr>
+            <p:cNvCxnSpPr>
+              <a:cxnSpLocks/>
+            </p:cNvCxnSpPr>
+            <p:nvPr/>
+          </p:nvCxnSpPr>
+          <p:spPr>
+            <a:xfrm>
+              <a:off x="555585" y="2314575"/>
+              <a:ext cx="1257660" cy="0"/>
+            </a:xfrm>
+            <a:prstGeom prst="line">
+              <a:avLst/>
+            </a:prstGeom>
+            <a:ln w="3175">
+              <a:gradFill flip="none" rotWithShape="1">
+                <a:gsLst>
+                  <a:gs pos="0">
+                    <a:srgbClr val="0A8276">
+                      <a:alpha val="0"/>
+                    </a:srgbClr>
+                  </a:gs>
+                  <a:gs pos="20000">
+                    <a:schemeClr val="bg1">
+                      <a:alpha val="50000"/>
+                    </a:schemeClr>
+                  </a:gs>
+                  <a:gs pos="80000">
+                    <a:schemeClr val="bg1">
+                      <a:alpha val="50000"/>
+                    </a:schemeClr>
+                  </a:gs>
+                  <a:gs pos="100000">
+                    <a:srgbClr val="0A8276">
+                      <a:alpha val="0"/>
+                    </a:srgbClr>
+                  </a:gs>
+                </a:gsLst>
+                <a:path path="circle">
+                  <a:fillToRect l="100000" t="100000"/>
+                </a:path>
+                <a:tileRect r="-100000" b="-100000"/>
+              </a:gradFill>
+              <a:tailEnd type="none"/>
+            </a:ln>
+            <a:effectLst>
+              <a:glow rad="25400">
+                <a:schemeClr val="accent1">
+                  <a:satMod val="175000"/>
+                  <a:alpha val="20000"/>
+                </a:schemeClr>
+              </a:glow>
+            </a:effectLst>
+          </p:spPr>
+          <p:style>
+            <a:lnRef idx="1">
+              <a:schemeClr val="accent1"/>
+            </a:lnRef>
+            <a:fillRef idx="0">
+              <a:schemeClr val="accent1"/>
+            </a:fillRef>
+            <a:effectRef idx="0">
+              <a:schemeClr val="accent1"/>
+            </a:effectRef>
+            <a:fontRef idx="minor">
+              <a:schemeClr val="tx1"/>
+            </a:fontRef>
+          </p:style>
+        </p:cxnSp>
+        <p:cxnSp>
+          <p:nvCxnSpPr>
+            <p:cNvPr id="75" name="Straight Connector 74">
+              <a:extLst>
+                <a:ext uri="{FF2B5EF4-FFF2-40B4-BE49-F238E27FC236}">
+                  <a16:creationId xmlns:a16="http://schemas.microsoft.com/office/drawing/2014/main" id="{9B756E95-5147-6461-5D74-AE372C474598}"/>
+                </a:ext>
+              </a:extLst>
+            </p:cNvPr>
+            <p:cNvCxnSpPr>
+              <a:cxnSpLocks/>
+            </p:cNvCxnSpPr>
+            <p:nvPr/>
+          </p:nvCxnSpPr>
+          <p:spPr>
+            <a:xfrm>
+              <a:off x="555585" y="2196815"/>
+              <a:ext cx="1257660" cy="0"/>
+            </a:xfrm>
+            <a:prstGeom prst="line">
+              <a:avLst/>
+            </a:prstGeom>
+            <a:ln w="3175">
+              <a:gradFill flip="none" rotWithShape="1">
+                <a:gsLst>
+                  <a:gs pos="0">
+                    <a:srgbClr val="0A8276">
+                      <a:alpha val="0"/>
+                    </a:srgbClr>
+                  </a:gs>
+                  <a:gs pos="20000">
+                    <a:schemeClr val="bg1">
+                      <a:alpha val="50000"/>
+                    </a:schemeClr>
+                  </a:gs>
+                  <a:gs pos="80000">
+                    <a:schemeClr val="bg1">
+                      <a:alpha val="50000"/>
+                    </a:schemeClr>
+                  </a:gs>
+                  <a:gs pos="100000">
+                    <a:srgbClr val="0A8276">
+                      <a:alpha val="0"/>
+                    </a:srgbClr>
+                  </a:gs>
+                </a:gsLst>
+                <a:path path="circle">
+                  <a:fillToRect l="100000" t="100000"/>
+                </a:path>
+                <a:tileRect r="-100000" b="-100000"/>
+              </a:gradFill>
+              <a:tailEnd type="none"/>
+            </a:ln>
+            <a:effectLst>
+              <a:glow rad="25400">
+                <a:schemeClr val="accent1">
+                  <a:satMod val="175000"/>
+                  <a:alpha val="20000"/>
+                </a:schemeClr>
+              </a:glow>
+            </a:effectLst>
+          </p:spPr>
+          <p:style>
+            <a:lnRef idx="1">
+              <a:schemeClr val="accent1"/>
+            </a:lnRef>
+            <a:fillRef idx="0">
+              <a:schemeClr val="accent1"/>
+            </a:fillRef>
+            <a:effectRef idx="0">
+              <a:schemeClr val="accent1"/>
+            </a:effectRef>
+            <a:fontRef idx="minor">
+              <a:schemeClr val="tx1"/>
+            </a:fontRef>
+          </p:style>
+        </p:cxnSp>
+        <p:cxnSp>
+          <p:nvCxnSpPr>
+            <p:cNvPr id="76" name="Straight Connector 75">
+              <a:extLst>
+                <a:ext uri="{FF2B5EF4-FFF2-40B4-BE49-F238E27FC236}">
+                  <a16:creationId xmlns:a16="http://schemas.microsoft.com/office/drawing/2014/main" id="{CB32BD06-4371-B275-D261-2D5D50F559A6}"/>
+                </a:ext>
+              </a:extLst>
+            </p:cNvPr>
+            <p:cNvCxnSpPr>
+              <a:cxnSpLocks/>
+            </p:cNvCxnSpPr>
+            <p:nvPr/>
+          </p:nvCxnSpPr>
+          <p:spPr>
+            <a:xfrm>
+              <a:off x="555585" y="2079051"/>
+              <a:ext cx="1257660" cy="0"/>
+            </a:xfrm>
+            <a:prstGeom prst="line">
+              <a:avLst/>
+            </a:prstGeom>
+            <a:ln w="3175">
+              <a:gradFill flip="none" rotWithShape="1">
+                <a:gsLst>
+                  <a:gs pos="0">
+                    <a:srgbClr val="0A8276">
+                      <a:alpha val="0"/>
+                    </a:srgbClr>
+                  </a:gs>
+                  <a:gs pos="20000">
+                    <a:schemeClr val="bg1">
+                      <a:alpha val="50000"/>
+                    </a:schemeClr>
+                  </a:gs>
+                  <a:gs pos="80000">
+                    <a:schemeClr val="bg1">
+                      <a:alpha val="50000"/>
+                    </a:schemeClr>
+                  </a:gs>
+                  <a:gs pos="100000">
+                    <a:srgbClr val="0A8276">
+                      <a:alpha val="0"/>
+                    </a:srgbClr>
+                  </a:gs>
+                </a:gsLst>
+                <a:path path="circle">
+                  <a:fillToRect l="100000" t="100000"/>
+                </a:path>
+                <a:tileRect r="-100000" b="-100000"/>
+              </a:gradFill>
+              <a:tailEnd type="none"/>
+            </a:ln>
+            <a:effectLst>
+              <a:glow rad="25400">
+                <a:schemeClr val="accent1">
+                  <a:satMod val="175000"/>
+                  <a:alpha val="20000"/>
+                </a:schemeClr>
+              </a:glow>
+            </a:effectLst>
+          </p:spPr>
+          <p:style>
+            <a:lnRef idx="1">
+              <a:schemeClr val="accent1"/>
+            </a:lnRef>
+            <a:fillRef idx="0">
+              <a:schemeClr val="accent1"/>
+            </a:fillRef>
+            <a:effectRef idx="0">
+              <a:schemeClr val="accent1"/>
+            </a:effectRef>
+            <a:fontRef idx="minor">
+              <a:schemeClr val="tx1"/>
+            </a:fontRef>
+          </p:style>
+        </p:cxnSp>
+        <p:cxnSp>
+          <p:nvCxnSpPr>
+            <p:cNvPr id="77" name="Straight Connector 76">
+              <a:extLst>
+                <a:ext uri="{FF2B5EF4-FFF2-40B4-BE49-F238E27FC236}">
+                  <a16:creationId xmlns:a16="http://schemas.microsoft.com/office/drawing/2014/main" id="{2F96CF14-1005-5EE2-DA17-1B6DB8A46466}"/>
+                </a:ext>
+              </a:extLst>
+            </p:cNvPr>
+            <p:cNvCxnSpPr>
+              <a:cxnSpLocks/>
+            </p:cNvCxnSpPr>
+            <p:nvPr/>
+          </p:nvCxnSpPr>
+          <p:spPr>
+            <a:xfrm>
+              <a:off x="555585" y="1961287"/>
+              <a:ext cx="1257660" cy="0"/>
+            </a:xfrm>
+            <a:prstGeom prst="line">
+              <a:avLst/>
+            </a:prstGeom>
+            <a:ln w="3175">
+              <a:gradFill flip="none" rotWithShape="1">
+                <a:gsLst>
+                  <a:gs pos="0">
+                    <a:srgbClr val="0A8276">
+                      <a:alpha val="0"/>
+                    </a:srgbClr>
+                  </a:gs>
+                  <a:gs pos="20000">
+                    <a:schemeClr val="bg1">
+                      <a:alpha val="50000"/>
+                    </a:schemeClr>
+                  </a:gs>
+                  <a:gs pos="80000">
+                    <a:schemeClr val="bg1">
+                      <a:alpha val="50000"/>
+                    </a:schemeClr>
+                  </a:gs>
+                  <a:gs pos="100000">
+                    <a:srgbClr val="0A8276">
+                      <a:alpha val="0"/>
+                    </a:srgbClr>
+                  </a:gs>
+                </a:gsLst>
+                <a:path path="circle">
+                  <a:fillToRect l="100000" t="100000"/>
+                </a:path>
+                <a:tileRect r="-100000" b="-100000"/>
+              </a:gradFill>
+              <a:tailEnd type="none"/>
+            </a:ln>
+            <a:effectLst>
+              <a:glow rad="25400">
+                <a:schemeClr val="accent1">
+                  <a:satMod val="175000"/>
+                  <a:alpha val="20000"/>
+                </a:schemeClr>
+              </a:glow>
+            </a:effectLst>
+          </p:spPr>
+          <p:style>
+            <a:lnRef idx="1">
+              <a:schemeClr val="accent1"/>
+            </a:lnRef>
+            <a:fillRef idx="0">
+              <a:schemeClr val="accent1"/>
+            </a:fillRef>
+            <a:effectRef idx="0">
+              <a:schemeClr val="accent1"/>
+            </a:effectRef>
+            <a:fontRef idx="minor">
+              <a:schemeClr val="tx1"/>
+            </a:fontRef>
+          </p:style>
+        </p:cxnSp>
+      </p:grpSp>
+      <p:grpSp>
+        <p:nvGrpSpPr>
+          <p:cNvPr id="78" name="Group 77">
+            <a:extLst>
+              <a:ext uri="{FF2B5EF4-FFF2-40B4-BE49-F238E27FC236}">
+                <a16:creationId xmlns:a16="http://schemas.microsoft.com/office/drawing/2014/main" id="{DA5AD7C8-0813-B8C3-7181-55112B24D696}"/>
+              </a:ext>
+            </a:extLst>
+          </p:cNvPr>
+          <p:cNvGrpSpPr/>
+          <p:nvPr/>
+        </p:nvGrpSpPr>
+        <p:grpSpPr>
+          <a:xfrm>
+            <a:off x="4562445" y="964228"/>
+            <a:ext cx="1260949" cy="1521770"/>
+            <a:chOff x="552297" y="903104"/>
+            <a:chExt cx="1260949" cy="1521770"/>
+          </a:xfrm>
+          <a:effectLst>
+            <a:glow>
+              <a:schemeClr val="bg1">
+                <a:lumMod val="95000"/>
+                <a:alpha val="10000"/>
+              </a:schemeClr>
+            </a:glow>
+            <a:outerShdw blurRad="63500" sx="102000" sy="102000" algn="ctr" rotWithShape="0">
+              <a:prstClr val="black">
+                <a:alpha val="40000"/>
+              </a:prstClr>
+            </a:outerShdw>
+          </a:effectLst>
+        </p:grpSpPr>
+        <p:cxnSp>
+          <p:nvCxnSpPr>
+            <p:cNvPr id="80" name="Straight Connector 79">
+              <a:extLst>
+                <a:ext uri="{FF2B5EF4-FFF2-40B4-BE49-F238E27FC236}">
+                  <a16:creationId xmlns:a16="http://schemas.microsoft.com/office/drawing/2014/main" id="{5A9C982F-6D57-D04F-A9B9-522FA41F354E}"/>
+                </a:ext>
+              </a:extLst>
+            </p:cNvPr>
+            <p:cNvCxnSpPr>
+              <a:cxnSpLocks/>
+            </p:cNvCxnSpPr>
+            <p:nvPr/>
+          </p:nvCxnSpPr>
+          <p:spPr>
+            <a:xfrm rot="16200000">
+              <a:off x="364572" y="1663989"/>
+              <a:ext cx="1521769" cy="0"/>
+            </a:xfrm>
+            <a:prstGeom prst="line">
+              <a:avLst/>
+            </a:prstGeom>
+            <a:ln w="3175">
+              <a:gradFill flip="none" rotWithShape="1">
+                <a:gsLst>
+                  <a:gs pos="0">
+                    <a:srgbClr val="0A8276">
+                      <a:alpha val="0"/>
+                    </a:srgbClr>
+                  </a:gs>
+                  <a:gs pos="20000">
+                    <a:schemeClr val="bg1">
+                      <a:alpha val="50000"/>
+                    </a:schemeClr>
+                  </a:gs>
+                  <a:gs pos="80000">
+                    <a:schemeClr val="bg1">
+                      <a:alpha val="50000"/>
+                    </a:schemeClr>
+                  </a:gs>
+                  <a:gs pos="100000">
+                    <a:srgbClr val="0A8276">
+                      <a:alpha val="0"/>
+                    </a:srgbClr>
+                  </a:gs>
+                </a:gsLst>
+                <a:path path="circle">
+                  <a:fillToRect l="100000" t="100000"/>
+                </a:path>
+                <a:tileRect r="-100000" b="-100000"/>
+              </a:gradFill>
+              <a:tailEnd type="none"/>
+            </a:ln>
+            <a:effectLst>
+              <a:glow rad="25400">
+                <a:schemeClr val="accent1">
+                  <a:satMod val="175000"/>
+                  <a:alpha val="20000"/>
+                </a:schemeClr>
+              </a:glow>
+            </a:effectLst>
+          </p:spPr>
+          <p:style>
+            <a:lnRef idx="1">
+              <a:schemeClr val="accent1"/>
+            </a:lnRef>
+            <a:fillRef idx="0">
+              <a:schemeClr val="accent1"/>
+            </a:fillRef>
+            <a:effectRef idx="0">
+              <a:schemeClr val="accent1"/>
+            </a:effectRef>
+            <a:fontRef idx="minor">
+              <a:schemeClr val="tx1"/>
+            </a:fontRef>
+          </p:style>
+        </p:cxnSp>
+        <p:cxnSp>
+          <p:nvCxnSpPr>
+            <p:cNvPr id="81" name="Straight Connector 80">
+              <a:extLst>
+                <a:ext uri="{FF2B5EF4-FFF2-40B4-BE49-F238E27FC236}">
+                  <a16:creationId xmlns:a16="http://schemas.microsoft.com/office/drawing/2014/main" id="{ED60AE45-8E7F-E3E4-277E-956E6279C42B}"/>
+                </a:ext>
+              </a:extLst>
+            </p:cNvPr>
+            <p:cNvCxnSpPr>
+              <a:cxnSpLocks/>
+            </p:cNvCxnSpPr>
+            <p:nvPr/>
+          </p:nvCxnSpPr>
+          <p:spPr>
+            <a:xfrm rot="16200000">
+              <a:off x="135308" y="1663989"/>
+              <a:ext cx="1521769" cy="0"/>
+            </a:xfrm>
+            <a:prstGeom prst="line">
+              <a:avLst/>
+            </a:prstGeom>
+            <a:ln w="3175">
+              <a:gradFill flip="none" rotWithShape="1">
+                <a:gsLst>
+                  <a:gs pos="0">
+                    <a:srgbClr val="0A8276">
+                      <a:alpha val="0"/>
+                    </a:srgbClr>
+                  </a:gs>
+                  <a:gs pos="20000">
+                    <a:schemeClr val="bg1">
+                      <a:alpha val="50000"/>
+                    </a:schemeClr>
+                  </a:gs>
+                  <a:gs pos="80000">
+                    <a:schemeClr val="bg1">
+                      <a:alpha val="50000"/>
+                    </a:schemeClr>
+                  </a:gs>
+                  <a:gs pos="100000">
+                    <a:srgbClr val="0A8276">
+                      <a:alpha val="0"/>
+                    </a:srgbClr>
+                  </a:gs>
+                </a:gsLst>
+                <a:path path="circle">
+                  <a:fillToRect l="100000" t="100000"/>
+                </a:path>
+                <a:tileRect r="-100000" b="-100000"/>
+              </a:gradFill>
+              <a:tailEnd type="none"/>
+            </a:ln>
+            <a:effectLst>
+              <a:glow rad="25400">
+                <a:schemeClr val="accent1">
+                  <a:satMod val="175000"/>
+                  <a:alpha val="20000"/>
+                </a:schemeClr>
+              </a:glow>
+            </a:effectLst>
+          </p:spPr>
+          <p:style>
+            <a:lnRef idx="1">
+              <a:schemeClr val="accent1"/>
+            </a:lnRef>
+            <a:fillRef idx="0">
+              <a:schemeClr val="accent1"/>
+            </a:fillRef>
+            <a:effectRef idx="0">
+              <a:schemeClr val="accent1"/>
+            </a:effectRef>
+            <a:fontRef idx="minor">
+              <a:schemeClr val="tx1"/>
+            </a:fontRef>
+          </p:style>
+        </p:cxnSp>
+        <p:cxnSp>
+          <p:nvCxnSpPr>
+            <p:cNvPr id="82" name="Straight Connector 81">
+              <a:extLst>
+                <a:ext uri="{FF2B5EF4-FFF2-40B4-BE49-F238E27FC236}">
+                  <a16:creationId xmlns:a16="http://schemas.microsoft.com/office/drawing/2014/main" id="{9A727177-7D3F-A4C1-642D-6E3851CF7CC2}"/>
+                </a:ext>
+              </a:extLst>
+            </p:cNvPr>
+            <p:cNvCxnSpPr>
+              <a:cxnSpLocks/>
+            </p:cNvCxnSpPr>
+            <p:nvPr/>
+          </p:nvCxnSpPr>
+          <p:spPr>
+            <a:xfrm rot="16200000">
+              <a:off x="1052361" y="1663989"/>
+              <a:ext cx="1521769" cy="0"/>
+            </a:xfrm>
+            <a:prstGeom prst="line">
+              <a:avLst/>
+            </a:prstGeom>
+            <a:ln w="3175">
+              <a:gradFill flip="none" rotWithShape="1">
+                <a:gsLst>
+                  <a:gs pos="0">
+                    <a:srgbClr val="0A8276">
+                      <a:alpha val="0"/>
+                    </a:srgbClr>
+                  </a:gs>
+                  <a:gs pos="20000">
+                    <a:schemeClr val="bg1">
+                      <a:alpha val="50000"/>
+                    </a:schemeClr>
+                  </a:gs>
+                  <a:gs pos="80000">
+                    <a:schemeClr val="bg1">
+                      <a:alpha val="50000"/>
+                    </a:schemeClr>
+                  </a:gs>
+                  <a:gs pos="100000">
+                    <a:srgbClr val="0A8276">
+                      <a:alpha val="0"/>
+                    </a:srgbClr>
+                  </a:gs>
+                </a:gsLst>
+                <a:path path="circle">
+                  <a:fillToRect l="100000" t="100000"/>
+                </a:path>
+                <a:tileRect r="-100000" b="-100000"/>
+              </a:gradFill>
+              <a:tailEnd type="none"/>
+            </a:ln>
+            <a:effectLst>
+              <a:glow rad="25400">
+                <a:schemeClr val="accent1">
+                  <a:satMod val="175000"/>
+                  <a:alpha val="20000"/>
+                </a:schemeClr>
+              </a:glow>
+            </a:effectLst>
+          </p:spPr>
+          <p:style>
+            <a:lnRef idx="1">
+              <a:schemeClr val="accent1"/>
+            </a:lnRef>
+            <a:fillRef idx="0">
+              <a:schemeClr val="accent1"/>
+            </a:fillRef>
+            <a:effectRef idx="0">
+              <a:schemeClr val="accent1"/>
+            </a:effectRef>
+            <a:fontRef idx="minor">
+              <a:schemeClr val="tx1"/>
+            </a:fontRef>
+          </p:style>
+        </p:cxnSp>
+        <p:cxnSp>
+          <p:nvCxnSpPr>
+            <p:cNvPr id="83" name="Straight Connector 82">
+              <a:extLst>
+                <a:ext uri="{FF2B5EF4-FFF2-40B4-BE49-F238E27FC236}">
+                  <a16:creationId xmlns:a16="http://schemas.microsoft.com/office/drawing/2014/main" id="{5F517AAC-DA86-373C-0D58-3E2CEE75249D}"/>
+                </a:ext>
+              </a:extLst>
+            </p:cNvPr>
+            <p:cNvCxnSpPr>
+              <a:cxnSpLocks/>
+            </p:cNvCxnSpPr>
+            <p:nvPr/>
+          </p:nvCxnSpPr>
+          <p:spPr>
+            <a:xfrm rot="16200000">
+              <a:off x="937732" y="1663989"/>
+              <a:ext cx="1521769" cy="0"/>
+            </a:xfrm>
+            <a:prstGeom prst="line">
+              <a:avLst/>
+            </a:prstGeom>
+            <a:ln w="3175">
+              <a:gradFill flip="none" rotWithShape="1">
+                <a:gsLst>
+                  <a:gs pos="0">
+                    <a:srgbClr val="0A8276">
+                      <a:alpha val="0"/>
+                    </a:srgbClr>
+                  </a:gs>
+                  <a:gs pos="20000">
+                    <a:schemeClr val="bg1">
+                      <a:alpha val="50000"/>
+                    </a:schemeClr>
+                  </a:gs>
+                  <a:gs pos="80000">
+                    <a:schemeClr val="bg1">
+                      <a:alpha val="50000"/>
+                    </a:schemeClr>
+                  </a:gs>
+                  <a:gs pos="100000">
+                    <a:srgbClr val="0A8276">
+                      <a:alpha val="0"/>
+                    </a:srgbClr>
+                  </a:gs>
+                </a:gsLst>
+                <a:path path="circle">
+                  <a:fillToRect l="100000" t="100000"/>
+                </a:path>
+                <a:tileRect r="-100000" b="-100000"/>
+              </a:gradFill>
+              <a:tailEnd type="none"/>
+            </a:ln>
+            <a:effectLst>
+              <a:glow rad="25400">
+                <a:schemeClr val="accent1">
+                  <a:satMod val="175000"/>
+                  <a:alpha val="20000"/>
+                </a:schemeClr>
+              </a:glow>
+            </a:effectLst>
+          </p:spPr>
+          <p:style>
+            <a:lnRef idx="1">
+              <a:schemeClr val="accent1"/>
+            </a:lnRef>
+            <a:fillRef idx="0">
+              <a:schemeClr val="accent1"/>
+            </a:fillRef>
+            <a:effectRef idx="0">
+              <a:schemeClr val="accent1"/>
+            </a:effectRef>
+            <a:fontRef idx="minor">
+              <a:schemeClr val="tx1"/>
+            </a:fontRef>
+          </p:style>
+        </p:cxnSp>
+        <p:cxnSp>
+          <p:nvCxnSpPr>
+            <p:cNvPr id="84" name="Straight Connector 83">
+              <a:extLst>
+                <a:ext uri="{FF2B5EF4-FFF2-40B4-BE49-F238E27FC236}">
+                  <a16:creationId xmlns:a16="http://schemas.microsoft.com/office/drawing/2014/main" id="{079314D1-4D1B-3840-C1C0-CB8BF1B5B69A}"/>
+                </a:ext>
+              </a:extLst>
+            </p:cNvPr>
+            <p:cNvCxnSpPr>
+              <a:cxnSpLocks/>
+            </p:cNvCxnSpPr>
+            <p:nvPr/>
+          </p:nvCxnSpPr>
+          <p:spPr>
+            <a:xfrm rot="16200000">
+              <a:off x="823100" y="1663989"/>
+              <a:ext cx="1521769" cy="0"/>
+            </a:xfrm>
+            <a:prstGeom prst="line">
+              <a:avLst/>
+            </a:prstGeom>
+            <a:ln w="3175">
+              <a:gradFill flip="none" rotWithShape="1">
+                <a:gsLst>
+                  <a:gs pos="0">
+                    <a:srgbClr val="0A8276">
+                      <a:alpha val="0"/>
+                    </a:srgbClr>
+                  </a:gs>
+                  <a:gs pos="20000">
+                    <a:schemeClr val="bg1">
+                      <a:alpha val="50000"/>
+                    </a:schemeClr>
+                  </a:gs>
+                  <a:gs pos="80000">
+                    <a:schemeClr val="bg1">
+                      <a:alpha val="50000"/>
+                    </a:schemeClr>
+                  </a:gs>
+                  <a:gs pos="100000">
+                    <a:srgbClr val="0A8276">
+                      <a:alpha val="0"/>
+                    </a:srgbClr>
+                  </a:gs>
+                </a:gsLst>
+                <a:path path="circle">
+                  <a:fillToRect l="100000" t="100000"/>
+                </a:path>
+                <a:tileRect r="-100000" b="-100000"/>
+              </a:gradFill>
+              <a:tailEnd type="none"/>
+            </a:ln>
+            <a:effectLst>
+              <a:glow rad="25400">
+                <a:schemeClr val="accent1">
+                  <a:satMod val="175000"/>
+                  <a:alpha val="20000"/>
+                </a:schemeClr>
+              </a:glow>
+            </a:effectLst>
+          </p:spPr>
+          <p:style>
+            <a:lnRef idx="1">
+              <a:schemeClr val="accent1"/>
+            </a:lnRef>
+            <a:fillRef idx="0">
+              <a:schemeClr val="accent1"/>
+            </a:fillRef>
+            <a:effectRef idx="0">
+              <a:schemeClr val="accent1"/>
+            </a:effectRef>
+            <a:fontRef idx="minor">
+              <a:schemeClr val="tx1"/>
+            </a:fontRef>
+          </p:style>
+        </p:cxnSp>
+        <p:cxnSp>
+          <p:nvCxnSpPr>
+            <p:cNvPr id="85" name="Straight Connector 84">
+              <a:extLst>
+                <a:ext uri="{FF2B5EF4-FFF2-40B4-BE49-F238E27FC236}">
+                  <a16:creationId xmlns:a16="http://schemas.microsoft.com/office/drawing/2014/main" id="{716C048F-3F50-8642-6B55-ECF82AEE84D0}"/>
+                </a:ext>
+              </a:extLst>
+            </p:cNvPr>
+            <p:cNvCxnSpPr>
+              <a:cxnSpLocks/>
+            </p:cNvCxnSpPr>
+            <p:nvPr/>
+          </p:nvCxnSpPr>
+          <p:spPr>
+            <a:xfrm rot="16200000">
+              <a:off x="708468" y="1663990"/>
+              <a:ext cx="1521769" cy="0"/>
+            </a:xfrm>
+            <a:prstGeom prst="line">
+              <a:avLst/>
+            </a:prstGeom>
+            <a:ln w="3175">
+              <a:gradFill flip="none" rotWithShape="1">
+                <a:gsLst>
+                  <a:gs pos="0">
+                    <a:srgbClr val="0A8276">
+                      <a:alpha val="0"/>
+                    </a:srgbClr>
+                  </a:gs>
+                  <a:gs pos="20000">
+                    <a:schemeClr val="bg1">
+                      <a:alpha val="50000"/>
+                    </a:schemeClr>
+                  </a:gs>
+                  <a:gs pos="80000">
+                    <a:schemeClr val="bg1">
+                      <a:alpha val="50000"/>
+                    </a:schemeClr>
+                  </a:gs>
+                  <a:gs pos="100000">
+                    <a:srgbClr val="0A8276">
+                      <a:alpha val="0"/>
+                    </a:srgbClr>
+                  </a:gs>
+                </a:gsLst>
+                <a:path path="circle">
+                  <a:fillToRect l="100000" t="100000"/>
+                </a:path>
+                <a:tileRect r="-100000" b="-100000"/>
+              </a:gradFill>
+              <a:tailEnd type="none"/>
+            </a:ln>
+            <a:effectLst>
+              <a:glow rad="25400">
+                <a:schemeClr val="accent1">
+                  <a:satMod val="175000"/>
+                  <a:alpha val="20000"/>
+                </a:schemeClr>
+              </a:glow>
+            </a:effectLst>
+          </p:spPr>
+          <p:style>
+            <a:lnRef idx="1">
+              <a:schemeClr val="accent1"/>
+            </a:lnRef>
+            <a:fillRef idx="0">
+              <a:schemeClr val="accent1"/>
+            </a:fillRef>
+            <a:effectRef idx="0">
+              <a:schemeClr val="accent1"/>
+            </a:effectRef>
+            <a:fontRef idx="minor">
+              <a:schemeClr val="tx1"/>
+            </a:fontRef>
+          </p:style>
+        </p:cxnSp>
+        <p:cxnSp>
+          <p:nvCxnSpPr>
+            <p:cNvPr id="86" name="Straight Connector 85">
+              <a:extLst>
+                <a:ext uri="{FF2B5EF4-FFF2-40B4-BE49-F238E27FC236}">
+                  <a16:creationId xmlns:a16="http://schemas.microsoft.com/office/drawing/2014/main" id="{ED8AE17C-BE7E-361F-FCDC-46B8D129AAF7}"/>
+                </a:ext>
+              </a:extLst>
+            </p:cNvPr>
+            <p:cNvCxnSpPr>
+              <a:cxnSpLocks/>
+            </p:cNvCxnSpPr>
+            <p:nvPr/>
+          </p:nvCxnSpPr>
+          <p:spPr>
+            <a:xfrm rot="16200000">
+              <a:off x="-208588" y="1663989"/>
+              <a:ext cx="1521769" cy="0"/>
+            </a:xfrm>
+            <a:prstGeom prst="line">
+              <a:avLst/>
+            </a:prstGeom>
+            <a:ln w="3175">
+              <a:gradFill flip="none" rotWithShape="1">
+                <a:gsLst>
+                  <a:gs pos="0">
+                    <a:srgbClr val="0A8276">
+                      <a:alpha val="0"/>
+                    </a:srgbClr>
+                  </a:gs>
+                  <a:gs pos="20000">
+                    <a:schemeClr val="bg1">
+                      <a:alpha val="50000"/>
+                    </a:schemeClr>
+                  </a:gs>
+                  <a:gs pos="80000">
+                    <a:schemeClr val="bg1">
+                      <a:alpha val="50000"/>
+                    </a:schemeClr>
+                  </a:gs>
+                  <a:gs pos="100000">
+                    <a:srgbClr val="0A8276">
+                      <a:alpha val="0"/>
+                    </a:srgbClr>
+                  </a:gs>
+                </a:gsLst>
+                <a:path path="circle">
+                  <a:fillToRect l="100000" t="100000"/>
+                </a:path>
+                <a:tileRect r="-100000" b="-100000"/>
+              </a:gradFill>
+              <a:tailEnd type="none"/>
+            </a:ln>
+            <a:effectLst>
+              <a:glow rad="25400">
+                <a:schemeClr val="accent1">
+                  <a:satMod val="175000"/>
+                  <a:alpha val="20000"/>
+                </a:schemeClr>
+              </a:glow>
+            </a:effectLst>
+          </p:spPr>
+          <p:style>
+            <a:lnRef idx="1">
+              <a:schemeClr val="accent1"/>
+            </a:lnRef>
+            <a:fillRef idx="0">
+              <a:schemeClr val="accent1"/>
+            </a:fillRef>
+            <a:effectRef idx="0">
+              <a:schemeClr val="accent1"/>
+            </a:effectRef>
+            <a:fontRef idx="minor">
+              <a:schemeClr val="tx1"/>
+            </a:fontRef>
+          </p:style>
+        </p:cxnSp>
+        <p:cxnSp>
+          <p:nvCxnSpPr>
+            <p:cNvPr id="87" name="Straight Connector 86">
+              <a:extLst>
+                <a:ext uri="{FF2B5EF4-FFF2-40B4-BE49-F238E27FC236}">
+                  <a16:creationId xmlns:a16="http://schemas.microsoft.com/office/drawing/2014/main" id="{6860F1DD-2988-2E4B-8D1C-547DAA54664D}"/>
+                </a:ext>
+              </a:extLst>
+            </p:cNvPr>
+            <p:cNvCxnSpPr>
+              <a:cxnSpLocks/>
+            </p:cNvCxnSpPr>
+            <p:nvPr/>
+          </p:nvCxnSpPr>
+          <p:spPr>
+            <a:xfrm rot="16200000">
+              <a:off x="593836" y="1663990"/>
+              <a:ext cx="1521769" cy="0"/>
+            </a:xfrm>
+            <a:prstGeom prst="line">
+              <a:avLst/>
+            </a:prstGeom>
+            <a:ln w="3175">
+              <a:gradFill flip="none" rotWithShape="1">
+                <a:gsLst>
+                  <a:gs pos="0">
+                    <a:srgbClr val="0A8276">
+                      <a:alpha val="0"/>
+                    </a:srgbClr>
+                  </a:gs>
+                  <a:gs pos="20000">
+                    <a:schemeClr val="bg1">
+                      <a:alpha val="50000"/>
+                    </a:schemeClr>
+                  </a:gs>
+                  <a:gs pos="80000">
+                    <a:schemeClr val="bg1">
+                      <a:alpha val="50000"/>
+                    </a:schemeClr>
+                  </a:gs>
+                  <a:gs pos="100000">
+                    <a:srgbClr val="0A8276">
+                      <a:alpha val="0"/>
+                    </a:srgbClr>
+                  </a:gs>
+                </a:gsLst>
+                <a:path path="circle">
+                  <a:fillToRect l="100000" t="100000"/>
+                </a:path>
+                <a:tileRect r="-100000" b="-100000"/>
+              </a:gradFill>
+              <a:tailEnd type="none"/>
+            </a:ln>
+            <a:effectLst>
+              <a:glow rad="25400">
+                <a:schemeClr val="accent1">
+                  <a:satMod val="175000"/>
+                  <a:alpha val="20000"/>
+                </a:schemeClr>
+              </a:glow>
+            </a:effectLst>
+          </p:spPr>
+          <p:style>
+            <a:lnRef idx="1">
+              <a:schemeClr val="accent1"/>
+            </a:lnRef>
+            <a:fillRef idx="0">
+              <a:schemeClr val="accent1"/>
+            </a:fillRef>
+            <a:effectRef idx="0">
+              <a:schemeClr val="accent1"/>
+            </a:effectRef>
+            <a:fontRef idx="minor">
+              <a:schemeClr val="tx1"/>
+            </a:fontRef>
+          </p:style>
+        </p:cxnSp>
+        <p:cxnSp>
+          <p:nvCxnSpPr>
+            <p:cNvPr id="88" name="Straight Connector 87">
+              <a:extLst>
+                <a:ext uri="{FF2B5EF4-FFF2-40B4-BE49-F238E27FC236}">
+                  <a16:creationId xmlns:a16="http://schemas.microsoft.com/office/drawing/2014/main" id="{24DC3769-9DCC-97A5-C08E-D06BABF3A96D}"/>
+                </a:ext>
+              </a:extLst>
+            </p:cNvPr>
+            <p:cNvCxnSpPr>
+              <a:cxnSpLocks/>
+            </p:cNvCxnSpPr>
+            <p:nvPr/>
+          </p:nvCxnSpPr>
+          <p:spPr>
+            <a:xfrm rot="16200000">
+              <a:off x="479204" y="1663990"/>
+              <a:ext cx="1521769" cy="0"/>
+            </a:xfrm>
+            <a:prstGeom prst="line">
+              <a:avLst/>
+            </a:prstGeom>
+            <a:ln w="3175">
+              <a:gradFill flip="none" rotWithShape="1">
+                <a:gsLst>
+                  <a:gs pos="0">
+                    <a:srgbClr val="0A8276">
+                      <a:alpha val="0"/>
+                    </a:srgbClr>
+                  </a:gs>
+                  <a:gs pos="20000">
+                    <a:schemeClr val="bg1">
+                      <a:alpha val="50000"/>
+                    </a:schemeClr>
+                  </a:gs>
+                  <a:gs pos="80000">
+                    <a:schemeClr val="bg1">
+                      <a:alpha val="50000"/>
+                    </a:schemeClr>
+                  </a:gs>
+                  <a:gs pos="100000">
+                    <a:srgbClr val="0A8276">
+                      <a:alpha val="0"/>
+                    </a:srgbClr>
+                  </a:gs>
+                </a:gsLst>
+                <a:path path="circle">
+                  <a:fillToRect l="100000" t="100000"/>
+                </a:path>
+                <a:tileRect r="-100000" b="-100000"/>
+              </a:gradFill>
+              <a:tailEnd type="none"/>
+            </a:ln>
+            <a:effectLst>
+              <a:glow rad="25400">
+                <a:schemeClr val="accent1">
+                  <a:satMod val="175000"/>
+                  <a:alpha val="20000"/>
+                </a:schemeClr>
+              </a:glow>
+            </a:effectLst>
+          </p:spPr>
+          <p:style>
+            <a:lnRef idx="1">
+              <a:schemeClr val="accent1"/>
+            </a:lnRef>
+            <a:fillRef idx="0">
+              <a:schemeClr val="accent1"/>
+            </a:fillRef>
+            <a:effectRef idx="0">
+              <a:schemeClr val="accent1"/>
+            </a:effectRef>
+            <a:fontRef idx="minor">
+              <a:schemeClr val="tx1"/>
+            </a:fontRef>
+          </p:style>
+        </p:cxnSp>
+        <p:cxnSp>
+          <p:nvCxnSpPr>
+            <p:cNvPr id="89" name="Straight Connector 88">
+              <a:extLst>
+                <a:ext uri="{FF2B5EF4-FFF2-40B4-BE49-F238E27FC236}">
+                  <a16:creationId xmlns:a16="http://schemas.microsoft.com/office/drawing/2014/main" id="{64366380-89EA-7B66-7458-94E2B0AD05F0}"/>
+                </a:ext>
+              </a:extLst>
+            </p:cNvPr>
+            <p:cNvCxnSpPr>
+              <a:cxnSpLocks/>
+            </p:cNvCxnSpPr>
+            <p:nvPr/>
+          </p:nvCxnSpPr>
+          <p:spPr>
+            <a:xfrm rot="16200000">
+              <a:off x="-93956" y="1663989"/>
+              <a:ext cx="1521769" cy="0"/>
+            </a:xfrm>
+            <a:prstGeom prst="line">
+              <a:avLst/>
+            </a:prstGeom>
+            <a:ln w="3175">
+              <a:gradFill flip="none" rotWithShape="1">
+                <a:gsLst>
+                  <a:gs pos="0">
+                    <a:srgbClr val="0A8276">
+                      <a:alpha val="0"/>
+                    </a:srgbClr>
+                  </a:gs>
+                  <a:gs pos="20000">
+                    <a:schemeClr val="bg1">
+                      <a:alpha val="50000"/>
+                    </a:schemeClr>
+                  </a:gs>
+                  <a:gs pos="80000">
+                    <a:schemeClr val="bg1">
+                      <a:alpha val="50000"/>
+                    </a:schemeClr>
+                  </a:gs>
+                  <a:gs pos="100000">
+                    <a:srgbClr val="0A8276">
+                      <a:alpha val="0"/>
+                    </a:srgbClr>
+                  </a:gs>
+                </a:gsLst>
+                <a:path path="circle">
+                  <a:fillToRect l="100000" t="100000"/>
+                </a:path>
+                <a:tileRect r="-100000" b="-100000"/>
+              </a:gradFill>
+              <a:tailEnd type="none"/>
+            </a:ln>
+            <a:effectLst>
+              <a:glow rad="25400">
+                <a:schemeClr val="accent1">
+                  <a:satMod val="175000"/>
+                  <a:alpha val="20000"/>
+                </a:schemeClr>
+              </a:glow>
+            </a:effectLst>
+          </p:spPr>
+          <p:style>
+            <a:lnRef idx="1">
+              <a:schemeClr val="accent1"/>
+            </a:lnRef>
+            <a:fillRef idx="0">
+              <a:schemeClr val="accent1"/>
+            </a:fillRef>
+            <a:effectRef idx="0">
+              <a:schemeClr val="accent1"/>
+            </a:effectRef>
+            <a:fontRef idx="minor">
+              <a:schemeClr val="tx1"/>
+            </a:fontRef>
+          </p:style>
+        </p:cxnSp>
+        <p:cxnSp>
+          <p:nvCxnSpPr>
+            <p:cNvPr id="90" name="Straight Connector 89">
+              <a:extLst>
+                <a:ext uri="{FF2B5EF4-FFF2-40B4-BE49-F238E27FC236}">
+                  <a16:creationId xmlns:a16="http://schemas.microsoft.com/office/drawing/2014/main" id="{3A2551F8-644B-90A5-78AC-85CBA0EA65B2}"/>
+                </a:ext>
+              </a:extLst>
+            </p:cNvPr>
+            <p:cNvCxnSpPr>
+              <a:cxnSpLocks/>
+            </p:cNvCxnSpPr>
+            <p:nvPr/>
+          </p:nvCxnSpPr>
+          <p:spPr>
+            <a:xfrm rot="16200000">
+              <a:off x="20676" y="1663989"/>
+              <a:ext cx="1521769" cy="0"/>
+            </a:xfrm>
+            <a:prstGeom prst="line">
+              <a:avLst/>
+            </a:prstGeom>
+            <a:ln w="3175">
+              <a:gradFill flip="none" rotWithShape="1">
+                <a:gsLst>
+                  <a:gs pos="0">
+                    <a:srgbClr val="0A8276">
+                      <a:alpha val="0"/>
+                    </a:srgbClr>
+                  </a:gs>
+                  <a:gs pos="20000">
+                    <a:schemeClr val="bg1">
+                      <a:alpha val="50000"/>
+                    </a:schemeClr>
+                  </a:gs>
+                  <a:gs pos="80000">
+                    <a:schemeClr val="bg1">
+                      <a:alpha val="50000"/>
+                    </a:schemeClr>
+                  </a:gs>
+                  <a:gs pos="100000">
+                    <a:srgbClr val="0A8276">
+                      <a:alpha val="0"/>
+                    </a:srgbClr>
+                  </a:gs>
+                </a:gsLst>
+                <a:path path="circle">
+                  <a:fillToRect l="100000" t="100000"/>
+                </a:path>
+                <a:tileRect r="-100000" b="-100000"/>
+              </a:gradFill>
+              <a:tailEnd type="none"/>
+            </a:ln>
+            <a:effectLst>
+              <a:glow rad="25400">
+                <a:schemeClr val="accent1">
+                  <a:satMod val="175000"/>
+                  <a:alpha val="20000"/>
+                </a:schemeClr>
+              </a:glow>
+            </a:effectLst>
+          </p:spPr>
+          <p:style>
+            <a:lnRef idx="1">
+              <a:schemeClr val="accent1"/>
+            </a:lnRef>
+            <a:fillRef idx="0">
+              <a:schemeClr val="accent1"/>
+            </a:fillRef>
+            <a:effectRef idx="0">
+              <a:schemeClr val="accent1"/>
+            </a:effectRef>
+            <a:fontRef idx="minor">
+              <a:schemeClr val="tx1"/>
+            </a:fontRef>
+          </p:style>
+        </p:cxnSp>
+        <p:cxnSp>
+          <p:nvCxnSpPr>
+            <p:cNvPr id="91" name="Straight Connector 90">
+              <a:extLst>
+                <a:ext uri="{FF2B5EF4-FFF2-40B4-BE49-F238E27FC236}">
+                  <a16:creationId xmlns:a16="http://schemas.microsoft.com/office/drawing/2014/main" id="{5934028A-9852-CBED-5511-769B938396AB}"/>
+                </a:ext>
+              </a:extLst>
+            </p:cNvPr>
+            <p:cNvCxnSpPr>
+              <a:cxnSpLocks/>
+            </p:cNvCxnSpPr>
+            <p:nvPr/>
+          </p:nvCxnSpPr>
+          <p:spPr>
+            <a:xfrm rot="16200000">
+              <a:off x="249940" y="1663989"/>
+              <a:ext cx="1521769" cy="0"/>
+            </a:xfrm>
+            <a:prstGeom prst="line">
+              <a:avLst/>
+            </a:prstGeom>
+            <a:ln w="3175">
+              <a:gradFill flip="none" rotWithShape="1">
+                <a:gsLst>
+                  <a:gs pos="0">
+                    <a:srgbClr val="0A8276">
+                      <a:alpha val="0"/>
+                    </a:srgbClr>
+                  </a:gs>
+                  <a:gs pos="20000">
+                    <a:schemeClr val="bg1">
+                      <a:alpha val="50000"/>
+                    </a:schemeClr>
+                  </a:gs>
+                  <a:gs pos="80000">
+                    <a:schemeClr val="bg1">
+                      <a:alpha val="50000"/>
+                    </a:schemeClr>
+                  </a:gs>
+                  <a:gs pos="100000">
+                    <a:srgbClr val="0A8276">
+                      <a:alpha val="0"/>
+                    </a:srgbClr>
+                  </a:gs>
+                </a:gsLst>
+                <a:path path="circle">
+                  <a:fillToRect l="100000" t="100000"/>
+                </a:path>
+                <a:tileRect r="-100000" b="-100000"/>
+              </a:gradFill>
+              <a:tailEnd type="none"/>
+            </a:ln>
+            <a:effectLst>
+              <a:glow rad="25400">
+                <a:schemeClr val="accent1">
+                  <a:satMod val="175000"/>
+                  <a:alpha val="20000"/>
+                </a:schemeClr>
+              </a:glow>
+            </a:effectLst>
+          </p:spPr>
+          <p:style>
+            <a:lnRef idx="1">
+              <a:schemeClr val="accent1"/>
+            </a:lnRef>
+            <a:fillRef idx="0">
+              <a:schemeClr val="accent1"/>
+            </a:fillRef>
+            <a:effectRef idx="0">
+              <a:schemeClr val="accent1"/>
+            </a:effectRef>
+            <a:fontRef idx="minor">
+              <a:schemeClr val="tx1"/>
+            </a:fontRef>
+          </p:style>
+        </p:cxnSp>
+      </p:grpSp>
     </p:spTree>
     <p:extLst>
       <p:ext uri="{BB962C8B-B14F-4D97-AF65-F5344CB8AC3E}">
-        <p14:creationId xmlns:p14="http://schemas.microsoft.com/office/powerpoint/2010/main" val="2981488331"/>
+        <p14:creationId xmlns:p14="http://schemas.microsoft.com/office/powerpoint/2010/main" val="3587115342"/>
       </p:ext>
     </p:extLst>
   </p:cSld>
@@ -34209,7 +40196,7 @@
 </p:sld>
 </file>
 
-<file path=ppt/slides/slide4.xml><?xml version="1.0" encoding="utf-8"?>
+<file path=ppt/slides/slide6.xml><?xml version="1.0" encoding="utf-8"?>
 <p:sld xmlns:a="http://schemas.openxmlformats.org/drawingml/2006/main" xmlns:r="http://schemas.openxmlformats.org/officeDocument/2006/relationships" xmlns:p="http://schemas.openxmlformats.org/presentationml/2006/main">
   <p:cSld>
     <p:spTree>
@@ -36875,7 +42862,7 @@
 </p:sld>
 </file>
 
-<file path=ppt/slides/slide5.xml><?xml version="1.0" encoding="utf-8"?>
+<file path=ppt/slides/slide7.xml><?xml version="1.0" encoding="utf-8"?>
 <p:sld xmlns:a="http://schemas.openxmlformats.org/drawingml/2006/main" xmlns:r="http://schemas.openxmlformats.org/officeDocument/2006/relationships" xmlns:p="http://schemas.openxmlformats.org/presentationml/2006/main">
   <p:cSld>
     <p:spTree>
@@ -37206,7 +43193,7 @@
 </p:sld>
 </file>
 
-<file path=ppt/slides/slide6.xml><?xml version="1.0" encoding="utf-8"?>
+<file path=ppt/slides/slide8.xml><?xml version="1.0" encoding="utf-8"?>
 <p:sld xmlns:a="http://schemas.openxmlformats.org/drawingml/2006/main" xmlns:r="http://schemas.openxmlformats.org/officeDocument/2006/relationships" xmlns:p="http://schemas.openxmlformats.org/presentationml/2006/main">
   <p:cSld>
     <p:spTree>
